--- a/slides/11501/Introduction to Computer/CH11.pptx
+++ b/slides/11501/Introduction to Computer/CH11.pptx
@@ -5,7 +5,7 @@
     <p:sldMasterId id="2147483648" r:id="rId1"/>
   </p:sldMasterIdLst>
   <p:notesMasterIdLst>
-    <p:notesMasterId r:id="rId102"/>
+    <p:notesMasterId r:id="rId101"/>
   </p:notesMasterIdLst>
   <p:sldIdLst>
     <p:sldId id="256" r:id="rId2"/>
@@ -70,44 +70,43 @@
     <p:sldId id="370" r:id="rId61"/>
     <p:sldId id="291" r:id="rId62"/>
     <p:sldId id="371" r:id="rId63"/>
-    <p:sldId id="340" r:id="rId64"/>
-    <p:sldId id="372" r:id="rId65"/>
-    <p:sldId id="294" r:id="rId66"/>
-    <p:sldId id="295" r:id="rId67"/>
-    <p:sldId id="296" r:id="rId68"/>
-    <p:sldId id="297" r:id="rId69"/>
-    <p:sldId id="373" r:id="rId70"/>
-    <p:sldId id="341" r:id="rId71"/>
-    <p:sldId id="299" r:id="rId72"/>
-    <p:sldId id="342" r:id="rId73"/>
-    <p:sldId id="374" r:id="rId74"/>
-    <p:sldId id="300" r:id="rId75"/>
-    <p:sldId id="343" r:id="rId76"/>
-    <p:sldId id="301" r:id="rId77"/>
-    <p:sldId id="375" r:id="rId78"/>
-    <p:sldId id="344" r:id="rId79"/>
-    <p:sldId id="376" r:id="rId80"/>
-    <p:sldId id="302" r:id="rId81"/>
-    <p:sldId id="303" r:id="rId82"/>
-    <p:sldId id="304" r:id="rId83"/>
-    <p:sldId id="352" r:id="rId84"/>
-    <p:sldId id="345" r:id="rId85"/>
-    <p:sldId id="377" r:id="rId86"/>
-    <p:sldId id="305" r:id="rId87"/>
-    <p:sldId id="306" r:id="rId88"/>
-    <p:sldId id="307" r:id="rId89"/>
-    <p:sldId id="308" r:id="rId90"/>
-    <p:sldId id="309" r:id="rId91"/>
-    <p:sldId id="346" r:id="rId92"/>
-    <p:sldId id="311" r:id="rId93"/>
-    <p:sldId id="312" r:id="rId94"/>
-    <p:sldId id="347" r:id="rId95"/>
-    <p:sldId id="313" r:id="rId96"/>
-    <p:sldId id="348" r:id="rId97"/>
-    <p:sldId id="378" r:id="rId98"/>
-    <p:sldId id="316" r:id="rId99"/>
-    <p:sldId id="317" r:id="rId100"/>
-    <p:sldId id="351" r:id="rId101"/>
+    <p:sldId id="372" r:id="rId64"/>
+    <p:sldId id="294" r:id="rId65"/>
+    <p:sldId id="295" r:id="rId66"/>
+    <p:sldId id="296" r:id="rId67"/>
+    <p:sldId id="297" r:id="rId68"/>
+    <p:sldId id="373" r:id="rId69"/>
+    <p:sldId id="341" r:id="rId70"/>
+    <p:sldId id="299" r:id="rId71"/>
+    <p:sldId id="342" r:id="rId72"/>
+    <p:sldId id="374" r:id="rId73"/>
+    <p:sldId id="300" r:id="rId74"/>
+    <p:sldId id="343" r:id="rId75"/>
+    <p:sldId id="301" r:id="rId76"/>
+    <p:sldId id="375" r:id="rId77"/>
+    <p:sldId id="344" r:id="rId78"/>
+    <p:sldId id="376" r:id="rId79"/>
+    <p:sldId id="302" r:id="rId80"/>
+    <p:sldId id="303" r:id="rId81"/>
+    <p:sldId id="304" r:id="rId82"/>
+    <p:sldId id="352" r:id="rId83"/>
+    <p:sldId id="345" r:id="rId84"/>
+    <p:sldId id="377" r:id="rId85"/>
+    <p:sldId id="305" r:id="rId86"/>
+    <p:sldId id="306" r:id="rId87"/>
+    <p:sldId id="307" r:id="rId88"/>
+    <p:sldId id="308" r:id="rId89"/>
+    <p:sldId id="309" r:id="rId90"/>
+    <p:sldId id="346" r:id="rId91"/>
+    <p:sldId id="311" r:id="rId92"/>
+    <p:sldId id="312" r:id="rId93"/>
+    <p:sldId id="347" r:id="rId94"/>
+    <p:sldId id="313" r:id="rId95"/>
+    <p:sldId id="348" r:id="rId96"/>
+    <p:sldId id="378" r:id="rId97"/>
+    <p:sldId id="316" r:id="rId98"/>
+    <p:sldId id="317" r:id="rId99"/>
+    <p:sldId id="351" r:id="rId100"/>
   </p:sldIdLst>
   <p:sldSz cx="9144000" cy="5143500" type="screen16x9"/>
   <p:notesSz cx="6858000" cy="9144000"/>
@@ -208,7 +207,7 @@
   </p:defaultTextStyle>
   <p:extLst>
     <p:ext uri="{EFAFB233-063F-42B5-8137-9DF3F51BA10A}">
-      <p15:sldGuideLst xmlns="" xmlns:p15="http://schemas.microsoft.com/office/powerpoint/2012/main">
+      <p15:sldGuideLst xmlns:p15="http://schemas.microsoft.com/office/powerpoint/2012/main">
         <p15:guide id="1" orient="horz" pos="2160">
           <p15:clr>
             <a:srgbClr val="A4A3A4"/>
@@ -4647,13 +4646,6 @@
         </dgm:presLayoutVars>
       </dgm:prSet>
       <dgm:spPr/>
-      <dgm:t>
-        <a:bodyPr/>
-        <a:lstStyle/>
-        <a:p>
-          <a:endParaRPr lang="zh-TW" altLang="en-US"/>
-        </a:p>
-      </dgm:t>
     </dgm:pt>
     <dgm:pt modelId="{A2E0DC09-9B54-4F0A-BDDD-E7577D1AA380}" type="pres">
       <dgm:prSet presAssocID="{C1E69EF1-40AA-4299-8FAA-C8A91BEB36B2}" presName="compNode" presStyleCnt="0"/>
@@ -4662,24 +4654,10 @@
     <dgm:pt modelId="{1D8745EB-B71C-4DB0-8EF9-16A687DDE7F1}" type="pres">
       <dgm:prSet presAssocID="{C1E69EF1-40AA-4299-8FAA-C8A91BEB36B2}" presName="aNode" presStyleLbl="bgShp" presStyleIdx="0" presStyleCnt="3" custScaleY="84818"/>
       <dgm:spPr/>
-      <dgm:t>
-        <a:bodyPr/>
-        <a:lstStyle/>
-        <a:p>
-          <a:endParaRPr lang="zh-TW" altLang="en-US"/>
-        </a:p>
-      </dgm:t>
     </dgm:pt>
     <dgm:pt modelId="{DF3C4F26-3913-4112-AF45-04C023B91091}" type="pres">
       <dgm:prSet presAssocID="{C1E69EF1-40AA-4299-8FAA-C8A91BEB36B2}" presName="textNode" presStyleLbl="bgShp" presStyleIdx="0" presStyleCnt="3"/>
       <dgm:spPr/>
-      <dgm:t>
-        <a:bodyPr/>
-        <a:lstStyle/>
-        <a:p>
-          <a:endParaRPr lang="zh-TW" altLang="en-US"/>
-        </a:p>
-      </dgm:t>
     </dgm:pt>
     <dgm:pt modelId="{D4E4C7F6-239D-4A7F-A996-2431441D2F5B}" type="pres">
       <dgm:prSet presAssocID="{C1E69EF1-40AA-4299-8FAA-C8A91BEB36B2}" presName="compChildNode" presStyleCnt="0"/>
@@ -4696,13 +4674,6 @@
         </dgm:presLayoutVars>
       </dgm:prSet>
       <dgm:spPr/>
-      <dgm:t>
-        <a:bodyPr/>
-        <a:lstStyle/>
-        <a:p>
-          <a:endParaRPr lang="zh-TW" altLang="en-US"/>
-        </a:p>
-      </dgm:t>
     </dgm:pt>
     <dgm:pt modelId="{3AA0EEDF-ED3A-439D-869B-F25BA7343E9E}" type="pres">
       <dgm:prSet presAssocID="{C1E69EF1-40AA-4299-8FAA-C8A91BEB36B2}" presName="aSpace" presStyleCnt="0"/>
@@ -4715,24 +4686,10 @@
     <dgm:pt modelId="{5E114458-8C8E-4284-B586-71EABBA55558}" type="pres">
       <dgm:prSet presAssocID="{2B62FC66-C72B-4978-B1BE-9AD0E90F2C2E}" presName="aNode" presStyleLbl="bgShp" presStyleIdx="1" presStyleCnt="3" custScaleY="84818"/>
       <dgm:spPr/>
-      <dgm:t>
-        <a:bodyPr/>
-        <a:lstStyle/>
-        <a:p>
-          <a:endParaRPr lang="zh-TW" altLang="en-US"/>
-        </a:p>
-      </dgm:t>
     </dgm:pt>
     <dgm:pt modelId="{A4E5C926-B3C5-4C74-8C37-A20EDBD34174}" type="pres">
       <dgm:prSet presAssocID="{2B62FC66-C72B-4978-B1BE-9AD0E90F2C2E}" presName="textNode" presStyleLbl="bgShp" presStyleIdx="1" presStyleCnt="3"/>
       <dgm:spPr/>
-      <dgm:t>
-        <a:bodyPr/>
-        <a:lstStyle/>
-        <a:p>
-          <a:endParaRPr lang="zh-TW" altLang="en-US"/>
-        </a:p>
-      </dgm:t>
     </dgm:pt>
     <dgm:pt modelId="{A845A247-0124-42AB-9B6A-422A8A9695F4}" type="pres">
       <dgm:prSet presAssocID="{2B62FC66-C72B-4978-B1BE-9AD0E90F2C2E}" presName="compChildNode" presStyleCnt="0"/>
@@ -4749,13 +4706,6 @@
         </dgm:presLayoutVars>
       </dgm:prSet>
       <dgm:spPr/>
-      <dgm:t>
-        <a:bodyPr/>
-        <a:lstStyle/>
-        <a:p>
-          <a:endParaRPr lang="zh-TW" altLang="en-US"/>
-        </a:p>
-      </dgm:t>
     </dgm:pt>
     <dgm:pt modelId="{69A1ADE0-5331-499D-A6B6-832542D377EA}" type="pres">
       <dgm:prSet presAssocID="{2B62FC66-C72B-4978-B1BE-9AD0E90F2C2E}" presName="aSpace" presStyleCnt="0"/>
@@ -4768,24 +4718,10 @@
     <dgm:pt modelId="{B108C075-E406-4E93-8FDC-07DA5A9D3F6C}" type="pres">
       <dgm:prSet presAssocID="{88741CB3-16FC-4B3C-B539-AD125A175ADB}" presName="aNode" presStyleLbl="bgShp" presStyleIdx="2" presStyleCnt="3" custScaleY="84818"/>
       <dgm:spPr/>
-      <dgm:t>
-        <a:bodyPr/>
-        <a:lstStyle/>
-        <a:p>
-          <a:endParaRPr lang="zh-TW" altLang="en-US"/>
-        </a:p>
-      </dgm:t>
     </dgm:pt>
     <dgm:pt modelId="{221D19C4-677A-4C86-A9B2-A1C4CD99372B}" type="pres">
       <dgm:prSet presAssocID="{88741CB3-16FC-4B3C-B539-AD125A175ADB}" presName="textNode" presStyleLbl="bgShp" presStyleIdx="2" presStyleCnt="3"/>
       <dgm:spPr/>
-      <dgm:t>
-        <a:bodyPr/>
-        <a:lstStyle/>
-        <a:p>
-          <a:endParaRPr lang="zh-TW" altLang="en-US"/>
-        </a:p>
-      </dgm:t>
     </dgm:pt>
     <dgm:pt modelId="{C1FB6A9E-305B-4B94-9B99-CBA60887A227}" type="pres">
       <dgm:prSet presAssocID="{88741CB3-16FC-4B3C-B539-AD125A175ADB}" presName="compChildNode" presStyleCnt="0"/>
@@ -4802,32 +4738,25 @@
         </dgm:presLayoutVars>
       </dgm:prSet>
       <dgm:spPr/>
-      <dgm:t>
-        <a:bodyPr/>
-        <a:lstStyle/>
-        <a:p>
-          <a:endParaRPr lang="zh-TW" altLang="en-US"/>
-        </a:p>
-      </dgm:t>
     </dgm:pt>
   </dgm:ptLst>
   <dgm:cxnLst>
+    <dgm:cxn modelId="{A6E0B503-B5EF-4B0F-9B26-6C134325E020}" type="presOf" srcId="{E6BB1002-3022-495E-A23F-9F7A582B7B49}" destId="{9C2201EC-D908-4DE5-9B38-BC12463CE5AC}" srcOrd="0" destOrd="0" presId="urn:microsoft.com/office/officeart/2005/8/layout/lProcess2"/>
     <dgm:cxn modelId="{64B99512-4A23-4529-867B-CE6ADF92F876}" type="presOf" srcId="{88741CB3-16FC-4B3C-B539-AD125A175ADB}" destId="{B108C075-E406-4E93-8FDC-07DA5A9D3F6C}" srcOrd="0" destOrd="0" presId="urn:microsoft.com/office/officeart/2005/8/layout/lProcess2"/>
+    <dgm:cxn modelId="{824E171E-A54C-4F8E-B635-168A51BF8B74}" type="presOf" srcId="{88741CB3-16FC-4B3C-B539-AD125A175ADB}" destId="{221D19C4-677A-4C86-A9B2-A1C4CD99372B}" srcOrd="1" destOrd="0" presId="urn:microsoft.com/office/officeart/2005/8/layout/lProcess2"/>
+    <dgm:cxn modelId="{0F9FE631-5453-4EBB-AF7E-D581B2E7A4A3}" srcId="{C1E69EF1-40AA-4299-8FAA-C8A91BEB36B2}" destId="{E8BFF938-8D63-4F34-82CB-0411F3F0328F}" srcOrd="0" destOrd="0" parTransId="{D2B60AF8-817F-473F-8761-2D42FD008F0F}" sibTransId="{6E5CB67D-FD15-433C-B1BA-D0508F8981F2}"/>
+    <dgm:cxn modelId="{A8E0996A-26CD-43FC-B9A4-A0ED5C6996A0}" srcId="{321BCE50-0E1D-4495-B2C7-068BD611DA4B}" destId="{88741CB3-16FC-4B3C-B539-AD125A175ADB}" srcOrd="2" destOrd="0" parTransId="{A8211020-B9F2-4F31-BDE6-BE21DD201197}" sibTransId="{3DFD04A9-917E-4161-8A0B-1C2641455221}"/>
+    <dgm:cxn modelId="{844F694D-4182-4DB7-BB86-BB5AE69D453B}" type="presOf" srcId="{C1E69EF1-40AA-4299-8FAA-C8A91BEB36B2}" destId="{DF3C4F26-3913-4112-AF45-04C023B91091}" srcOrd="1" destOrd="0" presId="urn:microsoft.com/office/officeart/2005/8/layout/lProcess2"/>
     <dgm:cxn modelId="{D041CC8C-3D18-45B8-BD82-9A4ABCA27830}" type="presOf" srcId="{321BCE50-0E1D-4495-B2C7-068BD611DA4B}" destId="{A0B8A99C-3CC7-4B68-8B82-54FC163DF4D8}" srcOrd="0" destOrd="0" presId="urn:microsoft.com/office/officeart/2005/8/layout/lProcess2"/>
-    <dgm:cxn modelId="{956672F3-E83D-441B-87C9-08BA2D13661E}" srcId="{2B62FC66-C72B-4978-B1BE-9AD0E90F2C2E}" destId="{E6BB1002-3022-495E-A23F-9F7A582B7B49}" srcOrd="0" destOrd="0" parTransId="{60FF6E73-947C-4954-87C4-B57D3753340B}" sibTransId="{E64F509B-39DA-4397-A761-2477A86EA903}"/>
+    <dgm:cxn modelId="{5A44E592-4813-4F20-81F9-9F13C2A44CD9}" type="presOf" srcId="{C1E69EF1-40AA-4299-8FAA-C8A91BEB36B2}" destId="{1D8745EB-B71C-4DB0-8EF9-16A687DDE7F1}" srcOrd="0" destOrd="0" presId="urn:microsoft.com/office/officeart/2005/8/layout/lProcess2"/>
+    <dgm:cxn modelId="{B57A8E9D-460E-4DFB-8AD8-A5CE6679510A}" type="presOf" srcId="{2B62FC66-C72B-4978-B1BE-9AD0E90F2C2E}" destId="{A4E5C926-B3C5-4C74-8C37-A20EDBD34174}" srcOrd="1" destOrd="0" presId="urn:microsoft.com/office/officeart/2005/8/layout/lProcess2"/>
+    <dgm:cxn modelId="{5605E6AA-F379-4786-A169-5334198EF2D8}" srcId="{321BCE50-0E1D-4495-B2C7-068BD611DA4B}" destId="{2B62FC66-C72B-4978-B1BE-9AD0E90F2C2E}" srcOrd="1" destOrd="0" parTransId="{E1C15B56-79CC-49EC-ABD6-0565A90213EF}" sibTransId="{EF3F835A-D1AD-49E9-B536-9F8F0588F513}"/>
+    <dgm:cxn modelId="{4CC038B1-C864-4BC5-A482-179D1CBACA64}" srcId="{88741CB3-16FC-4B3C-B539-AD125A175ADB}" destId="{E8266DFC-06C6-4B98-8C01-496CF7B3400A}" srcOrd="0" destOrd="0" parTransId="{7A8F4611-B02A-4804-9BFB-74AC4CDDEBF0}" sibTransId="{C29359EA-E221-4E3E-973D-DBA16081B1F5}"/>
     <dgm:cxn modelId="{5DEA4AB3-6270-40F5-978A-3AE8BE720CBB}" type="presOf" srcId="{2B62FC66-C72B-4978-B1BE-9AD0E90F2C2E}" destId="{5E114458-8C8E-4284-B586-71EABBA55558}" srcOrd="0" destOrd="0" presId="urn:microsoft.com/office/officeart/2005/8/layout/lProcess2"/>
     <dgm:cxn modelId="{C6F169C1-304A-4F88-AA60-B7382747A27E}" type="presOf" srcId="{E8266DFC-06C6-4B98-8C01-496CF7B3400A}" destId="{468C3BB7-6DA6-4606-9772-679DB50AE176}" srcOrd="0" destOrd="0" presId="urn:microsoft.com/office/officeart/2005/8/layout/lProcess2"/>
-    <dgm:cxn modelId="{4CC038B1-C864-4BC5-A482-179D1CBACA64}" srcId="{88741CB3-16FC-4B3C-B539-AD125A175ADB}" destId="{E8266DFC-06C6-4B98-8C01-496CF7B3400A}" srcOrd="0" destOrd="0" parTransId="{7A8F4611-B02A-4804-9BFB-74AC4CDDEBF0}" sibTransId="{C29359EA-E221-4E3E-973D-DBA16081B1F5}"/>
-    <dgm:cxn modelId="{5A44E592-4813-4F20-81F9-9F13C2A44CD9}" type="presOf" srcId="{C1E69EF1-40AA-4299-8FAA-C8A91BEB36B2}" destId="{1D8745EB-B71C-4DB0-8EF9-16A687DDE7F1}" srcOrd="0" destOrd="0" presId="urn:microsoft.com/office/officeart/2005/8/layout/lProcess2"/>
+    <dgm:cxn modelId="{74292ED0-47E1-4105-851A-17A4D6400DE2}" type="presOf" srcId="{E8BFF938-8D63-4F34-82CB-0411F3F0328F}" destId="{CA6EE8DB-B66B-4A06-B89B-27E4D981F042}" srcOrd="0" destOrd="0" presId="urn:microsoft.com/office/officeart/2005/8/layout/lProcess2"/>
+    <dgm:cxn modelId="{956672F3-E83D-441B-87C9-08BA2D13661E}" srcId="{2B62FC66-C72B-4978-B1BE-9AD0E90F2C2E}" destId="{E6BB1002-3022-495E-A23F-9F7A582B7B49}" srcOrd="0" destOrd="0" parTransId="{60FF6E73-947C-4954-87C4-B57D3753340B}" sibTransId="{E64F509B-39DA-4397-A761-2477A86EA903}"/>
     <dgm:cxn modelId="{C30045FE-9B4D-4798-B3B9-BC85398171BE}" srcId="{321BCE50-0E1D-4495-B2C7-068BD611DA4B}" destId="{C1E69EF1-40AA-4299-8FAA-C8A91BEB36B2}" srcOrd="0" destOrd="0" parTransId="{3783CB84-520A-49A8-8BFF-C151739B9DAC}" sibTransId="{E29E3D14-A83B-4DC8-9938-18AB1D8EB339}"/>
-    <dgm:cxn modelId="{0F9FE631-5453-4EBB-AF7E-D581B2E7A4A3}" srcId="{C1E69EF1-40AA-4299-8FAA-C8A91BEB36B2}" destId="{E8BFF938-8D63-4F34-82CB-0411F3F0328F}" srcOrd="0" destOrd="0" parTransId="{D2B60AF8-817F-473F-8761-2D42FD008F0F}" sibTransId="{6E5CB67D-FD15-433C-B1BA-D0508F8981F2}"/>
-    <dgm:cxn modelId="{A6E0B503-B5EF-4B0F-9B26-6C134325E020}" type="presOf" srcId="{E6BB1002-3022-495E-A23F-9F7A582B7B49}" destId="{9C2201EC-D908-4DE5-9B38-BC12463CE5AC}" srcOrd="0" destOrd="0" presId="urn:microsoft.com/office/officeart/2005/8/layout/lProcess2"/>
-    <dgm:cxn modelId="{844F694D-4182-4DB7-BB86-BB5AE69D453B}" type="presOf" srcId="{C1E69EF1-40AA-4299-8FAA-C8A91BEB36B2}" destId="{DF3C4F26-3913-4112-AF45-04C023B91091}" srcOrd="1" destOrd="0" presId="urn:microsoft.com/office/officeart/2005/8/layout/lProcess2"/>
-    <dgm:cxn modelId="{824E171E-A54C-4F8E-B635-168A51BF8B74}" type="presOf" srcId="{88741CB3-16FC-4B3C-B539-AD125A175ADB}" destId="{221D19C4-677A-4C86-A9B2-A1C4CD99372B}" srcOrd="1" destOrd="0" presId="urn:microsoft.com/office/officeart/2005/8/layout/lProcess2"/>
-    <dgm:cxn modelId="{5605E6AA-F379-4786-A169-5334198EF2D8}" srcId="{321BCE50-0E1D-4495-B2C7-068BD611DA4B}" destId="{2B62FC66-C72B-4978-B1BE-9AD0E90F2C2E}" srcOrd="1" destOrd="0" parTransId="{E1C15B56-79CC-49EC-ABD6-0565A90213EF}" sibTransId="{EF3F835A-D1AD-49E9-B536-9F8F0588F513}"/>
-    <dgm:cxn modelId="{B57A8E9D-460E-4DFB-8AD8-A5CE6679510A}" type="presOf" srcId="{2B62FC66-C72B-4978-B1BE-9AD0E90F2C2E}" destId="{A4E5C926-B3C5-4C74-8C37-A20EDBD34174}" srcOrd="1" destOrd="0" presId="urn:microsoft.com/office/officeart/2005/8/layout/lProcess2"/>
-    <dgm:cxn modelId="{A8E0996A-26CD-43FC-B9A4-A0ED5C6996A0}" srcId="{321BCE50-0E1D-4495-B2C7-068BD611DA4B}" destId="{88741CB3-16FC-4B3C-B539-AD125A175ADB}" srcOrd="2" destOrd="0" parTransId="{A8211020-B9F2-4F31-BDE6-BE21DD201197}" sibTransId="{3DFD04A9-917E-4161-8A0B-1C2641455221}"/>
-    <dgm:cxn modelId="{74292ED0-47E1-4105-851A-17A4D6400DE2}" type="presOf" srcId="{E8BFF938-8D63-4F34-82CB-0411F3F0328F}" destId="{CA6EE8DB-B66B-4A06-B89B-27E4D981F042}" srcOrd="0" destOrd="0" presId="urn:microsoft.com/office/officeart/2005/8/layout/lProcess2"/>
     <dgm:cxn modelId="{FAE30E03-DB6A-46B2-9EAF-DC953BFDCC6D}" type="presParOf" srcId="{A0B8A99C-3CC7-4B68-8B82-54FC163DF4D8}" destId="{A2E0DC09-9B54-4F0A-BDDD-E7577D1AA380}" srcOrd="0" destOrd="0" presId="urn:microsoft.com/office/officeart/2005/8/layout/lProcess2"/>
     <dgm:cxn modelId="{389C59E2-F2E3-4446-B6DD-D64BE7F7463F}" type="presParOf" srcId="{A2E0DC09-9B54-4F0A-BDDD-E7577D1AA380}" destId="{1D8745EB-B71C-4DB0-8EF9-16A687DDE7F1}" srcOrd="0" destOrd="0" presId="urn:microsoft.com/office/officeart/2005/8/layout/lProcess2"/>
     <dgm:cxn modelId="{0CA22A6B-4210-43F2-8573-CC780A3836B0}" type="presParOf" srcId="{A2E0DC09-9B54-4F0A-BDDD-E7577D1AA380}" destId="{DF3C4F26-3913-4112-AF45-04C023B91091}" srcOrd="1" destOrd="0" presId="urn:microsoft.com/office/officeart/2005/8/layout/lProcess2"/>
@@ -5242,13 +5171,6 @@
         </dgm:presLayoutVars>
       </dgm:prSet>
       <dgm:spPr/>
-      <dgm:t>
-        <a:bodyPr/>
-        <a:lstStyle/>
-        <a:p>
-          <a:endParaRPr lang="zh-TW" altLang="en-US"/>
-        </a:p>
-      </dgm:t>
     </dgm:pt>
     <dgm:pt modelId="{A2E0DC09-9B54-4F0A-BDDD-E7577D1AA380}" type="pres">
       <dgm:prSet presAssocID="{C1E69EF1-40AA-4299-8FAA-C8A91BEB36B2}" presName="compNode" presStyleCnt="0"/>
@@ -5257,24 +5179,10 @@
     <dgm:pt modelId="{1D8745EB-B71C-4DB0-8EF9-16A687DDE7F1}" type="pres">
       <dgm:prSet presAssocID="{C1E69EF1-40AA-4299-8FAA-C8A91BEB36B2}" presName="aNode" presStyleLbl="bgShp" presStyleIdx="0" presStyleCnt="3" custScaleY="89831"/>
       <dgm:spPr/>
-      <dgm:t>
-        <a:bodyPr/>
-        <a:lstStyle/>
-        <a:p>
-          <a:endParaRPr lang="zh-TW" altLang="en-US"/>
-        </a:p>
-      </dgm:t>
     </dgm:pt>
     <dgm:pt modelId="{DF3C4F26-3913-4112-AF45-04C023B91091}" type="pres">
       <dgm:prSet presAssocID="{C1E69EF1-40AA-4299-8FAA-C8A91BEB36B2}" presName="textNode" presStyleLbl="bgShp" presStyleIdx="0" presStyleCnt="3"/>
       <dgm:spPr/>
-      <dgm:t>
-        <a:bodyPr/>
-        <a:lstStyle/>
-        <a:p>
-          <a:endParaRPr lang="zh-TW" altLang="en-US"/>
-        </a:p>
-      </dgm:t>
     </dgm:pt>
     <dgm:pt modelId="{D4E4C7F6-239D-4A7F-A996-2431441D2F5B}" type="pres">
       <dgm:prSet presAssocID="{C1E69EF1-40AA-4299-8FAA-C8A91BEB36B2}" presName="compChildNode" presStyleCnt="0"/>
@@ -5291,13 +5199,6 @@
         </dgm:presLayoutVars>
       </dgm:prSet>
       <dgm:spPr/>
-      <dgm:t>
-        <a:bodyPr/>
-        <a:lstStyle/>
-        <a:p>
-          <a:endParaRPr lang="zh-TW" altLang="en-US"/>
-        </a:p>
-      </dgm:t>
     </dgm:pt>
     <dgm:pt modelId="{3AA0EEDF-ED3A-439D-869B-F25BA7343E9E}" type="pres">
       <dgm:prSet presAssocID="{C1E69EF1-40AA-4299-8FAA-C8A91BEB36B2}" presName="aSpace" presStyleCnt="0"/>
@@ -5310,24 +5211,10 @@
     <dgm:pt modelId="{5E114458-8C8E-4284-B586-71EABBA55558}" type="pres">
       <dgm:prSet presAssocID="{2B62FC66-C72B-4978-B1BE-9AD0E90F2C2E}" presName="aNode" presStyleLbl="bgShp" presStyleIdx="1" presStyleCnt="3" custScaleY="89831"/>
       <dgm:spPr/>
-      <dgm:t>
-        <a:bodyPr/>
-        <a:lstStyle/>
-        <a:p>
-          <a:endParaRPr lang="zh-TW" altLang="en-US"/>
-        </a:p>
-      </dgm:t>
     </dgm:pt>
     <dgm:pt modelId="{A4E5C926-B3C5-4C74-8C37-A20EDBD34174}" type="pres">
       <dgm:prSet presAssocID="{2B62FC66-C72B-4978-B1BE-9AD0E90F2C2E}" presName="textNode" presStyleLbl="bgShp" presStyleIdx="1" presStyleCnt="3"/>
       <dgm:spPr/>
-      <dgm:t>
-        <a:bodyPr/>
-        <a:lstStyle/>
-        <a:p>
-          <a:endParaRPr lang="zh-TW" altLang="en-US"/>
-        </a:p>
-      </dgm:t>
     </dgm:pt>
     <dgm:pt modelId="{A845A247-0124-42AB-9B6A-422A8A9695F4}" type="pres">
       <dgm:prSet presAssocID="{2B62FC66-C72B-4978-B1BE-9AD0E90F2C2E}" presName="compChildNode" presStyleCnt="0"/>
@@ -5344,13 +5231,6 @@
         </dgm:presLayoutVars>
       </dgm:prSet>
       <dgm:spPr/>
-      <dgm:t>
-        <a:bodyPr/>
-        <a:lstStyle/>
-        <a:p>
-          <a:endParaRPr lang="zh-TW" altLang="en-US"/>
-        </a:p>
-      </dgm:t>
     </dgm:pt>
     <dgm:pt modelId="{69A1ADE0-5331-499D-A6B6-832542D377EA}" type="pres">
       <dgm:prSet presAssocID="{2B62FC66-C72B-4978-B1BE-9AD0E90F2C2E}" presName="aSpace" presStyleCnt="0"/>
@@ -5363,24 +5243,10 @@
     <dgm:pt modelId="{B108C075-E406-4E93-8FDC-07DA5A9D3F6C}" type="pres">
       <dgm:prSet presAssocID="{88741CB3-16FC-4B3C-B539-AD125A175ADB}" presName="aNode" presStyleLbl="bgShp" presStyleIdx="2" presStyleCnt="3" custScaleY="89831"/>
       <dgm:spPr/>
-      <dgm:t>
-        <a:bodyPr/>
-        <a:lstStyle/>
-        <a:p>
-          <a:endParaRPr lang="zh-TW" altLang="en-US"/>
-        </a:p>
-      </dgm:t>
     </dgm:pt>
     <dgm:pt modelId="{221D19C4-677A-4C86-A9B2-A1C4CD99372B}" type="pres">
       <dgm:prSet presAssocID="{88741CB3-16FC-4B3C-B539-AD125A175ADB}" presName="textNode" presStyleLbl="bgShp" presStyleIdx="2" presStyleCnt="3"/>
       <dgm:spPr/>
-      <dgm:t>
-        <a:bodyPr/>
-        <a:lstStyle/>
-        <a:p>
-          <a:endParaRPr lang="zh-TW" altLang="en-US"/>
-        </a:p>
-      </dgm:t>
     </dgm:pt>
     <dgm:pt modelId="{C1FB6A9E-305B-4B94-9B99-CBA60887A227}" type="pres">
       <dgm:prSet presAssocID="{88741CB3-16FC-4B3C-B539-AD125A175ADB}" presName="compChildNode" presStyleCnt="0"/>
@@ -5397,32 +5263,25 @@
         </dgm:presLayoutVars>
       </dgm:prSet>
       <dgm:spPr/>
-      <dgm:t>
-        <a:bodyPr/>
-        <a:lstStyle/>
-        <a:p>
-          <a:endParaRPr lang="zh-TW" altLang="en-US"/>
-        </a:p>
-      </dgm:t>
     </dgm:pt>
   </dgm:ptLst>
   <dgm:cxnLst>
-    <dgm:cxn modelId="{0EAC2286-32B7-4608-8916-EDB111648AEF}" type="presOf" srcId="{C1E69EF1-40AA-4299-8FAA-C8A91BEB36B2}" destId="{1D8745EB-B71C-4DB0-8EF9-16A687DDE7F1}" srcOrd="0" destOrd="0" presId="urn:microsoft.com/office/officeart/2005/8/layout/lProcess2"/>
-    <dgm:cxn modelId="{906760FC-FF8F-4F7F-A922-A8CEBA3E5BBD}" type="presOf" srcId="{E8BFF938-8D63-4F34-82CB-0411F3F0328F}" destId="{CA6EE8DB-B66B-4A06-B89B-27E4D981F042}" srcOrd="0" destOrd="0" presId="urn:microsoft.com/office/officeart/2005/8/layout/lProcess2"/>
-    <dgm:cxn modelId="{258F91E2-483B-4DDE-AE47-1A5E9AFDAFFD}" type="presOf" srcId="{2B62FC66-C72B-4978-B1BE-9AD0E90F2C2E}" destId="{5E114458-8C8E-4284-B586-71EABBA55558}" srcOrd="0" destOrd="0" presId="urn:microsoft.com/office/officeart/2005/8/layout/lProcess2"/>
     <dgm:cxn modelId="{90CA3A0A-041F-4191-9238-EF6A54BDD355}" type="presOf" srcId="{321BCE50-0E1D-4495-B2C7-068BD611DA4B}" destId="{A0B8A99C-3CC7-4B68-8B82-54FC163DF4D8}" srcOrd="0" destOrd="0" presId="urn:microsoft.com/office/officeart/2005/8/layout/lProcess2"/>
+    <dgm:cxn modelId="{695D7213-7231-4EC4-9B32-16F7D1178565}" type="presOf" srcId="{C1E69EF1-40AA-4299-8FAA-C8A91BEB36B2}" destId="{DF3C4F26-3913-4112-AF45-04C023B91091}" srcOrd="1" destOrd="0" presId="urn:microsoft.com/office/officeart/2005/8/layout/lProcess2"/>
+    <dgm:cxn modelId="{72C56B29-1C95-49B4-AD70-E94B7174F9B4}" type="presOf" srcId="{88741CB3-16FC-4B3C-B539-AD125A175ADB}" destId="{221D19C4-677A-4C86-A9B2-A1C4CD99372B}" srcOrd="1" destOrd="0" presId="urn:microsoft.com/office/officeart/2005/8/layout/lProcess2"/>
     <dgm:cxn modelId="{0F9FE631-5453-4EBB-AF7E-D581B2E7A4A3}" srcId="{C1E69EF1-40AA-4299-8FAA-C8A91BEB36B2}" destId="{E8BFF938-8D63-4F34-82CB-0411F3F0328F}" srcOrd="0" destOrd="0" parTransId="{D2B60AF8-817F-473F-8761-2D42FD008F0F}" sibTransId="{6E5CB67D-FD15-433C-B1BA-D0508F8981F2}"/>
     <dgm:cxn modelId="{A8E0996A-26CD-43FC-B9A4-A0ED5C6996A0}" srcId="{321BCE50-0E1D-4495-B2C7-068BD611DA4B}" destId="{88741CB3-16FC-4B3C-B539-AD125A175ADB}" srcOrd="2" destOrd="0" parTransId="{A8211020-B9F2-4F31-BDE6-BE21DD201197}" sibTransId="{3DFD04A9-917E-4161-8A0B-1C2641455221}"/>
-    <dgm:cxn modelId="{72C56B29-1C95-49B4-AD70-E94B7174F9B4}" type="presOf" srcId="{88741CB3-16FC-4B3C-B539-AD125A175ADB}" destId="{221D19C4-677A-4C86-A9B2-A1C4CD99372B}" srcOrd="1" destOrd="0" presId="urn:microsoft.com/office/officeart/2005/8/layout/lProcess2"/>
+    <dgm:cxn modelId="{EEEBE751-BEAC-4BEE-BCB2-4A90356AE26B}" type="presOf" srcId="{E6BB1002-3022-495E-A23F-9F7A582B7B49}" destId="{9C2201EC-D908-4DE5-9B38-BC12463CE5AC}" srcOrd="0" destOrd="0" presId="urn:microsoft.com/office/officeart/2005/8/layout/lProcess2"/>
+    <dgm:cxn modelId="{0EAC2286-32B7-4608-8916-EDB111648AEF}" type="presOf" srcId="{C1E69EF1-40AA-4299-8FAA-C8A91BEB36B2}" destId="{1D8745EB-B71C-4DB0-8EF9-16A687DDE7F1}" srcOrd="0" destOrd="0" presId="urn:microsoft.com/office/officeart/2005/8/layout/lProcess2"/>
+    <dgm:cxn modelId="{5605E6AA-F379-4786-A169-5334198EF2D8}" srcId="{321BCE50-0E1D-4495-B2C7-068BD611DA4B}" destId="{2B62FC66-C72B-4978-B1BE-9AD0E90F2C2E}" srcOrd="1" destOrd="0" parTransId="{E1C15B56-79CC-49EC-ABD6-0565A90213EF}" sibTransId="{EF3F835A-D1AD-49E9-B536-9F8F0588F513}"/>
+    <dgm:cxn modelId="{4CC038B1-C864-4BC5-A482-179D1CBACA64}" srcId="{88741CB3-16FC-4B3C-B539-AD125A175ADB}" destId="{E8266DFC-06C6-4B98-8C01-496CF7B3400A}" srcOrd="0" destOrd="0" parTransId="{7A8F4611-B02A-4804-9BFB-74AC4CDDEBF0}" sibTransId="{C29359EA-E221-4E3E-973D-DBA16081B1F5}"/>
+    <dgm:cxn modelId="{9762B0D2-9B59-4232-811E-602C89B0F0EE}" type="presOf" srcId="{E8266DFC-06C6-4B98-8C01-496CF7B3400A}" destId="{468C3BB7-6DA6-4606-9772-679DB50AE176}" srcOrd="0" destOrd="0" presId="urn:microsoft.com/office/officeart/2005/8/layout/lProcess2"/>
+    <dgm:cxn modelId="{258F91E2-483B-4DDE-AE47-1A5E9AFDAFFD}" type="presOf" srcId="{2B62FC66-C72B-4978-B1BE-9AD0E90F2C2E}" destId="{5E114458-8C8E-4284-B586-71EABBA55558}" srcOrd="0" destOrd="0" presId="urn:microsoft.com/office/officeart/2005/8/layout/lProcess2"/>
+    <dgm:cxn modelId="{247B31E7-F3BD-4C0A-BC4E-8252A5F6D65C}" type="presOf" srcId="{2B62FC66-C72B-4978-B1BE-9AD0E90F2C2E}" destId="{A4E5C926-B3C5-4C74-8C37-A20EDBD34174}" srcOrd="1" destOrd="0" presId="urn:microsoft.com/office/officeart/2005/8/layout/lProcess2"/>
+    <dgm:cxn modelId="{BACA0CEE-33A8-4399-B5B4-9B3012B5EDB7}" type="presOf" srcId="{88741CB3-16FC-4B3C-B539-AD125A175ADB}" destId="{B108C075-E406-4E93-8FDC-07DA5A9D3F6C}" srcOrd="0" destOrd="0" presId="urn:microsoft.com/office/officeart/2005/8/layout/lProcess2"/>
     <dgm:cxn modelId="{956672F3-E83D-441B-87C9-08BA2D13661E}" srcId="{2B62FC66-C72B-4978-B1BE-9AD0E90F2C2E}" destId="{E6BB1002-3022-495E-A23F-9F7A582B7B49}" srcOrd="0" destOrd="0" parTransId="{60FF6E73-947C-4954-87C4-B57D3753340B}" sibTransId="{E64F509B-39DA-4397-A761-2477A86EA903}"/>
-    <dgm:cxn modelId="{BACA0CEE-33A8-4399-B5B4-9B3012B5EDB7}" type="presOf" srcId="{88741CB3-16FC-4B3C-B539-AD125A175ADB}" destId="{B108C075-E406-4E93-8FDC-07DA5A9D3F6C}" srcOrd="0" destOrd="0" presId="urn:microsoft.com/office/officeart/2005/8/layout/lProcess2"/>
-    <dgm:cxn modelId="{EEEBE751-BEAC-4BEE-BCB2-4A90356AE26B}" type="presOf" srcId="{E6BB1002-3022-495E-A23F-9F7A582B7B49}" destId="{9C2201EC-D908-4DE5-9B38-BC12463CE5AC}" srcOrd="0" destOrd="0" presId="urn:microsoft.com/office/officeart/2005/8/layout/lProcess2"/>
-    <dgm:cxn modelId="{247B31E7-F3BD-4C0A-BC4E-8252A5F6D65C}" type="presOf" srcId="{2B62FC66-C72B-4978-B1BE-9AD0E90F2C2E}" destId="{A4E5C926-B3C5-4C74-8C37-A20EDBD34174}" srcOrd="1" destOrd="0" presId="urn:microsoft.com/office/officeart/2005/8/layout/lProcess2"/>
-    <dgm:cxn modelId="{9762B0D2-9B59-4232-811E-602C89B0F0EE}" type="presOf" srcId="{E8266DFC-06C6-4B98-8C01-496CF7B3400A}" destId="{468C3BB7-6DA6-4606-9772-679DB50AE176}" srcOrd="0" destOrd="0" presId="urn:microsoft.com/office/officeart/2005/8/layout/lProcess2"/>
-    <dgm:cxn modelId="{5605E6AA-F379-4786-A169-5334198EF2D8}" srcId="{321BCE50-0E1D-4495-B2C7-068BD611DA4B}" destId="{2B62FC66-C72B-4978-B1BE-9AD0E90F2C2E}" srcOrd="1" destOrd="0" parTransId="{E1C15B56-79CC-49EC-ABD6-0565A90213EF}" sibTransId="{EF3F835A-D1AD-49E9-B536-9F8F0588F513}"/>
-    <dgm:cxn modelId="{695D7213-7231-4EC4-9B32-16F7D1178565}" type="presOf" srcId="{C1E69EF1-40AA-4299-8FAA-C8A91BEB36B2}" destId="{DF3C4F26-3913-4112-AF45-04C023B91091}" srcOrd="1" destOrd="0" presId="urn:microsoft.com/office/officeart/2005/8/layout/lProcess2"/>
+    <dgm:cxn modelId="{906760FC-FF8F-4F7F-A922-A8CEBA3E5BBD}" type="presOf" srcId="{E8BFF938-8D63-4F34-82CB-0411F3F0328F}" destId="{CA6EE8DB-B66B-4A06-B89B-27E4D981F042}" srcOrd="0" destOrd="0" presId="urn:microsoft.com/office/officeart/2005/8/layout/lProcess2"/>
     <dgm:cxn modelId="{C30045FE-9B4D-4798-B3B9-BC85398171BE}" srcId="{321BCE50-0E1D-4495-B2C7-068BD611DA4B}" destId="{C1E69EF1-40AA-4299-8FAA-C8A91BEB36B2}" srcOrd="0" destOrd="0" parTransId="{3783CB84-520A-49A8-8BFF-C151739B9DAC}" sibTransId="{E29E3D14-A83B-4DC8-9938-18AB1D8EB339}"/>
-    <dgm:cxn modelId="{4CC038B1-C864-4BC5-A482-179D1CBACA64}" srcId="{88741CB3-16FC-4B3C-B539-AD125A175ADB}" destId="{E8266DFC-06C6-4B98-8C01-496CF7B3400A}" srcOrd="0" destOrd="0" parTransId="{7A8F4611-B02A-4804-9BFB-74AC4CDDEBF0}" sibTransId="{C29359EA-E221-4E3E-973D-DBA16081B1F5}"/>
     <dgm:cxn modelId="{AB72713F-0AEA-4C4A-AB24-D25E2D929D57}" type="presParOf" srcId="{A0B8A99C-3CC7-4B68-8B82-54FC163DF4D8}" destId="{A2E0DC09-9B54-4F0A-BDDD-E7577D1AA380}" srcOrd="0" destOrd="0" presId="urn:microsoft.com/office/officeart/2005/8/layout/lProcess2"/>
     <dgm:cxn modelId="{F7C54B81-CBF5-408B-8BCA-152BD56F57E6}" type="presParOf" srcId="{A2E0DC09-9B54-4F0A-BDDD-E7577D1AA380}" destId="{1D8745EB-B71C-4DB0-8EF9-16A687DDE7F1}" srcOrd="0" destOrd="0" presId="urn:microsoft.com/office/officeart/2005/8/layout/lProcess2"/>
     <dgm:cxn modelId="{379A0B53-605D-4CCF-8FA6-BC648C99C00E}" type="presParOf" srcId="{A2E0DC09-9B54-4F0A-BDDD-E7577D1AA380}" destId="{DF3C4F26-3913-4112-AF45-04C023B91091}" srcOrd="1" destOrd="0" presId="urn:microsoft.com/office/officeart/2005/8/layout/lProcess2"/>
@@ -5837,13 +5696,6 @@
         </dgm:presLayoutVars>
       </dgm:prSet>
       <dgm:spPr/>
-      <dgm:t>
-        <a:bodyPr/>
-        <a:lstStyle/>
-        <a:p>
-          <a:endParaRPr lang="zh-TW" altLang="en-US"/>
-        </a:p>
-      </dgm:t>
     </dgm:pt>
     <dgm:pt modelId="{A2E0DC09-9B54-4F0A-BDDD-E7577D1AA380}" type="pres">
       <dgm:prSet presAssocID="{C1E69EF1-40AA-4299-8FAA-C8A91BEB36B2}" presName="compNode" presStyleCnt="0"/>
@@ -5852,24 +5704,10 @@
     <dgm:pt modelId="{1D8745EB-B71C-4DB0-8EF9-16A687DDE7F1}" type="pres">
       <dgm:prSet presAssocID="{C1E69EF1-40AA-4299-8FAA-C8A91BEB36B2}" presName="aNode" presStyleLbl="bgShp" presStyleIdx="0" presStyleCnt="3" custLinFactNeighborY="-1856"/>
       <dgm:spPr/>
-      <dgm:t>
-        <a:bodyPr/>
-        <a:lstStyle/>
-        <a:p>
-          <a:endParaRPr lang="zh-TW" altLang="en-US"/>
-        </a:p>
-      </dgm:t>
     </dgm:pt>
     <dgm:pt modelId="{DF3C4F26-3913-4112-AF45-04C023B91091}" type="pres">
       <dgm:prSet presAssocID="{C1E69EF1-40AA-4299-8FAA-C8A91BEB36B2}" presName="textNode" presStyleLbl="bgShp" presStyleIdx="0" presStyleCnt="3"/>
       <dgm:spPr/>
-      <dgm:t>
-        <a:bodyPr/>
-        <a:lstStyle/>
-        <a:p>
-          <a:endParaRPr lang="zh-TW" altLang="en-US"/>
-        </a:p>
-      </dgm:t>
     </dgm:pt>
     <dgm:pt modelId="{D4E4C7F6-239D-4A7F-A996-2431441D2F5B}" type="pres">
       <dgm:prSet presAssocID="{C1E69EF1-40AA-4299-8FAA-C8A91BEB36B2}" presName="compChildNode" presStyleCnt="0"/>
@@ -5886,13 +5724,6 @@
         </dgm:presLayoutVars>
       </dgm:prSet>
       <dgm:spPr/>
-      <dgm:t>
-        <a:bodyPr/>
-        <a:lstStyle/>
-        <a:p>
-          <a:endParaRPr lang="zh-TW" altLang="en-US"/>
-        </a:p>
-      </dgm:t>
     </dgm:pt>
     <dgm:pt modelId="{3AA0EEDF-ED3A-439D-869B-F25BA7343E9E}" type="pres">
       <dgm:prSet presAssocID="{C1E69EF1-40AA-4299-8FAA-C8A91BEB36B2}" presName="aSpace" presStyleCnt="0"/>
@@ -5905,24 +5736,10 @@
     <dgm:pt modelId="{5E114458-8C8E-4284-B586-71EABBA55558}" type="pres">
       <dgm:prSet presAssocID="{2B62FC66-C72B-4978-B1BE-9AD0E90F2C2E}" presName="aNode" presStyleLbl="bgShp" presStyleIdx="1" presStyleCnt="3" custScaleX="113636" custLinFactNeighborY="-1856"/>
       <dgm:spPr/>
-      <dgm:t>
-        <a:bodyPr/>
-        <a:lstStyle/>
-        <a:p>
-          <a:endParaRPr lang="zh-TW" altLang="en-US"/>
-        </a:p>
-      </dgm:t>
     </dgm:pt>
     <dgm:pt modelId="{A4E5C926-B3C5-4C74-8C37-A20EDBD34174}" type="pres">
       <dgm:prSet presAssocID="{2B62FC66-C72B-4978-B1BE-9AD0E90F2C2E}" presName="textNode" presStyleLbl="bgShp" presStyleIdx="1" presStyleCnt="3"/>
       <dgm:spPr/>
-      <dgm:t>
-        <a:bodyPr/>
-        <a:lstStyle/>
-        <a:p>
-          <a:endParaRPr lang="zh-TW" altLang="en-US"/>
-        </a:p>
-      </dgm:t>
     </dgm:pt>
     <dgm:pt modelId="{A845A247-0124-42AB-9B6A-422A8A9695F4}" type="pres">
       <dgm:prSet presAssocID="{2B62FC66-C72B-4978-B1BE-9AD0E90F2C2E}" presName="compChildNode" presStyleCnt="0"/>
@@ -5939,13 +5756,6 @@
         </dgm:presLayoutVars>
       </dgm:prSet>
       <dgm:spPr/>
-      <dgm:t>
-        <a:bodyPr/>
-        <a:lstStyle/>
-        <a:p>
-          <a:endParaRPr lang="zh-TW" altLang="en-US"/>
-        </a:p>
-      </dgm:t>
     </dgm:pt>
     <dgm:pt modelId="{69A1ADE0-5331-499D-A6B6-832542D377EA}" type="pres">
       <dgm:prSet presAssocID="{2B62FC66-C72B-4978-B1BE-9AD0E90F2C2E}" presName="aSpace" presStyleCnt="0"/>
@@ -5958,24 +5768,10 @@
     <dgm:pt modelId="{B108C075-E406-4E93-8FDC-07DA5A9D3F6C}" type="pres">
       <dgm:prSet presAssocID="{88741CB3-16FC-4B3C-B539-AD125A175ADB}" presName="aNode" presStyleLbl="bgShp" presStyleIdx="2" presStyleCnt="3" custLinFactNeighborY="-1856"/>
       <dgm:spPr/>
-      <dgm:t>
-        <a:bodyPr/>
-        <a:lstStyle/>
-        <a:p>
-          <a:endParaRPr lang="zh-TW" altLang="en-US"/>
-        </a:p>
-      </dgm:t>
     </dgm:pt>
     <dgm:pt modelId="{221D19C4-677A-4C86-A9B2-A1C4CD99372B}" type="pres">
       <dgm:prSet presAssocID="{88741CB3-16FC-4B3C-B539-AD125A175ADB}" presName="textNode" presStyleLbl="bgShp" presStyleIdx="2" presStyleCnt="3"/>
       <dgm:spPr/>
-      <dgm:t>
-        <a:bodyPr/>
-        <a:lstStyle/>
-        <a:p>
-          <a:endParaRPr lang="zh-TW" altLang="en-US"/>
-        </a:p>
-      </dgm:t>
     </dgm:pt>
     <dgm:pt modelId="{C1FB6A9E-305B-4B94-9B99-CBA60887A227}" type="pres">
       <dgm:prSet presAssocID="{88741CB3-16FC-4B3C-B539-AD125A175ADB}" presName="compChildNode" presStyleCnt="0"/>
@@ -5992,32 +5788,25 @@
         </dgm:presLayoutVars>
       </dgm:prSet>
       <dgm:spPr/>
-      <dgm:t>
-        <a:bodyPr/>
-        <a:lstStyle/>
-        <a:p>
-          <a:endParaRPr lang="zh-TW" altLang="en-US"/>
-        </a:p>
-      </dgm:t>
     </dgm:pt>
   </dgm:ptLst>
   <dgm:cxnLst>
-    <dgm:cxn modelId="{1C3950C8-0E9F-4E70-AD4C-F2718486B0FA}" type="presOf" srcId="{321BCE50-0E1D-4495-B2C7-068BD611DA4B}" destId="{A0B8A99C-3CC7-4B68-8B82-54FC163DF4D8}" srcOrd="0" destOrd="0" presId="urn:microsoft.com/office/officeart/2005/8/layout/lProcess2"/>
-    <dgm:cxn modelId="{956672F3-E83D-441B-87C9-08BA2D13661E}" srcId="{2B62FC66-C72B-4978-B1BE-9AD0E90F2C2E}" destId="{E6BB1002-3022-495E-A23F-9F7A582B7B49}" srcOrd="0" destOrd="0" parTransId="{60FF6E73-947C-4954-87C4-B57D3753340B}" sibTransId="{E64F509B-39DA-4397-A761-2477A86EA903}"/>
-    <dgm:cxn modelId="{4CC038B1-C864-4BC5-A482-179D1CBACA64}" srcId="{88741CB3-16FC-4B3C-B539-AD125A175ADB}" destId="{E8266DFC-06C6-4B98-8C01-496CF7B3400A}" srcOrd="0" destOrd="0" parTransId="{7A8F4611-B02A-4804-9BFB-74AC4CDDEBF0}" sibTransId="{C29359EA-E221-4E3E-973D-DBA16081B1F5}"/>
     <dgm:cxn modelId="{6554C30E-37CB-4495-87A1-A7DB5E403639}" type="presOf" srcId="{88741CB3-16FC-4B3C-B539-AD125A175ADB}" destId="{B108C075-E406-4E93-8FDC-07DA5A9D3F6C}" srcOrd="0" destOrd="0" presId="urn:microsoft.com/office/officeart/2005/8/layout/lProcess2"/>
-    <dgm:cxn modelId="{8ACC127B-BEC4-497F-9635-C1C565BB5038}" type="presOf" srcId="{E8BFF938-8D63-4F34-82CB-0411F3F0328F}" destId="{CA6EE8DB-B66B-4A06-B89B-27E4D981F042}" srcOrd="0" destOrd="0" presId="urn:microsoft.com/office/officeart/2005/8/layout/lProcess2"/>
-    <dgm:cxn modelId="{C30045FE-9B4D-4798-B3B9-BC85398171BE}" srcId="{321BCE50-0E1D-4495-B2C7-068BD611DA4B}" destId="{C1E69EF1-40AA-4299-8FAA-C8A91BEB36B2}" srcOrd="0" destOrd="0" parTransId="{3783CB84-520A-49A8-8BFF-C151739B9DAC}" sibTransId="{E29E3D14-A83B-4DC8-9938-18AB1D8EB339}"/>
     <dgm:cxn modelId="{0F9FE631-5453-4EBB-AF7E-D581B2E7A4A3}" srcId="{C1E69EF1-40AA-4299-8FAA-C8A91BEB36B2}" destId="{E8BFF938-8D63-4F34-82CB-0411F3F0328F}" srcOrd="0" destOrd="0" parTransId="{D2B60AF8-817F-473F-8761-2D42FD008F0F}" sibTransId="{6E5CB67D-FD15-433C-B1BA-D0508F8981F2}"/>
     <dgm:cxn modelId="{260EDC41-EC45-4316-99CE-BD5DEC5C66AA}" type="presOf" srcId="{2B62FC66-C72B-4978-B1BE-9AD0E90F2C2E}" destId="{A4E5C926-B3C5-4C74-8C37-A20EDBD34174}" srcOrd="1" destOrd="0" presId="urn:microsoft.com/office/officeart/2005/8/layout/lProcess2"/>
-    <dgm:cxn modelId="{77CE3BB7-C56F-4CD7-809C-9FEF0F9D5857}" type="presOf" srcId="{C1E69EF1-40AA-4299-8FAA-C8A91BEB36B2}" destId="{DF3C4F26-3913-4112-AF45-04C023B91091}" srcOrd="1" destOrd="0" presId="urn:microsoft.com/office/officeart/2005/8/layout/lProcess2"/>
-    <dgm:cxn modelId="{8DB935DE-AA20-459A-BF49-6314F8189EEA}" type="presOf" srcId="{C1E69EF1-40AA-4299-8FAA-C8A91BEB36B2}" destId="{1D8745EB-B71C-4DB0-8EF9-16A687DDE7F1}" srcOrd="0" destOrd="0" presId="urn:microsoft.com/office/officeart/2005/8/layout/lProcess2"/>
+    <dgm:cxn modelId="{3F76AB44-B109-4877-A335-B3EEB383373E}" type="presOf" srcId="{E6BB1002-3022-495E-A23F-9F7A582B7B49}" destId="{9C2201EC-D908-4DE5-9B38-BC12463CE5AC}" srcOrd="0" destOrd="0" presId="urn:microsoft.com/office/officeart/2005/8/layout/lProcess2"/>
+    <dgm:cxn modelId="{A8E0996A-26CD-43FC-B9A4-A0ED5C6996A0}" srcId="{321BCE50-0E1D-4495-B2C7-068BD611DA4B}" destId="{88741CB3-16FC-4B3C-B539-AD125A175ADB}" srcOrd="2" destOrd="0" parTransId="{A8211020-B9F2-4F31-BDE6-BE21DD201197}" sibTransId="{3DFD04A9-917E-4161-8A0B-1C2641455221}"/>
+    <dgm:cxn modelId="{8ACC127B-BEC4-497F-9635-C1C565BB5038}" type="presOf" srcId="{E8BFF938-8D63-4F34-82CB-0411F3F0328F}" destId="{CA6EE8DB-B66B-4A06-B89B-27E4D981F042}" srcOrd="0" destOrd="0" presId="urn:microsoft.com/office/officeart/2005/8/layout/lProcess2"/>
     <dgm:cxn modelId="{4E7B5C82-DDFF-419B-BDD3-5203F12B869C}" type="presOf" srcId="{88741CB3-16FC-4B3C-B539-AD125A175ADB}" destId="{221D19C4-677A-4C86-A9B2-A1C4CD99372B}" srcOrd="1" destOrd="0" presId="urn:microsoft.com/office/officeart/2005/8/layout/lProcess2"/>
     <dgm:cxn modelId="{5BE84893-E4B0-4406-9213-3E076810C241}" type="presOf" srcId="{2B62FC66-C72B-4978-B1BE-9AD0E90F2C2E}" destId="{5E114458-8C8E-4284-B586-71EABBA55558}" srcOrd="0" destOrd="0" presId="urn:microsoft.com/office/officeart/2005/8/layout/lProcess2"/>
+    <dgm:cxn modelId="{2CE0B59E-0B92-45FC-8A0B-9BBADB0326D8}" type="presOf" srcId="{E8266DFC-06C6-4B98-8C01-496CF7B3400A}" destId="{468C3BB7-6DA6-4606-9772-679DB50AE176}" srcOrd="0" destOrd="0" presId="urn:microsoft.com/office/officeart/2005/8/layout/lProcess2"/>
     <dgm:cxn modelId="{5605E6AA-F379-4786-A169-5334198EF2D8}" srcId="{321BCE50-0E1D-4495-B2C7-068BD611DA4B}" destId="{2B62FC66-C72B-4978-B1BE-9AD0E90F2C2E}" srcOrd="1" destOrd="0" parTransId="{E1C15B56-79CC-49EC-ABD6-0565A90213EF}" sibTransId="{EF3F835A-D1AD-49E9-B536-9F8F0588F513}"/>
-    <dgm:cxn modelId="{3F76AB44-B109-4877-A335-B3EEB383373E}" type="presOf" srcId="{E6BB1002-3022-495E-A23F-9F7A582B7B49}" destId="{9C2201EC-D908-4DE5-9B38-BC12463CE5AC}" srcOrd="0" destOrd="0" presId="urn:microsoft.com/office/officeart/2005/8/layout/lProcess2"/>
-    <dgm:cxn modelId="{2CE0B59E-0B92-45FC-8A0B-9BBADB0326D8}" type="presOf" srcId="{E8266DFC-06C6-4B98-8C01-496CF7B3400A}" destId="{468C3BB7-6DA6-4606-9772-679DB50AE176}" srcOrd="0" destOrd="0" presId="urn:microsoft.com/office/officeart/2005/8/layout/lProcess2"/>
-    <dgm:cxn modelId="{A8E0996A-26CD-43FC-B9A4-A0ED5C6996A0}" srcId="{321BCE50-0E1D-4495-B2C7-068BD611DA4B}" destId="{88741CB3-16FC-4B3C-B539-AD125A175ADB}" srcOrd="2" destOrd="0" parTransId="{A8211020-B9F2-4F31-BDE6-BE21DD201197}" sibTransId="{3DFD04A9-917E-4161-8A0B-1C2641455221}"/>
+    <dgm:cxn modelId="{4CC038B1-C864-4BC5-A482-179D1CBACA64}" srcId="{88741CB3-16FC-4B3C-B539-AD125A175ADB}" destId="{E8266DFC-06C6-4B98-8C01-496CF7B3400A}" srcOrd="0" destOrd="0" parTransId="{7A8F4611-B02A-4804-9BFB-74AC4CDDEBF0}" sibTransId="{C29359EA-E221-4E3E-973D-DBA16081B1F5}"/>
+    <dgm:cxn modelId="{77CE3BB7-C56F-4CD7-809C-9FEF0F9D5857}" type="presOf" srcId="{C1E69EF1-40AA-4299-8FAA-C8A91BEB36B2}" destId="{DF3C4F26-3913-4112-AF45-04C023B91091}" srcOrd="1" destOrd="0" presId="urn:microsoft.com/office/officeart/2005/8/layout/lProcess2"/>
+    <dgm:cxn modelId="{1C3950C8-0E9F-4E70-AD4C-F2718486B0FA}" type="presOf" srcId="{321BCE50-0E1D-4495-B2C7-068BD611DA4B}" destId="{A0B8A99C-3CC7-4B68-8B82-54FC163DF4D8}" srcOrd="0" destOrd="0" presId="urn:microsoft.com/office/officeart/2005/8/layout/lProcess2"/>
+    <dgm:cxn modelId="{8DB935DE-AA20-459A-BF49-6314F8189EEA}" type="presOf" srcId="{C1E69EF1-40AA-4299-8FAA-C8A91BEB36B2}" destId="{1D8745EB-B71C-4DB0-8EF9-16A687DDE7F1}" srcOrd="0" destOrd="0" presId="urn:microsoft.com/office/officeart/2005/8/layout/lProcess2"/>
+    <dgm:cxn modelId="{956672F3-E83D-441B-87C9-08BA2D13661E}" srcId="{2B62FC66-C72B-4978-B1BE-9AD0E90F2C2E}" destId="{E6BB1002-3022-495E-A23F-9F7A582B7B49}" srcOrd="0" destOrd="0" parTransId="{60FF6E73-947C-4954-87C4-B57D3753340B}" sibTransId="{E64F509B-39DA-4397-A761-2477A86EA903}"/>
+    <dgm:cxn modelId="{C30045FE-9B4D-4798-B3B9-BC85398171BE}" srcId="{321BCE50-0E1D-4495-B2C7-068BD611DA4B}" destId="{C1E69EF1-40AA-4299-8FAA-C8A91BEB36B2}" srcOrd="0" destOrd="0" parTransId="{3783CB84-520A-49A8-8BFF-C151739B9DAC}" sibTransId="{E29E3D14-A83B-4DC8-9938-18AB1D8EB339}"/>
     <dgm:cxn modelId="{4A477DCE-076B-4233-B01F-F7E40B5BDF1C}" type="presParOf" srcId="{A0B8A99C-3CC7-4B68-8B82-54FC163DF4D8}" destId="{A2E0DC09-9B54-4F0A-BDDD-E7577D1AA380}" srcOrd="0" destOrd="0" presId="urn:microsoft.com/office/officeart/2005/8/layout/lProcess2"/>
     <dgm:cxn modelId="{59016F3C-561A-424E-BD71-0BE152F3F212}" type="presParOf" srcId="{A2E0DC09-9B54-4F0A-BDDD-E7577D1AA380}" destId="{1D8745EB-B71C-4DB0-8EF9-16A687DDE7F1}" srcOrd="0" destOrd="0" presId="urn:microsoft.com/office/officeart/2005/8/layout/lProcess2"/>
     <dgm:cxn modelId="{F8C2D81C-9B60-4BFF-A813-2307189497A5}" type="presParOf" srcId="{A2E0DC09-9B54-4F0A-BDDD-E7577D1AA380}" destId="{DF3C4F26-3913-4112-AF45-04C023B91091}" srcOrd="1" destOrd="0" presId="urn:microsoft.com/office/officeart/2005/8/layout/lProcess2"/>
@@ -6423,13 +6212,6 @@
         </dgm:presLayoutVars>
       </dgm:prSet>
       <dgm:spPr/>
-      <dgm:t>
-        <a:bodyPr/>
-        <a:lstStyle/>
-        <a:p>
-          <a:endParaRPr lang="zh-TW" altLang="en-US"/>
-        </a:p>
-      </dgm:t>
     </dgm:pt>
     <dgm:pt modelId="{4D173509-0DAC-46F1-A2DE-BE8E477EC926}" type="pres">
       <dgm:prSet presAssocID="{2C10E827-78B9-4CD0-9135-C649C8ABD480}" presName="composite" presStyleCnt="0"/>
@@ -6443,13 +6225,6 @@
         </dgm:presLayoutVars>
       </dgm:prSet>
       <dgm:spPr/>
-      <dgm:t>
-        <a:bodyPr/>
-        <a:lstStyle/>
-        <a:p>
-          <a:endParaRPr lang="zh-TW" altLang="en-US"/>
-        </a:p>
-      </dgm:t>
     </dgm:pt>
     <dgm:pt modelId="{6EFE7AB5-0941-4CF7-B563-5474DF815C78}" type="pres">
       <dgm:prSet presAssocID="{2C10E827-78B9-4CD0-9135-C649C8ABD480}" presName="descendantText" presStyleLbl="alignAcc1" presStyleIdx="0" presStyleCnt="3">
@@ -6458,13 +6233,6 @@
         </dgm:presLayoutVars>
       </dgm:prSet>
       <dgm:spPr/>
-      <dgm:t>
-        <a:bodyPr/>
-        <a:lstStyle/>
-        <a:p>
-          <a:endParaRPr lang="zh-TW" altLang="en-US"/>
-        </a:p>
-      </dgm:t>
     </dgm:pt>
     <dgm:pt modelId="{B65A2965-E936-485C-B625-A5B1F83D98B8}" type="pres">
       <dgm:prSet presAssocID="{C8152C64-7C20-4F35-9417-6DC5EBBB3B54}" presName="sp" presStyleCnt="0"/>
@@ -6482,13 +6250,6 @@
         </dgm:presLayoutVars>
       </dgm:prSet>
       <dgm:spPr/>
-      <dgm:t>
-        <a:bodyPr/>
-        <a:lstStyle/>
-        <a:p>
-          <a:endParaRPr lang="zh-TW" altLang="en-US"/>
-        </a:p>
-      </dgm:t>
     </dgm:pt>
     <dgm:pt modelId="{A9D70513-2C42-4FAE-94DD-459AB157F382}" type="pres">
       <dgm:prSet presAssocID="{2A1BFA2A-5C03-4E5F-983D-2BD4CA7F9BDA}" presName="descendantText" presStyleLbl="alignAcc1" presStyleIdx="1" presStyleCnt="3">
@@ -6497,13 +6258,6 @@
         </dgm:presLayoutVars>
       </dgm:prSet>
       <dgm:spPr/>
-      <dgm:t>
-        <a:bodyPr/>
-        <a:lstStyle/>
-        <a:p>
-          <a:endParaRPr lang="zh-TW" altLang="en-US"/>
-        </a:p>
-      </dgm:t>
     </dgm:pt>
     <dgm:pt modelId="{F614FE5E-8AAD-4DAE-821B-03E0DD954911}" type="pres">
       <dgm:prSet presAssocID="{1A6F7ECC-F4FF-4A75-AB26-6223F585E71E}" presName="sp" presStyleCnt="0"/>
@@ -6521,13 +6275,6 @@
         </dgm:presLayoutVars>
       </dgm:prSet>
       <dgm:spPr/>
-      <dgm:t>
-        <a:bodyPr/>
-        <a:lstStyle/>
-        <a:p>
-          <a:endParaRPr lang="zh-TW" altLang="en-US"/>
-        </a:p>
-      </dgm:t>
     </dgm:pt>
     <dgm:pt modelId="{F8313686-5249-4203-A1E3-82BD9AB7F03E}" type="pres">
       <dgm:prSet presAssocID="{9A17E133-4454-4A58-83BD-C0DB239A5918}" presName="descendantText" presStyleLbl="alignAcc1" presStyleIdx="2" presStyleCnt="3">
@@ -6536,29 +6283,22 @@
         </dgm:presLayoutVars>
       </dgm:prSet>
       <dgm:spPr/>
-      <dgm:t>
-        <a:bodyPr/>
-        <a:lstStyle/>
-        <a:p>
-          <a:endParaRPr lang="zh-TW" altLang="en-US"/>
-        </a:p>
-      </dgm:t>
     </dgm:pt>
   </dgm:ptLst>
   <dgm:cxnLst>
+    <dgm:cxn modelId="{3C3C7F01-216E-47FF-A875-492ABC671FB3}" srcId="{760D3DD5-4FF4-4CB9-9043-FEF900489766}" destId="{2A1BFA2A-5C03-4E5F-983D-2BD4CA7F9BDA}" srcOrd="1" destOrd="0" parTransId="{99407E7A-5918-46F4-AA66-3C96CE0D2086}" sibTransId="{1A6F7ECC-F4FF-4A75-AB26-6223F585E71E}"/>
+    <dgm:cxn modelId="{2510EA01-6BD8-464E-A53F-29C11CECC1A7}" type="presOf" srcId="{2C10E827-78B9-4CD0-9135-C649C8ABD480}" destId="{FAD15BB6-E774-456B-913A-D03FFD50F88D}" srcOrd="0" destOrd="0" presId="urn:microsoft.com/office/officeart/2005/8/layout/chevron2"/>
+    <dgm:cxn modelId="{4E91F15F-4C16-4A05-BA53-BA082F79003D}" type="presOf" srcId="{A6D9C0F0-43FD-4B68-B921-48BFD0F7816A}" destId="{A9D70513-2C42-4FAE-94DD-459AB157F382}" srcOrd="0" destOrd="0" presId="urn:microsoft.com/office/officeart/2005/8/layout/chevron2"/>
+    <dgm:cxn modelId="{4B9CF579-7673-41D7-B07B-A56C28C4404D}" type="presOf" srcId="{F0D36D75-CE48-4990-9B09-C82EF57F00B6}" destId="{F8313686-5249-4203-A1E3-82BD9AB7F03E}" srcOrd="0" destOrd="0" presId="urn:microsoft.com/office/officeart/2005/8/layout/chevron2"/>
+    <dgm:cxn modelId="{1EA9BF94-70A6-4937-9215-5D651C8ABD5C}" srcId="{9A17E133-4454-4A58-83BD-C0DB239A5918}" destId="{F0D36D75-CE48-4990-9B09-C82EF57F00B6}" srcOrd="0" destOrd="0" parTransId="{3994C285-D6DE-46EE-9CC3-D757142DB53C}" sibTransId="{911FE5AC-0C02-4296-A3F2-B92731DCDF0B}"/>
+    <dgm:cxn modelId="{1A4D2798-D47D-4627-9E90-8676B0BD465B}" type="presOf" srcId="{384090E4-912C-426D-9A37-136CFA55A092}" destId="{6EFE7AB5-0941-4CF7-B563-5474DF815C78}" srcOrd="0" destOrd="0" presId="urn:microsoft.com/office/officeart/2005/8/layout/chevron2"/>
+    <dgm:cxn modelId="{930F27A9-3ED3-490C-9632-79A17FAD1969}" srcId="{760D3DD5-4FF4-4CB9-9043-FEF900489766}" destId="{9A17E133-4454-4A58-83BD-C0DB239A5918}" srcOrd="2" destOrd="0" parTransId="{689324D7-7DB9-4A42-8613-E684DB67F3DD}" sibTransId="{06362CFF-BDB7-4EFE-A7B1-40326E554C76}"/>
+    <dgm:cxn modelId="{6DCEBAB2-FFD5-46E3-9065-3AAC30BA7C48}" srcId="{2A1BFA2A-5C03-4E5F-983D-2BD4CA7F9BDA}" destId="{A6D9C0F0-43FD-4B68-B921-48BFD0F7816A}" srcOrd="0" destOrd="0" parTransId="{DE5220DE-B613-422A-B82A-FCBA9C21A552}" sibTransId="{23B5D9A6-7B96-42C6-9D06-D2C5C7E5F735}"/>
+    <dgm:cxn modelId="{D26A3FB6-4F83-486C-84C6-6C6F1F949761}" srcId="{2C10E827-78B9-4CD0-9135-C649C8ABD480}" destId="{384090E4-912C-426D-9A37-136CFA55A092}" srcOrd="0" destOrd="0" parTransId="{1EB3CEAC-62C4-4FA6-AC60-9DA9D7E5BAA2}" sibTransId="{C7BE88AB-20C7-4C5A-A8D7-36AE018DC915}"/>
+    <dgm:cxn modelId="{0BE1E9C4-1017-4A08-B68C-B0DF9FCC2EDC}" type="presOf" srcId="{2A1BFA2A-5C03-4E5F-983D-2BD4CA7F9BDA}" destId="{116AA287-C9C7-4ABA-AD92-9ED685872512}" srcOrd="0" destOrd="0" presId="urn:microsoft.com/office/officeart/2005/8/layout/chevron2"/>
+    <dgm:cxn modelId="{4FC0DCD0-9FDC-4C14-BFB3-E0065746EE36}" type="presOf" srcId="{9A17E133-4454-4A58-83BD-C0DB239A5918}" destId="{AF898CE2-AE28-4243-89F6-C146EF02B541}" srcOrd="0" destOrd="0" presId="urn:microsoft.com/office/officeart/2005/8/layout/chevron2"/>
     <dgm:cxn modelId="{648A79E8-6EBD-4732-A6AF-B2C284FEFE83}" srcId="{760D3DD5-4FF4-4CB9-9043-FEF900489766}" destId="{2C10E827-78B9-4CD0-9135-C649C8ABD480}" srcOrd="0" destOrd="0" parTransId="{EA638C33-1065-42CF-B1B9-B98C81104479}" sibTransId="{C8152C64-7C20-4F35-9417-6DC5EBBB3B54}"/>
-    <dgm:cxn modelId="{1A4D2798-D47D-4627-9E90-8676B0BD465B}" type="presOf" srcId="{384090E4-912C-426D-9A37-136CFA55A092}" destId="{6EFE7AB5-0941-4CF7-B563-5474DF815C78}" srcOrd="0" destOrd="0" presId="urn:microsoft.com/office/officeart/2005/8/layout/chevron2"/>
-    <dgm:cxn modelId="{D26A3FB6-4F83-486C-84C6-6C6F1F949761}" srcId="{2C10E827-78B9-4CD0-9135-C649C8ABD480}" destId="{384090E4-912C-426D-9A37-136CFA55A092}" srcOrd="0" destOrd="0" parTransId="{1EB3CEAC-62C4-4FA6-AC60-9DA9D7E5BAA2}" sibTransId="{C7BE88AB-20C7-4C5A-A8D7-36AE018DC915}"/>
-    <dgm:cxn modelId="{930F27A9-3ED3-490C-9632-79A17FAD1969}" srcId="{760D3DD5-4FF4-4CB9-9043-FEF900489766}" destId="{9A17E133-4454-4A58-83BD-C0DB239A5918}" srcOrd="2" destOrd="0" parTransId="{689324D7-7DB9-4A42-8613-E684DB67F3DD}" sibTransId="{06362CFF-BDB7-4EFE-A7B1-40326E554C76}"/>
     <dgm:cxn modelId="{FD7AFBF1-42D0-4B83-B023-295526BDF8D4}" type="presOf" srcId="{760D3DD5-4FF4-4CB9-9043-FEF900489766}" destId="{435F2F68-9B69-410F-8DAE-32309F80F7BA}" srcOrd="0" destOrd="0" presId="urn:microsoft.com/office/officeart/2005/8/layout/chevron2"/>
-    <dgm:cxn modelId="{6DCEBAB2-FFD5-46E3-9065-3AAC30BA7C48}" srcId="{2A1BFA2A-5C03-4E5F-983D-2BD4CA7F9BDA}" destId="{A6D9C0F0-43FD-4B68-B921-48BFD0F7816A}" srcOrd="0" destOrd="0" parTransId="{DE5220DE-B613-422A-B82A-FCBA9C21A552}" sibTransId="{23B5D9A6-7B96-42C6-9D06-D2C5C7E5F735}"/>
-    <dgm:cxn modelId="{3C3C7F01-216E-47FF-A875-492ABC671FB3}" srcId="{760D3DD5-4FF4-4CB9-9043-FEF900489766}" destId="{2A1BFA2A-5C03-4E5F-983D-2BD4CA7F9BDA}" srcOrd="1" destOrd="0" parTransId="{99407E7A-5918-46F4-AA66-3C96CE0D2086}" sibTransId="{1A6F7ECC-F4FF-4A75-AB26-6223F585E71E}"/>
-    <dgm:cxn modelId="{0BE1E9C4-1017-4A08-B68C-B0DF9FCC2EDC}" type="presOf" srcId="{2A1BFA2A-5C03-4E5F-983D-2BD4CA7F9BDA}" destId="{116AA287-C9C7-4ABA-AD92-9ED685872512}" srcOrd="0" destOrd="0" presId="urn:microsoft.com/office/officeart/2005/8/layout/chevron2"/>
-    <dgm:cxn modelId="{1EA9BF94-70A6-4937-9215-5D651C8ABD5C}" srcId="{9A17E133-4454-4A58-83BD-C0DB239A5918}" destId="{F0D36D75-CE48-4990-9B09-C82EF57F00B6}" srcOrd="0" destOrd="0" parTransId="{3994C285-D6DE-46EE-9CC3-D757142DB53C}" sibTransId="{911FE5AC-0C02-4296-A3F2-B92731DCDF0B}"/>
-    <dgm:cxn modelId="{2510EA01-6BD8-464E-A53F-29C11CECC1A7}" type="presOf" srcId="{2C10E827-78B9-4CD0-9135-C649C8ABD480}" destId="{FAD15BB6-E774-456B-913A-D03FFD50F88D}" srcOrd="0" destOrd="0" presId="urn:microsoft.com/office/officeart/2005/8/layout/chevron2"/>
-    <dgm:cxn modelId="{4FC0DCD0-9FDC-4C14-BFB3-E0065746EE36}" type="presOf" srcId="{9A17E133-4454-4A58-83BD-C0DB239A5918}" destId="{AF898CE2-AE28-4243-89F6-C146EF02B541}" srcOrd="0" destOrd="0" presId="urn:microsoft.com/office/officeart/2005/8/layout/chevron2"/>
-    <dgm:cxn modelId="{4B9CF579-7673-41D7-B07B-A56C28C4404D}" type="presOf" srcId="{F0D36D75-CE48-4990-9B09-C82EF57F00B6}" destId="{F8313686-5249-4203-A1E3-82BD9AB7F03E}" srcOrd="0" destOrd="0" presId="urn:microsoft.com/office/officeart/2005/8/layout/chevron2"/>
-    <dgm:cxn modelId="{4E91F15F-4C16-4A05-BA53-BA082F79003D}" type="presOf" srcId="{A6D9C0F0-43FD-4B68-B921-48BFD0F7816A}" destId="{A9D70513-2C42-4FAE-94DD-459AB157F382}" srcOrd="0" destOrd="0" presId="urn:microsoft.com/office/officeart/2005/8/layout/chevron2"/>
     <dgm:cxn modelId="{05190FE8-C97A-4D47-9CEE-34E9DBF15C27}" type="presParOf" srcId="{435F2F68-9B69-410F-8DAE-32309F80F7BA}" destId="{4D173509-0DAC-46F1-A2DE-BE8E477EC926}" srcOrd="0" destOrd="0" presId="urn:microsoft.com/office/officeart/2005/8/layout/chevron2"/>
     <dgm:cxn modelId="{D0C7DC9A-1036-4799-8F1C-D5AFD8EADC3A}" type="presParOf" srcId="{4D173509-0DAC-46F1-A2DE-BE8E477EC926}" destId="{FAD15BB6-E774-456B-913A-D03FFD50F88D}" srcOrd="0" destOrd="0" presId="urn:microsoft.com/office/officeart/2005/8/layout/chevron2"/>
     <dgm:cxn modelId="{22680173-7BE4-4375-8C73-FCD735AB3F1E}" type="presParOf" srcId="{4D173509-0DAC-46F1-A2DE-BE8E477EC926}" destId="{6EFE7AB5-0941-4CF7-B563-5474DF815C78}" srcOrd="1" destOrd="0" presId="urn:microsoft.com/office/officeart/2005/8/layout/chevron2"/>
@@ -7016,13 +6756,6 @@
         </dgm:presLayoutVars>
       </dgm:prSet>
       <dgm:spPr/>
-      <dgm:t>
-        <a:bodyPr/>
-        <a:lstStyle/>
-        <a:p>
-          <a:endParaRPr lang="zh-TW" altLang="en-US"/>
-        </a:p>
-      </dgm:t>
     </dgm:pt>
     <dgm:pt modelId="{4D173509-0DAC-46F1-A2DE-BE8E477EC926}" type="pres">
       <dgm:prSet presAssocID="{2C10E827-78B9-4CD0-9135-C649C8ABD480}" presName="composite" presStyleCnt="0"/>
@@ -7036,13 +6769,6 @@
         </dgm:presLayoutVars>
       </dgm:prSet>
       <dgm:spPr/>
-      <dgm:t>
-        <a:bodyPr/>
-        <a:lstStyle/>
-        <a:p>
-          <a:endParaRPr lang="zh-TW" altLang="en-US"/>
-        </a:p>
-      </dgm:t>
     </dgm:pt>
     <dgm:pt modelId="{6EFE7AB5-0941-4CF7-B563-5474DF815C78}" type="pres">
       <dgm:prSet presAssocID="{2C10E827-78B9-4CD0-9135-C649C8ABD480}" presName="descendantText" presStyleLbl="alignAcc1" presStyleIdx="0" presStyleCnt="3">
@@ -7051,13 +6777,6 @@
         </dgm:presLayoutVars>
       </dgm:prSet>
       <dgm:spPr/>
-      <dgm:t>
-        <a:bodyPr/>
-        <a:lstStyle/>
-        <a:p>
-          <a:endParaRPr lang="zh-TW" altLang="en-US"/>
-        </a:p>
-      </dgm:t>
     </dgm:pt>
     <dgm:pt modelId="{B65A2965-E936-485C-B625-A5B1F83D98B8}" type="pres">
       <dgm:prSet presAssocID="{C8152C64-7C20-4F35-9417-6DC5EBBB3B54}" presName="sp" presStyleCnt="0"/>
@@ -7075,13 +6794,6 @@
         </dgm:presLayoutVars>
       </dgm:prSet>
       <dgm:spPr/>
-      <dgm:t>
-        <a:bodyPr/>
-        <a:lstStyle/>
-        <a:p>
-          <a:endParaRPr lang="zh-TW" altLang="en-US"/>
-        </a:p>
-      </dgm:t>
     </dgm:pt>
     <dgm:pt modelId="{A9D70513-2C42-4FAE-94DD-459AB157F382}" type="pres">
       <dgm:prSet presAssocID="{2A1BFA2A-5C03-4E5F-983D-2BD4CA7F9BDA}" presName="descendantText" presStyleLbl="alignAcc1" presStyleIdx="1" presStyleCnt="3">
@@ -7090,13 +6802,6 @@
         </dgm:presLayoutVars>
       </dgm:prSet>
       <dgm:spPr/>
-      <dgm:t>
-        <a:bodyPr/>
-        <a:lstStyle/>
-        <a:p>
-          <a:endParaRPr lang="zh-TW" altLang="en-US"/>
-        </a:p>
-      </dgm:t>
     </dgm:pt>
     <dgm:pt modelId="{F614FE5E-8AAD-4DAE-821B-03E0DD954911}" type="pres">
       <dgm:prSet presAssocID="{1A6F7ECC-F4FF-4A75-AB26-6223F585E71E}" presName="sp" presStyleCnt="0"/>
@@ -7114,13 +6819,6 @@
         </dgm:presLayoutVars>
       </dgm:prSet>
       <dgm:spPr/>
-      <dgm:t>
-        <a:bodyPr/>
-        <a:lstStyle/>
-        <a:p>
-          <a:endParaRPr lang="zh-TW" altLang="en-US"/>
-        </a:p>
-      </dgm:t>
     </dgm:pt>
     <dgm:pt modelId="{F8313686-5249-4203-A1E3-82BD9AB7F03E}" type="pres">
       <dgm:prSet presAssocID="{9A17E133-4454-4A58-83BD-C0DB239A5918}" presName="descendantText" presStyleLbl="alignAcc1" presStyleIdx="2" presStyleCnt="3">
@@ -7129,29 +6827,22 @@
         </dgm:presLayoutVars>
       </dgm:prSet>
       <dgm:spPr/>
-      <dgm:t>
-        <a:bodyPr/>
-        <a:lstStyle/>
-        <a:p>
-          <a:endParaRPr lang="zh-TW" altLang="en-US"/>
-        </a:p>
-      </dgm:t>
     </dgm:pt>
   </dgm:ptLst>
   <dgm:cxnLst>
+    <dgm:cxn modelId="{3C3C7F01-216E-47FF-A875-492ABC671FB3}" srcId="{760D3DD5-4FF4-4CB9-9043-FEF900489766}" destId="{2A1BFA2A-5C03-4E5F-983D-2BD4CA7F9BDA}" srcOrd="1" destOrd="0" parTransId="{99407E7A-5918-46F4-AA66-3C96CE0D2086}" sibTransId="{1A6F7ECC-F4FF-4A75-AB26-6223F585E71E}"/>
+    <dgm:cxn modelId="{BC902B0A-3AF4-48C1-823C-D2C72394679C}" type="presOf" srcId="{2A1BFA2A-5C03-4E5F-983D-2BD4CA7F9BDA}" destId="{116AA287-C9C7-4ABA-AD92-9ED685872512}" srcOrd="0" destOrd="0" presId="urn:microsoft.com/office/officeart/2005/8/layout/chevron2"/>
+    <dgm:cxn modelId="{625C6614-5095-45EE-9926-19FAD7BC1835}" type="presOf" srcId="{9A17E133-4454-4A58-83BD-C0DB239A5918}" destId="{AF898CE2-AE28-4243-89F6-C146EF02B541}" srcOrd="0" destOrd="0" presId="urn:microsoft.com/office/officeart/2005/8/layout/chevron2"/>
     <dgm:cxn modelId="{D5D3926E-95DE-4013-829E-AD5862666CBC}" type="presOf" srcId="{2C10E827-78B9-4CD0-9135-C649C8ABD480}" destId="{FAD15BB6-E774-456B-913A-D03FFD50F88D}" srcOrd="0" destOrd="0" presId="urn:microsoft.com/office/officeart/2005/8/layout/chevron2"/>
+    <dgm:cxn modelId="{911EE884-4AC2-4C63-A15D-8EAF022663B2}" type="presOf" srcId="{F0D36D75-CE48-4990-9B09-C82EF57F00B6}" destId="{F8313686-5249-4203-A1E3-82BD9AB7F03E}" srcOrd="0" destOrd="0" presId="urn:microsoft.com/office/officeart/2005/8/layout/chevron2"/>
+    <dgm:cxn modelId="{F1422C8E-D90A-450E-956A-20E6F28B2310}" type="presOf" srcId="{384090E4-912C-426D-9A37-136CFA55A092}" destId="{6EFE7AB5-0941-4CF7-B563-5474DF815C78}" srcOrd="0" destOrd="0" presId="urn:microsoft.com/office/officeart/2005/8/layout/chevron2"/>
+    <dgm:cxn modelId="{1EA9BF94-70A6-4937-9215-5D651C8ABD5C}" srcId="{9A17E133-4454-4A58-83BD-C0DB239A5918}" destId="{F0D36D75-CE48-4990-9B09-C82EF57F00B6}" srcOrd="0" destOrd="0" parTransId="{3994C285-D6DE-46EE-9CC3-D757142DB53C}" sibTransId="{911FE5AC-0C02-4296-A3F2-B92731DCDF0B}"/>
+    <dgm:cxn modelId="{930F27A9-3ED3-490C-9632-79A17FAD1969}" srcId="{760D3DD5-4FF4-4CB9-9043-FEF900489766}" destId="{9A17E133-4454-4A58-83BD-C0DB239A5918}" srcOrd="2" destOrd="0" parTransId="{689324D7-7DB9-4A42-8613-E684DB67F3DD}" sibTransId="{06362CFF-BDB7-4EFE-A7B1-40326E554C76}"/>
+    <dgm:cxn modelId="{6DCEBAB2-FFD5-46E3-9065-3AAC30BA7C48}" srcId="{2A1BFA2A-5C03-4E5F-983D-2BD4CA7F9BDA}" destId="{A6D9C0F0-43FD-4B68-B921-48BFD0F7816A}" srcOrd="0" destOrd="0" parTransId="{DE5220DE-B613-422A-B82A-FCBA9C21A552}" sibTransId="{23B5D9A6-7B96-42C6-9D06-D2C5C7E5F735}"/>
+    <dgm:cxn modelId="{D26A3FB6-4F83-486C-84C6-6C6F1F949761}" srcId="{2C10E827-78B9-4CD0-9135-C649C8ABD480}" destId="{384090E4-912C-426D-9A37-136CFA55A092}" srcOrd="0" destOrd="0" parTransId="{1EB3CEAC-62C4-4FA6-AC60-9DA9D7E5BAA2}" sibTransId="{C7BE88AB-20C7-4C5A-A8D7-36AE018DC915}"/>
+    <dgm:cxn modelId="{D6E0CCC8-0B1E-4C06-BBA3-7A3FCF6649D6}" type="presOf" srcId="{760D3DD5-4FF4-4CB9-9043-FEF900489766}" destId="{435F2F68-9B69-410F-8DAE-32309F80F7BA}" srcOrd="0" destOrd="0" presId="urn:microsoft.com/office/officeart/2005/8/layout/chevron2"/>
     <dgm:cxn modelId="{BA6C3ECC-55BE-4BF0-9270-D6263ABA81D5}" type="presOf" srcId="{A6D9C0F0-43FD-4B68-B921-48BFD0F7816A}" destId="{A9D70513-2C42-4FAE-94DD-459AB157F382}" srcOrd="0" destOrd="0" presId="urn:microsoft.com/office/officeart/2005/8/layout/chevron2"/>
-    <dgm:cxn modelId="{1EA9BF94-70A6-4937-9215-5D651C8ABD5C}" srcId="{9A17E133-4454-4A58-83BD-C0DB239A5918}" destId="{F0D36D75-CE48-4990-9B09-C82EF57F00B6}" srcOrd="0" destOrd="0" parTransId="{3994C285-D6DE-46EE-9CC3-D757142DB53C}" sibTransId="{911FE5AC-0C02-4296-A3F2-B92731DCDF0B}"/>
-    <dgm:cxn modelId="{BC902B0A-3AF4-48C1-823C-D2C72394679C}" type="presOf" srcId="{2A1BFA2A-5C03-4E5F-983D-2BD4CA7F9BDA}" destId="{116AA287-C9C7-4ABA-AD92-9ED685872512}" srcOrd="0" destOrd="0" presId="urn:microsoft.com/office/officeart/2005/8/layout/chevron2"/>
-    <dgm:cxn modelId="{F1422C8E-D90A-450E-956A-20E6F28B2310}" type="presOf" srcId="{384090E4-912C-426D-9A37-136CFA55A092}" destId="{6EFE7AB5-0941-4CF7-B563-5474DF815C78}" srcOrd="0" destOrd="0" presId="urn:microsoft.com/office/officeart/2005/8/layout/chevron2"/>
-    <dgm:cxn modelId="{D26A3FB6-4F83-486C-84C6-6C6F1F949761}" srcId="{2C10E827-78B9-4CD0-9135-C649C8ABD480}" destId="{384090E4-912C-426D-9A37-136CFA55A092}" srcOrd="0" destOrd="0" parTransId="{1EB3CEAC-62C4-4FA6-AC60-9DA9D7E5BAA2}" sibTransId="{C7BE88AB-20C7-4C5A-A8D7-36AE018DC915}"/>
     <dgm:cxn modelId="{648A79E8-6EBD-4732-A6AF-B2C284FEFE83}" srcId="{760D3DD5-4FF4-4CB9-9043-FEF900489766}" destId="{2C10E827-78B9-4CD0-9135-C649C8ABD480}" srcOrd="0" destOrd="0" parTransId="{EA638C33-1065-42CF-B1B9-B98C81104479}" sibTransId="{C8152C64-7C20-4F35-9417-6DC5EBBB3B54}"/>
-    <dgm:cxn modelId="{6DCEBAB2-FFD5-46E3-9065-3AAC30BA7C48}" srcId="{2A1BFA2A-5C03-4E5F-983D-2BD4CA7F9BDA}" destId="{A6D9C0F0-43FD-4B68-B921-48BFD0F7816A}" srcOrd="0" destOrd="0" parTransId="{DE5220DE-B613-422A-B82A-FCBA9C21A552}" sibTransId="{23B5D9A6-7B96-42C6-9D06-D2C5C7E5F735}"/>
-    <dgm:cxn modelId="{911EE884-4AC2-4C63-A15D-8EAF022663B2}" type="presOf" srcId="{F0D36D75-CE48-4990-9B09-C82EF57F00B6}" destId="{F8313686-5249-4203-A1E3-82BD9AB7F03E}" srcOrd="0" destOrd="0" presId="urn:microsoft.com/office/officeart/2005/8/layout/chevron2"/>
-    <dgm:cxn modelId="{930F27A9-3ED3-490C-9632-79A17FAD1969}" srcId="{760D3DD5-4FF4-4CB9-9043-FEF900489766}" destId="{9A17E133-4454-4A58-83BD-C0DB239A5918}" srcOrd="2" destOrd="0" parTransId="{689324D7-7DB9-4A42-8613-E684DB67F3DD}" sibTransId="{06362CFF-BDB7-4EFE-A7B1-40326E554C76}"/>
-    <dgm:cxn modelId="{625C6614-5095-45EE-9926-19FAD7BC1835}" type="presOf" srcId="{9A17E133-4454-4A58-83BD-C0DB239A5918}" destId="{AF898CE2-AE28-4243-89F6-C146EF02B541}" srcOrd="0" destOrd="0" presId="urn:microsoft.com/office/officeart/2005/8/layout/chevron2"/>
-    <dgm:cxn modelId="{3C3C7F01-216E-47FF-A875-492ABC671FB3}" srcId="{760D3DD5-4FF4-4CB9-9043-FEF900489766}" destId="{2A1BFA2A-5C03-4E5F-983D-2BD4CA7F9BDA}" srcOrd="1" destOrd="0" parTransId="{99407E7A-5918-46F4-AA66-3C96CE0D2086}" sibTransId="{1A6F7ECC-F4FF-4A75-AB26-6223F585E71E}"/>
-    <dgm:cxn modelId="{D6E0CCC8-0B1E-4C06-BBA3-7A3FCF6649D6}" type="presOf" srcId="{760D3DD5-4FF4-4CB9-9043-FEF900489766}" destId="{435F2F68-9B69-410F-8DAE-32309F80F7BA}" srcOrd="0" destOrd="0" presId="urn:microsoft.com/office/officeart/2005/8/layout/chevron2"/>
     <dgm:cxn modelId="{66E64EB6-E713-4407-B5EA-FE292E3E3B69}" type="presParOf" srcId="{435F2F68-9B69-410F-8DAE-32309F80F7BA}" destId="{4D173509-0DAC-46F1-A2DE-BE8E477EC926}" srcOrd="0" destOrd="0" presId="urn:microsoft.com/office/officeart/2005/8/layout/chevron2"/>
     <dgm:cxn modelId="{2D8668AA-7CD9-4E18-A192-A4386C38EEB6}" type="presParOf" srcId="{4D173509-0DAC-46F1-A2DE-BE8E477EC926}" destId="{FAD15BB6-E774-456B-913A-D03FFD50F88D}" srcOrd="0" destOrd="0" presId="urn:microsoft.com/office/officeart/2005/8/layout/chevron2"/>
     <dgm:cxn modelId="{D21229E4-0AFC-4AEC-A9AC-3651140874B5}" type="presParOf" srcId="{4D173509-0DAC-46F1-A2DE-BE8E477EC926}" destId="{6EFE7AB5-0941-4CF7-B563-5474DF815C78}" srcOrd="1" destOrd="0" presId="urn:microsoft.com/office/officeart/2005/8/layout/chevron2"/>
@@ -7235,7 +6926,7 @@
         </a:bodyPr>
         <a:lstStyle/>
         <a:p>
-          <a:pPr lvl="0" algn="ctr" defTabSz="1066800" rtl="0">
+          <a:pPr marL="0" lvl="0" indent="0" algn="ctr" defTabSz="1066800" rtl="0">
             <a:lnSpc>
               <a:spcPct val="0"/>
             </a:lnSpc>
@@ -7245,6 +6936,7 @@
             <a:spcAft>
               <a:spcPct val="35000"/>
             </a:spcAft>
+            <a:buNone/>
           </a:pPr>
           <a:r>
             <a:rPr lang="zh-TW" sz="2400" b="1" kern="1200" dirty="0">
@@ -7363,7 +7055,7 @@
         </a:bodyPr>
         <a:lstStyle/>
         <a:p>
-          <a:pPr lvl="0" algn="ctr" defTabSz="889000" rtl="0">
+          <a:pPr marL="0" lvl="0" indent="0" algn="ctr" defTabSz="889000" rtl="0">
             <a:lnSpc>
               <a:spcPct val="90000"/>
             </a:lnSpc>
@@ -7373,6 +7065,7 @@
             <a:spcAft>
               <a:spcPct val="35000"/>
             </a:spcAft>
+            <a:buNone/>
           </a:pPr>
           <a:r>
             <a:rPr lang="zh-TW" altLang="en-US" sz="2000" b="1" kern="1200" dirty="0">
@@ -7441,7 +7134,7 @@
         </a:bodyPr>
         <a:lstStyle/>
         <a:p>
-          <a:pPr lvl="0" algn="ctr" defTabSz="1066800" rtl="0">
+          <a:pPr marL="0" lvl="0" indent="0" algn="ctr" defTabSz="1066800" rtl="0">
             <a:lnSpc>
               <a:spcPct val="0"/>
             </a:lnSpc>
@@ -7451,6 +7144,7 @@
             <a:spcAft>
               <a:spcPct val="35000"/>
             </a:spcAft>
+            <a:buNone/>
           </a:pPr>
           <a:r>
             <a:rPr lang="zh-TW" sz="2400" b="1" kern="1200" dirty="0">
@@ -7569,7 +7263,7 @@
         </a:bodyPr>
         <a:lstStyle/>
         <a:p>
-          <a:pPr lvl="0" algn="ctr" defTabSz="755650" rtl="0">
+          <a:pPr marL="0" lvl="0" indent="0" algn="ctr" defTabSz="755650" rtl="0">
             <a:lnSpc>
               <a:spcPct val="90000"/>
             </a:lnSpc>
@@ -7579,6 +7273,7 @@
             <a:spcAft>
               <a:spcPct val="35000"/>
             </a:spcAft>
+            <a:buNone/>
           </a:pPr>
           <a:r>
             <a:rPr lang="zh-TW" altLang="en-US" sz="1700" b="1" kern="1200" dirty="0">
@@ -7647,7 +7342,7 @@
         </a:bodyPr>
         <a:lstStyle/>
         <a:p>
-          <a:pPr lvl="0" algn="ctr" defTabSz="1066800" rtl="0">
+          <a:pPr marL="0" lvl="0" indent="0" algn="ctr" defTabSz="1066800" rtl="0">
             <a:lnSpc>
               <a:spcPct val="0"/>
             </a:lnSpc>
@@ -7657,6 +7352,7 @@
             <a:spcAft>
               <a:spcPct val="35000"/>
             </a:spcAft>
+            <a:buNone/>
           </a:pPr>
           <a:r>
             <a:rPr lang="zh-TW" sz="2400" b="1" kern="1200" dirty="0">
@@ -7775,7 +7471,7 @@
         </a:bodyPr>
         <a:lstStyle/>
         <a:p>
-          <a:pPr lvl="0" algn="ctr" defTabSz="889000" rtl="0">
+          <a:pPr marL="0" lvl="0" indent="0" algn="ctr" defTabSz="889000" rtl="0">
             <a:lnSpc>
               <a:spcPct val="90000"/>
             </a:lnSpc>
@@ -7785,6 +7481,7 @@
             <a:spcAft>
               <a:spcPct val="35000"/>
             </a:spcAft>
+            <a:buNone/>
           </a:pPr>
           <a:r>
             <a:rPr lang="zh-TW" sz="2000" b="1" kern="1200" dirty="0">
@@ -7914,7 +7611,7 @@
         </a:bodyPr>
         <a:lstStyle/>
         <a:p>
-          <a:pPr lvl="0" algn="ctr" defTabSz="1155700" rtl="0">
+          <a:pPr marL="0" lvl="0" indent="0" algn="ctr" defTabSz="1155700" rtl="0">
             <a:lnSpc>
               <a:spcPct val="10000"/>
             </a:lnSpc>
@@ -7924,6 +7621,7 @@
             <a:spcAft>
               <a:spcPts val="10"/>
             </a:spcAft>
+            <a:buNone/>
           </a:pPr>
           <a:r>
             <a:rPr lang="zh-TW" sz="2600" b="1" kern="1200" dirty="0">
@@ -8040,7 +7738,7 @@
         </a:bodyPr>
         <a:lstStyle/>
         <a:p>
-          <a:pPr lvl="0" algn="ctr" defTabSz="800100" rtl="0">
+          <a:pPr marL="0" lvl="0" indent="0" algn="ctr" defTabSz="800100" rtl="0">
             <a:lnSpc>
               <a:spcPct val="90000"/>
             </a:lnSpc>
@@ -8050,6 +7748,7 @@
             <a:spcAft>
               <a:spcPct val="35000"/>
             </a:spcAft>
+            <a:buNone/>
           </a:pPr>
           <a:r>
             <a:rPr lang="zh-TW" altLang="en-US" sz="1800" b="1" kern="1200" dirty="0">
@@ -8153,7 +7852,7 @@
         </a:bodyPr>
         <a:lstStyle/>
         <a:p>
-          <a:pPr lvl="0" algn="ctr" defTabSz="1155700" rtl="0">
+          <a:pPr marL="0" lvl="0" indent="0" algn="ctr" defTabSz="1155700" rtl="0">
             <a:lnSpc>
               <a:spcPct val="10000"/>
             </a:lnSpc>
@@ -8163,6 +7862,7 @@
             <a:spcAft>
               <a:spcPts val="10"/>
             </a:spcAft>
+            <a:buNone/>
           </a:pPr>
           <a:r>
             <a:rPr lang="zh-TW" sz="2600" b="1" kern="1200" dirty="0">
@@ -8208,9 +7908,9 @@
           <a:gsLst>
             <a:gs pos="0">
               <a:schemeClr val="accent4">
-                <a:hueOff val="-2232385"/>
-                <a:satOff val="13449"/>
-                <a:lumOff val="1078"/>
+                <a:hueOff val="179936"/>
+                <a:satOff val="8690"/>
+                <a:lumOff val="4901"/>
                 <a:alphaOff val="0"/>
                 <a:shade val="51000"/>
                 <a:satMod val="130000"/>
@@ -8218,9 +7918,9 @@
             </a:gs>
             <a:gs pos="80000">
               <a:schemeClr val="accent4">
-                <a:hueOff val="-2232385"/>
-                <a:satOff val="13449"/>
-                <a:lumOff val="1078"/>
+                <a:hueOff val="179936"/>
+                <a:satOff val="8690"/>
+                <a:lumOff val="4901"/>
                 <a:alphaOff val="0"/>
                 <a:shade val="93000"/>
                 <a:satMod val="130000"/>
@@ -8228,9 +7928,9 @@
             </a:gs>
             <a:gs pos="100000">
               <a:schemeClr val="accent4">
-                <a:hueOff val="-2232385"/>
-                <a:satOff val="13449"/>
-                <a:lumOff val="1078"/>
+                <a:hueOff val="179936"/>
+                <a:satOff val="8690"/>
+                <a:lumOff val="4901"/>
                 <a:alphaOff val="0"/>
                 <a:shade val="94000"/>
                 <a:satMod val="135000"/>
@@ -8279,7 +7979,7 @@
         </a:bodyPr>
         <a:lstStyle/>
         <a:p>
-          <a:pPr lvl="0" algn="ctr" defTabSz="711200" rtl="0">
+          <a:pPr marL="0" lvl="0" indent="0" algn="ctr" defTabSz="711200" rtl="0">
             <a:lnSpc>
               <a:spcPct val="90000"/>
             </a:lnSpc>
@@ -8289,6 +7989,7 @@
             <a:spcAft>
               <a:spcPct val="35000"/>
             </a:spcAft>
+            <a:buNone/>
           </a:pPr>
           <a:r>
             <a:rPr lang="zh-TW" altLang="en-US" sz="1600" b="1" kern="1200" dirty="0">
@@ -8392,7 +8093,7 @@
         </a:bodyPr>
         <a:lstStyle/>
         <a:p>
-          <a:pPr lvl="0" algn="ctr" defTabSz="1155700" rtl="0">
+          <a:pPr marL="0" lvl="0" indent="0" algn="ctr" defTabSz="1155700" rtl="0">
             <a:lnSpc>
               <a:spcPct val="10000"/>
             </a:lnSpc>
@@ -8402,6 +8103,7 @@
             <a:spcAft>
               <a:spcPts val="10"/>
             </a:spcAft>
+            <a:buNone/>
           </a:pPr>
           <a:r>
             <a:rPr lang="zh-TW" sz="2600" b="1" kern="1200" dirty="0">
@@ -8447,9 +8149,9 @@
           <a:gsLst>
             <a:gs pos="0">
               <a:schemeClr val="accent4">
-                <a:hueOff val="-4464770"/>
-                <a:satOff val="26899"/>
-                <a:lumOff val="2156"/>
+                <a:hueOff val="359873"/>
+                <a:satOff val="17380"/>
+                <a:lumOff val="9803"/>
                 <a:alphaOff val="0"/>
                 <a:shade val="51000"/>
                 <a:satMod val="130000"/>
@@ -8457,9 +8159,9 @@
             </a:gs>
             <a:gs pos="80000">
               <a:schemeClr val="accent4">
-                <a:hueOff val="-4464770"/>
-                <a:satOff val="26899"/>
-                <a:lumOff val="2156"/>
+                <a:hueOff val="359873"/>
+                <a:satOff val="17380"/>
+                <a:lumOff val="9803"/>
                 <a:alphaOff val="0"/>
                 <a:shade val="93000"/>
                 <a:satMod val="130000"/>
@@ -8467,9 +8169,9 @@
             </a:gs>
             <a:gs pos="100000">
               <a:schemeClr val="accent4">
-                <a:hueOff val="-4464770"/>
-                <a:satOff val="26899"/>
-                <a:lumOff val="2156"/>
+                <a:hueOff val="359873"/>
+                <a:satOff val="17380"/>
+                <a:lumOff val="9803"/>
                 <a:alphaOff val="0"/>
                 <a:shade val="94000"/>
                 <a:satMod val="135000"/>
@@ -8518,7 +8220,7 @@
         </a:bodyPr>
         <a:lstStyle/>
         <a:p>
-          <a:pPr lvl="0" algn="ctr" defTabSz="800100" rtl="0">
+          <a:pPr marL="0" lvl="0" indent="0" algn="ctr" defTabSz="800100" rtl="0">
             <a:lnSpc>
               <a:spcPct val="90000"/>
             </a:lnSpc>
@@ -8528,6 +8230,7 @@
             <a:spcAft>
               <a:spcPct val="35000"/>
             </a:spcAft>
+            <a:buNone/>
           </a:pPr>
           <a:r>
             <a:rPr lang="zh-TW" altLang="en-US" sz="1800" b="1" kern="1200" dirty="0">
@@ -8573,6 +8276,615 @@
       <dsp:cNvGrpSpPr/>
     </dsp:nvGrpSpPr>
     <dsp:grpSpPr/>
+    <dsp:sp modelId="{1D8745EB-B71C-4DB0-8EF9-16A687DDE7F1}">
+      <dsp:nvSpPr>
+        <dsp:cNvPr id="0" name=""/>
+        <dsp:cNvSpPr/>
+      </dsp:nvSpPr>
+      <dsp:spPr>
+        <a:xfrm>
+          <a:off x="1063" y="0"/>
+          <a:ext cx="2217858" cy="2925325"/>
+        </a:xfrm>
+        <a:prstGeom prst="roundRect">
+          <a:avLst>
+            <a:gd name="adj" fmla="val 10000"/>
+          </a:avLst>
+        </a:prstGeom>
+        <a:solidFill>
+          <a:schemeClr val="accent3">
+            <a:tint val="40000"/>
+            <a:hueOff val="0"/>
+            <a:satOff val="0"/>
+            <a:lumOff val="0"/>
+            <a:alphaOff val="0"/>
+          </a:schemeClr>
+        </a:solidFill>
+        <a:ln>
+          <a:noFill/>
+        </a:ln>
+        <a:effectLst>
+          <a:outerShdw blurRad="40000" dist="23000" dir="5400000" rotWithShape="0">
+            <a:srgbClr val="000000">
+              <a:alpha val="35000"/>
+            </a:srgbClr>
+          </a:outerShdw>
+        </a:effectLst>
+      </dsp:spPr>
+      <dsp:style>
+        <a:lnRef idx="0">
+          <a:scrgbClr r="0" g="0" b="0"/>
+        </a:lnRef>
+        <a:fillRef idx="1">
+          <a:scrgbClr r="0" g="0" b="0"/>
+        </a:fillRef>
+        <a:effectRef idx="2">
+          <a:scrgbClr r="0" g="0" b="0"/>
+        </a:effectRef>
+        <a:fontRef idx="minor"/>
+      </dsp:style>
+      <dsp:txBody>
+        <a:bodyPr spcFirstLastPara="0" vert="horz" wrap="square" lIns="99060" tIns="99060" rIns="99060" bIns="99060" numCol="1" spcCol="1270" anchor="ctr" anchorCtr="0">
+          <a:noAutofit/>
+        </a:bodyPr>
+        <a:lstStyle/>
+        <a:p>
+          <a:pPr marL="0" lvl="0" indent="0" algn="ctr" defTabSz="1155700" rtl="0">
+            <a:lnSpc>
+              <a:spcPct val="40000"/>
+            </a:lnSpc>
+            <a:spcBef>
+              <a:spcPct val="0"/>
+            </a:spcBef>
+            <a:spcAft>
+              <a:spcPts val="0"/>
+            </a:spcAft>
+            <a:buNone/>
+          </a:pPr>
+          <a:r>
+            <a:rPr lang="zh-TW" sz="2600" b="1" kern="1200" dirty="0">
+              <a:latin typeface="微軟正黑體" panose="020B0604030504040204" pitchFamily="34" charset="-120"/>
+              <a:ea typeface="微軟正黑體" panose="020B0604030504040204" pitchFamily="34" charset="-120"/>
+            </a:rPr>
+            <a:t>步驟 </a:t>
+          </a:r>
+          <a:r>
+            <a:rPr lang="en-US" sz="2600" b="1" kern="1200" dirty="0">
+              <a:latin typeface="微軟正黑體" panose="020B0604030504040204" pitchFamily="34" charset="-120"/>
+              <a:ea typeface="微軟正黑體" panose="020B0604030504040204" pitchFamily="34" charset="-120"/>
+            </a:rPr>
+            <a:t>1 </a:t>
+          </a:r>
+          <a:endParaRPr lang="zh-TW" sz="2600" b="1" kern="1200" dirty="0">
+            <a:latin typeface="微軟正黑體" panose="020B0604030504040204" pitchFamily="34" charset="-120"/>
+            <a:ea typeface="微軟正黑體" panose="020B0604030504040204" pitchFamily="34" charset="-120"/>
+          </a:endParaRPr>
+        </a:p>
+      </dsp:txBody>
+      <dsp:txXfrm>
+        <a:off x="1063" y="0"/>
+        <a:ext cx="2217858" cy="877597"/>
+      </dsp:txXfrm>
+    </dsp:sp>
+    <dsp:sp modelId="{CA6EE8DB-B66B-4A06-B89B-27E4D981F042}">
+      <dsp:nvSpPr>
+        <dsp:cNvPr id="0" name=""/>
+        <dsp:cNvSpPr/>
+      </dsp:nvSpPr>
+      <dsp:spPr>
+        <a:xfrm>
+          <a:off x="222849" y="716916"/>
+          <a:ext cx="1774286" cy="1901345"/>
+        </a:xfrm>
+        <a:prstGeom prst="roundRect">
+          <a:avLst>
+            <a:gd name="adj" fmla="val 10000"/>
+          </a:avLst>
+        </a:prstGeom>
+        <a:gradFill rotWithShape="0">
+          <a:gsLst>
+            <a:gs pos="0">
+              <a:schemeClr val="accent3">
+                <a:hueOff val="0"/>
+                <a:satOff val="0"/>
+                <a:lumOff val="0"/>
+                <a:alphaOff val="0"/>
+                <a:shade val="51000"/>
+                <a:satMod val="130000"/>
+              </a:schemeClr>
+            </a:gs>
+            <a:gs pos="80000">
+              <a:schemeClr val="accent3">
+                <a:hueOff val="0"/>
+                <a:satOff val="0"/>
+                <a:lumOff val="0"/>
+                <a:alphaOff val="0"/>
+                <a:shade val="93000"/>
+                <a:satMod val="130000"/>
+              </a:schemeClr>
+            </a:gs>
+            <a:gs pos="100000">
+              <a:schemeClr val="accent3">
+                <a:hueOff val="0"/>
+                <a:satOff val="0"/>
+                <a:lumOff val="0"/>
+                <a:alphaOff val="0"/>
+                <a:shade val="94000"/>
+                <a:satMod val="135000"/>
+              </a:schemeClr>
+            </a:gs>
+          </a:gsLst>
+          <a:lin ang="16200000" scaled="0"/>
+        </a:gradFill>
+        <a:ln>
+          <a:noFill/>
+        </a:ln>
+        <a:effectLst>
+          <a:outerShdw blurRad="40000" dist="23000" dir="5400000" rotWithShape="0">
+            <a:srgbClr val="000000">
+              <a:alpha val="35000"/>
+            </a:srgbClr>
+          </a:outerShdw>
+        </a:effectLst>
+      </dsp:spPr>
+      <dsp:style>
+        <a:lnRef idx="0">
+          <a:scrgbClr r="0" g="0" b="0"/>
+        </a:lnRef>
+        <a:fillRef idx="3">
+          <a:scrgbClr r="0" g="0" b="0"/>
+        </a:fillRef>
+        <a:effectRef idx="2">
+          <a:scrgbClr r="0" g="0" b="0"/>
+        </a:effectRef>
+        <a:fontRef idx="minor">
+          <a:schemeClr val="lt1"/>
+        </a:fontRef>
+      </dsp:style>
+      <dsp:txBody>
+        <a:bodyPr spcFirstLastPara="0" vert="horz" wrap="square" lIns="50800" tIns="38100" rIns="50800" bIns="38100" numCol="1" spcCol="1270" anchor="ctr" anchorCtr="0">
+          <a:noAutofit/>
+        </a:bodyPr>
+        <a:lstStyle/>
+        <a:p>
+          <a:pPr marL="0" lvl="0" indent="0" algn="ctr" defTabSz="889000" rtl="0">
+            <a:lnSpc>
+              <a:spcPct val="90000"/>
+            </a:lnSpc>
+            <a:spcBef>
+              <a:spcPct val="0"/>
+            </a:spcBef>
+            <a:spcAft>
+              <a:spcPct val="35000"/>
+            </a:spcAft>
+            <a:buNone/>
+          </a:pPr>
+          <a:r>
+            <a:rPr lang="zh-TW" altLang="en-US" sz="2000" b="1" kern="1200" dirty="0">
+              <a:latin typeface="微軟正黑體" panose="020B0604030504040204" pitchFamily="34" charset="-120"/>
+              <a:ea typeface="微軟正黑體" panose="020B0604030504040204" pitchFamily="34" charset="-120"/>
+            </a:rPr>
+            <a:t>一開始整個數列歸類為未排序</a:t>
+          </a:r>
+        </a:p>
+      </dsp:txBody>
+      <dsp:txXfrm>
+        <a:off x="274816" y="768883"/>
+        <a:ext cx="1670352" cy="1797411"/>
+      </dsp:txXfrm>
+    </dsp:sp>
+    <dsp:sp modelId="{5E114458-8C8E-4284-B586-71EABBA55558}">
+      <dsp:nvSpPr>
+        <dsp:cNvPr id="0" name=""/>
+        <dsp:cNvSpPr/>
+      </dsp:nvSpPr>
+      <dsp:spPr>
+        <a:xfrm>
+          <a:off x="2385262" y="0"/>
+          <a:ext cx="2520285" cy="2925325"/>
+        </a:xfrm>
+        <a:prstGeom prst="roundRect">
+          <a:avLst>
+            <a:gd name="adj" fmla="val 10000"/>
+          </a:avLst>
+        </a:prstGeom>
+        <a:solidFill>
+          <a:schemeClr val="accent3">
+            <a:tint val="40000"/>
+            <a:hueOff val="0"/>
+            <a:satOff val="0"/>
+            <a:lumOff val="0"/>
+            <a:alphaOff val="0"/>
+          </a:schemeClr>
+        </a:solidFill>
+        <a:ln>
+          <a:noFill/>
+        </a:ln>
+        <a:effectLst>
+          <a:outerShdw blurRad="40000" dist="23000" dir="5400000" rotWithShape="0">
+            <a:srgbClr val="000000">
+              <a:alpha val="35000"/>
+            </a:srgbClr>
+          </a:outerShdw>
+        </a:effectLst>
+      </dsp:spPr>
+      <dsp:style>
+        <a:lnRef idx="0">
+          <a:scrgbClr r="0" g="0" b="0"/>
+        </a:lnRef>
+        <a:fillRef idx="1">
+          <a:scrgbClr r="0" g="0" b="0"/>
+        </a:fillRef>
+        <a:effectRef idx="2">
+          <a:scrgbClr r="0" g="0" b="0"/>
+        </a:effectRef>
+        <a:fontRef idx="minor"/>
+      </dsp:style>
+      <dsp:txBody>
+        <a:bodyPr spcFirstLastPara="0" vert="horz" wrap="square" lIns="99060" tIns="99060" rIns="99060" bIns="99060" numCol="1" spcCol="1270" anchor="ctr" anchorCtr="0">
+          <a:noAutofit/>
+        </a:bodyPr>
+        <a:lstStyle/>
+        <a:p>
+          <a:pPr marL="0" lvl="0" indent="0" algn="ctr" defTabSz="1155700" rtl="0">
+            <a:lnSpc>
+              <a:spcPct val="40000"/>
+            </a:lnSpc>
+            <a:spcBef>
+              <a:spcPct val="0"/>
+            </a:spcBef>
+            <a:spcAft>
+              <a:spcPts val="0"/>
+            </a:spcAft>
+            <a:buNone/>
+          </a:pPr>
+          <a:r>
+            <a:rPr lang="zh-TW" sz="2600" b="1" kern="1200" dirty="0">
+              <a:latin typeface="微軟正黑體" panose="020B0604030504040204" pitchFamily="34" charset="-120"/>
+              <a:ea typeface="微軟正黑體" panose="020B0604030504040204" pitchFamily="34" charset="-120"/>
+            </a:rPr>
+            <a:t>步驟 </a:t>
+          </a:r>
+          <a:r>
+            <a:rPr lang="en-US" sz="2600" b="1" kern="1200" dirty="0">
+              <a:latin typeface="微軟正黑體" panose="020B0604030504040204" pitchFamily="34" charset="-120"/>
+              <a:ea typeface="微軟正黑體" panose="020B0604030504040204" pitchFamily="34" charset="-120"/>
+            </a:rPr>
+            <a:t>2</a:t>
+          </a:r>
+          <a:endParaRPr lang="zh-TW" sz="2600" b="1" kern="1200" dirty="0">
+            <a:latin typeface="微軟正黑體" panose="020B0604030504040204" pitchFamily="34" charset="-120"/>
+            <a:ea typeface="微軟正黑體" panose="020B0604030504040204" pitchFamily="34" charset="-120"/>
+          </a:endParaRPr>
+        </a:p>
+      </dsp:txBody>
+      <dsp:txXfrm>
+        <a:off x="2385262" y="0"/>
+        <a:ext cx="2520285" cy="877597"/>
+      </dsp:txXfrm>
+    </dsp:sp>
+    <dsp:sp modelId="{9C2201EC-D908-4DE5-9B38-BC12463CE5AC}">
+      <dsp:nvSpPr>
+        <dsp:cNvPr id="0" name=""/>
+        <dsp:cNvSpPr/>
+      </dsp:nvSpPr>
+      <dsp:spPr>
+        <a:xfrm>
+          <a:off x="2567011" y="752759"/>
+          <a:ext cx="2156787" cy="1900828"/>
+        </a:xfrm>
+        <a:prstGeom prst="roundRect">
+          <a:avLst>
+            <a:gd name="adj" fmla="val 10000"/>
+          </a:avLst>
+        </a:prstGeom>
+        <a:gradFill rotWithShape="0">
+          <a:gsLst>
+            <a:gs pos="0">
+              <a:schemeClr val="accent3">
+                <a:hueOff val="730060"/>
+                <a:satOff val="-13582"/>
+                <a:lumOff val="-4118"/>
+                <a:alphaOff val="0"/>
+                <a:shade val="51000"/>
+                <a:satMod val="130000"/>
+              </a:schemeClr>
+            </a:gs>
+            <a:gs pos="80000">
+              <a:schemeClr val="accent3">
+                <a:hueOff val="730060"/>
+                <a:satOff val="-13582"/>
+                <a:lumOff val="-4118"/>
+                <a:alphaOff val="0"/>
+                <a:shade val="93000"/>
+                <a:satMod val="130000"/>
+              </a:schemeClr>
+            </a:gs>
+            <a:gs pos="100000">
+              <a:schemeClr val="accent3">
+                <a:hueOff val="730060"/>
+                <a:satOff val="-13582"/>
+                <a:lumOff val="-4118"/>
+                <a:alphaOff val="0"/>
+                <a:shade val="94000"/>
+                <a:satMod val="135000"/>
+              </a:schemeClr>
+            </a:gs>
+          </a:gsLst>
+          <a:lin ang="16200000" scaled="0"/>
+        </a:gradFill>
+        <a:ln>
+          <a:noFill/>
+        </a:ln>
+        <a:effectLst>
+          <a:outerShdw blurRad="40000" dist="23000" dir="5400000" rotWithShape="0">
+            <a:srgbClr val="000000">
+              <a:alpha val="35000"/>
+            </a:srgbClr>
+          </a:outerShdw>
+        </a:effectLst>
+      </dsp:spPr>
+      <dsp:style>
+        <a:lnRef idx="0">
+          <a:scrgbClr r="0" g="0" b="0"/>
+        </a:lnRef>
+        <a:fillRef idx="3">
+          <a:scrgbClr r="0" g="0" b="0"/>
+        </a:fillRef>
+        <a:effectRef idx="2">
+          <a:scrgbClr r="0" g="0" b="0"/>
+        </a:effectRef>
+        <a:fontRef idx="minor">
+          <a:schemeClr val="lt1"/>
+        </a:fontRef>
+      </dsp:style>
+      <dsp:txBody>
+        <a:bodyPr spcFirstLastPara="0" vert="horz" wrap="square" lIns="35560" tIns="26670" rIns="35560" bIns="26670" numCol="1" spcCol="1270" anchor="ctr" anchorCtr="0">
+          <a:noAutofit/>
+        </a:bodyPr>
+        <a:lstStyle/>
+        <a:p>
+          <a:pPr marL="0" lvl="0" indent="0" algn="ctr" defTabSz="622300" rtl="0">
+            <a:lnSpc>
+              <a:spcPct val="90000"/>
+            </a:lnSpc>
+            <a:spcBef>
+              <a:spcPct val="0"/>
+            </a:spcBef>
+            <a:spcAft>
+              <a:spcPct val="35000"/>
+            </a:spcAft>
+            <a:buNone/>
+          </a:pPr>
+          <a:r>
+            <a:rPr lang="zh-TW" altLang="en-US" sz="1400" b="1" kern="1200" dirty="0">
+              <a:latin typeface="微軟正黑體" panose="020B0604030504040204" pitchFamily="34" charset="-120"/>
+              <a:ea typeface="微軟正黑體" panose="020B0604030504040204" pitchFamily="34" charset="-120"/>
+            </a:rPr>
+            <a:t>從未排序數列的最後一個數開始看起，如果後面的數比前面小，就往前推，在這過程中，最小的數會被推到未排序數列中的第一個位置，將該最小的數歸類到已排序的數列中</a:t>
+          </a:r>
+        </a:p>
+      </dsp:txBody>
+      <dsp:txXfrm>
+        <a:off x="2622684" y="808432"/>
+        <a:ext cx="2045441" cy="1789482"/>
+      </dsp:txXfrm>
+    </dsp:sp>
+    <dsp:sp modelId="{B108C075-E406-4E93-8FDC-07DA5A9D3F6C}">
+      <dsp:nvSpPr>
+        <dsp:cNvPr id="0" name=""/>
+        <dsp:cNvSpPr/>
+      </dsp:nvSpPr>
+      <dsp:spPr>
+        <a:xfrm>
+          <a:off x="5071887" y="0"/>
+          <a:ext cx="2217858" cy="2925325"/>
+        </a:xfrm>
+        <a:prstGeom prst="roundRect">
+          <a:avLst>
+            <a:gd name="adj" fmla="val 10000"/>
+          </a:avLst>
+        </a:prstGeom>
+        <a:solidFill>
+          <a:schemeClr val="accent3">
+            <a:tint val="40000"/>
+            <a:hueOff val="0"/>
+            <a:satOff val="0"/>
+            <a:lumOff val="0"/>
+            <a:alphaOff val="0"/>
+          </a:schemeClr>
+        </a:solidFill>
+        <a:ln>
+          <a:noFill/>
+        </a:ln>
+        <a:effectLst>
+          <a:outerShdw blurRad="40000" dist="23000" dir="5400000" rotWithShape="0">
+            <a:srgbClr val="000000">
+              <a:alpha val="35000"/>
+            </a:srgbClr>
+          </a:outerShdw>
+        </a:effectLst>
+      </dsp:spPr>
+      <dsp:style>
+        <a:lnRef idx="0">
+          <a:scrgbClr r="0" g="0" b="0"/>
+        </a:lnRef>
+        <a:fillRef idx="1">
+          <a:scrgbClr r="0" g="0" b="0"/>
+        </a:fillRef>
+        <a:effectRef idx="2">
+          <a:scrgbClr r="0" g="0" b="0"/>
+        </a:effectRef>
+        <a:fontRef idx="minor"/>
+      </dsp:style>
+      <dsp:txBody>
+        <a:bodyPr spcFirstLastPara="0" vert="horz" wrap="square" lIns="99060" tIns="99060" rIns="99060" bIns="99060" numCol="1" spcCol="1270" anchor="ctr" anchorCtr="0">
+          <a:noAutofit/>
+        </a:bodyPr>
+        <a:lstStyle/>
+        <a:p>
+          <a:pPr marL="0" lvl="0" indent="0" algn="ctr" defTabSz="1155700" rtl="0">
+            <a:lnSpc>
+              <a:spcPct val="40000"/>
+            </a:lnSpc>
+            <a:spcBef>
+              <a:spcPct val="0"/>
+            </a:spcBef>
+            <a:spcAft>
+              <a:spcPts val="0"/>
+            </a:spcAft>
+            <a:buNone/>
+          </a:pPr>
+          <a:r>
+            <a:rPr lang="zh-TW" sz="2600" b="1" kern="1200" dirty="0">
+              <a:latin typeface="微軟正黑體" panose="020B0604030504040204" pitchFamily="34" charset="-120"/>
+              <a:ea typeface="微軟正黑體" panose="020B0604030504040204" pitchFamily="34" charset="-120"/>
+            </a:rPr>
+            <a:t>步驟</a:t>
+          </a:r>
+          <a:r>
+            <a:rPr lang="en-US" sz="2600" b="1" kern="1200" dirty="0">
+              <a:latin typeface="微軟正黑體" panose="020B0604030504040204" pitchFamily="34" charset="-120"/>
+              <a:ea typeface="微軟正黑體" panose="020B0604030504040204" pitchFamily="34" charset="-120"/>
+            </a:rPr>
+            <a:t>3</a:t>
+          </a:r>
+          <a:endParaRPr lang="zh-TW" sz="2600" b="1" kern="1200" dirty="0">
+            <a:latin typeface="微軟正黑體" panose="020B0604030504040204" pitchFamily="34" charset="-120"/>
+            <a:ea typeface="微軟正黑體" panose="020B0604030504040204" pitchFamily="34" charset="-120"/>
+          </a:endParaRPr>
+        </a:p>
+      </dsp:txBody>
+      <dsp:txXfrm>
+        <a:off x="5071887" y="0"/>
+        <a:ext cx="2217858" cy="877597"/>
+      </dsp:txXfrm>
+    </dsp:sp>
+    <dsp:sp modelId="{468C3BB7-6DA6-4606-9772-679DB50AE176}">
+      <dsp:nvSpPr>
+        <dsp:cNvPr id="0" name=""/>
+        <dsp:cNvSpPr/>
+      </dsp:nvSpPr>
+      <dsp:spPr>
+        <a:xfrm>
+          <a:off x="5293673" y="761264"/>
+          <a:ext cx="1774286" cy="1901240"/>
+        </a:xfrm>
+        <a:prstGeom prst="roundRect">
+          <a:avLst>
+            <a:gd name="adj" fmla="val 10000"/>
+          </a:avLst>
+        </a:prstGeom>
+        <a:gradFill rotWithShape="0">
+          <a:gsLst>
+            <a:gs pos="0">
+              <a:schemeClr val="accent3">
+                <a:hueOff val="1460120"/>
+                <a:satOff val="-27164"/>
+                <a:lumOff val="-8235"/>
+                <a:alphaOff val="0"/>
+                <a:shade val="51000"/>
+                <a:satMod val="130000"/>
+              </a:schemeClr>
+            </a:gs>
+            <a:gs pos="80000">
+              <a:schemeClr val="accent3">
+                <a:hueOff val="1460120"/>
+                <a:satOff val="-27164"/>
+                <a:lumOff val="-8235"/>
+                <a:alphaOff val="0"/>
+                <a:shade val="93000"/>
+                <a:satMod val="130000"/>
+              </a:schemeClr>
+            </a:gs>
+            <a:gs pos="100000">
+              <a:schemeClr val="accent3">
+                <a:hueOff val="1460120"/>
+                <a:satOff val="-27164"/>
+                <a:lumOff val="-8235"/>
+                <a:alphaOff val="0"/>
+                <a:shade val="94000"/>
+                <a:satMod val="135000"/>
+              </a:schemeClr>
+            </a:gs>
+          </a:gsLst>
+          <a:lin ang="16200000" scaled="0"/>
+        </a:gradFill>
+        <a:ln>
+          <a:noFill/>
+        </a:ln>
+        <a:effectLst>
+          <a:outerShdw blurRad="40000" dist="23000" dir="5400000" rotWithShape="0">
+            <a:srgbClr val="000000">
+              <a:alpha val="35000"/>
+            </a:srgbClr>
+          </a:outerShdw>
+        </a:effectLst>
+      </dsp:spPr>
+      <dsp:style>
+        <a:lnRef idx="0">
+          <a:scrgbClr r="0" g="0" b="0"/>
+        </a:lnRef>
+        <a:fillRef idx="3">
+          <a:scrgbClr r="0" g="0" b="0"/>
+        </a:fillRef>
+        <a:effectRef idx="2">
+          <a:scrgbClr r="0" g="0" b="0"/>
+        </a:effectRef>
+        <a:fontRef idx="minor">
+          <a:schemeClr val="lt1"/>
+        </a:fontRef>
+      </dsp:style>
+      <dsp:txBody>
+        <a:bodyPr spcFirstLastPara="0" vert="horz" wrap="square" lIns="50800" tIns="38100" rIns="50800" bIns="38100" numCol="1" spcCol="1270" anchor="ctr" anchorCtr="0">
+          <a:noAutofit/>
+        </a:bodyPr>
+        <a:lstStyle/>
+        <a:p>
+          <a:pPr marL="0" lvl="0" indent="0" algn="ctr" defTabSz="889000" rtl="0">
+            <a:lnSpc>
+              <a:spcPct val="90000"/>
+            </a:lnSpc>
+            <a:spcBef>
+              <a:spcPct val="0"/>
+            </a:spcBef>
+            <a:spcAft>
+              <a:spcPct val="35000"/>
+            </a:spcAft>
+            <a:buNone/>
+          </a:pPr>
+          <a:r>
+            <a:rPr lang="zh-TW" altLang="en-US" sz="2000" b="1" kern="1200" dirty="0">
+              <a:latin typeface="微軟正黑體" panose="020B0604030504040204" pitchFamily="34" charset="-120"/>
+              <a:ea typeface="微軟正黑體" panose="020B0604030504040204" pitchFamily="34" charset="-120"/>
+            </a:rPr>
+            <a:t>重複步驟</a:t>
+          </a:r>
+          <a:r>
+            <a:rPr lang="en-US" altLang="zh-TW" sz="2000" b="1" kern="1200" dirty="0">
+              <a:latin typeface="微軟正黑體" panose="020B0604030504040204" pitchFamily="34" charset="-120"/>
+              <a:ea typeface="微軟正黑體" panose="020B0604030504040204" pitchFamily="34" charset="-120"/>
+            </a:rPr>
+            <a:t>2</a:t>
+          </a:r>
+          <a:r>
+            <a:rPr lang="zh-TW" altLang="en-US" sz="2000" b="1" kern="1200" dirty="0">
+              <a:latin typeface="微軟正黑體" panose="020B0604030504040204" pitchFamily="34" charset="-120"/>
+              <a:ea typeface="微軟正黑體" panose="020B0604030504040204" pitchFamily="34" charset="-120"/>
+            </a:rPr>
+            <a:t>，直到沒有往前推的動作為止</a:t>
+          </a:r>
+          <a:endParaRPr lang="zh-TW" sz="2000" b="1" kern="1200" dirty="0">
+            <a:latin typeface="微軟正黑體" panose="020B0604030504040204" pitchFamily="34" charset="-120"/>
+            <a:ea typeface="微軟正黑體" panose="020B0604030504040204" pitchFamily="34" charset="-120"/>
+          </a:endParaRPr>
+        </a:p>
+      </dsp:txBody>
+      <dsp:txXfrm>
+        <a:off x="5345640" y="813231"/>
+        <a:ext cx="1670352" cy="1797306"/>
+      </dsp:txXfrm>
+    </dsp:sp>
   </dsp:spTree>
 </dsp:drawing>
 </file>
@@ -8585,6 +8897,708 @@
       <dsp:cNvGrpSpPr/>
     </dsp:nvGrpSpPr>
     <dsp:grpSpPr/>
+    <dsp:sp modelId="{FAD15BB6-E774-456B-913A-D03FFD50F88D}">
+      <dsp:nvSpPr>
+        <dsp:cNvPr id="0" name=""/>
+        <dsp:cNvSpPr/>
+      </dsp:nvSpPr>
+      <dsp:spPr>
+        <a:xfrm rot="5400000">
+          <a:off x="-105286" y="106721"/>
+          <a:ext cx="701912" cy="491338"/>
+        </a:xfrm>
+        <a:prstGeom prst="chevron">
+          <a:avLst/>
+        </a:prstGeom>
+        <a:gradFill rotWithShape="0">
+          <a:gsLst>
+            <a:gs pos="0">
+              <a:schemeClr val="accent4">
+                <a:hueOff val="0"/>
+                <a:satOff val="0"/>
+                <a:lumOff val="0"/>
+                <a:alphaOff val="0"/>
+                <a:shade val="51000"/>
+                <a:satMod val="130000"/>
+              </a:schemeClr>
+            </a:gs>
+            <a:gs pos="80000">
+              <a:schemeClr val="accent4">
+                <a:hueOff val="0"/>
+                <a:satOff val="0"/>
+                <a:lumOff val="0"/>
+                <a:alphaOff val="0"/>
+                <a:shade val="93000"/>
+                <a:satMod val="130000"/>
+              </a:schemeClr>
+            </a:gs>
+            <a:gs pos="100000">
+              <a:schemeClr val="accent4">
+                <a:hueOff val="0"/>
+                <a:satOff val="0"/>
+                <a:lumOff val="0"/>
+                <a:alphaOff val="0"/>
+                <a:shade val="94000"/>
+                <a:satMod val="135000"/>
+              </a:schemeClr>
+            </a:gs>
+          </a:gsLst>
+          <a:lin ang="16200000" scaled="0"/>
+        </a:gradFill>
+        <a:ln w="9525" cap="flat" cmpd="sng" algn="ctr">
+          <a:solidFill>
+            <a:schemeClr val="accent4">
+              <a:hueOff val="0"/>
+              <a:satOff val="0"/>
+              <a:lumOff val="0"/>
+              <a:alphaOff val="0"/>
+            </a:schemeClr>
+          </a:solidFill>
+          <a:prstDash val="solid"/>
+        </a:ln>
+        <a:effectLst>
+          <a:outerShdw blurRad="40000" dist="23000" dir="5400000" rotWithShape="0">
+            <a:srgbClr val="000000">
+              <a:alpha val="35000"/>
+            </a:srgbClr>
+          </a:outerShdw>
+        </a:effectLst>
+        <a:scene3d>
+          <a:camera prst="orthographicFront">
+            <a:rot lat="0" lon="0" rev="0"/>
+          </a:camera>
+          <a:lightRig rig="threePt" dir="t">
+            <a:rot lat="0" lon="0" rev="1200000"/>
+          </a:lightRig>
+        </a:scene3d>
+        <a:sp3d>
+          <a:bevelT w="63500" h="25400"/>
+        </a:sp3d>
+      </dsp:spPr>
+      <dsp:style>
+        <a:lnRef idx="1">
+          <a:scrgbClr r="0" g="0" b="0"/>
+        </a:lnRef>
+        <a:fillRef idx="3">
+          <a:scrgbClr r="0" g="0" b="0"/>
+        </a:fillRef>
+        <a:effectRef idx="3">
+          <a:scrgbClr r="0" g="0" b="0"/>
+        </a:effectRef>
+        <a:fontRef idx="minor">
+          <a:schemeClr val="lt1"/>
+        </a:fontRef>
+      </dsp:style>
+      <dsp:txBody>
+        <a:bodyPr spcFirstLastPara="0" vert="horz" wrap="square" lIns="12700" tIns="12700" rIns="12700" bIns="12700" numCol="1" spcCol="1270" anchor="ctr" anchorCtr="0">
+          <a:noAutofit/>
+        </a:bodyPr>
+        <a:lstStyle/>
+        <a:p>
+          <a:pPr marL="0" lvl="0" indent="0" algn="ctr" defTabSz="889000" rtl="0">
+            <a:lnSpc>
+              <a:spcPct val="90000"/>
+            </a:lnSpc>
+            <a:spcBef>
+              <a:spcPct val="0"/>
+            </a:spcBef>
+            <a:spcAft>
+              <a:spcPct val="35000"/>
+            </a:spcAft>
+            <a:buNone/>
+          </a:pPr>
+          <a:r>
+            <a:rPr lang="zh-TW" sz="2000" b="1" kern="1200" dirty="0">
+              <a:latin typeface="微軟正黑體" panose="020B0604030504040204" pitchFamily="34" charset="-120"/>
+              <a:ea typeface="微軟正黑體" panose="020B0604030504040204" pitchFamily="34" charset="-120"/>
+            </a:rPr>
+            <a:t> </a:t>
+          </a:r>
+          <a:r>
+            <a:rPr lang="en-US" sz="2000" b="1" kern="1200" dirty="0">
+              <a:latin typeface="微軟正黑體" panose="020B0604030504040204" pitchFamily="34" charset="-120"/>
+              <a:ea typeface="微軟正黑體" panose="020B0604030504040204" pitchFamily="34" charset="-120"/>
+            </a:rPr>
+            <a:t>1</a:t>
+          </a:r>
+          <a:endParaRPr lang="zh-TW" sz="2000" b="1" kern="1200" dirty="0">
+            <a:latin typeface="微軟正黑體" panose="020B0604030504040204" pitchFamily="34" charset="-120"/>
+            <a:ea typeface="微軟正黑體" panose="020B0604030504040204" pitchFamily="34" charset="-120"/>
+          </a:endParaRPr>
+        </a:p>
+      </dsp:txBody>
+      <dsp:txXfrm rot="-5400000">
+        <a:off x="1" y="247103"/>
+        <a:ext cx="491338" cy="210574"/>
+      </dsp:txXfrm>
+    </dsp:sp>
+    <dsp:sp modelId="{6EFE7AB5-0941-4CF7-B563-5474DF815C78}">
+      <dsp:nvSpPr>
+        <dsp:cNvPr id="0" name=""/>
+        <dsp:cNvSpPr/>
+      </dsp:nvSpPr>
+      <dsp:spPr>
+        <a:xfrm rot="5400000">
+          <a:off x="3775345" y="-3282571"/>
+          <a:ext cx="456483" cy="7024496"/>
+        </a:xfrm>
+        <a:prstGeom prst="round2SameRect">
+          <a:avLst/>
+        </a:prstGeom>
+        <a:solidFill>
+          <a:schemeClr val="lt1">
+            <a:alpha val="90000"/>
+            <a:hueOff val="0"/>
+            <a:satOff val="0"/>
+            <a:lumOff val="0"/>
+            <a:alphaOff val="0"/>
+          </a:schemeClr>
+        </a:solidFill>
+        <a:ln w="9525" cap="flat" cmpd="sng" algn="ctr">
+          <a:solidFill>
+            <a:schemeClr val="accent4">
+              <a:hueOff val="0"/>
+              <a:satOff val="0"/>
+              <a:lumOff val="0"/>
+              <a:alphaOff val="0"/>
+            </a:schemeClr>
+          </a:solidFill>
+          <a:prstDash val="solid"/>
+        </a:ln>
+        <a:effectLst>
+          <a:outerShdw blurRad="40000" dist="23000" dir="5400000" rotWithShape="0">
+            <a:srgbClr val="000000">
+              <a:alpha val="35000"/>
+            </a:srgbClr>
+          </a:outerShdw>
+        </a:effectLst>
+      </dsp:spPr>
+      <dsp:style>
+        <a:lnRef idx="1">
+          <a:scrgbClr r="0" g="0" b="0"/>
+        </a:lnRef>
+        <a:fillRef idx="1">
+          <a:scrgbClr r="0" g="0" b="0"/>
+        </a:fillRef>
+        <a:effectRef idx="2">
+          <a:scrgbClr r="0" g="0" b="0"/>
+        </a:effectRef>
+        <a:fontRef idx="minor"/>
+      </dsp:style>
+      <dsp:txBody>
+        <a:bodyPr spcFirstLastPara="0" vert="horz" wrap="square" lIns="142240" tIns="12700" rIns="12700" bIns="12700" numCol="1" spcCol="1270" anchor="ctr" anchorCtr="0">
+          <a:noAutofit/>
+        </a:bodyPr>
+        <a:lstStyle/>
+        <a:p>
+          <a:pPr marL="228600" lvl="1" indent="-228600" algn="l" defTabSz="889000" rtl="0">
+            <a:lnSpc>
+              <a:spcPct val="90000"/>
+            </a:lnSpc>
+            <a:spcBef>
+              <a:spcPct val="0"/>
+            </a:spcBef>
+            <a:spcAft>
+              <a:spcPct val="15000"/>
+            </a:spcAft>
+            <a:buChar char="•"/>
+          </a:pPr>
+          <a:r>
+            <a:rPr lang="en-US" sz="2000" b="1" kern="1200" dirty="0">
+              <a:latin typeface="微軟正黑體" panose="020B0604030504040204" pitchFamily="34" charset="-120"/>
+              <a:ea typeface="微軟正黑體" panose="020B0604030504040204" pitchFamily="34" charset="-120"/>
+            </a:rPr>
+            <a:t>mid</a:t>
+          </a:r>
+          <a:r>
+            <a:rPr lang="zh-TW" sz="2000" b="1" kern="1200" dirty="0">
+              <a:latin typeface="微軟正黑體" panose="020B0604030504040204" pitchFamily="34" charset="-120"/>
+              <a:ea typeface="微軟正黑體" panose="020B0604030504040204" pitchFamily="34" charset="-120"/>
+            </a:rPr>
+            <a:t>←原排序</a:t>
+          </a:r>
+          <a:r>
+            <a:rPr lang="zh-TW" sz="2000" b="1" kern="1200">
+              <a:latin typeface="微軟正黑體" panose="020B0604030504040204" pitchFamily="34" charset="-120"/>
+              <a:ea typeface="微軟正黑體" panose="020B0604030504040204" pitchFamily="34" charset="-120"/>
+            </a:rPr>
+            <a:t>數列的中間數</a:t>
+          </a:r>
+        </a:p>
+      </dsp:txBody>
+      <dsp:txXfrm rot="-5400000">
+        <a:off x="491339" y="23719"/>
+        <a:ext cx="7002212" cy="411915"/>
+      </dsp:txXfrm>
+    </dsp:sp>
+    <dsp:sp modelId="{116AA287-C9C7-4ABA-AD92-9ED685872512}">
+      <dsp:nvSpPr>
+        <dsp:cNvPr id="0" name=""/>
+        <dsp:cNvSpPr/>
+      </dsp:nvSpPr>
+      <dsp:spPr>
+        <a:xfrm rot="5400000">
+          <a:off x="-105286" y="581297"/>
+          <a:ext cx="701912" cy="491338"/>
+        </a:xfrm>
+        <a:prstGeom prst="chevron">
+          <a:avLst/>
+        </a:prstGeom>
+        <a:gradFill rotWithShape="0">
+          <a:gsLst>
+            <a:gs pos="0">
+              <a:schemeClr val="accent4">
+                <a:hueOff val="179936"/>
+                <a:satOff val="8690"/>
+                <a:lumOff val="4901"/>
+                <a:alphaOff val="0"/>
+                <a:shade val="51000"/>
+                <a:satMod val="130000"/>
+              </a:schemeClr>
+            </a:gs>
+            <a:gs pos="80000">
+              <a:schemeClr val="accent4">
+                <a:hueOff val="179936"/>
+                <a:satOff val="8690"/>
+                <a:lumOff val="4901"/>
+                <a:alphaOff val="0"/>
+                <a:shade val="93000"/>
+                <a:satMod val="130000"/>
+              </a:schemeClr>
+            </a:gs>
+            <a:gs pos="100000">
+              <a:schemeClr val="accent4">
+                <a:hueOff val="179936"/>
+                <a:satOff val="8690"/>
+                <a:lumOff val="4901"/>
+                <a:alphaOff val="0"/>
+                <a:shade val="94000"/>
+                <a:satMod val="135000"/>
+              </a:schemeClr>
+            </a:gs>
+          </a:gsLst>
+          <a:lin ang="16200000" scaled="0"/>
+        </a:gradFill>
+        <a:ln w="9525" cap="flat" cmpd="sng" algn="ctr">
+          <a:solidFill>
+            <a:schemeClr val="accent4">
+              <a:hueOff val="179936"/>
+              <a:satOff val="8690"/>
+              <a:lumOff val="4901"/>
+              <a:alphaOff val="0"/>
+            </a:schemeClr>
+          </a:solidFill>
+          <a:prstDash val="solid"/>
+        </a:ln>
+        <a:effectLst>
+          <a:outerShdw blurRad="40000" dist="23000" dir="5400000" rotWithShape="0">
+            <a:srgbClr val="000000">
+              <a:alpha val="35000"/>
+            </a:srgbClr>
+          </a:outerShdw>
+        </a:effectLst>
+        <a:scene3d>
+          <a:camera prst="orthographicFront">
+            <a:rot lat="0" lon="0" rev="0"/>
+          </a:camera>
+          <a:lightRig rig="threePt" dir="t">
+            <a:rot lat="0" lon="0" rev="1200000"/>
+          </a:lightRig>
+        </a:scene3d>
+        <a:sp3d>
+          <a:bevelT w="63500" h="25400"/>
+        </a:sp3d>
+      </dsp:spPr>
+      <dsp:style>
+        <a:lnRef idx="1">
+          <a:scrgbClr r="0" g="0" b="0"/>
+        </a:lnRef>
+        <a:fillRef idx="3">
+          <a:scrgbClr r="0" g="0" b="0"/>
+        </a:fillRef>
+        <a:effectRef idx="3">
+          <a:scrgbClr r="0" g="0" b="0"/>
+        </a:effectRef>
+        <a:fontRef idx="minor">
+          <a:schemeClr val="lt1"/>
+        </a:fontRef>
+      </dsp:style>
+      <dsp:txBody>
+        <a:bodyPr spcFirstLastPara="0" vert="horz" wrap="square" lIns="12700" tIns="12700" rIns="12700" bIns="12700" numCol="1" spcCol="1270" anchor="ctr" anchorCtr="0">
+          <a:noAutofit/>
+        </a:bodyPr>
+        <a:lstStyle/>
+        <a:p>
+          <a:pPr marL="0" lvl="0" indent="0" algn="ctr" defTabSz="889000" rtl="0">
+            <a:lnSpc>
+              <a:spcPct val="90000"/>
+            </a:lnSpc>
+            <a:spcBef>
+              <a:spcPct val="0"/>
+            </a:spcBef>
+            <a:spcAft>
+              <a:spcPct val="35000"/>
+            </a:spcAft>
+            <a:buNone/>
+          </a:pPr>
+          <a:r>
+            <a:rPr lang="zh-TW" sz="2000" b="1" kern="1200" dirty="0">
+              <a:latin typeface="微軟正黑體" panose="020B0604030504040204" pitchFamily="34" charset="-120"/>
+              <a:ea typeface="微軟正黑體" panose="020B0604030504040204" pitchFamily="34" charset="-120"/>
+            </a:rPr>
+            <a:t> </a:t>
+          </a:r>
+          <a:r>
+            <a:rPr lang="en-US" sz="2000" b="1" kern="1200" dirty="0">
+              <a:latin typeface="微軟正黑體" panose="020B0604030504040204" pitchFamily="34" charset="-120"/>
+              <a:ea typeface="微軟正黑體" panose="020B0604030504040204" pitchFamily="34" charset="-120"/>
+            </a:rPr>
+            <a:t>2</a:t>
+          </a:r>
+          <a:endParaRPr lang="zh-TW" sz="2000" b="1" kern="1200" dirty="0">
+            <a:latin typeface="微軟正黑體" panose="020B0604030504040204" pitchFamily="34" charset="-120"/>
+            <a:ea typeface="微軟正黑體" panose="020B0604030504040204" pitchFamily="34" charset="-120"/>
+          </a:endParaRPr>
+        </a:p>
+      </dsp:txBody>
+      <dsp:txXfrm rot="-5400000">
+        <a:off x="1" y="721679"/>
+        <a:ext cx="491338" cy="210574"/>
+      </dsp:txXfrm>
+    </dsp:sp>
+    <dsp:sp modelId="{A9D70513-2C42-4FAE-94DD-459AB157F382}">
+      <dsp:nvSpPr>
+        <dsp:cNvPr id="0" name=""/>
+        <dsp:cNvSpPr/>
+      </dsp:nvSpPr>
+      <dsp:spPr>
+        <a:xfrm rot="5400000">
+          <a:off x="3775465" y="-2808115"/>
+          <a:ext cx="456243" cy="7024496"/>
+        </a:xfrm>
+        <a:prstGeom prst="round2SameRect">
+          <a:avLst/>
+        </a:prstGeom>
+        <a:solidFill>
+          <a:schemeClr val="lt1">
+            <a:alpha val="90000"/>
+            <a:hueOff val="0"/>
+            <a:satOff val="0"/>
+            <a:lumOff val="0"/>
+            <a:alphaOff val="0"/>
+          </a:schemeClr>
+        </a:solidFill>
+        <a:ln w="9525" cap="flat" cmpd="sng" algn="ctr">
+          <a:solidFill>
+            <a:schemeClr val="accent4">
+              <a:hueOff val="179936"/>
+              <a:satOff val="8690"/>
+              <a:lumOff val="4901"/>
+              <a:alphaOff val="0"/>
+            </a:schemeClr>
+          </a:solidFill>
+          <a:prstDash val="solid"/>
+        </a:ln>
+        <a:effectLst>
+          <a:outerShdw blurRad="40000" dist="23000" dir="5400000" rotWithShape="0">
+            <a:srgbClr val="000000">
+              <a:alpha val="35000"/>
+            </a:srgbClr>
+          </a:outerShdw>
+        </a:effectLst>
+      </dsp:spPr>
+      <dsp:style>
+        <a:lnRef idx="1">
+          <a:scrgbClr r="0" g="0" b="0"/>
+        </a:lnRef>
+        <a:fillRef idx="1">
+          <a:scrgbClr r="0" g="0" b="0"/>
+        </a:fillRef>
+        <a:effectRef idx="2">
+          <a:scrgbClr r="0" g="0" b="0"/>
+        </a:effectRef>
+        <a:fontRef idx="minor"/>
+      </dsp:style>
+      <dsp:txBody>
+        <a:bodyPr spcFirstLastPara="0" vert="horz" wrap="square" lIns="142240" tIns="12700" rIns="12700" bIns="12700" numCol="1" spcCol="1270" anchor="ctr" anchorCtr="0">
+          <a:noAutofit/>
+        </a:bodyPr>
+        <a:lstStyle/>
+        <a:p>
+          <a:pPr marL="228600" lvl="1" indent="-228600" algn="l" defTabSz="889000" rtl="0">
+            <a:lnSpc>
+              <a:spcPct val="90000"/>
+            </a:lnSpc>
+            <a:spcBef>
+              <a:spcPct val="0"/>
+            </a:spcBef>
+            <a:spcAft>
+              <a:spcPct val="15000"/>
+            </a:spcAft>
+            <a:buChar char="•"/>
+          </a:pPr>
+          <a:r>
+            <a:rPr lang="zh-TW" sz="2000" b="1" kern="1200">
+              <a:latin typeface="微軟正黑體" panose="020B0604030504040204" pitchFamily="34" charset="-120"/>
+              <a:ea typeface="微軟正黑體" panose="020B0604030504040204" pitchFamily="34" charset="-120"/>
+            </a:rPr>
+            <a:t>將所要搜尋的數與</a:t>
+          </a:r>
+          <a:r>
+            <a:rPr lang="en-US" sz="2000" b="1" kern="1200">
+              <a:latin typeface="微軟正黑體" panose="020B0604030504040204" pitchFamily="34" charset="-120"/>
+              <a:ea typeface="微軟正黑體" panose="020B0604030504040204" pitchFamily="34" charset="-120"/>
+            </a:rPr>
+            <a:t>mid</a:t>
+          </a:r>
+          <a:r>
+            <a:rPr lang="zh-TW" sz="2000" b="1" kern="1200">
+              <a:latin typeface="微軟正黑體" panose="020B0604030504040204" pitchFamily="34" charset="-120"/>
+              <a:ea typeface="微軟正黑體" panose="020B0604030504040204" pitchFamily="34" charset="-120"/>
+            </a:rPr>
+            <a:t>相比</a:t>
+          </a:r>
+        </a:p>
+      </dsp:txBody>
+      <dsp:txXfrm rot="-5400000">
+        <a:off x="491339" y="498283"/>
+        <a:ext cx="7002224" cy="411699"/>
+      </dsp:txXfrm>
+    </dsp:sp>
+    <dsp:sp modelId="{AF898CE2-AE28-4243-89F6-C146EF02B541}">
+      <dsp:nvSpPr>
+        <dsp:cNvPr id="0" name=""/>
+        <dsp:cNvSpPr/>
+      </dsp:nvSpPr>
+      <dsp:spPr>
+        <a:xfrm rot="5400000">
+          <a:off x="-105286" y="1055873"/>
+          <a:ext cx="701912" cy="491338"/>
+        </a:xfrm>
+        <a:prstGeom prst="chevron">
+          <a:avLst/>
+        </a:prstGeom>
+        <a:gradFill rotWithShape="0">
+          <a:gsLst>
+            <a:gs pos="0">
+              <a:schemeClr val="accent4">
+                <a:hueOff val="359873"/>
+                <a:satOff val="17380"/>
+                <a:lumOff val="9803"/>
+                <a:alphaOff val="0"/>
+                <a:shade val="51000"/>
+                <a:satMod val="130000"/>
+              </a:schemeClr>
+            </a:gs>
+            <a:gs pos="80000">
+              <a:schemeClr val="accent4">
+                <a:hueOff val="359873"/>
+                <a:satOff val="17380"/>
+                <a:lumOff val="9803"/>
+                <a:alphaOff val="0"/>
+                <a:shade val="93000"/>
+                <a:satMod val="130000"/>
+              </a:schemeClr>
+            </a:gs>
+            <a:gs pos="100000">
+              <a:schemeClr val="accent4">
+                <a:hueOff val="359873"/>
+                <a:satOff val="17380"/>
+                <a:lumOff val="9803"/>
+                <a:alphaOff val="0"/>
+                <a:shade val="94000"/>
+                <a:satMod val="135000"/>
+              </a:schemeClr>
+            </a:gs>
+          </a:gsLst>
+          <a:lin ang="16200000" scaled="0"/>
+        </a:gradFill>
+        <a:ln w="9525" cap="flat" cmpd="sng" algn="ctr">
+          <a:solidFill>
+            <a:schemeClr val="accent4">
+              <a:hueOff val="359873"/>
+              <a:satOff val="17380"/>
+              <a:lumOff val="9803"/>
+              <a:alphaOff val="0"/>
+            </a:schemeClr>
+          </a:solidFill>
+          <a:prstDash val="solid"/>
+        </a:ln>
+        <a:effectLst>
+          <a:outerShdw blurRad="40000" dist="23000" dir="5400000" rotWithShape="0">
+            <a:srgbClr val="000000">
+              <a:alpha val="35000"/>
+            </a:srgbClr>
+          </a:outerShdw>
+        </a:effectLst>
+        <a:scene3d>
+          <a:camera prst="orthographicFront">
+            <a:rot lat="0" lon="0" rev="0"/>
+          </a:camera>
+          <a:lightRig rig="threePt" dir="t">
+            <a:rot lat="0" lon="0" rev="1200000"/>
+          </a:lightRig>
+        </a:scene3d>
+        <a:sp3d>
+          <a:bevelT w="63500" h="25400"/>
+        </a:sp3d>
+      </dsp:spPr>
+      <dsp:style>
+        <a:lnRef idx="1">
+          <a:scrgbClr r="0" g="0" b="0"/>
+        </a:lnRef>
+        <a:fillRef idx="3">
+          <a:scrgbClr r="0" g="0" b="0"/>
+        </a:fillRef>
+        <a:effectRef idx="3">
+          <a:scrgbClr r="0" g="0" b="0"/>
+        </a:effectRef>
+        <a:fontRef idx="minor">
+          <a:schemeClr val="lt1"/>
+        </a:fontRef>
+      </dsp:style>
+      <dsp:txBody>
+        <a:bodyPr spcFirstLastPara="0" vert="horz" wrap="square" lIns="12700" tIns="12700" rIns="12700" bIns="12700" numCol="1" spcCol="1270" anchor="ctr" anchorCtr="0">
+          <a:noAutofit/>
+        </a:bodyPr>
+        <a:lstStyle/>
+        <a:p>
+          <a:pPr marL="0" lvl="0" indent="0" algn="ctr" defTabSz="889000" rtl="0">
+            <a:lnSpc>
+              <a:spcPct val="90000"/>
+            </a:lnSpc>
+            <a:spcBef>
+              <a:spcPct val="0"/>
+            </a:spcBef>
+            <a:spcAft>
+              <a:spcPct val="35000"/>
+            </a:spcAft>
+            <a:buNone/>
+          </a:pPr>
+          <a:r>
+            <a:rPr lang="zh-TW" sz="2000" b="1" kern="1200" dirty="0">
+              <a:latin typeface="微軟正黑體" panose="020B0604030504040204" pitchFamily="34" charset="-120"/>
+              <a:ea typeface="微軟正黑體" panose="020B0604030504040204" pitchFamily="34" charset="-120"/>
+            </a:rPr>
+            <a:t> </a:t>
+          </a:r>
+          <a:r>
+            <a:rPr lang="en-US" sz="2000" b="1" kern="1200" dirty="0">
+              <a:latin typeface="微軟正黑體" panose="020B0604030504040204" pitchFamily="34" charset="-120"/>
+              <a:ea typeface="微軟正黑體" panose="020B0604030504040204" pitchFamily="34" charset="-120"/>
+            </a:rPr>
+            <a:t>3</a:t>
+          </a:r>
+          <a:endParaRPr lang="zh-TW" sz="2000" b="1" kern="1200" dirty="0">
+            <a:latin typeface="微軟正黑體" panose="020B0604030504040204" pitchFamily="34" charset="-120"/>
+            <a:ea typeface="微軟正黑體" panose="020B0604030504040204" pitchFamily="34" charset="-120"/>
+          </a:endParaRPr>
+        </a:p>
+      </dsp:txBody>
+      <dsp:txXfrm rot="-5400000">
+        <a:off x="1" y="1196255"/>
+        <a:ext cx="491338" cy="210574"/>
+      </dsp:txXfrm>
+    </dsp:sp>
+    <dsp:sp modelId="{F8313686-5249-4203-A1E3-82BD9AB7F03E}">
+      <dsp:nvSpPr>
+        <dsp:cNvPr id="0" name=""/>
+        <dsp:cNvSpPr/>
+      </dsp:nvSpPr>
+      <dsp:spPr>
+        <a:xfrm rot="5400000">
+          <a:off x="3775465" y="-2333540"/>
+          <a:ext cx="456243" cy="7024496"/>
+        </a:xfrm>
+        <a:prstGeom prst="round2SameRect">
+          <a:avLst/>
+        </a:prstGeom>
+        <a:solidFill>
+          <a:schemeClr val="lt1">
+            <a:alpha val="90000"/>
+            <a:hueOff val="0"/>
+            <a:satOff val="0"/>
+            <a:lumOff val="0"/>
+            <a:alphaOff val="0"/>
+          </a:schemeClr>
+        </a:solidFill>
+        <a:ln w="9525" cap="flat" cmpd="sng" algn="ctr">
+          <a:solidFill>
+            <a:schemeClr val="accent4">
+              <a:hueOff val="359873"/>
+              <a:satOff val="17380"/>
+              <a:lumOff val="9803"/>
+              <a:alphaOff val="0"/>
+            </a:schemeClr>
+          </a:solidFill>
+          <a:prstDash val="solid"/>
+        </a:ln>
+        <a:effectLst>
+          <a:outerShdw blurRad="40000" dist="23000" dir="5400000" rotWithShape="0">
+            <a:srgbClr val="000000">
+              <a:alpha val="35000"/>
+            </a:srgbClr>
+          </a:outerShdw>
+        </a:effectLst>
+      </dsp:spPr>
+      <dsp:style>
+        <a:lnRef idx="1">
+          <a:scrgbClr r="0" g="0" b="0"/>
+        </a:lnRef>
+        <a:fillRef idx="1">
+          <a:scrgbClr r="0" g="0" b="0"/>
+        </a:fillRef>
+        <a:effectRef idx="2">
+          <a:scrgbClr r="0" g="0" b="0"/>
+        </a:effectRef>
+        <a:fontRef idx="minor"/>
+      </dsp:style>
+      <dsp:txBody>
+        <a:bodyPr spcFirstLastPara="0" vert="horz" wrap="square" lIns="142240" tIns="12700" rIns="12700" bIns="12700" numCol="1" spcCol="1270" anchor="ctr" anchorCtr="0">
+          <a:noAutofit/>
+        </a:bodyPr>
+        <a:lstStyle/>
+        <a:p>
+          <a:pPr marL="228600" lvl="1" indent="-228600" algn="l" defTabSz="889000" rtl="0">
+            <a:lnSpc>
+              <a:spcPct val="90000"/>
+            </a:lnSpc>
+            <a:spcBef>
+              <a:spcPct val="0"/>
+            </a:spcBef>
+            <a:spcAft>
+              <a:spcPct val="15000"/>
+            </a:spcAft>
+            <a:buChar char="•"/>
+          </a:pPr>
+          <a:r>
+            <a:rPr lang="zh-TW" sz="2000" b="1" kern="1200" dirty="0">
+              <a:latin typeface="微軟正黑體" panose="020B0604030504040204" pitchFamily="34" charset="-120"/>
+              <a:ea typeface="微軟正黑體" panose="020B0604030504040204" pitchFamily="34" charset="-120"/>
+            </a:rPr>
+            <a:t>如果搜尋的數與</a:t>
+          </a:r>
+          <a:r>
+            <a:rPr lang="en-US" sz="2000" b="1" kern="1200" dirty="0">
+              <a:latin typeface="微軟正黑體" panose="020B0604030504040204" pitchFamily="34" charset="-120"/>
+              <a:ea typeface="微軟正黑體" panose="020B0604030504040204" pitchFamily="34" charset="-120"/>
+            </a:rPr>
+            <a:t>mid</a:t>
+          </a:r>
+          <a:r>
+            <a:rPr lang="zh-TW" sz="2000" b="1" kern="1200" dirty="0">
+              <a:latin typeface="微軟正黑體" panose="020B0604030504040204" pitchFamily="34" charset="-120"/>
+              <a:ea typeface="微軟正黑體" panose="020B0604030504040204" pitchFamily="34" charset="-120"/>
+            </a:rPr>
+            <a:t>相等，則已找到，回答該數在數列裡</a:t>
+          </a:r>
+        </a:p>
+      </dsp:txBody>
+      <dsp:txXfrm rot="-5400000">
+        <a:off x="491339" y="972858"/>
+        <a:ext cx="7002224" cy="411699"/>
+      </dsp:txXfrm>
+    </dsp:sp>
   </dsp:spTree>
 </dsp:drawing>
 </file>
@@ -8597,6 +9611,769 @@
       <dsp:cNvGrpSpPr/>
     </dsp:nvGrpSpPr>
     <dsp:grpSpPr/>
+    <dsp:sp modelId="{FAD15BB6-E774-456B-913A-D03FFD50F88D}">
+      <dsp:nvSpPr>
+        <dsp:cNvPr id="0" name=""/>
+        <dsp:cNvSpPr/>
+      </dsp:nvSpPr>
+      <dsp:spPr>
+        <a:xfrm rot="5400000">
+          <a:off x="-163536" y="166261"/>
+          <a:ext cx="1090245" cy="763171"/>
+        </a:xfrm>
+        <a:prstGeom prst="chevron">
+          <a:avLst/>
+        </a:prstGeom>
+        <a:gradFill rotWithShape="0">
+          <a:gsLst>
+            <a:gs pos="0">
+              <a:schemeClr val="accent4">
+                <a:hueOff val="0"/>
+                <a:satOff val="0"/>
+                <a:lumOff val="0"/>
+                <a:alphaOff val="0"/>
+                <a:shade val="51000"/>
+                <a:satMod val="130000"/>
+              </a:schemeClr>
+            </a:gs>
+            <a:gs pos="80000">
+              <a:schemeClr val="accent4">
+                <a:hueOff val="0"/>
+                <a:satOff val="0"/>
+                <a:lumOff val="0"/>
+                <a:alphaOff val="0"/>
+                <a:shade val="93000"/>
+                <a:satMod val="130000"/>
+              </a:schemeClr>
+            </a:gs>
+            <a:gs pos="100000">
+              <a:schemeClr val="accent4">
+                <a:hueOff val="0"/>
+                <a:satOff val="0"/>
+                <a:lumOff val="0"/>
+                <a:alphaOff val="0"/>
+                <a:shade val="94000"/>
+                <a:satMod val="135000"/>
+              </a:schemeClr>
+            </a:gs>
+          </a:gsLst>
+          <a:lin ang="16200000" scaled="0"/>
+        </a:gradFill>
+        <a:ln w="9525" cap="flat" cmpd="sng" algn="ctr">
+          <a:solidFill>
+            <a:schemeClr val="accent4">
+              <a:hueOff val="0"/>
+              <a:satOff val="0"/>
+              <a:lumOff val="0"/>
+              <a:alphaOff val="0"/>
+            </a:schemeClr>
+          </a:solidFill>
+          <a:prstDash val="solid"/>
+        </a:ln>
+        <a:effectLst>
+          <a:outerShdw blurRad="40000" dist="23000" dir="5400000" rotWithShape="0">
+            <a:srgbClr val="000000">
+              <a:alpha val="35000"/>
+            </a:srgbClr>
+          </a:outerShdw>
+        </a:effectLst>
+        <a:scene3d>
+          <a:camera prst="orthographicFront">
+            <a:rot lat="0" lon="0" rev="0"/>
+          </a:camera>
+          <a:lightRig rig="threePt" dir="t">
+            <a:rot lat="0" lon="0" rev="1200000"/>
+          </a:lightRig>
+        </a:scene3d>
+        <a:sp3d>
+          <a:bevelT w="63500" h="25400"/>
+        </a:sp3d>
+      </dsp:spPr>
+      <dsp:style>
+        <a:lnRef idx="1">
+          <a:scrgbClr r="0" g="0" b="0"/>
+        </a:lnRef>
+        <a:fillRef idx="3">
+          <a:scrgbClr r="0" g="0" b="0"/>
+        </a:fillRef>
+        <a:effectRef idx="3">
+          <a:scrgbClr r="0" g="0" b="0"/>
+        </a:effectRef>
+        <a:fontRef idx="minor">
+          <a:schemeClr val="lt1"/>
+        </a:fontRef>
+      </dsp:style>
+      <dsp:txBody>
+        <a:bodyPr spcFirstLastPara="0" vert="horz" wrap="square" lIns="9525" tIns="9525" rIns="9525" bIns="9525" numCol="1" spcCol="1270" anchor="ctr" anchorCtr="0">
+          <a:noAutofit/>
+        </a:bodyPr>
+        <a:lstStyle/>
+        <a:p>
+          <a:pPr marL="0" lvl="0" indent="0" algn="ctr" defTabSz="666750" rtl="0">
+            <a:lnSpc>
+              <a:spcPct val="90000"/>
+            </a:lnSpc>
+            <a:spcBef>
+              <a:spcPct val="0"/>
+            </a:spcBef>
+            <a:spcAft>
+              <a:spcPct val="35000"/>
+            </a:spcAft>
+            <a:buNone/>
+          </a:pPr>
+          <a:r>
+            <a:rPr lang="en-US" altLang="zh-TW" sz="1500" b="1" kern="1200" dirty="0">
+              <a:latin typeface="微軟正黑體" panose="020B0604030504040204" pitchFamily="34" charset="-120"/>
+              <a:ea typeface="微軟正黑體" panose="020B0604030504040204" pitchFamily="34" charset="-120"/>
+            </a:rPr>
+            <a:t>4</a:t>
+          </a:r>
+          <a:endParaRPr lang="zh-TW" sz="1500" b="1" kern="1200" dirty="0">
+            <a:latin typeface="微軟正黑體" panose="020B0604030504040204" pitchFamily="34" charset="-120"/>
+            <a:ea typeface="微軟正黑體" panose="020B0604030504040204" pitchFamily="34" charset="-120"/>
+          </a:endParaRPr>
+        </a:p>
+      </dsp:txBody>
+      <dsp:txXfrm rot="-5400000">
+        <a:off x="2" y="384310"/>
+        <a:ext cx="763171" cy="327074"/>
+      </dsp:txXfrm>
+    </dsp:sp>
+    <dsp:sp modelId="{6EFE7AB5-0941-4CF7-B563-5474DF815C78}">
+      <dsp:nvSpPr>
+        <dsp:cNvPr id="0" name=""/>
+        <dsp:cNvSpPr/>
+      </dsp:nvSpPr>
+      <dsp:spPr>
+        <a:xfrm rot="5400000">
+          <a:off x="3897686" y="-3131789"/>
+          <a:ext cx="708659" cy="6977688"/>
+        </a:xfrm>
+        <a:prstGeom prst="round2SameRect">
+          <a:avLst/>
+        </a:prstGeom>
+        <a:solidFill>
+          <a:schemeClr val="lt1">
+            <a:alpha val="90000"/>
+            <a:hueOff val="0"/>
+            <a:satOff val="0"/>
+            <a:lumOff val="0"/>
+            <a:alphaOff val="0"/>
+          </a:schemeClr>
+        </a:solidFill>
+        <a:ln w="9525" cap="flat" cmpd="sng" algn="ctr">
+          <a:solidFill>
+            <a:schemeClr val="accent4">
+              <a:hueOff val="0"/>
+              <a:satOff val="0"/>
+              <a:lumOff val="0"/>
+              <a:alphaOff val="0"/>
+            </a:schemeClr>
+          </a:solidFill>
+          <a:prstDash val="solid"/>
+        </a:ln>
+        <a:effectLst>
+          <a:outerShdw blurRad="40000" dist="23000" dir="5400000" rotWithShape="0">
+            <a:srgbClr val="000000">
+              <a:alpha val="35000"/>
+            </a:srgbClr>
+          </a:outerShdw>
+        </a:effectLst>
+      </dsp:spPr>
+      <dsp:style>
+        <a:lnRef idx="1">
+          <a:scrgbClr r="0" g="0" b="0"/>
+        </a:lnRef>
+        <a:fillRef idx="1">
+          <a:scrgbClr r="0" g="0" b="0"/>
+        </a:fillRef>
+        <a:effectRef idx="2">
+          <a:scrgbClr r="0" g="0" b="0"/>
+        </a:effectRef>
+        <a:fontRef idx="minor"/>
+      </dsp:style>
+      <dsp:txBody>
+        <a:bodyPr spcFirstLastPara="0" vert="horz" wrap="square" lIns="128016" tIns="11430" rIns="11430" bIns="11430" numCol="1" spcCol="1270" anchor="ctr" anchorCtr="0">
+          <a:noAutofit/>
+        </a:bodyPr>
+        <a:lstStyle/>
+        <a:p>
+          <a:pPr marL="171450" lvl="1" indent="-171450" algn="just" defTabSz="800100" rtl="0">
+            <a:lnSpc>
+              <a:spcPct val="90000"/>
+            </a:lnSpc>
+            <a:spcBef>
+              <a:spcPct val="0"/>
+            </a:spcBef>
+            <a:spcAft>
+              <a:spcPct val="15000"/>
+            </a:spcAft>
+            <a:buChar char="•"/>
+          </a:pPr>
+          <a:r>
+            <a:rPr lang="zh-TW" altLang="en-US" sz="1800" b="1" kern="1200" dirty="0">
+              <a:latin typeface="微軟正黑體" panose="020B0604030504040204" pitchFamily="34" charset="-120"/>
+              <a:ea typeface="微軟正黑體" panose="020B0604030504040204" pitchFamily="34" charset="-120"/>
+            </a:rPr>
+            <a:t>如果目前子數列只剩一個數</a:t>
+          </a:r>
+          <a:r>
+            <a:rPr lang="en-US" altLang="zh-TW" sz="1800" b="1" kern="1200" dirty="0">
+              <a:latin typeface="微軟正黑體" panose="020B0604030504040204" pitchFamily="34" charset="-120"/>
+              <a:ea typeface="微軟正黑體" panose="020B0604030504040204" pitchFamily="34" charset="-120"/>
+            </a:rPr>
+            <a:t>(</a:t>
+          </a:r>
+          <a:r>
+            <a:rPr lang="zh-TW" altLang="en-US" sz="1800" b="1" kern="1200" dirty="0">
+              <a:latin typeface="微軟正黑體" panose="020B0604030504040204" pitchFamily="34" charset="-120"/>
+              <a:ea typeface="微軟正黑體" panose="020B0604030504040204" pitchFamily="34" charset="-120"/>
+            </a:rPr>
+            <a:t>此時搜尋的數與</a:t>
+          </a:r>
+          <a:r>
+            <a:rPr lang="en-US" altLang="zh-TW" sz="1800" b="1" kern="1200" dirty="0">
+              <a:latin typeface="微軟正黑體" panose="020B0604030504040204" pitchFamily="34" charset="-120"/>
+              <a:ea typeface="微軟正黑體" panose="020B0604030504040204" pitchFamily="34" charset="-120"/>
+            </a:rPr>
+            <a:t>mid</a:t>
+          </a:r>
+          <a:r>
+            <a:rPr lang="zh-TW" altLang="en-US" sz="1800" b="1" kern="1200" dirty="0">
+              <a:latin typeface="微軟正黑體" panose="020B0604030504040204" pitchFamily="34" charset="-120"/>
+              <a:ea typeface="微軟正黑體" panose="020B0604030504040204" pitchFamily="34" charset="-120"/>
+            </a:rPr>
+            <a:t>不等</a:t>
+          </a:r>
+          <a:r>
+            <a:rPr lang="en-US" altLang="zh-TW" sz="1800" b="1" kern="1200" dirty="0">
+              <a:latin typeface="微軟正黑體" panose="020B0604030504040204" pitchFamily="34" charset="-120"/>
+              <a:ea typeface="微軟正黑體" panose="020B0604030504040204" pitchFamily="34" charset="-120"/>
+            </a:rPr>
+            <a:t>)</a:t>
+          </a:r>
+          <a:r>
+            <a:rPr lang="zh-TW" altLang="en-US" sz="1800" b="1" kern="1200" dirty="0">
+              <a:latin typeface="微軟正黑體" panose="020B0604030504040204" pitchFamily="34" charset="-120"/>
+              <a:ea typeface="微軟正黑體" panose="020B0604030504040204" pitchFamily="34" charset="-120"/>
+            </a:rPr>
+            <a:t>，則回答該數不在數列裡</a:t>
+          </a:r>
+          <a:endParaRPr lang="zh-TW" sz="1800" b="1" kern="1200" dirty="0">
+            <a:latin typeface="微軟正黑體" panose="020B0604030504040204" pitchFamily="34" charset="-120"/>
+            <a:ea typeface="微軟正黑體" panose="020B0604030504040204" pitchFamily="34" charset="-120"/>
+          </a:endParaRPr>
+        </a:p>
+      </dsp:txBody>
+      <dsp:txXfrm rot="-5400000">
+        <a:off x="763172" y="37319"/>
+        <a:ext cx="6943094" cy="639471"/>
+      </dsp:txXfrm>
+    </dsp:sp>
+    <dsp:sp modelId="{116AA287-C9C7-4ABA-AD92-9ED685872512}">
+      <dsp:nvSpPr>
+        <dsp:cNvPr id="0" name=""/>
+        <dsp:cNvSpPr/>
+      </dsp:nvSpPr>
+      <dsp:spPr>
+        <a:xfrm rot="5400000">
+          <a:off x="-163536" y="1052948"/>
+          <a:ext cx="1090245" cy="763171"/>
+        </a:xfrm>
+        <a:prstGeom prst="chevron">
+          <a:avLst/>
+        </a:prstGeom>
+        <a:gradFill rotWithShape="0">
+          <a:gsLst>
+            <a:gs pos="0">
+              <a:schemeClr val="accent4">
+                <a:hueOff val="179936"/>
+                <a:satOff val="8690"/>
+                <a:lumOff val="4901"/>
+                <a:alphaOff val="0"/>
+                <a:shade val="51000"/>
+                <a:satMod val="130000"/>
+              </a:schemeClr>
+            </a:gs>
+            <a:gs pos="80000">
+              <a:schemeClr val="accent4">
+                <a:hueOff val="179936"/>
+                <a:satOff val="8690"/>
+                <a:lumOff val="4901"/>
+                <a:alphaOff val="0"/>
+                <a:shade val="93000"/>
+                <a:satMod val="130000"/>
+              </a:schemeClr>
+            </a:gs>
+            <a:gs pos="100000">
+              <a:schemeClr val="accent4">
+                <a:hueOff val="179936"/>
+                <a:satOff val="8690"/>
+                <a:lumOff val="4901"/>
+                <a:alphaOff val="0"/>
+                <a:shade val="94000"/>
+                <a:satMod val="135000"/>
+              </a:schemeClr>
+            </a:gs>
+          </a:gsLst>
+          <a:lin ang="16200000" scaled="0"/>
+        </a:gradFill>
+        <a:ln w="9525" cap="flat" cmpd="sng" algn="ctr">
+          <a:solidFill>
+            <a:schemeClr val="accent4">
+              <a:hueOff val="179936"/>
+              <a:satOff val="8690"/>
+              <a:lumOff val="4901"/>
+              <a:alphaOff val="0"/>
+            </a:schemeClr>
+          </a:solidFill>
+          <a:prstDash val="solid"/>
+        </a:ln>
+        <a:effectLst>
+          <a:outerShdw blurRad="40000" dist="23000" dir="5400000" rotWithShape="0">
+            <a:srgbClr val="000000">
+              <a:alpha val="35000"/>
+            </a:srgbClr>
+          </a:outerShdw>
+        </a:effectLst>
+        <a:scene3d>
+          <a:camera prst="orthographicFront">
+            <a:rot lat="0" lon="0" rev="0"/>
+          </a:camera>
+          <a:lightRig rig="threePt" dir="t">
+            <a:rot lat="0" lon="0" rev="1200000"/>
+          </a:lightRig>
+        </a:scene3d>
+        <a:sp3d>
+          <a:bevelT w="63500" h="25400"/>
+        </a:sp3d>
+      </dsp:spPr>
+      <dsp:style>
+        <a:lnRef idx="1">
+          <a:scrgbClr r="0" g="0" b="0"/>
+        </a:lnRef>
+        <a:fillRef idx="3">
+          <a:scrgbClr r="0" g="0" b="0"/>
+        </a:fillRef>
+        <a:effectRef idx="3">
+          <a:scrgbClr r="0" g="0" b="0"/>
+        </a:effectRef>
+        <a:fontRef idx="minor">
+          <a:schemeClr val="lt1"/>
+        </a:fontRef>
+      </dsp:style>
+      <dsp:txBody>
+        <a:bodyPr spcFirstLastPara="0" vert="horz" wrap="square" lIns="9525" tIns="9525" rIns="9525" bIns="9525" numCol="1" spcCol="1270" anchor="ctr" anchorCtr="0">
+          <a:noAutofit/>
+        </a:bodyPr>
+        <a:lstStyle/>
+        <a:p>
+          <a:pPr marL="0" lvl="0" indent="0" algn="ctr" defTabSz="666750" rtl="0">
+            <a:lnSpc>
+              <a:spcPct val="90000"/>
+            </a:lnSpc>
+            <a:spcBef>
+              <a:spcPct val="0"/>
+            </a:spcBef>
+            <a:spcAft>
+              <a:spcPct val="35000"/>
+            </a:spcAft>
+            <a:buNone/>
+          </a:pPr>
+          <a:r>
+            <a:rPr lang="en-US" altLang="zh-TW" sz="1500" b="1" kern="1200" dirty="0">
+              <a:latin typeface="微軟正黑體" panose="020B0604030504040204" pitchFamily="34" charset="-120"/>
+              <a:ea typeface="微軟正黑體" panose="020B0604030504040204" pitchFamily="34" charset="-120"/>
+            </a:rPr>
+            <a:t>5</a:t>
+          </a:r>
+          <a:endParaRPr lang="zh-TW" sz="1500" b="1" kern="1200" dirty="0">
+            <a:latin typeface="微軟正黑體" panose="020B0604030504040204" pitchFamily="34" charset="-120"/>
+            <a:ea typeface="微軟正黑體" panose="020B0604030504040204" pitchFamily="34" charset="-120"/>
+          </a:endParaRPr>
+        </a:p>
+      </dsp:txBody>
+      <dsp:txXfrm rot="-5400000">
+        <a:off x="2" y="1270997"/>
+        <a:ext cx="763171" cy="327074"/>
+      </dsp:txXfrm>
+    </dsp:sp>
+    <dsp:sp modelId="{A9D70513-2C42-4FAE-94DD-459AB157F382}">
+      <dsp:nvSpPr>
+        <dsp:cNvPr id="0" name=""/>
+        <dsp:cNvSpPr/>
+      </dsp:nvSpPr>
+      <dsp:spPr>
+        <a:xfrm rot="5400000">
+          <a:off x="3897686" y="-2245102"/>
+          <a:ext cx="708659" cy="6977688"/>
+        </a:xfrm>
+        <a:prstGeom prst="round2SameRect">
+          <a:avLst/>
+        </a:prstGeom>
+        <a:solidFill>
+          <a:schemeClr val="lt1">
+            <a:alpha val="90000"/>
+            <a:hueOff val="0"/>
+            <a:satOff val="0"/>
+            <a:lumOff val="0"/>
+            <a:alphaOff val="0"/>
+          </a:schemeClr>
+        </a:solidFill>
+        <a:ln w="9525" cap="flat" cmpd="sng" algn="ctr">
+          <a:solidFill>
+            <a:schemeClr val="accent4">
+              <a:hueOff val="179936"/>
+              <a:satOff val="8690"/>
+              <a:lumOff val="4901"/>
+              <a:alphaOff val="0"/>
+            </a:schemeClr>
+          </a:solidFill>
+          <a:prstDash val="solid"/>
+        </a:ln>
+        <a:effectLst>
+          <a:outerShdw blurRad="40000" dist="23000" dir="5400000" rotWithShape="0">
+            <a:srgbClr val="000000">
+              <a:alpha val="35000"/>
+            </a:srgbClr>
+          </a:outerShdw>
+        </a:effectLst>
+      </dsp:spPr>
+      <dsp:style>
+        <a:lnRef idx="1">
+          <a:scrgbClr r="0" g="0" b="0"/>
+        </a:lnRef>
+        <a:fillRef idx="1">
+          <a:scrgbClr r="0" g="0" b="0"/>
+        </a:fillRef>
+        <a:effectRef idx="2">
+          <a:scrgbClr r="0" g="0" b="0"/>
+        </a:effectRef>
+        <a:fontRef idx="minor"/>
+      </dsp:style>
+      <dsp:txBody>
+        <a:bodyPr spcFirstLastPara="0" vert="horz" wrap="square" lIns="128016" tIns="11430" rIns="11430" bIns="11430" numCol="1" spcCol="1270" anchor="ctr" anchorCtr="0">
+          <a:noAutofit/>
+        </a:bodyPr>
+        <a:lstStyle/>
+        <a:p>
+          <a:pPr marL="171450" lvl="1" indent="-171450" algn="just" defTabSz="800100" rtl="0">
+            <a:lnSpc>
+              <a:spcPct val="90000"/>
+            </a:lnSpc>
+            <a:spcBef>
+              <a:spcPct val="0"/>
+            </a:spcBef>
+            <a:spcAft>
+              <a:spcPct val="15000"/>
+            </a:spcAft>
+            <a:buChar char="•"/>
+          </a:pPr>
+          <a:r>
+            <a:rPr lang="zh-TW" altLang="en-US" sz="1800" b="1" kern="1200" dirty="0">
+              <a:latin typeface="微軟正黑體" panose="020B0604030504040204" pitchFamily="34" charset="-120"/>
+              <a:ea typeface="微軟正黑體" panose="020B0604030504040204" pitchFamily="34" charset="-120"/>
+            </a:rPr>
+            <a:t>如果搜尋的數小於</a:t>
+          </a:r>
+          <a:r>
+            <a:rPr lang="en-US" altLang="zh-TW" sz="1800" b="1" kern="1200" dirty="0">
+              <a:latin typeface="微軟正黑體" panose="020B0604030504040204" pitchFamily="34" charset="-120"/>
+              <a:ea typeface="微軟正黑體" panose="020B0604030504040204" pitchFamily="34" charset="-120"/>
+            </a:rPr>
+            <a:t>mid</a:t>
+          </a:r>
+          <a:r>
+            <a:rPr lang="zh-TW" altLang="en-US" sz="1800" b="1" kern="1200" dirty="0">
+              <a:latin typeface="微軟正黑體" panose="020B0604030504040204" pitchFamily="34" charset="-120"/>
+              <a:ea typeface="微軟正黑體" panose="020B0604030504040204" pitchFamily="34" charset="-120"/>
+            </a:rPr>
+            <a:t>，則只要考慮前半的子數列，</a:t>
+          </a:r>
+          <a:r>
+            <a:rPr lang="en-US" altLang="zh-TW" sz="1800" b="1" kern="1200" dirty="0">
+              <a:latin typeface="微軟正黑體" panose="020B0604030504040204" pitchFamily="34" charset="-120"/>
+              <a:ea typeface="微軟正黑體" panose="020B0604030504040204" pitchFamily="34" charset="-120"/>
+            </a:rPr>
+            <a:t>mid </a:t>
+          </a:r>
+          <a:r>
+            <a:rPr lang="zh-TW" altLang="en-US" sz="1800" b="1" kern="1200" dirty="0">
+              <a:latin typeface="微軟正黑體" panose="020B0604030504040204" pitchFamily="34" charset="-120"/>
+              <a:ea typeface="微軟正黑體" panose="020B0604030504040204" pitchFamily="34" charset="-120"/>
+            </a:rPr>
+            <a:t>←前面子數列的中間數，回到步驟</a:t>
+          </a:r>
+          <a:r>
+            <a:rPr lang="en-US" altLang="zh-TW" sz="1800" b="1" kern="1200" dirty="0">
+              <a:latin typeface="微軟正黑體" panose="020B0604030504040204" pitchFamily="34" charset="-120"/>
+              <a:ea typeface="微軟正黑體" panose="020B0604030504040204" pitchFamily="34" charset="-120"/>
+            </a:rPr>
+            <a:t>2</a:t>
+          </a:r>
+          <a:endParaRPr lang="zh-TW" sz="1800" b="1" kern="1200" dirty="0">
+            <a:latin typeface="微軟正黑體" panose="020B0604030504040204" pitchFamily="34" charset="-120"/>
+            <a:ea typeface="微軟正黑體" panose="020B0604030504040204" pitchFamily="34" charset="-120"/>
+          </a:endParaRPr>
+        </a:p>
+      </dsp:txBody>
+      <dsp:txXfrm rot="-5400000">
+        <a:off x="763172" y="924006"/>
+        <a:ext cx="6943094" cy="639471"/>
+      </dsp:txXfrm>
+    </dsp:sp>
+    <dsp:sp modelId="{AF898CE2-AE28-4243-89F6-C146EF02B541}">
+      <dsp:nvSpPr>
+        <dsp:cNvPr id="0" name=""/>
+        <dsp:cNvSpPr/>
+      </dsp:nvSpPr>
+      <dsp:spPr>
+        <a:xfrm rot="5400000">
+          <a:off x="-163536" y="1939635"/>
+          <a:ext cx="1090245" cy="763171"/>
+        </a:xfrm>
+        <a:prstGeom prst="chevron">
+          <a:avLst/>
+        </a:prstGeom>
+        <a:gradFill rotWithShape="0">
+          <a:gsLst>
+            <a:gs pos="0">
+              <a:schemeClr val="accent4">
+                <a:hueOff val="359873"/>
+                <a:satOff val="17380"/>
+                <a:lumOff val="9803"/>
+                <a:alphaOff val="0"/>
+                <a:shade val="51000"/>
+                <a:satMod val="130000"/>
+              </a:schemeClr>
+            </a:gs>
+            <a:gs pos="80000">
+              <a:schemeClr val="accent4">
+                <a:hueOff val="359873"/>
+                <a:satOff val="17380"/>
+                <a:lumOff val="9803"/>
+                <a:alphaOff val="0"/>
+                <a:shade val="93000"/>
+                <a:satMod val="130000"/>
+              </a:schemeClr>
+            </a:gs>
+            <a:gs pos="100000">
+              <a:schemeClr val="accent4">
+                <a:hueOff val="359873"/>
+                <a:satOff val="17380"/>
+                <a:lumOff val="9803"/>
+                <a:alphaOff val="0"/>
+                <a:shade val="94000"/>
+                <a:satMod val="135000"/>
+              </a:schemeClr>
+            </a:gs>
+          </a:gsLst>
+          <a:lin ang="16200000" scaled="0"/>
+        </a:gradFill>
+        <a:ln w="9525" cap="flat" cmpd="sng" algn="ctr">
+          <a:solidFill>
+            <a:schemeClr val="accent4">
+              <a:hueOff val="359873"/>
+              <a:satOff val="17380"/>
+              <a:lumOff val="9803"/>
+              <a:alphaOff val="0"/>
+            </a:schemeClr>
+          </a:solidFill>
+          <a:prstDash val="solid"/>
+        </a:ln>
+        <a:effectLst>
+          <a:outerShdw blurRad="40000" dist="23000" dir="5400000" rotWithShape="0">
+            <a:srgbClr val="000000">
+              <a:alpha val="35000"/>
+            </a:srgbClr>
+          </a:outerShdw>
+        </a:effectLst>
+        <a:scene3d>
+          <a:camera prst="orthographicFront">
+            <a:rot lat="0" lon="0" rev="0"/>
+          </a:camera>
+          <a:lightRig rig="threePt" dir="t">
+            <a:rot lat="0" lon="0" rev="1200000"/>
+          </a:lightRig>
+        </a:scene3d>
+        <a:sp3d>
+          <a:bevelT w="63500" h="25400"/>
+        </a:sp3d>
+      </dsp:spPr>
+      <dsp:style>
+        <a:lnRef idx="1">
+          <a:scrgbClr r="0" g="0" b="0"/>
+        </a:lnRef>
+        <a:fillRef idx="3">
+          <a:scrgbClr r="0" g="0" b="0"/>
+        </a:fillRef>
+        <a:effectRef idx="3">
+          <a:scrgbClr r="0" g="0" b="0"/>
+        </a:effectRef>
+        <a:fontRef idx="minor">
+          <a:schemeClr val="lt1"/>
+        </a:fontRef>
+      </dsp:style>
+      <dsp:txBody>
+        <a:bodyPr spcFirstLastPara="0" vert="horz" wrap="square" lIns="9525" tIns="9525" rIns="9525" bIns="9525" numCol="1" spcCol="1270" anchor="ctr" anchorCtr="0">
+          <a:noAutofit/>
+        </a:bodyPr>
+        <a:lstStyle/>
+        <a:p>
+          <a:pPr marL="0" lvl="0" indent="0" algn="ctr" defTabSz="666750" rtl="0">
+            <a:lnSpc>
+              <a:spcPct val="90000"/>
+            </a:lnSpc>
+            <a:spcBef>
+              <a:spcPct val="0"/>
+            </a:spcBef>
+            <a:spcAft>
+              <a:spcPct val="35000"/>
+            </a:spcAft>
+            <a:buNone/>
+          </a:pPr>
+          <a:r>
+            <a:rPr lang="en-US" altLang="zh-TW" sz="1500" b="1" kern="1200" dirty="0">
+              <a:latin typeface="微軟正黑體" panose="020B0604030504040204" pitchFamily="34" charset="-120"/>
+              <a:ea typeface="微軟正黑體" panose="020B0604030504040204" pitchFamily="34" charset="-120"/>
+            </a:rPr>
+            <a:t>6</a:t>
+          </a:r>
+          <a:endParaRPr lang="zh-TW" sz="1500" b="1" kern="1200" dirty="0">
+            <a:latin typeface="微軟正黑體" panose="020B0604030504040204" pitchFamily="34" charset="-120"/>
+            <a:ea typeface="微軟正黑體" panose="020B0604030504040204" pitchFamily="34" charset="-120"/>
+          </a:endParaRPr>
+        </a:p>
+      </dsp:txBody>
+      <dsp:txXfrm rot="-5400000">
+        <a:off x="2" y="2157684"/>
+        <a:ext cx="763171" cy="327074"/>
+      </dsp:txXfrm>
+    </dsp:sp>
+    <dsp:sp modelId="{F8313686-5249-4203-A1E3-82BD9AB7F03E}">
+      <dsp:nvSpPr>
+        <dsp:cNvPr id="0" name=""/>
+        <dsp:cNvSpPr/>
+      </dsp:nvSpPr>
+      <dsp:spPr>
+        <a:xfrm rot="5400000">
+          <a:off x="3897686" y="-1358415"/>
+          <a:ext cx="708659" cy="6977688"/>
+        </a:xfrm>
+        <a:prstGeom prst="round2SameRect">
+          <a:avLst/>
+        </a:prstGeom>
+        <a:solidFill>
+          <a:schemeClr val="lt1">
+            <a:alpha val="90000"/>
+            <a:hueOff val="0"/>
+            <a:satOff val="0"/>
+            <a:lumOff val="0"/>
+            <a:alphaOff val="0"/>
+          </a:schemeClr>
+        </a:solidFill>
+        <a:ln w="9525" cap="flat" cmpd="sng" algn="ctr">
+          <a:solidFill>
+            <a:schemeClr val="accent4">
+              <a:hueOff val="359873"/>
+              <a:satOff val="17380"/>
+              <a:lumOff val="9803"/>
+              <a:alphaOff val="0"/>
+            </a:schemeClr>
+          </a:solidFill>
+          <a:prstDash val="solid"/>
+        </a:ln>
+        <a:effectLst>
+          <a:outerShdw blurRad="40000" dist="23000" dir="5400000" rotWithShape="0">
+            <a:srgbClr val="000000">
+              <a:alpha val="35000"/>
+            </a:srgbClr>
+          </a:outerShdw>
+        </a:effectLst>
+      </dsp:spPr>
+      <dsp:style>
+        <a:lnRef idx="1">
+          <a:scrgbClr r="0" g="0" b="0"/>
+        </a:lnRef>
+        <a:fillRef idx="1">
+          <a:scrgbClr r="0" g="0" b="0"/>
+        </a:fillRef>
+        <a:effectRef idx="2">
+          <a:scrgbClr r="0" g="0" b="0"/>
+        </a:effectRef>
+        <a:fontRef idx="minor"/>
+      </dsp:style>
+      <dsp:txBody>
+        <a:bodyPr spcFirstLastPara="0" vert="horz" wrap="square" lIns="128016" tIns="11430" rIns="11430" bIns="11430" numCol="1" spcCol="1270" anchor="ctr" anchorCtr="0">
+          <a:noAutofit/>
+        </a:bodyPr>
+        <a:lstStyle/>
+        <a:p>
+          <a:pPr marL="171450" lvl="1" indent="-171450" algn="just" defTabSz="800100" rtl="0">
+            <a:lnSpc>
+              <a:spcPct val="90000"/>
+            </a:lnSpc>
+            <a:spcBef>
+              <a:spcPct val="0"/>
+            </a:spcBef>
+            <a:spcAft>
+              <a:spcPct val="15000"/>
+            </a:spcAft>
+            <a:buChar char="•"/>
+          </a:pPr>
+          <a:r>
+            <a:rPr lang="zh-TW" altLang="en-US" sz="1800" b="1" kern="1200" dirty="0">
+              <a:latin typeface="微軟正黑體" panose="020B0604030504040204" pitchFamily="34" charset="-120"/>
+              <a:ea typeface="微軟正黑體" panose="020B0604030504040204" pitchFamily="34" charset="-120"/>
+            </a:rPr>
+            <a:t>如果搜尋的數大於</a:t>
+          </a:r>
+          <a:r>
+            <a:rPr lang="en-US" altLang="zh-TW" sz="1800" b="1" kern="1200" dirty="0">
+              <a:latin typeface="微軟正黑體" panose="020B0604030504040204" pitchFamily="34" charset="-120"/>
+              <a:ea typeface="微軟正黑體" panose="020B0604030504040204" pitchFamily="34" charset="-120"/>
+            </a:rPr>
+            <a:t>mid</a:t>
+          </a:r>
+          <a:r>
+            <a:rPr lang="zh-TW" altLang="en-US" sz="1800" b="1" kern="1200" dirty="0">
+              <a:latin typeface="微軟正黑體" panose="020B0604030504040204" pitchFamily="34" charset="-120"/>
+              <a:ea typeface="微軟正黑體" panose="020B0604030504040204" pitchFamily="34" charset="-120"/>
+            </a:rPr>
+            <a:t>，則只要考慮後半的子數列，</a:t>
+          </a:r>
+          <a:r>
+            <a:rPr lang="en-US" altLang="zh-TW" sz="1800" b="1" kern="1200" dirty="0">
+              <a:latin typeface="微軟正黑體" panose="020B0604030504040204" pitchFamily="34" charset="-120"/>
+              <a:ea typeface="微軟正黑體" panose="020B0604030504040204" pitchFamily="34" charset="-120"/>
+            </a:rPr>
+            <a:t>mid </a:t>
+          </a:r>
+          <a:r>
+            <a:rPr lang="zh-TW" altLang="en-US" sz="1800" b="1" kern="1200" dirty="0">
+              <a:latin typeface="微軟正黑體" panose="020B0604030504040204" pitchFamily="34" charset="-120"/>
+              <a:ea typeface="微軟正黑體" panose="020B0604030504040204" pitchFamily="34" charset="-120"/>
+            </a:rPr>
+            <a:t>←後面子數列的中間數，回到步驟</a:t>
+          </a:r>
+          <a:r>
+            <a:rPr lang="en-US" altLang="zh-TW" sz="1800" b="1" kern="1200" dirty="0">
+              <a:latin typeface="微軟正黑體" panose="020B0604030504040204" pitchFamily="34" charset="-120"/>
+              <a:ea typeface="微軟正黑體" panose="020B0604030504040204" pitchFamily="34" charset="-120"/>
+            </a:rPr>
+            <a:t>2</a:t>
+          </a:r>
+          <a:endParaRPr lang="zh-TW" sz="1800" b="1" kern="1200" dirty="0">
+            <a:latin typeface="微軟正黑體" panose="020B0604030504040204" pitchFamily="34" charset="-120"/>
+            <a:ea typeface="微軟正黑體" panose="020B0604030504040204" pitchFamily="34" charset="-120"/>
+          </a:endParaRPr>
+        </a:p>
+      </dsp:txBody>
+      <dsp:txXfrm rot="-5400000">
+        <a:off x="763172" y="1810693"/>
+        <a:ext cx="6943094" cy="639471"/>
+      </dsp:txXfrm>
+    </dsp:sp>
   </dsp:spTree>
 </dsp:drawing>
 </file>
@@ -15275,7 +17052,7 @@
             <a:fld id="{55EB12AB-0481-4543-9448-EE76391C4D02}" type="datetimeFigureOut">
               <a:rPr lang="zh-TW" altLang="en-US" smtClean="0"/>
               <a:pPr/>
-              <a:t>2025/6/19</a:t>
+              <a:t>2026/6/10</a:t>
             </a:fld>
             <a:endParaRPr lang="zh-TW" altLang="en-US"/>
           </a:p>
@@ -25230,7 +27007,7 @@
               </a:lnSpc>
             </a:pPr>
             <a:r>
-              <a:rPr lang="en-US" altLang="zh-TW" b="1" dirty="0" smtClean="0">
+              <a:rPr lang="en-US" altLang="zh-TW" b="1" dirty="0">
                 <a:latin typeface="微軟正黑體" pitchFamily="34" charset="-120"/>
                 <a:ea typeface="微軟正黑體" pitchFamily="34" charset="-120"/>
                 <a:hlinkClick r:id="rId5" action="ppaction://hlinksldjump"/>
@@ -25257,7 +27034,7 @@
               </a:lnSpc>
             </a:pPr>
             <a:r>
-              <a:rPr lang="en-US" altLang="zh-TW" b="1" dirty="0" smtClean="0">
+              <a:rPr lang="en-US" altLang="zh-TW" b="1" dirty="0">
                 <a:latin typeface="微軟正黑體" pitchFamily="34" charset="-120"/>
                 <a:ea typeface="微軟正黑體" pitchFamily="34" charset="-120"/>
                 <a:hlinkClick r:id="rId6" action="ppaction://hlinksldjump"/>
@@ -25284,7 +27061,7 @@
               </a:lnSpc>
             </a:pPr>
             <a:r>
-              <a:rPr lang="en-US" altLang="zh-TW" b="1" dirty="0" smtClean="0">
+              <a:rPr lang="en-US" altLang="zh-TW" b="1" dirty="0">
                 <a:latin typeface="微軟正黑體" pitchFamily="34" charset="-120"/>
                 <a:ea typeface="微軟正黑體" pitchFamily="34" charset="-120"/>
                 <a:hlinkClick r:id="rId7" action="ppaction://hlinksldjump"/>
@@ -25311,7 +27088,7 @@
               </a:lnSpc>
             </a:pPr>
             <a:r>
-              <a:rPr lang="en-US" altLang="zh-TW" b="1" dirty="0" smtClean="0">
+              <a:rPr lang="en-US" altLang="zh-TW" b="1" dirty="0">
                 <a:latin typeface="微軟正黑體" pitchFamily="34" charset="-120"/>
                 <a:ea typeface="微軟正黑體" pitchFamily="34" charset="-120"/>
                 <a:hlinkClick r:id="rId8" action="ppaction://hlinksldjump"/>
@@ -25338,7 +27115,7 @@
               </a:lnSpc>
             </a:pPr>
             <a:r>
-              <a:rPr lang="en-US" altLang="zh-TW" b="1" dirty="0" smtClean="0">
+              <a:rPr lang="en-US" altLang="zh-TW" b="1" dirty="0">
                 <a:latin typeface="微軟正黑體" pitchFamily="34" charset="-120"/>
                 <a:ea typeface="微軟正黑體" pitchFamily="34" charset="-120"/>
                 <a:hlinkClick r:id="rId9" action="ppaction://hlinksldjump"/>
@@ -25351,15 +27128,7 @@
                 <a:ea typeface="微軟正黑體" pitchFamily="34" charset="-120"/>
                 <a:hlinkClick r:id="rId9" action="ppaction://hlinksldjump"/>
               </a:rPr>
-              <a:t>計算</a:t>
-            </a:r>
-            <a:r>
-              <a:rPr lang="zh-TW" altLang="en-US" b="1" dirty="0" smtClean="0">
-                <a:latin typeface="微軟正黑體" pitchFamily="34" charset="-120"/>
-                <a:ea typeface="微軟正黑體" pitchFamily="34" charset="-120"/>
-                <a:hlinkClick r:id="rId9" action="ppaction://hlinksldjump"/>
-              </a:rPr>
-              <a:t>難題</a:t>
+              <a:t>計算難題</a:t>
             </a:r>
             <a:endParaRPr lang="en-US" altLang="zh-TW" b="1" dirty="0">
               <a:solidFill>
@@ -25513,13 +27282,6 @@
   <p:clrMapOvr>
     <a:masterClrMapping/>
   </p:clrMapOvr>
-  <p:timing>
-    <p:tnLst>
-      <p:par>
-        <p:cTn id="1" dur="indefinite" restart="never" nodeType="tmRoot"/>
-      </p:par>
-    </p:tnLst>
-  </p:timing>
 </p:sld>
 </file>
 
@@ -25687,98 +27449,6 @@
     <p:extLst>
       <p:ext uri="{BB962C8B-B14F-4D97-AF65-F5344CB8AC3E}">
         <p14:creationId xmlns:p14="http://schemas.microsoft.com/office/powerpoint/2010/main" val="30413385"/>
-      </p:ext>
-    </p:extLst>
-  </p:cSld>
-  <p:clrMapOvr>
-    <a:masterClrMapping/>
-  </p:clrMapOvr>
-  <p:timing>
-    <p:tnLst>
-      <p:par>
-        <p:cTn id="1" dur="indefinite" restart="never" nodeType="tmRoot"/>
-      </p:par>
-    </p:tnLst>
-  </p:timing>
-</p:sld>
-</file>
-
-<file path=ppt/slides/slide100.xml><?xml version="1.0" encoding="utf-8"?>
-<p:sld xmlns:a="http://schemas.openxmlformats.org/drawingml/2006/main" xmlns:r="http://schemas.openxmlformats.org/officeDocument/2006/relationships" xmlns:p="http://schemas.openxmlformats.org/presentationml/2006/main">
-  <p:cSld>
-    <p:spTree>
-      <p:nvGrpSpPr>
-        <p:cNvPr id="1" name=""/>
-        <p:cNvGrpSpPr/>
-        <p:nvPr/>
-      </p:nvGrpSpPr>
-      <p:grpSpPr>
-        <a:xfrm>
-          <a:off x="0" y="0"/>
-          <a:ext cx="0" cy="0"/>
-          <a:chOff x="0" y="0"/>
-          <a:chExt cx="0" cy="0"/>
-        </a:xfrm>
-      </p:grpSpPr>
-      <p:sp>
-        <p:nvSpPr>
-          <p:cNvPr id="2" name="標題 1"/>
-          <p:cNvSpPr>
-            <a:spLocks noGrp="1"/>
-          </p:cNvSpPr>
-          <p:nvPr>
-            <p:ph type="title"/>
-          </p:nvPr>
-        </p:nvSpPr>
-        <p:spPr/>
-        <p:txBody>
-          <a:bodyPr/>
-          <a:lstStyle/>
-          <a:p>
-            <a:r>
-              <a:rPr lang="en-US" altLang="zh-TW" dirty="0" smtClean="0"/>
-              <a:t>11-6 </a:t>
-            </a:r>
-            <a:r>
-              <a:rPr lang="zh-TW" altLang="en-US" dirty="0"/>
-              <a:t>計算難題</a:t>
-            </a:r>
-          </a:p>
-        </p:txBody>
-      </p:sp>
-      <p:sp>
-        <p:nvSpPr>
-          <p:cNvPr id="3" name="內容版面配置區 2"/>
-          <p:cNvSpPr>
-            <a:spLocks noGrp="1"/>
-          </p:cNvSpPr>
-          <p:nvPr>
-            <p:ph idx="1"/>
-          </p:nvPr>
-        </p:nvSpPr>
-        <p:spPr/>
-        <p:txBody>
-          <a:bodyPr>
-            <a:normAutofit/>
-          </a:bodyPr>
-          <a:lstStyle/>
-          <a:p>
-            <a:r>
-              <a:rPr lang="zh-TW" altLang="en-US" dirty="0"/>
-              <a:t>可以證明旅行推銷員問題不太可能存在好的近似解法，而小偷背包問題卻已有很好的近似</a:t>
-            </a:r>
-            <a:r>
-              <a:rPr lang="zh-TW" altLang="en-US" dirty="0" smtClean="0"/>
-              <a:t>解法。</a:t>
-            </a:r>
-            <a:endParaRPr lang="zh-TW" altLang="en-US" dirty="0"/>
-          </a:p>
-        </p:txBody>
-      </p:sp>
-    </p:spTree>
-    <p:extLst>
-      <p:ext uri="{BB962C8B-B14F-4D97-AF65-F5344CB8AC3E}">
-        <p14:creationId xmlns:p14="http://schemas.microsoft.com/office/powerpoint/2010/main" val="3605386876"/>
       </p:ext>
     </p:extLst>
   </p:cSld>
@@ -25893,15 +27563,7 @@
             </a:r>
             <a:r>
               <a:rPr lang="zh-TW" altLang="en-US" dirty="0"/>
-              <a:t>大</a:t>
-            </a:r>
-            <a:r>
-              <a:rPr lang="zh-TW" altLang="en-US" dirty="0" smtClean="0"/>
-              <a:t>，將</a:t>
-            </a:r>
-            <a:r>
-              <a:rPr lang="zh-TW" altLang="en-US" dirty="0"/>
-              <a:t>所記錄的數改成</a:t>
+              <a:t>大，將所記錄的數改成</a:t>
             </a:r>
             <a:r>
               <a:rPr lang="en-US" altLang="zh-TW" dirty="0"/>
@@ -26005,13 +27667,6 @@
   <p:clrMapOvr>
     <a:masterClrMapping/>
   </p:clrMapOvr>
-  <p:timing>
-    <p:tnLst>
-      <p:par>
-        <p:cTn id="1" dur="indefinite" restart="never" nodeType="tmRoot"/>
-      </p:par>
-    </p:tnLst>
-  </p:timing>
 </p:sld>
 </file>
 
@@ -26113,13 +27768,6 @@
   <p:clrMapOvr>
     <a:masterClrMapping/>
   </p:clrMapOvr>
-  <p:timing>
-    <p:tnLst>
-      <p:par>
-        <p:cTn id="1" dur="indefinite" restart="never" nodeType="tmRoot"/>
-      </p:par>
-    </p:tnLst>
-  </p:timing>
 </p:sld>
 </file>
 
@@ -26229,13 +27877,6 @@
   <p:clrMapOvr>
     <a:masterClrMapping/>
   </p:clrMapOvr>
-  <p:timing>
-    <p:tnLst>
-      <p:par>
-        <p:cTn id="1" dur="indefinite" restart="never" nodeType="tmRoot"/>
-      </p:par>
-    </p:tnLst>
-  </p:timing>
 </p:sld>
 </file>
 
@@ -26401,13 +28042,6 @@
   <p:clrMapOvr>
     <a:masterClrMapping/>
   </p:clrMapOvr>
-  <p:timing>
-    <p:tnLst>
-      <p:par>
-        <p:cTn id="1" dur="indefinite" restart="never" nodeType="tmRoot"/>
-      </p:par>
-    </p:tnLst>
-  </p:timing>
 </p:sld>
 </file>
 
@@ -26494,13 +28128,6 @@
   <p:clrMapOvr>
     <a:masterClrMapping/>
   </p:clrMapOvr>
-  <p:timing>
-    <p:tnLst>
-      <p:par>
-        <p:cTn id="1" dur="indefinite" restart="never" nodeType="tmRoot"/>
-      </p:par>
-    </p:tnLst>
-  </p:timing>
 </p:sld>
 </file>
 
@@ -26747,13 +28374,6 @@
   <p:clrMapOvr>
     <a:masterClrMapping/>
   </p:clrMapOvr>
-  <p:timing>
-    <p:tnLst>
-      <p:par>
-        <p:cTn id="1" dur="indefinite" restart="never" nodeType="tmRoot"/>
-      </p:par>
-    </p:tnLst>
-  </p:timing>
 </p:sld>
 </file>
 
@@ -26831,13 +28451,8 @@
             </a:r>
             <a:r>
               <a:rPr lang="zh-TW" altLang="en-US" dirty="0"/>
-              <a:t>從八個數中找出最大數，共需多少次的</a:t>
-            </a:r>
-            <a:r>
-              <a:rPr lang="zh-TW" altLang="en-US" dirty="0" smtClean="0"/>
-              <a:t>比較？</a:t>
-            </a:r>
-            <a:endParaRPr lang="zh-TW" altLang="en-US" dirty="0"/>
+              <a:t>從八個數中找出最大數，共需多少次的比較？</a:t>
+            </a:r>
           </a:p>
           <a:p>
             <a:r>
@@ -26901,13 +28516,6 @@
   <p:clrMapOvr>
     <a:masterClrMapping/>
   </p:clrMapOvr>
-  <p:timing>
-    <p:tnLst>
-      <p:par>
-        <p:cTn id="1" dur="indefinite" restart="never" nodeType="tmRoot"/>
-      </p:par>
-    </p:tnLst>
-  </p:timing>
 </p:sld>
 </file>
 
@@ -27071,13 +28679,8 @@
             </a:r>
             <a:r>
               <a:rPr lang="zh-TW" altLang="en-US" dirty="0"/>
-              <a:t>次數</a:t>
-            </a:r>
-            <a:r>
-              <a:rPr lang="zh-TW" altLang="en-US" dirty="0" smtClean="0"/>
-              <a:t>相同。</a:t>
-            </a:r>
-            <a:endParaRPr lang="zh-TW" altLang="en-US" dirty="0"/>
+              <a:t>次數相同。</a:t>
+            </a:r>
           </a:p>
           <a:p>
             <a:endParaRPr lang="zh-TW" altLang="en-US" dirty="0"/>
@@ -27094,13 +28697,6 @@
   <p:clrMapOvr>
     <a:masterClrMapping/>
   </p:clrMapOvr>
-  <p:timing>
-    <p:tnLst>
-      <p:par>
-        <p:cTn id="1" dur="indefinite" restart="never" nodeType="tmRoot"/>
-      </p:par>
-    </p:tnLst>
-  </p:timing>
 </p:sld>
 </file>
 
@@ -27268,13 +28864,6 @@
   <p:clrMapOvr>
     <a:masterClrMapping/>
   </p:clrMapOvr>
-  <p:timing>
-    <p:tnLst>
-      <p:par>
-        <p:cTn id="1" dur="indefinite" restart="never" nodeType="tmRoot"/>
-      </p:par>
-    </p:tnLst>
-  </p:timing>
 </p:sld>
 </file>
 
@@ -27311,14 +28900,13 @@
           <a:lstStyle/>
           <a:p>
             <a:r>
-              <a:rPr lang="en-US" altLang="zh-TW" dirty="0" smtClean="0"/>
+              <a:rPr lang="en-US" altLang="zh-TW" dirty="0"/>
               <a:t>11-1</a:t>
             </a:r>
             <a:r>
-              <a:rPr lang="zh-TW" altLang="en-US" dirty="0" smtClean="0"/>
+              <a:rPr lang="zh-TW" altLang="en-US" dirty="0"/>
               <a:t> 演算法效率分析</a:t>
             </a:r>
-            <a:endParaRPr lang="zh-TW" altLang="en-US" dirty="0"/>
           </a:p>
         </p:txBody>
       </p:sp>
@@ -27341,11 +28929,7 @@
           <a:p>
             <a:r>
               <a:rPr lang="zh-TW" altLang="en-US" dirty="0"/>
-              <a:t>演算法乃計算機解決問題的逐步過程</a:t>
-            </a:r>
-            <a:r>
-              <a:rPr lang="zh-TW" altLang="en-US" dirty="0" smtClean="0"/>
-              <a:t>。</a:t>
+              <a:t>演算法乃計算機解決問題的逐步過程。</a:t>
             </a:r>
             <a:endParaRPr lang="en-US" altLang="zh-TW" dirty="0"/>
           </a:p>
@@ -27362,13 +28946,6 @@
   <p:clrMapOvr>
     <a:masterClrMapping/>
   </p:clrMapOvr>
-  <p:timing>
-    <p:tnLst>
-      <p:par>
-        <p:cTn id="1" dur="indefinite" restart="never" nodeType="tmRoot"/>
-      </p:par>
-    </p:tnLst>
-  </p:timing>
 </p:sld>
 </file>
 
@@ -27574,13 +29151,6 @@
   <p:clrMapOvr>
     <a:masterClrMapping/>
   </p:clrMapOvr>
-  <p:timing>
-    <p:tnLst>
-      <p:par>
-        <p:cTn id="1" dur="indefinite" restart="never" nodeType="tmRoot"/>
-      </p:par>
-    </p:tnLst>
-  </p:timing>
 </p:sld>
 </file>
 
@@ -27765,13 +29335,6 @@
   <p:clrMapOvr>
     <a:masterClrMapping/>
   </p:clrMapOvr>
-  <p:timing>
-    <p:tnLst>
-      <p:par>
-        <p:cTn id="1" dur="indefinite" restart="never" nodeType="tmRoot"/>
-      </p:par>
-    </p:tnLst>
-  </p:timing>
 </p:sld>
 </file>
 
@@ -27947,13 +29510,6 @@
   <p:clrMapOvr>
     <a:masterClrMapping/>
   </p:clrMapOvr>
-  <p:timing>
-    <p:tnLst>
-      <p:par>
-        <p:cTn id="1" dur="indefinite" restart="never" nodeType="tmRoot"/>
-      </p:par>
-    </p:tnLst>
-  </p:timing>
 </p:sld>
 </file>
 
@@ -28080,13 +29636,6 @@
   <p:clrMapOvr>
     <a:masterClrMapping/>
   </p:clrMapOvr>
-  <p:timing>
-    <p:tnLst>
-      <p:par>
-        <p:cTn id="1" dur="indefinite" restart="never" nodeType="tmRoot"/>
-      </p:par>
-    </p:tnLst>
-  </p:timing>
 </p:sld>
 </file>
 
@@ -28259,13 +29808,6 @@
   <p:clrMapOvr>
     <a:masterClrMapping/>
   </p:clrMapOvr>
-  <p:timing>
-    <p:tnLst>
-      <p:par>
-        <p:cTn id="1" dur="indefinite" restart="never" nodeType="tmRoot"/>
-      </p:par>
-    </p:tnLst>
-  </p:timing>
 </p:sld>
 </file>
 
@@ -28481,13 +30023,6 @@
   <p:clrMapOvr>
     <a:masterClrMapping/>
   </p:clrMapOvr>
-  <p:timing>
-    <p:tnLst>
-      <p:par>
-        <p:cTn id="1" dur="indefinite" restart="never" nodeType="tmRoot"/>
-      </p:par>
-    </p:tnLst>
-  </p:timing>
 </p:sld>
 </file>
 
@@ -28644,13 +30179,6 @@
   <p:clrMapOvr>
     <a:masterClrMapping/>
   </p:clrMapOvr>
-  <p:timing>
-    <p:tnLst>
-      <p:par>
-        <p:cTn id="1" dur="indefinite" restart="never" nodeType="tmRoot"/>
-      </p:par>
-    </p:tnLst>
-  </p:timing>
 </p:sld>
 </file>
 
@@ -28836,13 +30364,6 @@
   <p:clrMapOvr>
     <a:masterClrMapping/>
   </p:clrMapOvr>
-  <p:timing>
-    <p:tnLst>
-      <p:par>
-        <p:cTn id="1" dur="indefinite" restart="never" nodeType="tmRoot"/>
-      </p:par>
-    </p:tnLst>
-  </p:timing>
 </p:sld>
 </file>
 
@@ -28879,7 +30400,7 @@
           <a:lstStyle/>
           <a:p>
             <a:r>
-              <a:rPr lang="en-US" altLang="zh-TW" dirty="0" smtClean="0"/>
+              <a:rPr lang="en-US" altLang="zh-TW" dirty="0"/>
               <a:t>11-3 </a:t>
             </a:r>
             <a:r>
@@ -28999,13 +30520,6 @@
   <p:clrMapOvr>
     <a:masterClrMapping/>
   </p:clrMapOvr>
-  <p:timing>
-    <p:tnLst>
-      <p:par>
-        <p:cTn id="1" dur="indefinite" restart="never" nodeType="tmRoot"/>
-      </p:par>
-    </p:tnLst>
-  </p:timing>
 </p:sld>
 </file>
 
@@ -29042,7 +30556,7 @@
           <a:lstStyle/>
           <a:p>
             <a:r>
-              <a:rPr lang="en-US" altLang="zh-TW" dirty="0" smtClean="0"/>
+              <a:rPr lang="en-US" altLang="zh-TW" dirty="0"/>
               <a:t>11-3 </a:t>
             </a:r>
             <a:r>
@@ -29094,13 +30608,6 @@
   <p:clrMapOvr>
     <a:masterClrMapping/>
   </p:clrMapOvr>
-  <p:timing>
-    <p:tnLst>
-      <p:par>
-        <p:cTn id="1" dur="indefinite" restart="never" nodeType="tmRoot"/>
-      </p:par>
-    </p:tnLst>
-  </p:timing>
 </p:sld>
 </file>
 
@@ -29157,17 +30664,13 @@
             </a:r>
             <a:r>
               <a:rPr lang="en-US" altLang="zh-TW" dirty="0"/>
-              <a:t>f (n</a:t>
-            </a:r>
-            <a:r>
-              <a:rPr lang="en-US" altLang="zh-TW" dirty="0" smtClean="0"/>
-              <a:t>)</a:t>
-            </a:r>
-            <a:r>
-              <a:rPr lang="zh-TW" altLang="en-US" dirty="0" smtClean="0"/>
+              <a:t>f (n)</a:t>
+            </a:r>
+            <a:r>
+              <a:rPr lang="zh-TW" altLang="en-US" dirty="0"/>
               <a:t>。</a:t>
             </a:r>
-            <a:endParaRPr lang="en-US" altLang="zh-TW" dirty="0" smtClean="0"/>
+            <a:endParaRPr lang="en-US" altLang="zh-TW" dirty="0"/>
           </a:p>
           <a:p>
             <a:endParaRPr lang="zh-TW" altLang="en-US" dirty="0"/>
@@ -29293,18 +30796,11 @@
           <a:lstStyle/>
           <a:p>
             <a:r>
-              <a:rPr lang="zh-TW" altLang="en-US" sz="1600" b="1" dirty="0" smtClean="0">
-                <a:latin typeface="微軟正黑體" panose="020B0604030504040204" pitchFamily="34" charset="-120"/>
-                <a:ea typeface="微軟正黑體" panose="020B0604030504040204" pitchFamily="34" charset="-120"/>
-              </a:rPr>
-              <a:t>對</a:t>
-            </a:r>
-            <a:r>
               <a:rPr lang="zh-TW" altLang="en-US" sz="1600" b="1" dirty="0">
                 <a:latin typeface="微軟正黑體" panose="020B0604030504040204" pitchFamily="34" charset="-120"/>
                 <a:ea typeface="微軟正黑體" panose="020B0604030504040204" pitchFamily="34" charset="-120"/>
               </a:rPr>
-              <a:t>不同大小的</a:t>
+              <a:t>對不同大小的</a:t>
             </a:r>
             <a:r>
               <a:rPr lang="en-US" altLang="zh-TW" sz="1600" b="1" i="1" dirty="0">
@@ -29368,13 +30864,6 @@
   <p:clrMapOvr>
     <a:masterClrMapping/>
   </p:clrMapOvr>
-  <p:timing>
-    <p:tnLst>
-      <p:par>
-        <p:cTn id="1" dur="indefinite" restart="never" nodeType="tmRoot"/>
-      </p:par>
-    </p:tnLst>
-  </p:timing>
 </p:sld>
 </file>
 
@@ -29411,7 +30900,7 @@
           <a:lstStyle/>
           <a:p>
             <a:r>
-              <a:rPr lang="en-US" altLang="zh-TW" dirty="0" smtClean="0"/>
+              <a:rPr lang="en-US" altLang="zh-TW" dirty="0"/>
               <a:t>11-3 </a:t>
             </a:r>
             <a:r>
@@ -29434,7 +30923,7 @@
         <p:spPr/>
         <p:txBody>
           <a:bodyPr>
-            <a:normAutofit fontScale="92500" lnSpcReduction="10000"/>
+            <a:normAutofit lnSpcReduction="10000"/>
           </a:bodyPr>
           <a:lstStyle/>
           <a:p>
@@ -29467,13 +30956,6 @@
   <p:clrMapOvr>
     <a:masterClrMapping/>
   </p:clrMapOvr>
-  <p:timing>
-    <p:tnLst>
-      <p:par>
-        <p:cTn id="1" dur="indefinite" restart="never" nodeType="tmRoot"/>
-      </p:par>
-    </p:tnLst>
-  </p:timing>
 </p:sld>
 </file>
 
@@ -29510,7 +30992,7 @@
           <a:lstStyle/>
           <a:p>
             <a:r>
-              <a:rPr lang="en-US" altLang="zh-TW" dirty="0" smtClean="0"/>
+              <a:rPr lang="en-US" altLang="zh-TW" dirty="0"/>
               <a:t>11-3 </a:t>
             </a:r>
             <a:r>
@@ -29563,13 +31045,6 @@
   <p:clrMapOvr>
     <a:masterClrMapping/>
   </p:clrMapOvr>
-  <p:timing>
-    <p:tnLst>
-      <p:par>
-        <p:cTn id="1" dur="indefinite" restart="never" nodeType="tmRoot"/>
-      </p:par>
-    </p:tnLst>
-  </p:timing>
 </p:sld>
 </file>
 
@@ -29689,13 +31164,6 @@
   <p:clrMapOvr>
     <a:masterClrMapping/>
   </p:clrMapOvr>
-  <p:timing>
-    <p:tnLst>
-      <p:par>
-        <p:cTn id="1" dur="indefinite" restart="never" nodeType="tmRoot"/>
-      </p:par>
-    </p:tnLst>
-  </p:timing>
 </p:sld>
 </file>
 
@@ -29841,13 +31309,6 @@
   <p:clrMapOvr>
     <a:masterClrMapping/>
   </p:clrMapOvr>
-  <p:timing>
-    <p:tnLst>
-      <p:par>
-        <p:cTn id="1" dur="indefinite" restart="never" nodeType="tmRoot"/>
-      </p:par>
-    </p:tnLst>
-  </p:timing>
 </p:sld>
 </file>
 
@@ -29946,13 +31407,6 @@
   <p:clrMapOvr>
     <a:masterClrMapping/>
   </p:clrMapOvr>
-  <p:timing>
-    <p:tnLst>
-      <p:par>
-        <p:cTn id="1" dur="indefinite" restart="never" nodeType="tmRoot"/>
-      </p:par>
-    </p:tnLst>
-  </p:timing>
 </p:sld>
 </file>
 
@@ -30476,13 +31930,6 @@
                 <a:ea typeface="微軟正黑體" panose="020B0604030504040204" pitchFamily="34" charset="-120"/>
               </a:rPr>
               <a:t>最小，所以它和第一個位置</a:t>
-            </a:r>
-            <a:r>
-              <a:rPr lang="en-US" altLang="zh-TW" sz="1600" b="1" dirty="0">
-                <a:latin typeface="微軟正黑體" panose="020B0604030504040204" pitchFamily="34" charset="-120"/>
-                <a:ea typeface="微軟正黑體" panose="020B0604030504040204" pitchFamily="34" charset="-120"/>
-              </a:rPr>
-              <a:t/>
             </a:r>
             <a:br>
               <a:rPr lang="en-US" altLang="zh-TW" sz="1600" b="1" dirty="0">
@@ -30599,13 +32046,6 @@
   <p:clrMapOvr>
     <a:masterClrMapping/>
   </p:clrMapOvr>
-  <p:timing>
-    <p:tnLst>
-      <p:par>
-        <p:cTn id="1" dur="indefinite" restart="never" nodeType="tmRoot"/>
-      </p:par>
-    </p:tnLst>
-  </p:timing>
 </p:sld>
 </file>
 
@@ -31248,13 +32688,6 @@
   <p:clrMapOvr>
     <a:masterClrMapping/>
   </p:clrMapOvr>
-  <p:timing>
-    <p:tnLst>
-      <p:par>
-        <p:cTn id="1" dur="indefinite" restart="never" nodeType="tmRoot"/>
-      </p:par>
-    </p:tnLst>
-  </p:timing>
 </p:sld>
 </file>
 
@@ -31401,13 +32834,6 @@
   <p:clrMapOvr>
     <a:masterClrMapping/>
   </p:clrMapOvr>
-  <p:timing>
-    <p:tnLst>
-      <p:par>
-        <p:cTn id="1" dur="indefinite" restart="never" nodeType="tmRoot"/>
-      </p:par>
-    </p:tnLst>
-  </p:timing>
 </p:sld>
 </file>
 
@@ -31486,13 +32912,6 @@
   <p:clrMapOvr>
     <a:masterClrMapping/>
   </p:clrMapOvr>
-  <p:timing>
-    <p:tnLst>
-      <p:par>
-        <p:cTn id="1" dur="indefinite" restart="never" nodeType="tmRoot"/>
-      </p:par>
-    </p:tnLst>
-  </p:timing>
 </p:sld>
 </file>
 
@@ -31650,13 +33069,6 @@
   <p:clrMapOvr>
     <a:masterClrMapping/>
   </p:clrMapOvr>
-  <p:timing>
-    <p:tnLst>
-      <p:par>
-        <p:cTn id="1" dur="indefinite" restart="never" nodeType="tmRoot"/>
-      </p:par>
-    </p:tnLst>
-  </p:timing>
 </p:sld>
 </file>
 
@@ -31719,56 +33131,40 @@
               <a:t>即使</a:t>
             </a:r>
             <a:r>
-              <a:rPr lang="en-US" altLang="zh-TW" i="1" dirty="0" smtClean="0"/>
+              <a:rPr lang="en-US" altLang="zh-TW" i="1" dirty="0"/>
               <a:t>n</a:t>
             </a:r>
             <a:r>
-              <a:rPr lang="zh-TW" altLang="en-US" i="1" dirty="0" smtClean="0"/>
+              <a:rPr lang="zh-TW" altLang="en-US" i="1" dirty="0"/>
               <a:t> </a:t>
             </a:r>
             <a:r>
-              <a:rPr lang="zh-TW" altLang="zh-TW" dirty="0" smtClean="0"/>
-              <a:t>很</a:t>
-            </a:r>
-            <a:r>
               <a:rPr lang="zh-TW" altLang="zh-TW" dirty="0"/>
-              <a:t>小，像</a:t>
-            </a:r>
-            <a:r>
-              <a:rPr lang="en-US" altLang="zh-TW" dirty="0" smtClean="0"/>
+              <a:t>很小，像</a:t>
+            </a:r>
+            <a:r>
+              <a:rPr lang="en-US" altLang="zh-TW" dirty="0"/>
               <a:t>10</a:t>
             </a:r>
             <a:r>
-              <a:rPr lang="en-US" altLang="zh-TW" i="1" baseline="30000" dirty="0" smtClean="0"/>
+              <a:rPr lang="en-US" altLang="zh-TW" i="1" baseline="30000" dirty="0"/>
               <a:t>n</a:t>
             </a:r>
             <a:r>
-              <a:rPr lang="zh-TW" altLang="en-US" i="1" baseline="30000" dirty="0" smtClean="0"/>
+              <a:rPr lang="zh-TW" altLang="en-US" i="1" baseline="30000" dirty="0"/>
               <a:t> </a:t>
             </a:r>
             <a:r>
-              <a:rPr lang="zh-TW" altLang="zh-TW" dirty="0" smtClean="0"/>
-              <a:t>那樣</a:t>
-            </a:r>
-            <a:r>
               <a:rPr lang="zh-TW" altLang="zh-TW" dirty="0"/>
-              <a:t>的指數演算法成長得相當快。二次方和三次方函數成長速度仍比線性函數快許多</a:t>
-            </a:r>
-            <a:r>
-              <a:rPr lang="zh-TW" altLang="zh-TW" dirty="0" smtClean="0"/>
-              <a:t>。</a:t>
-            </a:r>
-            <a:endParaRPr lang="en-US" altLang="zh-TW" dirty="0" smtClean="0"/>
+              <a:t>那樣的指數演算法成長得相當快。二次方和三次方函數成長速度仍比線性函數快許多。</a:t>
+            </a:r>
+            <a:endParaRPr lang="en-US" altLang="zh-TW" dirty="0"/>
           </a:p>
           <a:p>
             <a:pPr algn="l"/>
             <a:r>
-              <a:rPr lang="zh-TW" altLang="zh-TW" dirty="0" smtClean="0"/>
-              <a:t>二</a:t>
-            </a:r>
-            <a:r>
               <a:rPr lang="zh-TW" altLang="zh-TW" dirty="0"/>
-              <a:t>次方或更高時間複雜度的演算法，通常無法用來處理大數據。</a:t>
+              <a:t>二次方或更高時間複雜度的演算法，通常無法用來處理大數據。</a:t>
             </a:r>
             <a:endParaRPr lang="zh-TW" altLang="en-US" dirty="0"/>
           </a:p>
@@ -31784,13 +33180,6 @@
   <p:clrMapOvr>
     <a:masterClrMapping/>
   </p:clrMapOvr>
-  <p:timing>
-    <p:tnLst>
-      <p:par>
-        <p:cTn id="1" dur="indefinite" restart="never" nodeType="tmRoot"/>
-      </p:par>
-    </p:tnLst>
-  </p:timing>
 </p:sld>
 </file>
 
@@ -31888,13 +33277,6 @@
   <p:clrMapOvr>
     <a:masterClrMapping/>
   </p:clrMapOvr>
-  <p:timing>
-    <p:tnLst>
-      <p:par>
-        <p:cTn id="1" dur="indefinite" restart="never" nodeType="tmRoot"/>
-      </p:par>
-    </p:tnLst>
-  </p:timing>
 </p:sld>
 </file>
 
@@ -32464,13 +33846,6 @@
   <p:clrMapOvr>
     <a:masterClrMapping/>
   </p:clrMapOvr>
-  <p:timing>
-    <p:tnLst>
-      <p:par>
-        <p:cTn id="1" dur="indefinite" restart="never" nodeType="tmRoot"/>
-      </p:par>
-    </p:tnLst>
-  </p:timing>
 </p:sld>
 </file>
 
@@ -34182,13 +35557,6 @@
   <p:clrMapOvr>
     <a:masterClrMapping/>
   </p:clrMapOvr>
-  <p:timing>
-    <p:tnLst>
-      <p:par>
-        <p:cTn id="1" dur="indefinite" restart="never" nodeType="tmRoot"/>
-      </p:par>
-    </p:tnLst>
-  </p:timing>
 </p:sld>
 </file>
 
@@ -35114,7 +36482,7 @@
                 <a:latin typeface="微軟正黑體" panose="020B0604030504040204" pitchFamily="34" charset="-120"/>
                 <a:ea typeface="微軟正黑體" panose="020B0604030504040204" pitchFamily="34" charset="-120"/>
               </a:rPr>
-              <a:t>看起，它沒比 </a:t>
+              <a:t>看起，它沒比</a:t>
             </a:r>
             <a:r>
               <a:rPr lang="en-US" altLang="zh-TW" sz="1600" b="1" dirty="0">
@@ -36726,138 +38094,134 @@
           <a:p>
             <a:pPr algn="l"/>
             <a:r>
-              <a:rPr lang="zh-TW" altLang="zh-TW" dirty="0" smtClean="0"/>
+              <a:rPr lang="zh-TW" altLang="zh-TW" dirty="0"/>
               <a:t>大</a:t>
             </a:r>
             <a:r>
-              <a:rPr lang="en-US" altLang="zh-TW" dirty="0" smtClean="0"/>
+              <a:rPr lang="en-US" altLang="zh-TW" dirty="0"/>
               <a:t>O</a:t>
             </a:r>
             <a:r>
-              <a:rPr lang="zh-TW" altLang="en-US" dirty="0" smtClean="0"/>
+              <a:rPr lang="zh-TW" altLang="zh-TW" dirty="0"/>
+              <a:t>符號定義：</a:t>
+            </a:r>
+            <a:r>
+              <a:rPr lang="en-US" altLang="zh-TW" dirty="0"/>
+              <a:t>f</a:t>
+            </a:r>
+            <a:r>
+              <a:rPr lang="zh-TW" altLang="en-US" dirty="0"/>
               <a:t> </a:t>
             </a:r>
             <a:r>
-              <a:rPr lang="zh-TW" altLang="zh-TW" dirty="0" smtClean="0"/>
-              <a:t>符號定義：</a:t>
-            </a:r>
-            <a:r>
-              <a:rPr lang="en-US" altLang="zh-TW" dirty="0" smtClean="0"/>
-              <a:t>f</a:t>
-            </a:r>
-            <a:r>
-              <a:rPr lang="zh-TW" altLang="en-US" dirty="0" smtClean="0"/>
+              <a:rPr lang="en-US" altLang="zh-TW" dirty="0"/>
+              <a:t>(n) = O</a:t>
+            </a:r>
+            <a:r>
+              <a:rPr lang="zh-TW" altLang="en-US" dirty="0"/>
               <a:t> </a:t>
             </a:r>
             <a:r>
-              <a:rPr lang="en-US" altLang="zh-TW" dirty="0" smtClean="0"/>
-              <a:t>(n) = O</a:t>
-            </a:r>
-            <a:r>
-              <a:rPr lang="zh-TW" altLang="en-US" dirty="0" smtClean="0"/>
-              <a:t> </a:t>
-            </a:r>
-            <a:r>
-              <a:rPr lang="en-US" altLang="zh-TW" dirty="0" smtClean="0"/>
+              <a:rPr lang="en-US" altLang="zh-TW" dirty="0"/>
               <a:t>(g(n)) </a:t>
             </a:r>
             <a:r>
-              <a:rPr lang="zh-TW" altLang="zh-TW" dirty="0" smtClean="0"/>
+              <a:rPr lang="zh-TW" altLang="zh-TW" dirty="0"/>
               <a:t>若存在正整數</a:t>
             </a:r>
             <a:r>
-              <a:rPr lang="en-US" altLang="zh-TW" dirty="0" smtClean="0"/>
+              <a:rPr lang="en-US" altLang="zh-TW" dirty="0"/>
               <a:t>c</a:t>
             </a:r>
             <a:r>
-              <a:rPr lang="zh-TW" altLang="zh-TW" dirty="0" smtClean="0"/>
+              <a:rPr lang="zh-TW" altLang="zh-TW" dirty="0"/>
               <a:t>和</a:t>
-            </a:r>
-            <a:r>
-              <a:rPr lang="en-US" altLang="zh-TW" dirty="0" smtClean="0"/>
-              <a:t>n</a:t>
-            </a:r>
-            <a:r>
-              <a:rPr lang="en-US" altLang="zh-TW" baseline="-25000" dirty="0" smtClean="0"/>
-              <a:t>0</a:t>
-            </a:r>
-            <a:r>
-              <a:rPr lang="zh-TW" altLang="zh-TW" dirty="0" smtClean="0"/>
-              <a:t>，使對所有</a:t>
-            </a:r>
-            <a:r>
-              <a:rPr lang="en-US" altLang="zh-TW" dirty="0" smtClean="0"/>
-              <a:t>n</a:t>
-            </a:r>
-            <a:r>
-              <a:rPr lang="zh-TW" altLang="en-US" dirty="0" smtClean="0"/>
-              <a:t> </a:t>
-            </a:r>
-            <a:r>
-              <a:rPr lang="en-US" altLang="zh-TW" dirty="0" smtClean="0"/>
-              <a:t>≥n</a:t>
-            </a:r>
-            <a:r>
-              <a:rPr lang="en-US" altLang="zh-TW" baseline="30000" dirty="0" smtClean="0"/>
-              <a:t>0</a:t>
-            </a:r>
-            <a:r>
-              <a:rPr lang="zh-TW" altLang="zh-TW" dirty="0" smtClean="0"/>
-              <a:t>，</a:t>
-            </a:r>
-            <a:r>
-              <a:rPr lang="en-US" altLang="zh-TW" dirty="0" smtClean="0"/>
-              <a:t>0</a:t>
-            </a:r>
-            <a:r>
-              <a:rPr lang="zh-TW" altLang="zh-TW" dirty="0" smtClean="0"/>
-              <a:t>≦</a:t>
-            </a:r>
-            <a:r>
-              <a:rPr lang="en-US" altLang="zh-TW" dirty="0" smtClean="0"/>
-              <a:t>f</a:t>
-            </a:r>
-            <a:r>
-              <a:rPr lang="zh-TW" altLang="en-US" dirty="0" smtClean="0"/>
-              <a:t> </a:t>
-            </a:r>
-            <a:r>
-              <a:rPr lang="en-US" altLang="zh-TW" dirty="0" smtClean="0"/>
-              <a:t>(n)</a:t>
-            </a:r>
-            <a:r>
-              <a:rPr lang="zh-TW" altLang="zh-TW" dirty="0" smtClean="0"/>
-              <a:t>≦</a:t>
-            </a:r>
-            <a:r>
-              <a:rPr lang="en-US" altLang="zh-TW" dirty="0" smtClean="0"/>
-              <a:t>cg(n)</a:t>
-            </a:r>
-            <a:r>
-              <a:rPr lang="zh-TW" altLang="zh-TW" dirty="0" smtClean="0"/>
-              <a:t>。</a:t>
-            </a:r>
-            <a:endParaRPr lang="en-US" altLang="zh-TW" dirty="0" smtClean="0"/>
-          </a:p>
-          <a:p>
-            <a:pPr algn="l"/>
-            <a:r>
-              <a:rPr lang="zh-TW" altLang="en-US" dirty="0"/>
-              <a:t>對於足夠大的</a:t>
             </a:r>
             <a:r>
               <a:rPr lang="en-US" altLang="zh-TW" dirty="0"/>
               <a:t>n</a:t>
             </a:r>
             <a:r>
-              <a:rPr lang="zh-TW" altLang="en-US" dirty="0"/>
+              <a:rPr lang="en-US" altLang="zh-TW" baseline="-25000" dirty="0"/>
+              <a:t>0</a:t>
+            </a:r>
+            <a:r>
+              <a:rPr lang="zh-TW" altLang="zh-TW" dirty="0"/>
+              <a:t>，使對所有</a:t>
+            </a:r>
+            <a:r>
+              <a:rPr lang="en-US" altLang="zh-TW" dirty="0"/>
+              <a:t>n</a:t>
+            </a:r>
+            <a:r>
+              <a:rPr lang="zh-TW" altLang="en-US" dirty="0"/>
+              <a:t> </a:t>
+            </a:r>
+            <a:r>
+              <a:rPr lang="en-US" altLang="zh-TW" dirty="0"/>
+              <a:t>≥n</a:t>
+            </a:r>
+            <a:r>
+              <a:rPr lang="en-US" altLang="zh-TW" baseline="30000" dirty="0"/>
+              <a:t>0</a:t>
+            </a:r>
+            <a:r>
+              <a:rPr lang="zh-TW" altLang="zh-TW" dirty="0"/>
               <a:t>，</a:t>
+            </a:r>
+            <a:r>
+              <a:rPr lang="en-US" altLang="zh-TW" dirty="0"/>
+              <a:t>0</a:t>
+            </a:r>
+            <a:r>
+              <a:rPr lang="zh-TW" altLang="zh-TW" dirty="0"/>
+              <a:t>≦</a:t>
+            </a:r>
+            <a:r>
+              <a:rPr lang="en-US" altLang="zh-TW" dirty="0"/>
+              <a:t>f</a:t>
+            </a:r>
+            <a:r>
+              <a:rPr lang="zh-TW" altLang="en-US" dirty="0"/>
+              <a:t> </a:t>
+            </a:r>
+            <a:r>
+              <a:rPr lang="en-US" altLang="zh-TW" dirty="0"/>
+              <a:t>(n)</a:t>
+            </a:r>
+            <a:r>
+              <a:rPr lang="zh-TW" altLang="zh-TW" dirty="0"/>
+              <a:t>≦</a:t>
             </a:r>
             <a:r>
               <a:rPr lang="en-US" altLang="zh-TW" dirty="0"/>
               <a:t>cg(n)</a:t>
             </a:r>
             <a:r>
+              <a:rPr lang="zh-TW" altLang="zh-TW" dirty="0"/>
+              <a:t>。</a:t>
+            </a:r>
+            <a:endParaRPr lang="en-US" altLang="zh-TW" dirty="0"/>
+          </a:p>
+          <a:p>
+            <a:pPr algn="l"/>
+            <a:r>
+              <a:rPr lang="zh-TW" altLang="en-US" dirty="0"/>
+              <a:t>對於足夠大的</a:t>
+            </a:r>
+            <a:r>
+              <a:rPr lang="en-US" altLang="zh-TW" dirty="0"/>
+              <a:t>n</a:t>
+            </a:r>
+            <a:r>
+              <a:rPr lang="zh-TW" altLang="en-US" dirty="0"/>
+              <a:t>，</a:t>
+            </a:r>
+            <a:r>
+              <a:rPr lang="en-US" altLang="zh-TW" dirty="0"/>
+              <a:t>cg(n)</a:t>
+            </a:r>
+            <a:r>
               <a:rPr lang="zh-TW" altLang="en-US" dirty="0"/>
               <a:t>是</a:t>
             </a:r>
@@ -36867,25 +38231,13 @@
             </a:r>
             <a:r>
               <a:rPr lang="zh-TW" altLang="en-US" dirty="0"/>
-              <a:t>的上界</a:t>
-            </a:r>
-            <a:r>
-              <a:rPr lang="zh-TW" altLang="en-US" dirty="0" smtClean="0"/>
-              <a:t>。</a:t>
-            </a:r>
-            <a:r>
-              <a:rPr lang="en-US" altLang="zh-TW" dirty="0" smtClean="0"/>
-              <a:t/>
+              <a:t>的上界。</a:t>
             </a:r>
             <a:br>
-              <a:rPr lang="en-US" altLang="zh-TW" dirty="0" smtClean="0"/>
+              <a:rPr lang="en-US" altLang="zh-TW" dirty="0"/>
             </a:br>
-            <a:r>
-              <a:rPr lang="en-US" altLang="zh-TW" dirty="0" smtClean="0"/>
-              <a:t/>
-            </a:r>
             <a:br>
-              <a:rPr lang="en-US" altLang="zh-TW" dirty="0" smtClean="0"/>
+              <a:rPr lang="en-US" altLang="zh-TW" dirty="0"/>
             </a:br>
             <a:endParaRPr lang="zh-TW" altLang="en-US" dirty="0"/>
           </a:p>
@@ -36901,13 +38253,6 @@
   <p:clrMapOvr>
     <a:masterClrMapping/>
   </p:clrMapOvr>
-  <p:timing>
-    <p:tnLst>
-      <p:par>
-        <p:cTn id="1" dur="indefinite" restart="never" nodeType="tmRoot"/>
-      </p:par>
-    </p:tnLst>
-  </p:timing>
 </p:sld>
 </file>
 
@@ -37077,7 +38422,7 @@
           <a:lstStyle/>
           <a:p>
             <a:r>
-              <a:rPr lang="en-US" altLang="zh-TW" dirty="0" smtClean="0"/>
+              <a:rPr lang="en-US" altLang="zh-TW" dirty="0"/>
               <a:t>11-4 </a:t>
             </a:r>
             <a:r>
@@ -37249,7 +38594,7 @@
           <a:lstStyle/>
           <a:p>
             <a:r>
-              <a:rPr lang="en-US" altLang="zh-TW" dirty="0" smtClean="0"/>
+              <a:rPr lang="en-US" altLang="zh-TW" dirty="0"/>
               <a:t>11-4 </a:t>
             </a:r>
             <a:r>
@@ -37271,7 +38616,9 @@
         </p:nvSpPr>
         <p:spPr/>
         <p:txBody>
-          <a:bodyPr/>
+          <a:bodyPr>
+            <a:normAutofit fontScale="92500" lnSpcReduction="20000"/>
+          </a:bodyPr>
           <a:lstStyle/>
           <a:p>
             <a:r>
@@ -37309,6 +38656,22 @@
             <a:r>
               <a:rPr lang="zh-TW" altLang="en-US" dirty="0"/>
               <a:t>在這數列裡。</a:t>
+            </a:r>
+            <a:endParaRPr lang="en-US" altLang="zh-TW" dirty="0"/>
+          </a:p>
+          <a:p>
+            <a:pPr lvl="1"/>
+            <a:r>
+              <a:rPr lang="zh-TW" altLang="en-US" dirty="0"/>
+              <a:t>這種逐一比較搜尋的方法稱為循序搜尋法</a:t>
+            </a:r>
+            <a:r>
+              <a:rPr lang="en-US" altLang="zh-TW" dirty="0"/>
+              <a:t>(sequential search)</a:t>
+            </a:r>
+            <a:r>
+              <a:rPr lang="zh-TW" altLang="en-US" dirty="0"/>
+              <a:t>，在數列很短的時候，還撐得過去，但當數列很長的時候，每次搜尋都要一一比對，則效率就差了。</a:t>
             </a:r>
           </a:p>
           <a:p>
@@ -37362,104 +38725,7 @@
           <a:lstStyle/>
           <a:p>
             <a:r>
-              <a:rPr lang="en-US" altLang="zh-TW" dirty="0" smtClean="0"/>
-              <a:t>11-4 </a:t>
-            </a:r>
-            <a:r>
-              <a:rPr lang="zh-TW" altLang="en-US" dirty="0"/>
-              <a:t>二元搜尋法</a:t>
-            </a:r>
-          </a:p>
-        </p:txBody>
-      </p:sp>
-      <p:sp>
-        <p:nvSpPr>
-          <p:cNvPr id="3" name="內容版面配置區 2"/>
-          <p:cNvSpPr>
-            <a:spLocks noGrp="1"/>
-          </p:cNvSpPr>
-          <p:nvPr>
-            <p:ph idx="1"/>
-          </p:nvPr>
-        </p:nvSpPr>
-        <p:spPr/>
-        <p:txBody>
-          <a:bodyPr>
-            <a:normAutofit/>
-          </a:bodyPr>
-          <a:lstStyle/>
-          <a:p>
-            <a:r>
-              <a:rPr lang="zh-TW" altLang="en-US"/>
-              <a:t>這種逐一比較搜尋的方法稱為</a:t>
-            </a:r>
-            <a:r>
-              <a:rPr lang="zh-TW" altLang="en-US">
-                <a:solidFill>
-                  <a:srgbClr val="C00000"/>
-                </a:solidFill>
-              </a:rPr>
-              <a:t>循序搜尋法</a:t>
-            </a:r>
-            <a:r>
-              <a:rPr lang="en-US" altLang="zh-TW"/>
-              <a:t>(sequential search)</a:t>
-            </a:r>
-            <a:r>
-              <a:rPr lang="zh-TW" altLang="en-US"/>
-              <a:t>，在數列很短的時候，還撐得過去，但當數列很長的時候，每次搜尋都要一一比對，則效率就差了。</a:t>
-            </a:r>
-            <a:endParaRPr lang="en-US" altLang="zh-TW" dirty="0"/>
-          </a:p>
-        </p:txBody>
-      </p:sp>
-    </p:spTree>
-    <p:extLst>
-      <p:ext uri="{BB962C8B-B14F-4D97-AF65-F5344CB8AC3E}">
-        <p14:creationId xmlns:p14="http://schemas.microsoft.com/office/powerpoint/2010/main" val="3854779372"/>
-      </p:ext>
-    </p:extLst>
-  </p:cSld>
-  <p:clrMapOvr>
-    <a:masterClrMapping/>
-  </p:clrMapOvr>
-</p:sld>
-</file>
-
-<file path=ppt/slides/slide64.xml><?xml version="1.0" encoding="utf-8"?>
-<p:sld xmlns:a="http://schemas.openxmlformats.org/drawingml/2006/main" xmlns:r="http://schemas.openxmlformats.org/officeDocument/2006/relationships" xmlns:p="http://schemas.openxmlformats.org/presentationml/2006/main">
-  <p:cSld>
-    <p:spTree>
-      <p:nvGrpSpPr>
-        <p:cNvPr id="1" name=""/>
-        <p:cNvGrpSpPr/>
-        <p:nvPr/>
-      </p:nvGrpSpPr>
-      <p:grpSpPr>
-        <a:xfrm>
-          <a:off x="0" y="0"/>
-          <a:ext cx="0" cy="0"/>
-          <a:chOff x="0" y="0"/>
-          <a:chExt cx="0" cy="0"/>
-        </a:xfrm>
-      </p:grpSpPr>
-      <p:sp>
-        <p:nvSpPr>
-          <p:cNvPr id="2" name="標題 1"/>
-          <p:cNvSpPr>
-            <a:spLocks noGrp="1"/>
-          </p:cNvSpPr>
-          <p:nvPr>
-            <p:ph type="title"/>
-          </p:nvPr>
-        </p:nvSpPr>
-        <p:spPr/>
-        <p:txBody>
-          <a:bodyPr/>
-          <a:lstStyle/>
-          <a:p>
-            <a:r>
-              <a:rPr lang="en-US" altLang="zh-TW" dirty="0" smtClean="0"/>
+              <a:rPr lang="en-US" altLang="zh-TW" dirty="0"/>
               <a:t>11-4 </a:t>
             </a:r>
             <a:r>
@@ -37523,7 +38789,7 @@
 </p:sld>
 </file>
 
-<file path=ppt/slides/slide65.xml><?xml version="1.0" encoding="utf-8"?>
+<file path=ppt/slides/slide64.xml><?xml version="1.0" encoding="utf-8"?>
 <p:sld xmlns:a="http://schemas.openxmlformats.org/drawingml/2006/main" xmlns:r="http://schemas.openxmlformats.org/officeDocument/2006/relationships" xmlns:p="http://schemas.openxmlformats.org/presentationml/2006/main">
   <p:cSld>
     <p:spTree>
@@ -37556,7 +38822,7 @@
           <a:lstStyle/>
           <a:p>
             <a:r>
-              <a:rPr lang="en-US" altLang="zh-TW" dirty="0" smtClean="0"/>
+              <a:rPr lang="en-US" altLang="zh-TW" dirty="0"/>
               <a:t>11-4 </a:t>
             </a:r>
             <a:r>
@@ -37637,6 +38903,79 @@
         <p:xfrm>
           <a:off x="971600" y="3111810"/>
           <a:ext cx="7515835" cy="1653934"/>
+        </p:xfrm>
+        <a:graphic>
+          <a:graphicData uri="http://schemas.openxmlformats.org/drawingml/2006/diagram">
+            <dgm:relIds xmlns:dgm="http://schemas.openxmlformats.org/drawingml/2006/diagram" xmlns:r="http://schemas.openxmlformats.org/officeDocument/2006/relationships" r:dm="rId2" r:lo="rId3" r:qs="rId4" r:cs="rId5"/>
+          </a:graphicData>
+        </a:graphic>
+      </p:graphicFrame>
+    </p:spTree>
+  </p:cSld>
+  <p:clrMapOvr>
+    <a:masterClrMapping/>
+  </p:clrMapOvr>
+</p:sld>
+</file>
+
+<file path=ppt/slides/slide65.xml><?xml version="1.0" encoding="utf-8"?>
+<p:sld xmlns:a="http://schemas.openxmlformats.org/drawingml/2006/main" xmlns:r="http://schemas.openxmlformats.org/officeDocument/2006/relationships" xmlns:p="http://schemas.openxmlformats.org/presentationml/2006/main">
+  <p:cSld>
+    <p:spTree>
+      <p:nvGrpSpPr>
+        <p:cNvPr id="1" name=""/>
+        <p:cNvGrpSpPr/>
+        <p:nvPr/>
+      </p:nvGrpSpPr>
+      <p:grpSpPr>
+        <a:xfrm>
+          <a:off x="0" y="0"/>
+          <a:ext cx="0" cy="0"/>
+          <a:chOff x="0" y="0"/>
+          <a:chExt cx="0" cy="0"/>
+        </a:xfrm>
+      </p:grpSpPr>
+      <p:sp>
+        <p:nvSpPr>
+          <p:cNvPr id="3" name="標題 2"/>
+          <p:cNvSpPr>
+            <a:spLocks noGrp="1"/>
+          </p:cNvSpPr>
+          <p:nvPr>
+            <p:ph type="title"/>
+          </p:nvPr>
+        </p:nvSpPr>
+        <p:spPr/>
+        <p:txBody>
+          <a:bodyPr/>
+          <a:lstStyle/>
+          <a:p>
+            <a:r>
+              <a:rPr lang="en-US" altLang="zh-TW" dirty="0"/>
+              <a:t>11-4 </a:t>
+            </a:r>
+            <a:r>
+              <a:rPr lang="zh-TW" altLang="en-US" dirty="0"/>
+              <a:t>二元搜尋法</a:t>
+            </a:r>
+          </a:p>
+        </p:txBody>
+      </p:sp>
+      <p:graphicFrame>
+        <p:nvGraphicFramePr>
+          <p:cNvPr id="9" name="資料庫圖表 8"/>
+          <p:cNvGraphicFramePr/>
+          <p:nvPr>
+            <p:extLst>
+              <p:ext uri="{D42A27DB-BD31-4B8C-83A1-F6EECF244321}">
+                <p14:modId xmlns:p14="http://schemas.microsoft.com/office/powerpoint/2010/main" val="2680668905"/>
+              </p:ext>
+            </p:extLst>
+          </p:nvPr>
+        </p:nvGraphicFramePr>
+        <p:xfrm>
+          <a:off x="791580" y="1592892"/>
+          <a:ext cx="7740860" cy="2869069"/>
         </p:xfrm>
         <a:graphic>
           <a:graphicData uri="http://schemas.openxmlformats.org/drawingml/2006/diagram">
@@ -37671,79 +39010,6 @@
       </p:grpSpPr>
       <p:sp>
         <p:nvSpPr>
-          <p:cNvPr id="3" name="標題 2"/>
-          <p:cNvSpPr>
-            <a:spLocks noGrp="1"/>
-          </p:cNvSpPr>
-          <p:nvPr>
-            <p:ph type="title"/>
-          </p:nvPr>
-        </p:nvSpPr>
-        <p:spPr/>
-        <p:txBody>
-          <a:bodyPr/>
-          <a:lstStyle/>
-          <a:p>
-            <a:r>
-              <a:rPr lang="en-US" altLang="zh-TW" dirty="0" smtClean="0"/>
-              <a:t>11-4 </a:t>
-            </a:r>
-            <a:r>
-              <a:rPr lang="zh-TW" altLang="en-US" dirty="0"/>
-              <a:t>二元搜尋法</a:t>
-            </a:r>
-          </a:p>
-        </p:txBody>
-      </p:sp>
-      <p:graphicFrame>
-        <p:nvGraphicFramePr>
-          <p:cNvPr id="9" name="資料庫圖表 8"/>
-          <p:cNvGraphicFramePr/>
-          <p:nvPr>
-            <p:extLst>
-              <p:ext uri="{D42A27DB-BD31-4B8C-83A1-F6EECF244321}">
-                <p14:modId xmlns:p14="http://schemas.microsoft.com/office/powerpoint/2010/main" val="2680668905"/>
-              </p:ext>
-            </p:extLst>
-          </p:nvPr>
-        </p:nvGraphicFramePr>
-        <p:xfrm>
-          <a:off x="791580" y="1592892"/>
-          <a:ext cx="7740860" cy="2869069"/>
-        </p:xfrm>
-        <a:graphic>
-          <a:graphicData uri="http://schemas.openxmlformats.org/drawingml/2006/diagram">
-            <dgm:relIds xmlns:dgm="http://schemas.openxmlformats.org/drawingml/2006/diagram" xmlns:r="http://schemas.openxmlformats.org/officeDocument/2006/relationships" r:dm="rId2" r:lo="rId3" r:qs="rId4" r:cs="rId5"/>
-          </a:graphicData>
-        </a:graphic>
-      </p:graphicFrame>
-    </p:spTree>
-  </p:cSld>
-  <p:clrMapOvr>
-    <a:masterClrMapping/>
-  </p:clrMapOvr>
-</p:sld>
-</file>
-
-<file path=ppt/slides/slide67.xml><?xml version="1.0" encoding="utf-8"?>
-<p:sld xmlns:a="http://schemas.openxmlformats.org/drawingml/2006/main" xmlns:r="http://schemas.openxmlformats.org/officeDocument/2006/relationships" xmlns:p="http://schemas.openxmlformats.org/presentationml/2006/main">
-  <p:cSld>
-    <p:spTree>
-      <p:nvGrpSpPr>
-        <p:cNvPr id="1" name=""/>
-        <p:cNvGrpSpPr/>
-        <p:nvPr/>
-      </p:nvGrpSpPr>
-      <p:grpSpPr>
-        <a:xfrm>
-          <a:off x="0" y="0"/>
-          <a:ext cx="0" cy="0"/>
-          <a:chOff x="0" y="0"/>
-          <a:chExt cx="0" cy="0"/>
-        </a:xfrm>
-      </p:grpSpPr>
-      <p:sp>
-        <p:nvSpPr>
           <p:cNvPr id="2" name="標題 1"/>
           <p:cNvSpPr>
             <a:spLocks noGrp="1"/>
@@ -37758,7 +39024,7 @@
           <a:lstStyle/>
           <a:p>
             <a:r>
-              <a:rPr lang="en-US" altLang="zh-TW" dirty="0" smtClean="0"/>
+              <a:rPr lang="en-US" altLang="zh-TW" dirty="0"/>
               <a:t>11-4 </a:t>
             </a:r>
             <a:r>
@@ -37856,7 +39122,7 @@
 </p:sld>
 </file>
 
-<file path=ppt/slides/slide68.xml><?xml version="1.0" encoding="utf-8"?>
+<file path=ppt/slides/slide67.xml><?xml version="1.0" encoding="utf-8"?>
 <p:sld xmlns:a="http://schemas.openxmlformats.org/drawingml/2006/main" xmlns:r="http://schemas.openxmlformats.org/officeDocument/2006/relationships" xmlns:p="http://schemas.openxmlformats.org/presentationml/2006/main">
   <p:cSld>
     <p:spTree>
@@ -37889,7 +39155,7 @@
           <a:lstStyle/>
           <a:p>
             <a:r>
-              <a:rPr lang="en-US" altLang="zh-TW" dirty="0" smtClean="0"/>
+              <a:rPr lang="en-US" altLang="zh-TW" dirty="0"/>
               <a:t>11-4 </a:t>
             </a:r>
             <a:r>
@@ -37937,6 +39203,157 @@
         </p:txBody>
       </p:sp>
     </p:spTree>
+  </p:cSld>
+  <p:clrMapOvr>
+    <a:masterClrMapping/>
+  </p:clrMapOvr>
+</p:sld>
+</file>
+
+<file path=ppt/slides/slide68.xml><?xml version="1.0" encoding="utf-8"?>
+<p:sld xmlns:a="http://schemas.openxmlformats.org/drawingml/2006/main" xmlns:r="http://schemas.openxmlformats.org/officeDocument/2006/relationships" xmlns:p="http://schemas.openxmlformats.org/presentationml/2006/main">
+  <p:cSld>
+    <p:spTree>
+      <p:nvGrpSpPr>
+        <p:cNvPr id="1" name=""/>
+        <p:cNvGrpSpPr/>
+        <p:nvPr/>
+      </p:nvGrpSpPr>
+      <p:grpSpPr>
+        <a:xfrm>
+          <a:off x="0" y="0"/>
+          <a:ext cx="0" cy="0"/>
+          <a:chOff x="0" y="0"/>
+          <a:chExt cx="0" cy="0"/>
+        </a:xfrm>
+      </p:grpSpPr>
+      <p:sp>
+        <p:nvSpPr>
+          <p:cNvPr id="2" name="標題 1"/>
+          <p:cNvSpPr>
+            <a:spLocks noGrp="1"/>
+          </p:cNvSpPr>
+          <p:nvPr>
+            <p:ph type="title"/>
+          </p:nvPr>
+        </p:nvSpPr>
+        <p:spPr/>
+        <p:txBody>
+          <a:bodyPr/>
+          <a:lstStyle/>
+          <a:p>
+            <a:r>
+              <a:rPr lang="en-US" altLang="zh-TW" dirty="0"/>
+              <a:t>11-4 </a:t>
+            </a:r>
+            <a:r>
+              <a:rPr lang="zh-TW" altLang="en-US" dirty="0"/>
+              <a:t>二元搜尋法</a:t>
+            </a:r>
+          </a:p>
+        </p:txBody>
+      </p:sp>
+      <p:sp>
+        <p:nvSpPr>
+          <p:cNvPr id="3" name="內容版面配置區 2"/>
+          <p:cNvSpPr>
+            <a:spLocks noGrp="1"/>
+          </p:cNvSpPr>
+          <p:nvPr>
+            <p:ph idx="1"/>
+          </p:nvPr>
+        </p:nvSpPr>
+        <p:spPr/>
+        <p:txBody>
+          <a:bodyPr/>
+          <a:lstStyle/>
+          <a:p>
+            <a:pPr marL="457200" lvl="1">
+              <a:buClrTx/>
+              <a:buBlip>
+                <a:blip r:embed="rId2"/>
+              </a:buBlip>
+            </a:pPr>
+            <a:r>
+              <a:rPr lang="zh-TW" altLang="en-US" dirty="0"/>
+              <a:t>先比一次中間數，所須考慮的子數列個數就從</a:t>
+            </a:r>
+            <a:r>
+              <a:rPr lang="en-US" altLang="zh-TW" dirty="0"/>
+              <a:t>2</a:t>
+            </a:r>
+            <a:r>
+              <a:rPr lang="en-US" altLang="zh-TW" baseline="30000" dirty="0"/>
+              <a:t>30</a:t>
+            </a:r>
+            <a:r>
+              <a:rPr lang="zh-TW" altLang="en-US" dirty="0"/>
+              <a:t>減半成為</a:t>
+            </a:r>
+            <a:r>
+              <a:rPr lang="en-US" altLang="zh-TW" dirty="0"/>
+              <a:t>2</a:t>
+            </a:r>
+            <a:r>
+              <a:rPr lang="en-US" altLang="zh-TW" baseline="30000" dirty="0"/>
+              <a:t>29</a:t>
+            </a:r>
+            <a:r>
+              <a:rPr lang="zh-TW" altLang="en-US" dirty="0"/>
+              <a:t>，再一次比較，所須考慮的子數列個數最多為</a:t>
+            </a:r>
+            <a:r>
+              <a:rPr lang="en-US" altLang="zh-TW" dirty="0"/>
+              <a:t>2</a:t>
+            </a:r>
+            <a:r>
+              <a:rPr lang="en-US" altLang="zh-TW" baseline="30000" dirty="0"/>
+              <a:t>28</a:t>
+            </a:r>
+            <a:r>
+              <a:rPr lang="zh-TW" altLang="en-US" dirty="0"/>
+              <a:t>，</a:t>
+            </a:r>
+            <a:r>
+              <a:rPr lang="en-US" altLang="zh-TW" dirty="0"/>
+              <a:t>...</a:t>
+            </a:r>
+            <a:r>
+              <a:rPr lang="zh-TW" altLang="en-US" dirty="0"/>
+              <a:t>，經過</a:t>
+            </a:r>
+            <a:r>
+              <a:rPr lang="en-US" altLang="zh-TW" dirty="0"/>
+              <a:t>30</a:t>
+            </a:r>
+            <a:r>
+              <a:rPr lang="zh-TW" altLang="en-US" dirty="0"/>
+              <a:t>次比較後，子數列最多只剩</a:t>
+            </a:r>
+            <a:r>
+              <a:rPr lang="en-US" altLang="zh-TW" dirty="0"/>
+              <a:t>2</a:t>
+            </a:r>
+            <a:r>
+              <a:rPr lang="en-US" altLang="zh-TW" baseline="30000" dirty="0"/>
+              <a:t>0</a:t>
+            </a:r>
+            <a:r>
+              <a:rPr lang="zh-TW" altLang="en-US" dirty="0"/>
+              <a:t>個，此時再一次比較就可確認某數是否在裡面。</a:t>
+            </a:r>
+          </a:p>
+          <a:p>
+            <a:endParaRPr lang="zh-TW" altLang="en-US" dirty="0"/>
+          </a:p>
+        </p:txBody>
+      </p:sp>
+    </p:spTree>
+    <p:extLst>
+      <p:ext uri="{BB962C8B-B14F-4D97-AF65-F5344CB8AC3E}">
+        <p14:creationId xmlns:p14="http://schemas.microsoft.com/office/powerpoint/2010/main" val="1480540464"/>
+      </p:ext>
+    </p:extLst>
   </p:cSld>
   <p:clrMapOvr>
     <a:masterClrMapping/>
@@ -37977,7 +39394,7 @@
           <a:lstStyle/>
           <a:p>
             <a:r>
-              <a:rPr lang="en-US" altLang="zh-TW" dirty="0" smtClean="0"/>
+              <a:rPr lang="en-US" altLang="zh-TW" dirty="0"/>
               <a:t>11-4 </a:t>
             </a:r>
             <a:r>
@@ -38002,90 +39419,57 @@
           <a:bodyPr/>
           <a:lstStyle/>
           <a:p>
-            <a:pPr marL="457200" lvl="1">
-              <a:buClrTx/>
-              <a:buBlip>
-                <a:blip r:embed="rId2"/>
-              </a:buBlip>
-            </a:pPr>
-            <a:r>
-              <a:rPr lang="zh-TW" altLang="en-US" dirty="0"/>
-              <a:t>先比一次中間數，所須考慮的子數列個數就從</a:t>
+            <a:r>
+              <a:rPr lang="zh-TW" altLang="en-US" dirty="0"/>
+              <a:t>因此，二元搜尋法最多只要</a:t>
             </a:r>
             <a:r>
               <a:rPr lang="en-US" altLang="zh-TW" dirty="0"/>
+              <a:t>31</a:t>
+            </a:r>
+            <a:r>
+              <a:rPr lang="zh-TW" altLang="en-US" dirty="0"/>
+              <a:t>次比較，就可判斷某數是否在一個有十億個數的數列裡。</a:t>
+            </a:r>
+            <a:endParaRPr lang="en-US" altLang="zh-TW" dirty="0"/>
+          </a:p>
+          <a:p>
+            <a:r>
+              <a:rPr lang="zh-TW" altLang="en-US" dirty="0"/>
+              <a:t>同理，可知道若已排序的數列長度為</a:t>
+            </a:r>
+            <a:r>
+              <a:rPr lang="en-US" altLang="zh-TW" dirty="0"/>
+              <a:t>n</a:t>
+            </a:r>
+            <a:r>
+              <a:rPr lang="zh-TW" altLang="en-US" dirty="0"/>
+              <a:t>，則二元搜尋法的最多比較次數大約為</a:t>
+            </a:r>
+            <a:r>
+              <a:rPr lang="en-US" altLang="zh-TW" dirty="0"/>
+              <a:t>log</a:t>
+            </a:r>
+            <a:r>
+              <a:rPr lang="en-US" altLang="zh-TW" baseline="-25000" dirty="0"/>
               <a:t>2</a:t>
             </a:r>
             <a:r>
-              <a:rPr lang="en-US" altLang="zh-TW" baseline="30000" dirty="0"/>
-              <a:t>30</a:t>
-            </a:r>
-            <a:r>
-              <a:rPr lang="zh-TW" altLang="en-US" dirty="0"/>
-              <a:t>減半成為</a:t>
-            </a:r>
-            <a:r>
               <a:rPr lang="en-US" altLang="zh-TW" dirty="0"/>
-              <a:t>2</a:t>
-            </a:r>
-            <a:r>
-              <a:rPr lang="en-US" altLang="zh-TW" baseline="30000" dirty="0"/>
-              <a:t>29</a:t>
-            </a:r>
-            <a:r>
-              <a:rPr lang="zh-TW" altLang="en-US" dirty="0"/>
-              <a:t>，再一次比較，所須考慮的子數列個數最多為</a:t>
-            </a:r>
-            <a:r>
-              <a:rPr lang="en-US" altLang="zh-TW" dirty="0"/>
-              <a:t>2</a:t>
-            </a:r>
-            <a:r>
-              <a:rPr lang="en-US" altLang="zh-TW" baseline="30000" dirty="0"/>
-              <a:t>28</a:t>
-            </a:r>
-            <a:r>
-              <a:rPr lang="zh-TW" altLang="en-US" dirty="0"/>
-              <a:t>，</a:t>
-            </a:r>
-            <a:r>
-              <a:rPr lang="en-US" altLang="zh-TW" dirty="0"/>
-              <a:t>...</a:t>
-            </a:r>
-            <a:r>
-              <a:rPr lang="zh-TW" altLang="en-US" dirty="0"/>
-              <a:t>，經過</a:t>
-            </a:r>
-            <a:r>
-              <a:rPr lang="en-US" altLang="zh-TW" dirty="0"/>
-              <a:t>30</a:t>
-            </a:r>
-            <a:r>
-              <a:rPr lang="zh-TW" altLang="en-US" dirty="0"/>
-              <a:t>次比較後，子數列最多只剩</a:t>
-            </a:r>
-            <a:r>
-              <a:rPr lang="en-US" altLang="zh-TW" dirty="0"/>
-              <a:t>2</a:t>
-            </a:r>
-            <a:r>
-              <a:rPr lang="en-US" altLang="zh-TW" baseline="30000" dirty="0"/>
-              <a:t>0</a:t>
-            </a:r>
-            <a:r>
-              <a:rPr lang="zh-TW" altLang="en-US" dirty="0"/>
-              <a:t>個，此時再一次比較就可確認某數是否在裡面。</a:t>
-            </a:r>
-          </a:p>
-          <a:p>
-            <a:endParaRPr lang="zh-TW" altLang="en-US" dirty="0"/>
+              <a:t>n</a:t>
+            </a:r>
+            <a:r>
+              <a:rPr lang="zh-TW" altLang="en-US" dirty="0"/>
+              <a:t>。</a:t>
+            </a:r>
+            <a:endParaRPr lang="en-US" altLang="zh-TW" dirty="0"/>
           </a:p>
         </p:txBody>
       </p:sp>
     </p:spTree>
     <p:extLst>
       <p:ext uri="{BB962C8B-B14F-4D97-AF65-F5344CB8AC3E}">
-        <p14:creationId xmlns:p14="http://schemas.microsoft.com/office/powerpoint/2010/main" val="1480540464"/>
+        <p14:creationId xmlns:p14="http://schemas.microsoft.com/office/powerpoint/2010/main" val="711195808"/>
       </p:ext>
     </p:extLst>
   </p:cSld>
@@ -38144,7 +39528,7 @@
         <p:spPr/>
         <p:txBody>
           <a:bodyPr>
-            <a:normAutofit/>
+            <a:normAutofit fontScale="92500"/>
           </a:bodyPr>
           <a:lstStyle/>
           <a:p>
@@ -38160,34 +39544,32 @@
               <a:rPr lang="zh-TW" altLang="en-US" dirty="0"/>
               <a:t>）中，最關鍵的部分是函數的等級，而不是函數的常數係數。</a:t>
             </a:r>
-            <a:endParaRPr lang="en-US" altLang="zh-TW" dirty="0" smtClean="0"/>
-          </a:p>
-          <a:p>
-            <a:pPr algn="l"/>
+            <a:endParaRPr lang="en-US" altLang="zh-TW" dirty="0"/>
+          </a:p>
+          <a:p>
             <a:r>
               <a:rPr lang="zh-TW" altLang="en-US" dirty="0"/>
               <a:t>例如，當</a:t>
             </a:r>
             <a:r>
               <a:rPr lang="en-US" altLang="zh-TW" dirty="0"/>
-              <a:t>f (n) = </a:t>
-            </a:r>
-            <a:r>
-              <a:rPr lang="en-US" altLang="zh-TW" dirty="0" smtClean="0"/>
-              <a:t>3n</a:t>
+              <a:t>f (n) = 3n</a:t>
             </a:r>
             <a:r>
               <a:rPr lang="en-US" altLang="zh-TW" baseline="30000" dirty="0"/>
               <a:t>2</a:t>
             </a:r>
             <a:r>
-              <a:rPr lang="en-US" altLang="zh-TW" dirty="0" smtClean="0"/>
+              <a:rPr lang="en-US" altLang="zh-TW" dirty="0"/>
               <a:t>+5n</a:t>
             </a:r>
             <a:r>
               <a:rPr lang="zh-TW" altLang="en-US" dirty="0"/>
               <a:t>時，我們可以透過令</a:t>
             </a:r>
+            <a:br>
+              <a:rPr lang="en-US" altLang="zh-TW" dirty="0"/>
+            </a:br>
             <a:r>
               <a:rPr lang="en-US" altLang="zh-TW" dirty="0"/>
               <a:t>c =4, n</a:t>
@@ -38205,12 +39587,8 @@
               <a:t>來說明</a:t>
             </a:r>
             <a:r>
-              <a:rPr lang="en-US" altLang="zh-TW" dirty="0" smtClean="0"/>
-              <a:t>f (</a:t>
-            </a:r>
-            <a:r>
               <a:rPr lang="en-US" altLang="zh-TW" dirty="0"/>
-              <a:t>n) = O(n</a:t>
+              <a:t>f (n) = O(n</a:t>
             </a:r>
             <a:r>
               <a:rPr lang="en-US" altLang="zh-TW" baseline="30000" dirty="0"/>
@@ -38225,19 +39603,15 @@
               <a:t>，這顯示</a:t>
             </a:r>
             <a:r>
-              <a:rPr lang="en-US" altLang="zh-TW" dirty="0" smtClean="0"/>
-              <a:t>f(n</a:t>
-            </a:r>
-            <a:r>
               <a:rPr lang="en-US" altLang="zh-TW" dirty="0"/>
-              <a:t>)</a:t>
+              <a:t>f(n)</a:t>
             </a:r>
             <a:r>
               <a:rPr lang="zh-TW" altLang="en-US" dirty="0"/>
               <a:t>是</a:t>
             </a:r>
             <a:r>
-              <a:rPr lang="en-US" altLang="zh-TW" dirty="0" smtClean="0"/>
+              <a:rPr lang="en-US" altLang="zh-TW" dirty="0"/>
               <a:t>n</a:t>
             </a:r>
             <a:r>
@@ -38245,12 +39619,8 @@
               <a:t>2</a:t>
             </a:r>
             <a:r>
-              <a:rPr lang="zh-TW" altLang="en-US" dirty="0" smtClean="0"/>
-              <a:t>等級</a:t>
-            </a:r>
-            <a:r>
-              <a:rPr lang="zh-TW" altLang="en-US" dirty="0"/>
-              <a:t>，</a:t>
+              <a:rPr lang="zh-TW" altLang="en-US" dirty="0"/>
+              <a:t>等級，</a:t>
             </a:r>
             <a:r>
               <a:rPr lang="en-US" altLang="zh-TW" dirty="0"/>
@@ -38266,11 +39636,7 @@
             </a:r>
             <a:r>
               <a:rPr lang="zh-TW" altLang="en-US" dirty="0"/>
-              <a:t>夠大時並不是最關鍵的</a:t>
-            </a:r>
-            <a:r>
-              <a:rPr lang="zh-TW" altLang="en-US" dirty="0" smtClean="0"/>
-              <a:t>。</a:t>
+              <a:t>夠大時並不是最關鍵的。</a:t>
             </a:r>
             <a:endParaRPr lang="zh-TW" altLang="zh-TW" dirty="0"/>
           </a:p>
@@ -38289,17 +39655,113 @@
   <p:clrMapOvr>
     <a:masterClrMapping/>
   </p:clrMapOvr>
-  <p:timing>
-    <p:tnLst>
-      <p:par>
-        <p:cTn id="1" dur="indefinite" restart="never" nodeType="tmRoot"/>
-      </p:par>
-    </p:tnLst>
-  </p:timing>
 </p:sld>
 </file>
 
 <file path=ppt/slides/slide70.xml><?xml version="1.0" encoding="utf-8"?>
+<p:sld xmlns:a="http://schemas.openxmlformats.org/drawingml/2006/main" xmlns:r="http://schemas.openxmlformats.org/officeDocument/2006/relationships" xmlns:p="http://schemas.openxmlformats.org/presentationml/2006/main">
+  <p:cSld>
+    <p:spTree>
+      <p:nvGrpSpPr>
+        <p:cNvPr id="1" name=""/>
+        <p:cNvGrpSpPr/>
+        <p:nvPr/>
+      </p:nvGrpSpPr>
+      <p:grpSpPr>
+        <a:xfrm>
+          <a:off x="0" y="0"/>
+          <a:ext cx="0" cy="0"/>
+          <a:chOff x="0" y="0"/>
+          <a:chExt cx="0" cy="0"/>
+        </a:xfrm>
+      </p:grpSpPr>
+      <p:sp>
+        <p:nvSpPr>
+          <p:cNvPr id="3" name="標題 2"/>
+          <p:cNvSpPr>
+            <a:spLocks noGrp="1"/>
+          </p:cNvSpPr>
+          <p:nvPr>
+            <p:ph type="title"/>
+          </p:nvPr>
+        </p:nvSpPr>
+        <p:spPr/>
+        <p:txBody>
+          <a:bodyPr/>
+          <a:lstStyle/>
+          <a:p>
+            <a:r>
+              <a:rPr lang="en-US" altLang="zh-TW" dirty="0"/>
+              <a:t>11-5 </a:t>
+            </a:r>
+            <a:r>
+              <a:rPr lang="zh-TW" altLang="en-US" dirty="0"/>
+              <a:t>動態規劃技巧</a:t>
+            </a:r>
+          </a:p>
+        </p:txBody>
+      </p:sp>
+      <p:sp>
+        <p:nvSpPr>
+          <p:cNvPr id="4" name="內容版面配置區 3"/>
+          <p:cNvSpPr>
+            <a:spLocks noGrp="1"/>
+          </p:cNvSpPr>
+          <p:nvPr>
+            <p:ph idx="1"/>
+          </p:nvPr>
+        </p:nvSpPr>
+        <p:spPr/>
+        <p:txBody>
+          <a:bodyPr>
+            <a:normAutofit fontScale="92500" lnSpcReduction="10000"/>
+          </a:bodyPr>
+          <a:lstStyle/>
+          <a:p>
+            <a:pPr algn="l"/>
+            <a:r>
+              <a:rPr lang="zh-TW" altLang="en-US" dirty="0">
+                <a:solidFill>
+                  <a:srgbClr val="C00000"/>
+                </a:solidFill>
+              </a:rPr>
+              <a:t>動態規劃技巧</a:t>
+            </a:r>
+            <a:r>
+              <a:rPr lang="en-US" altLang="zh-TW" dirty="0"/>
+              <a:t>(dynamic programming)</a:t>
+            </a:r>
+            <a:r>
+              <a:rPr lang="zh-TW" altLang="en-US" dirty="0"/>
+              <a:t>的</a:t>
+            </a:r>
+            <a:r>
+              <a:rPr lang="en-US" altLang="zh-TW" dirty="0"/>
+              <a:t>programming</a:t>
+            </a:r>
+            <a:r>
+              <a:rPr lang="zh-TW" altLang="en-US" dirty="0"/>
+              <a:t>在此並不是程式設計的意思，而是代表一種「列表式」的運算。</a:t>
+            </a:r>
+            <a:endParaRPr lang="en-US" altLang="zh-TW" dirty="0"/>
+          </a:p>
+          <a:p>
+            <a:r>
+              <a:rPr lang="zh-TW" altLang="en-US" dirty="0"/>
+              <a:t>在正式介紹動態規劃技巧之前，先從一個簡單的例子來感受列表式的計算為何有時可較有效率地求得結果。</a:t>
+            </a:r>
+          </a:p>
+        </p:txBody>
+      </p:sp>
+    </p:spTree>
+  </p:cSld>
+  <p:clrMapOvr>
+    <a:masterClrMapping/>
+  </p:clrMapOvr>
+</p:sld>
+</file>
+
+<file path=ppt/slides/slide71.xml><?xml version="1.0" encoding="utf-8"?>
 <p:sld xmlns:a="http://schemas.openxmlformats.org/drawingml/2006/main" xmlns:r="http://schemas.openxmlformats.org/officeDocument/2006/relationships" xmlns:p="http://schemas.openxmlformats.org/presentationml/2006/main">
   <p:cSld>
     <p:spTree>
@@ -38332,260 +39794,7 @@
           <a:lstStyle/>
           <a:p>
             <a:r>
-              <a:rPr lang="en-US" altLang="zh-TW" dirty="0" smtClean="0"/>
-              <a:t>11-4 </a:t>
-            </a:r>
-            <a:r>
-              <a:rPr lang="zh-TW" altLang="en-US" dirty="0"/>
-              <a:t>二元搜尋法</a:t>
-            </a:r>
-          </a:p>
-        </p:txBody>
-      </p:sp>
-      <p:sp>
-        <p:nvSpPr>
-          <p:cNvPr id="3" name="內容版面配置區 2"/>
-          <p:cNvSpPr>
-            <a:spLocks noGrp="1"/>
-          </p:cNvSpPr>
-          <p:nvPr>
-            <p:ph idx="1"/>
-          </p:nvPr>
-        </p:nvSpPr>
-        <p:spPr/>
-        <p:txBody>
-          <a:bodyPr/>
-          <a:lstStyle/>
-          <a:p>
-            <a:r>
-              <a:rPr lang="zh-TW" altLang="en-US" dirty="0"/>
-              <a:t>因此，二元搜尋法最多只要</a:t>
-            </a:r>
-            <a:r>
               <a:rPr lang="en-US" altLang="zh-TW" dirty="0"/>
-              <a:t>31</a:t>
-            </a:r>
-            <a:r>
-              <a:rPr lang="zh-TW" altLang="en-US" dirty="0"/>
-              <a:t>次比較，就可判斷某數是否在一個有十億個數的數列</a:t>
-            </a:r>
-            <a:r>
-              <a:rPr lang="zh-TW" altLang="en-US" dirty="0" smtClean="0"/>
-              <a:t>裡。</a:t>
-            </a:r>
-            <a:endParaRPr lang="en-US" altLang="zh-TW" dirty="0" smtClean="0"/>
-          </a:p>
-          <a:p>
-            <a:r>
-              <a:rPr lang="zh-TW" altLang="en-US" dirty="0" smtClean="0"/>
-              <a:t>同理</a:t>
-            </a:r>
-            <a:r>
-              <a:rPr lang="zh-TW" altLang="en-US" dirty="0"/>
-              <a:t>，可</a:t>
-            </a:r>
-            <a:r>
-              <a:rPr lang="zh-TW" altLang="en-US" dirty="0" smtClean="0"/>
-              <a:t>知道若</a:t>
-            </a:r>
-            <a:r>
-              <a:rPr lang="zh-TW" altLang="en-US" dirty="0"/>
-              <a:t>已排序的數列長度為</a:t>
-            </a:r>
-            <a:r>
-              <a:rPr lang="en-US" altLang="zh-TW" dirty="0"/>
-              <a:t>n</a:t>
-            </a:r>
-            <a:r>
-              <a:rPr lang="zh-TW" altLang="en-US" dirty="0"/>
-              <a:t>，則二元搜尋法的最多比較次數大約為</a:t>
-            </a:r>
-            <a:r>
-              <a:rPr lang="en-US" altLang="zh-TW" dirty="0"/>
-              <a:t>log</a:t>
-            </a:r>
-            <a:r>
-              <a:rPr lang="en-US" altLang="zh-TW" baseline="-25000" dirty="0"/>
-              <a:t>2</a:t>
-            </a:r>
-            <a:r>
-              <a:rPr lang="en-US" altLang="zh-TW" dirty="0"/>
-              <a:t>n</a:t>
-            </a:r>
-            <a:r>
-              <a:rPr lang="zh-TW" altLang="en-US" dirty="0"/>
-              <a:t>。</a:t>
-            </a:r>
-            <a:endParaRPr lang="en-US" altLang="zh-TW" dirty="0"/>
-          </a:p>
-        </p:txBody>
-      </p:sp>
-    </p:spTree>
-    <p:extLst>
-      <p:ext uri="{BB962C8B-B14F-4D97-AF65-F5344CB8AC3E}">
-        <p14:creationId xmlns:p14="http://schemas.microsoft.com/office/powerpoint/2010/main" val="711195808"/>
-      </p:ext>
-    </p:extLst>
-  </p:cSld>
-  <p:clrMapOvr>
-    <a:masterClrMapping/>
-  </p:clrMapOvr>
-</p:sld>
-</file>
-
-<file path=ppt/slides/slide71.xml><?xml version="1.0" encoding="utf-8"?>
-<p:sld xmlns:a="http://schemas.openxmlformats.org/drawingml/2006/main" xmlns:r="http://schemas.openxmlformats.org/officeDocument/2006/relationships" xmlns:p="http://schemas.openxmlformats.org/presentationml/2006/main">
-  <p:cSld>
-    <p:spTree>
-      <p:nvGrpSpPr>
-        <p:cNvPr id="1" name=""/>
-        <p:cNvGrpSpPr/>
-        <p:nvPr/>
-      </p:nvGrpSpPr>
-      <p:grpSpPr>
-        <a:xfrm>
-          <a:off x="0" y="0"/>
-          <a:ext cx="0" cy="0"/>
-          <a:chOff x="0" y="0"/>
-          <a:chExt cx="0" cy="0"/>
-        </a:xfrm>
-      </p:grpSpPr>
-      <p:sp>
-        <p:nvSpPr>
-          <p:cNvPr id="3" name="標題 2"/>
-          <p:cNvSpPr>
-            <a:spLocks noGrp="1"/>
-          </p:cNvSpPr>
-          <p:nvPr>
-            <p:ph type="title"/>
-          </p:nvPr>
-        </p:nvSpPr>
-        <p:spPr/>
-        <p:txBody>
-          <a:bodyPr/>
-          <a:lstStyle/>
-          <a:p>
-            <a:r>
-              <a:rPr lang="en-US" altLang="zh-TW" dirty="0" smtClean="0"/>
-              <a:t>11-5 </a:t>
-            </a:r>
-            <a:r>
-              <a:rPr lang="zh-TW" altLang="en-US" dirty="0"/>
-              <a:t>動態規劃技巧</a:t>
-            </a:r>
-          </a:p>
-        </p:txBody>
-      </p:sp>
-      <p:sp>
-        <p:nvSpPr>
-          <p:cNvPr id="4" name="內容版面配置區 3"/>
-          <p:cNvSpPr>
-            <a:spLocks noGrp="1"/>
-          </p:cNvSpPr>
-          <p:nvPr>
-            <p:ph idx="1"/>
-          </p:nvPr>
-        </p:nvSpPr>
-        <p:spPr/>
-        <p:txBody>
-          <a:bodyPr>
-            <a:normAutofit fontScale="92500" lnSpcReduction="10000"/>
-          </a:bodyPr>
-          <a:lstStyle/>
-          <a:p>
-            <a:pPr algn="l"/>
-            <a:r>
-              <a:rPr lang="zh-TW" altLang="en-US" dirty="0">
-                <a:solidFill>
-                  <a:srgbClr val="C00000"/>
-                </a:solidFill>
-              </a:rPr>
-              <a:t>動態規劃技巧</a:t>
-            </a:r>
-            <a:r>
-              <a:rPr lang="en-US" altLang="zh-TW" dirty="0"/>
-              <a:t>(dynamic </a:t>
-            </a:r>
-            <a:r>
-              <a:rPr lang="en-US" altLang="zh-TW" dirty="0" err="1"/>
-              <a:t>progr</a:t>
-            </a:r>
-            <a:r>
-              <a:rPr lang="en-US" altLang="zh-TW" dirty="0"/>
-              <a:t> </a:t>
-            </a:r>
-            <a:r>
-              <a:rPr lang="en-US" altLang="zh-TW" dirty="0" err="1"/>
-              <a:t>amming</a:t>
-            </a:r>
-            <a:r>
-              <a:rPr lang="en-US" altLang="zh-TW" dirty="0"/>
-              <a:t>)</a:t>
-            </a:r>
-            <a:r>
-              <a:rPr lang="zh-TW" altLang="en-US" dirty="0"/>
-              <a:t>的</a:t>
-            </a:r>
-            <a:r>
-              <a:rPr lang="en-US" altLang="zh-TW" dirty="0"/>
-              <a:t>programming</a:t>
-            </a:r>
-            <a:r>
-              <a:rPr lang="zh-TW" altLang="en-US" dirty="0"/>
-              <a:t>在此並不是程式設計的意思，而是代表一種「列表式」的運算。</a:t>
-            </a:r>
-            <a:endParaRPr lang="en-US" altLang="zh-TW" dirty="0"/>
-          </a:p>
-          <a:p>
-            <a:r>
-              <a:rPr lang="zh-TW" altLang="en-US" dirty="0"/>
-              <a:t>在正式介紹動態規劃技巧之前，先從一個簡單的例子來感受列表式的計算為何有時可較有效率地求得結果。</a:t>
-            </a:r>
-          </a:p>
-        </p:txBody>
-      </p:sp>
-    </p:spTree>
-  </p:cSld>
-  <p:clrMapOvr>
-    <a:masterClrMapping/>
-  </p:clrMapOvr>
-</p:sld>
-</file>
-
-<file path=ppt/slides/slide72.xml><?xml version="1.0" encoding="utf-8"?>
-<p:sld xmlns:a="http://schemas.openxmlformats.org/drawingml/2006/main" xmlns:r="http://schemas.openxmlformats.org/officeDocument/2006/relationships" xmlns:p="http://schemas.openxmlformats.org/presentationml/2006/main">
-  <p:cSld>
-    <p:spTree>
-      <p:nvGrpSpPr>
-        <p:cNvPr id="1" name=""/>
-        <p:cNvGrpSpPr/>
-        <p:nvPr/>
-      </p:nvGrpSpPr>
-      <p:grpSpPr>
-        <a:xfrm>
-          <a:off x="0" y="0"/>
-          <a:ext cx="0" cy="0"/>
-          <a:chOff x="0" y="0"/>
-          <a:chExt cx="0" cy="0"/>
-        </a:xfrm>
-      </p:grpSpPr>
-      <p:sp>
-        <p:nvSpPr>
-          <p:cNvPr id="2" name="標題 1"/>
-          <p:cNvSpPr>
-            <a:spLocks noGrp="1"/>
-          </p:cNvSpPr>
-          <p:nvPr>
-            <p:ph type="title"/>
-          </p:nvPr>
-        </p:nvSpPr>
-        <p:spPr/>
-        <p:txBody>
-          <a:bodyPr/>
-          <a:lstStyle/>
-          <a:p>
-            <a:r>
-              <a:rPr lang="en-US" altLang="zh-TW" dirty="0" smtClean="0"/>
               <a:t>11-5 </a:t>
             </a:r>
             <a:r>
@@ -38739,6 +39948,131 @@
 </p:sld>
 </file>
 
+<file path=ppt/slides/slide72.xml><?xml version="1.0" encoding="utf-8"?>
+<p:sld xmlns:a="http://schemas.openxmlformats.org/drawingml/2006/main" xmlns:r="http://schemas.openxmlformats.org/officeDocument/2006/relationships" xmlns:p="http://schemas.openxmlformats.org/presentationml/2006/main">
+  <p:cSld>
+    <p:spTree>
+      <p:nvGrpSpPr>
+        <p:cNvPr id="1" name=""/>
+        <p:cNvGrpSpPr/>
+        <p:nvPr/>
+      </p:nvGrpSpPr>
+      <p:grpSpPr>
+        <a:xfrm>
+          <a:off x="0" y="0"/>
+          <a:ext cx="0" cy="0"/>
+          <a:chOff x="0" y="0"/>
+          <a:chExt cx="0" cy="0"/>
+        </a:xfrm>
+      </p:grpSpPr>
+      <p:sp>
+        <p:nvSpPr>
+          <p:cNvPr id="2" name="標題 1"/>
+          <p:cNvSpPr>
+            <a:spLocks noGrp="1"/>
+          </p:cNvSpPr>
+          <p:nvPr>
+            <p:ph type="title"/>
+          </p:nvPr>
+        </p:nvSpPr>
+        <p:spPr/>
+        <p:txBody>
+          <a:bodyPr/>
+          <a:lstStyle/>
+          <a:p>
+            <a:r>
+              <a:rPr lang="en-US" altLang="zh-TW" dirty="0"/>
+              <a:t>11-5 </a:t>
+            </a:r>
+            <a:r>
+              <a:rPr lang="zh-TW" altLang="en-US" dirty="0"/>
+              <a:t>動態規劃技巧</a:t>
+            </a:r>
+          </a:p>
+        </p:txBody>
+      </p:sp>
+      <p:sp>
+        <p:nvSpPr>
+          <p:cNvPr id="3" name="內容版面配置區 2"/>
+          <p:cNvSpPr>
+            <a:spLocks noGrp="1"/>
+          </p:cNvSpPr>
+          <p:nvPr>
+            <p:ph idx="1"/>
+          </p:nvPr>
+        </p:nvSpPr>
+        <p:spPr/>
+        <p:txBody>
+          <a:bodyPr/>
+          <a:lstStyle/>
+          <a:p>
+            <a:r>
+              <a:rPr lang="zh-TW" altLang="en-US" dirty="0"/>
+              <a:t>如果想知道</a:t>
+            </a:r>
+            <a:r>
+              <a:rPr lang="en-US" altLang="zh-TW" dirty="0"/>
+              <a:t>F</a:t>
+            </a:r>
+            <a:r>
+              <a:rPr lang="en-US" altLang="zh-TW" baseline="-25000" dirty="0"/>
+              <a:t>20</a:t>
+            </a:r>
+            <a:r>
+              <a:rPr lang="zh-TW" altLang="en-US" dirty="0"/>
+              <a:t>的值是多少，有人可能會以程式語言中的遞迴呼叫</a:t>
+            </a:r>
+            <a:r>
+              <a:rPr lang="en-US" altLang="zh-TW" dirty="0"/>
+              <a:t>(recursive call)</a:t>
+            </a:r>
+            <a:r>
+              <a:rPr lang="zh-TW" altLang="en-US" dirty="0"/>
+              <a:t>這麼做：先試著去求得</a:t>
+            </a:r>
+            <a:r>
+              <a:rPr lang="en-US" altLang="zh-TW" dirty="0"/>
+              <a:t>F</a:t>
+            </a:r>
+            <a:r>
+              <a:rPr lang="en-US" altLang="zh-TW" baseline="-25000" dirty="0"/>
+              <a:t>19</a:t>
+            </a:r>
+            <a:r>
+              <a:rPr lang="zh-TW" altLang="en-US" dirty="0"/>
+              <a:t>，然後再設法求</a:t>
+            </a:r>
+            <a:r>
+              <a:rPr lang="en-US" altLang="zh-TW" dirty="0"/>
+              <a:t>F</a:t>
+            </a:r>
+            <a:r>
+              <a:rPr lang="en-US" altLang="zh-TW" baseline="-25000" dirty="0"/>
+              <a:t>18</a:t>
+            </a:r>
+            <a:r>
+              <a:rPr lang="zh-TW" altLang="en-US" dirty="0"/>
+              <a:t>，最後再將兩個加起來。</a:t>
+            </a:r>
+          </a:p>
+          <a:p>
+            <a:endParaRPr lang="zh-TW" altLang="en-US" dirty="0"/>
+          </a:p>
+        </p:txBody>
+      </p:sp>
+    </p:spTree>
+    <p:extLst>
+      <p:ext uri="{BB962C8B-B14F-4D97-AF65-F5344CB8AC3E}">
+        <p14:creationId xmlns:p14="http://schemas.microsoft.com/office/powerpoint/2010/main" val="2092373589"/>
+      </p:ext>
+    </p:extLst>
+  </p:cSld>
+  <p:clrMapOvr>
+    <a:masterClrMapping/>
+  </p:clrMapOvr>
+</p:sld>
+</file>
+
 <file path=ppt/slides/slide73.xml><?xml version="1.0" encoding="utf-8"?>
 <p:sld xmlns:a="http://schemas.openxmlformats.org/drawingml/2006/main" xmlns:r="http://schemas.openxmlformats.org/officeDocument/2006/relationships" xmlns:p="http://schemas.openxmlformats.org/presentationml/2006/main">
   <p:cSld>
@@ -38772,7 +40106,7 @@
           <a:lstStyle/>
           <a:p>
             <a:r>
-              <a:rPr lang="en-US" altLang="zh-TW" dirty="0" smtClean="0"/>
+              <a:rPr lang="en-US" altLang="zh-TW" dirty="0"/>
               <a:t>11-5 </a:t>
             </a:r>
             <a:r>
@@ -38784,7 +40118,7 @@
       </p:sp>
       <p:sp>
         <p:nvSpPr>
-          <p:cNvPr id="3" name="內容版面配置區 2"/>
+          <p:cNvPr id="4" name="內容版面配置區 3"/>
           <p:cNvSpPr>
             <a:spLocks noGrp="1"/>
           </p:cNvSpPr>
@@ -38794,12 +40128,19 @@
         </p:nvSpPr>
         <p:spPr/>
         <p:txBody>
-          <a:bodyPr/>
+          <a:bodyPr>
+            <a:normAutofit/>
+          </a:bodyPr>
           <a:lstStyle/>
           <a:p>
-            <a:r>
-              <a:rPr lang="zh-TW" altLang="en-US" dirty="0"/>
-              <a:t>如果想知道</a:t>
+            <a:pPr>
+              <a:lnSpc>
+                <a:spcPct val="120000"/>
+              </a:lnSpc>
+            </a:pPr>
+            <a:r>
+              <a:rPr lang="zh-TW" altLang="en-US" dirty="0"/>
+              <a:t>要如何求得</a:t>
             </a:r>
             <a:r>
               <a:rPr lang="en-US" altLang="zh-TW" dirty="0"/>
@@ -38807,19 +40148,23 @@
             </a:r>
             <a:r>
               <a:rPr lang="en-US" altLang="zh-TW" baseline="-25000" dirty="0"/>
-              <a:t>20</a:t>
-            </a:r>
-            <a:r>
-              <a:rPr lang="zh-TW" altLang="en-US" dirty="0"/>
-              <a:t>的值是多少，有人可能會以程式語言中的遞迴呼叫</a:t>
-            </a:r>
-            <a:r>
-              <a:rPr lang="en-US" altLang="zh-TW" dirty="0"/>
-              <a:t>(recursive call)</a:t>
-            </a:r>
-            <a:r>
-              <a:rPr lang="zh-TW" altLang="en-US" dirty="0"/>
-              <a:t>這麼做：先試著去求得</a:t>
+              <a:t>19</a:t>
+            </a:r>
+            <a:r>
+              <a:rPr lang="zh-TW" altLang="en-US" dirty="0"/>
+              <a:t>呢？</a:t>
+            </a:r>
+            <a:endParaRPr lang="en-US" altLang="zh-TW" dirty="0"/>
+          </a:p>
+          <a:p>
+            <a:pPr>
+              <a:lnSpc>
+                <a:spcPct val="120000"/>
+              </a:lnSpc>
+            </a:pPr>
+            <a:r>
+              <a:rPr lang="zh-TW" altLang="en-US" dirty="0"/>
+              <a:t>將</a:t>
             </a:r>
             <a:r>
               <a:rPr lang="en-US" altLang="zh-TW" dirty="0"/>
@@ -38827,11 +40172,11 @@
             </a:r>
             <a:r>
               <a:rPr lang="en-US" altLang="zh-TW" baseline="-25000" dirty="0"/>
-              <a:t>19</a:t>
-            </a:r>
-            <a:r>
-              <a:rPr lang="zh-TW" altLang="en-US" dirty="0"/>
-              <a:t>，然後再設法求</a:t>
+              <a:t>18</a:t>
+            </a:r>
+            <a:r>
+              <a:rPr lang="zh-TW" altLang="en-US" dirty="0"/>
+              <a:t>及</a:t>
             </a:r>
             <a:r>
               <a:rPr lang="en-US" altLang="zh-TW" dirty="0"/>
@@ -38839,24 +40184,49 @@
             </a:r>
             <a:r>
               <a:rPr lang="en-US" altLang="zh-TW" baseline="-25000" dirty="0"/>
+              <a:t>17</a:t>
+            </a:r>
+            <a:r>
+              <a:rPr lang="zh-TW" altLang="en-US" dirty="0"/>
+              <a:t>算出來就可以了。</a:t>
+            </a:r>
+            <a:endParaRPr lang="en-US" altLang="zh-TW" dirty="0"/>
+          </a:p>
+          <a:p>
+            <a:pPr>
+              <a:lnSpc>
+                <a:spcPct val="120000"/>
+              </a:lnSpc>
+            </a:pPr>
+            <a:r>
+              <a:rPr lang="en-US" altLang="zh-TW" dirty="0"/>
+              <a:t>F</a:t>
+            </a:r>
+            <a:r>
+              <a:rPr lang="en-US" altLang="zh-TW" baseline="-25000" dirty="0"/>
               <a:t>18</a:t>
             </a:r>
             <a:r>
               <a:rPr lang="zh-TW" altLang="en-US" dirty="0"/>
-              <a:t>，最後再將兩個加起來。</a:t>
-            </a:r>
-          </a:p>
-          <a:p>
-            <a:endParaRPr lang="zh-TW" altLang="en-US" dirty="0"/>
+              <a:t>不是已經算過了？為何現在又要重算？</a:t>
+            </a:r>
+            <a:endParaRPr lang="en-US" altLang="zh-TW" dirty="0"/>
+          </a:p>
+          <a:p>
+            <a:pPr>
+              <a:lnSpc>
+                <a:spcPct val="120000"/>
+              </a:lnSpc>
+            </a:pPr>
+            <a:r>
+              <a:rPr lang="zh-TW" altLang="en-US" dirty="0"/>
+              <a:t>實際上，以遞迴呼叫來處理這樣的問題，重算的次數還真嚇人呢！</a:t>
+            </a:r>
+            <a:endParaRPr lang="en-US" altLang="zh-TW" dirty="0"/>
           </a:p>
         </p:txBody>
       </p:sp>
     </p:spTree>
-    <p:extLst>
-      <p:ext uri="{BB962C8B-B14F-4D97-AF65-F5344CB8AC3E}">
-        <p14:creationId xmlns:p14="http://schemas.microsoft.com/office/powerpoint/2010/main" val="2092373589"/>
-      </p:ext>
-    </p:extLst>
   </p:cSld>
   <p:clrMapOvr>
     <a:masterClrMapping/>
@@ -38897,188 +40267,7 @@
           <a:lstStyle/>
           <a:p>
             <a:r>
-              <a:rPr lang="en-US" altLang="zh-TW" dirty="0" smtClean="0"/>
-              <a:t>11-5 </a:t>
-            </a:r>
-            <a:r>
-              <a:rPr lang="zh-TW" altLang="en-US" dirty="0"/>
-              <a:t>動態規劃技巧</a:t>
-            </a:r>
-          </a:p>
-        </p:txBody>
-      </p:sp>
-      <p:sp>
-        <p:nvSpPr>
-          <p:cNvPr id="4" name="內容版面配置區 3"/>
-          <p:cNvSpPr>
-            <a:spLocks noGrp="1"/>
-          </p:cNvSpPr>
-          <p:nvPr>
-            <p:ph idx="1"/>
-          </p:nvPr>
-        </p:nvSpPr>
-        <p:spPr/>
-        <p:txBody>
-          <a:bodyPr>
-            <a:normAutofit lnSpcReduction="10000"/>
-          </a:bodyPr>
-          <a:lstStyle/>
-          <a:p>
-            <a:pPr>
-              <a:lnSpc>
-                <a:spcPct val="120000"/>
-              </a:lnSpc>
-            </a:pPr>
-            <a:r>
-              <a:rPr lang="zh-TW" altLang="en-US" dirty="0"/>
-              <a:t>要如何求得</a:t>
-            </a:r>
-            <a:r>
               <a:rPr lang="en-US" altLang="zh-TW" dirty="0"/>
-              <a:t>F</a:t>
-            </a:r>
-            <a:r>
-              <a:rPr lang="en-US" altLang="zh-TW" baseline="-25000" dirty="0"/>
-              <a:t>19</a:t>
-            </a:r>
-            <a:r>
-              <a:rPr lang="zh-TW" altLang="en-US" dirty="0"/>
-              <a:t>呢</a:t>
-            </a:r>
-            <a:r>
-              <a:rPr lang="zh-TW" altLang="en-US" dirty="0" smtClean="0"/>
-              <a:t>？</a:t>
-            </a:r>
-            <a:endParaRPr lang="en-US" altLang="zh-TW" dirty="0" smtClean="0"/>
-          </a:p>
-          <a:p>
-            <a:pPr>
-              <a:lnSpc>
-                <a:spcPct val="120000"/>
-              </a:lnSpc>
-            </a:pPr>
-            <a:r>
-              <a:rPr lang="zh-TW" altLang="en-US" dirty="0" smtClean="0"/>
-              <a:t>將</a:t>
-            </a:r>
-            <a:r>
-              <a:rPr lang="en-US" altLang="zh-TW" dirty="0"/>
-              <a:t>F</a:t>
-            </a:r>
-            <a:r>
-              <a:rPr lang="en-US" altLang="zh-TW" baseline="-25000" dirty="0"/>
-              <a:t>18</a:t>
-            </a:r>
-            <a:r>
-              <a:rPr lang="zh-TW" altLang="en-US" dirty="0"/>
-              <a:t>及</a:t>
-            </a:r>
-            <a:r>
-              <a:rPr lang="en-US" altLang="zh-TW" dirty="0"/>
-              <a:t>F</a:t>
-            </a:r>
-            <a:r>
-              <a:rPr lang="en-US" altLang="zh-TW" baseline="-25000" dirty="0"/>
-              <a:t>17</a:t>
-            </a:r>
-            <a:r>
-              <a:rPr lang="zh-TW" altLang="en-US" dirty="0"/>
-              <a:t>算出來就可以</a:t>
-            </a:r>
-            <a:r>
-              <a:rPr lang="zh-TW" altLang="en-US" dirty="0" smtClean="0"/>
-              <a:t>了。</a:t>
-            </a:r>
-            <a:endParaRPr lang="en-US" altLang="zh-TW" dirty="0"/>
-          </a:p>
-          <a:p>
-            <a:pPr>
-              <a:lnSpc>
-                <a:spcPct val="120000"/>
-              </a:lnSpc>
-            </a:pPr>
-            <a:r>
-              <a:rPr lang="en-US" altLang="zh-TW" dirty="0"/>
-              <a:t>F</a:t>
-            </a:r>
-            <a:r>
-              <a:rPr lang="en-US" altLang="zh-TW" baseline="-25000" dirty="0"/>
-              <a:t>18</a:t>
-            </a:r>
-            <a:r>
-              <a:rPr lang="zh-TW" altLang="en-US" dirty="0"/>
-              <a:t>不是已經算過</a:t>
-            </a:r>
-            <a:r>
-              <a:rPr lang="zh-TW" altLang="en-US" dirty="0" smtClean="0"/>
-              <a:t>了？</a:t>
-            </a:r>
-            <a:r>
-              <a:rPr lang="zh-TW" altLang="en-US" dirty="0"/>
-              <a:t>為何現在又要重</a:t>
-            </a:r>
-            <a:r>
-              <a:rPr lang="zh-TW" altLang="en-US" dirty="0" smtClean="0"/>
-              <a:t>算？</a:t>
-            </a:r>
-            <a:endParaRPr lang="en-US" altLang="zh-TW" dirty="0"/>
-          </a:p>
-          <a:p>
-            <a:pPr>
-              <a:lnSpc>
-                <a:spcPct val="120000"/>
-              </a:lnSpc>
-            </a:pPr>
-            <a:r>
-              <a:rPr lang="zh-TW" altLang="en-US" dirty="0"/>
-              <a:t>實際上，以遞迴呼叫來處理這樣的問題，重算的次數還真嚇人呢！</a:t>
-            </a:r>
-            <a:endParaRPr lang="en-US" altLang="zh-TW" dirty="0"/>
-          </a:p>
-        </p:txBody>
-      </p:sp>
-    </p:spTree>
-  </p:cSld>
-  <p:clrMapOvr>
-    <a:masterClrMapping/>
-  </p:clrMapOvr>
-</p:sld>
-</file>
-
-<file path=ppt/slides/slide75.xml><?xml version="1.0" encoding="utf-8"?>
-<p:sld xmlns:a="http://schemas.openxmlformats.org/drawingml/2006/main" xmlns:r="http://schemas.openxmlformats.org/officeDocument/2006/relationships" xmlns:p="http://schemas.openxmlformats.org/presentationml/2006/main">
-  <p:cSld>
-    <p:spTree>
-      <p:nvGrpSpPr>
-        <p:cNvPr id="1" name=""/>
-        <p:cNvGrpSpPr/>
-        <p:nvPr/>
-      </p:nvGrpSpPr>
-      <p:grpSpPr>
-        <a:xfrm>
-          <a:off x="0" y="0"/>
-          <a:ext cx="0" cy="0"/>
-          <a:chOff x="0" y="0"/>
-          <a:chExt cx="0" cy="0"/>
-        </a:xfrm>
-      </p:grpSpPr>
-      <p:sp>
-        <p:nvSpPr>
-          <p:cNvPr id="2" name="標題 1"/>
-          <p:cNvSpPr>
-            <a:spLocks noGrp="1"/>
-          </p:cNvSpPr>
-          <p:nvPr>
-            <p:ph type="title"/>
-          </p:nvPr>
-        </p:nvSpPr>
-        <p:spPr/>
-        <p:txBody>
-          <a:bodyPr/>
-          <a:lstStyle/>
-          <a:p>
-            <a:r>
-              <a:rPr lang="en-US" altLang="zh-TW" dirty="0" smtClean="0"/>
               <a:t>11-5 </a:t>
             </a:r>
             <a:r>
@@ -39255,7 +40444,7 @@
 </p:sld>
 </file>
 
-<file path=ppt/slides/slide76.xml><?xml version="1.0" encoding="utf-8"?>
+<file path=ppt/slides/slide75.xml><?xml version="1.0" encoding="utf-8"?>
 <p:sld xmlns:a="http://schemas.openxmlformats.org/drawingml/2006/main" xmlns:r="http://schemas.openxmlformats.org/officeDocument/2006/relationships" xmlns:p="http://schemas.openxmlformats.org/presentationml/2006/main">
   <p:cSld>
     <p:spTree>
@@ -39288,7 +40477,7 @@
           <a:lstStyle/>
           <a:p>
             <a:r>
-              <a:rPr lang="en-US" altLang="zh-TW" dirty="0" smtClean="0"/>
+              <a:rPr lang="en-US" altLang="zh-TW" dirty="0"/>
               <a:t>11-5 </a:t>
             </a:r>
             <a:r>
@@ -39365,6 +40554,113 @@
         </p:txBody>
       </p:sp>
     </p:spTree>
+  </p:cSld>
+  <p:clrMapOvr>
+    <a:masterClrMapping/>
+  </p:clrMapOvr>
+</p:sld>
+</file>
+
+<file path=ppt/slides/slide76.xml><?xml version="1.0" encoding="utf-8"?>
+<p:sld xmlns:a="http://schemas.openxmlformats.org/drawingml/2006/main" xmlns:r="http://schemas.openxmlformats.org/officeDocument/2006/relationships" xmlns:p="http://schemas.openxmlformats.org/presentationml/2006/main">
+  <p:cSld>
+    <p:spTree>
+      <p:nvGrpSpPr>
+        <p:cNvPr id="1" name=""/>
+        <p:cNvGrpSpPr/>
+        <p:nvPr/>
+      </p:nvGrpSpPr>
+      <p:grpSpPr>
+        <a:xfrm>
+          <a:off x="0" y="0"/>
+          <a:ext cx="0" cy="0"/>
+          <a:chOff x="0" y="0"/>
+          <a:chExt cx="0" cy="0"/>
+        </a:xfrm>
+      </p:grpSpPr>
+      <p:sp>
+        <p:nvSpPr>
+          <p:cNvPr id="2" name="標題 1"/>
+          <p:cNvSpPr>
+            <a:spLocks noGrp="1"/>
+          </p:cNvSpPr>
+          <p:nvPr>
+            <p:ph type="title"/>
+          </p:nvPr>
+        </p:nvSpPr>
+        <p:spPr/>
+        <p:txBody>
+          <a:bodyPr/>
+          <a:lstStyle/>
+          <a:p>
+            <a:r>
+              <a:rPr lang="en-US" altLang="zh-TW" dirty="0"/>
+              <a:t>11-5 </a:t>
+            </a:r>
+            <a:r>
+              <a:rPr lang="zh-TW" altLang="en-US" dirty="0"/>
+              <a:t>動態規劃技巧</a:t>
+            </a:r>
+          </a:p>
+        </p:txBody>
+      </p:sp>
+      <p:sp>
+        <p:nvSpPr>
+          <p:cNvPr id="3" name="內容版面配置區 2"/>
+          <p:cNvSpPr>
+            <a:spLocks noGrp="1"/>
+          </p:cNvSpPr>
+          <p:nvPr>
+            <p:ph idx="1"/>
+          </p:nvPr>
+        </p:nvSpPr>
+        <p:spPr/>
+        <p:txBody>
+          <a:bodyPr/>
+          <a:lstStyle/>
+          <a:p>
+            <a:pPr algn="l"/>
+            <a:r>
+              <a:rPr lang="zh-TW" altLang="en-US" dirty="0"/>
+              <a:t>以</a:t>
+            </a:r>
+            <a:r>
+              <a:rPr lang="zh-TW" altLang="en-US" dirty="0">
+                <a:solidFill>
+                  <a:srgbClr val="C00000"/>
+                </a:solidFill>
+              </a:rPr>
+              <a:t>最長共同子序列</a:t>
+            </a:r>
+            <a:r>
+              <a:rPr lang="en-US" altLang="zh-TW" dirty="0"/>
+              <a:t>(Longest Common Subsequence</a:t>
+            </a:r>
+            <a:r>
+              <a:rPr lang="zh-TW" altLang="en-US" dirty="0"/>
+              <a:t>；</a:t>
+            </a:r>
+            <a:r>
+              <a:rPr lang="en-US" altLang="zh-TW" dirty="0"/>
+              <a:t>LCS)</a:t>
+            </a:r>
+            <a:r>
+              <a:rPr lang="zh-TW" altLang="en-US" dirty="0"/>
+              <a:t>問題為例來談談這些特性。</a:t>
+            </a:r>
+            <a:endParaRPr lang="en-US" altLang="zh-TW" dirty="0"/>
+          </a:p>
+          <a:p>
+            <a:endParaRPr lang="zh-TW" altLang="en-US" dirty="0"/>
+          </a:p>
+        </p:txBody>
+      </p:sp>
+    </p:spTree>
+    <p:extLst>
+      <p:ext uri="{BB962C8B-B14F-4D97-AF65-F5344CB8AC3E}">
+        <p14:creationId xmlns:p14="http://schemas.microsoft.com/office/powerpoint/2010/main" val="1718354700"/>
+      </p:ext>
+    </p:extLst>
   </p:cSld>
   <p:clrMapOvr>
     <a:masterClrMapping/>
@@ -39405,7 +40701,7 @@
           <a:lstStyle/>
           <a:p>
             <a:r>
-              <a:rPr lang="en-US" altLang="zh-TW" dirty="0" smtClean="0"/>
+              <a:rPr lang="en-US" altLang="zh-TW" dirty="0"/>
               <a:t>11-5 </a:t>
             </a:r>
             <a:r>
@@ -39427,37 +40723,78 @@
         </p:nvSpPr>
         <p:spPr/>
         <p:txBody>
-          <a:bodyPr/>
+          <a:bodyPr>
+            <a:normAutofit/>
+          </a:bodyPr>
           <a:lstStyle/>
           <a:p>
-            <a:pPr algn="l"/>
-            <a:r>
-              <a:rPr lang="zh-TW" altLang="en-US" dirty="0"/>
-              <a:t>以</a:t>
-            </a:r>
             <a:r>
               <a:rPr lang="zh-TW" altLang="en-US" dirty="0">
                 <a:solidFill>
                   <a:srgbClr val="C00000"/>
                 </a:solidFill>
               </a:rPr>
-              <a:t>最長共同子序列</a:t>
+              <a:t>子序列</a:t>
             </a:r>
             <a:r>
               <a:rPr lang="en-US" altLang="zh-TW" dirty="0"/>
-              <a:t>(Longest Common Subsequence</a:t>
-            </a:r>
-            <a:r>
-              <a:rPr lang="zh-TW" altLang="en-US" dirty="0"/>
-              <a:t>；</a:t>
+              <a:t>(subsequence)</a:t>
+            </a:r>
+            <a:r>
+              <a:rPr lang="zh-TW" altLang="en-US" dirty="0"/>
+              <a:t>就是將一個序列中的一些</a:t>
             </a:r>
             <a:r>
               <a:rPr lang="en-US" altLang="zh-TW" dirty="0"/>
-              <a:t>LCS)</a:t>
-            </a:r>
-            <a:r>
-              <a:rPr lang="zh-TW" altLang="en-US" dirty="0"/>
-              <a:t>問題為例來談談這些特性。</a:t>
+              <a:t>(</a:t>
+            </a:r>
+            <a:r>
+              <a:rPr lang="zh-TW" altLang="en-US" dirty="0"/>
+              <a:t>可能是零個</a:t>
+            </a:r>
+            <a:r>
+              <a:rPr lang="en-US" altLang="zh-TW" dirty="0"/>
+              <a:t>)</a:t>
+            </a:r>
+            <a:r>
+              <a:rPr lang="zh-TW" altLang="en-US" dirty="0"/>
+              <a:t>字元去掉所得到的序列，例如：</a:t>
+            </a:r>
+            <a:r>
+              <a:rPr lang="en-US" altLang="zh-TW" dirty="0" err="1"/>
+              <a:t>pred</a:t>
+            </a:r>
+            <a:r>
+              <a:rPr lang="zh-TW" altLang="en-US" dirty="0"/>
+              <a:t>、</a:t>
+            </a:r>
+            <a:r>
+              <a:rPr lang="en-US" altLang="zh-TW" dirty="0" err="1"/>
+              <a:t>sdn</a:t>
+            </a:r>
+            <a:r>
+              <a:rPr lang="zh-TW" altLang="en-US" dirty="0"/>
+              <a:t>、</a:t>
+            </a:r>
+            <a:r>
+              <a:rPr lang="en-US" altLang="zh-TW" dirty="0" err="1"/>
+              <a:t>predent</a:t>
+            </a:r>
+            <a:r>
+              <a:rPr lang="zh-TW" altLang="en-US" dirty="0"/>
+              <a:t>等都是</a:t>
+            </a:r>
+            <a:r>
+              <a:rPr lang="en-US" altLang="zh-TW" dirty="0">
+                <a:solidFill>
+                  <a:srgbClr val="0070C0"/>
+                </a:solidFill>
+              </a:rPr>
+              <a:t>president</a:t>
+            </a:r>
+            <a:r>
+              <a:rPr lang="zh-TW" altLang="en-US" dirty="0"/>
+              <a:t>的子序列。</a:t>
             </a:r>
             <a:endParaRPr lang="en-US" altLang="zh-TW" dirty="0"/>
           </a:p>
@@ -39469,7 +40806,7 @@
     </p:spTree>
     <p:extLst>
       <p:ext uri="{BB962C8B-B14F-4D97-AF65-F5344CB8AC3E}">
-        <p14:creationId xmlns:p14="http://schemas.microsoft.com/office/powerpoint/2010/main" val="1718354700"/>
+        <p14:creationId xmlns:p14="http://schemas.microsoft.com/office/powerpoint/2010/main" val="1610393876"/>
       </p:ext>
     </p:extLst>
   </p:cSld>
@@ -39512,7 +40849,7 @@
           <a:lstStyle/>
           <a:p>
             <a:r>
-              <a:rPr lang="en-US" altLang="zh-TW" dirty="0" smtClean="0"/>
+              <a:rPr lang="en-US" altLang="zh-TW" dirty="0"/>
               <a:t>11-5 </a:t>
             </a:r>
             <a:r>
@@ -39534,78 +40871,36 @@
         </p:nvSpPr>
         <p:spPr/>
         <p:txBody>
-          <a:bodyPr>
-            <a:normAutofit/>
-          </a:bodyPr>
+          <a:bodyPr/>
           <a:lstStyle/>
           <a:p>
             <a:r>
-              <a:rPr lang="zh-TW" altLang="en-US" dirty="0">
-                <a:solidFill>
-                  <a:srgbClr val="C00000"/>
-                </a:solidFill>
-              </a:rPr>
-              <a:t>子序列</a:t>
+              <a:rPr lang="zh-TW" altLang="en-US" dirty="0"/>
+              <a:t>給定兩序列，最長共同子序列</a:t>
             </a:r>
             <a:r>
               <a:rPr lang="en-US" altLang="zh-TW" dirty="0"/>
-              <a:t>(subsequence)</a:t>
-            </a:r>
-            <a:r>
-              <a:rPr lang="zh-TW" altLang="en-US" dirty="0"/>
-              <a:t>就是將一個序列中的一些</a:t>
-            </a:r>
-            <a:r>
-              <a:rPr lang="en-US" altLang="zh-TW" dirty="0"/>
-              <a:t>(</a:t>
-            </a:r>
-            <a:r>
-              <a:rPr lang="zh-TW" altLang="en-US" dirty="0"/>
-              <a:t>可能是零個</a:t>
-            </a:r>
-            <a:r>
-              <a:rPr lang="en-US" altLang="zh-TW" dirty="0"/>
-              <a:t>)</a:t>
-            </a:r>
-            <a:r>
-              <a:rPr lang="zh-TW" altLang="en-US" dirty="0"/>
-              <a:t>字元去掉所得到的序列，例如：</a:t>
-            </a:r>
-            <a:r>
-              <a:rPr lang="en-US" altLang="zh-TW" dirty="0" err="1"/>
-              <a:t>pred</a:t>
-            </a:r>
-            <a:r>
-              <a:rPr lang="zh-TW" altLang="en-US" dirty="0"/>
-              <a:t>、</a:t>
-            </a:r>
-            <a:r>
-              <a:rPr lang="en-US" altLang="zh-TW" dirty="0" err="1"/>
-              <a:t>sdn</a:t>
-            </a:r>
-            <a:r>
-              <a:rPr lang="zh-TW" altLang="en-US" dirty="0"/>
-              <a:t>、</a:t>
-            </a:r>
-            <a:r>
-              <a:rPr lang="en-US" altLang="zh-TW" dirty="0" err="1"/>
-              <a:t>predent</a:t>
-            </a:r>
-            <a:r>
-              <a:rPr lang="zh-TW" altLang="en-US" dirty="0"/>
-              <a:t>等都是</a:t>
-            </a:r>
-            <a:r>
-              <a:rPr lang="en-US" altLang="zh-TW" dirty="0">
-                <a:solidFill>
-                  <a:srgbClr val="0070C0"/>
-                </a:solidFill>
-              </a:rPr>
-              <a:t>president</a:t>
-            </a:r>
-            <a:r>
-              <a:rPr lang="zh-TW" altLang="en-US" dirty="0"/>
-              <a:t>的子序列。</a:t>
+              <a:t>(LCS)</a:t>
+            </a:r>
+            <a:r>
+              <a:rPr lang="zh-TW" altLang="en-US" dirty="0"/>
+              <a:t>問題是決定一個子序列，使得：</a:t>
+            </a:r>
+            <a:endParaRPr lang="en-US" altLang="zh-TW" dirty="0"/>
+          </a:p>
+          <a:p>
+            <a:pPr lvl="1"/>
+            <a:r>
+              <a:rPr lang="zh-TW" altLang="en-US" dirty="0"/>
+              <a:t>該子序列是這兩序列的子序列。</a:t>
+            </a:r>
+            <a:endParaRPr lang="en-US" altLang="zh-TW" dirty="0"/>
+          </a:p>
+          <a:p>
+            <a:pPr lvl="1"/>
+            <a:r>
+              <a:rPr lang="zh-TW" altLang="en-US" dirty="0"/>
+              <a:t>它的長度是最長的。</a:t>
             </a:r>
             <a:endParaRPr lang="en-US" altLang="zh-TW" dirty="0"/>
           </a:p>
@@ -39617,7 +40912,7 @@
     </p:spTree>
     <p:extLst>
       <p:ext uri="{BB962C8B-B14F-4D97-AF65-F5344CB8AC3E}">
-        <p14:creationId xmlns:p14="http://schemas.microsoft.com/office/powerpoint/2010/main" val="1610393876"/>
+        <p14:creationId xmlns:p14="http://schemas.microsoft.com/office/powerpoint/2010/main" val="3811970469"/>
       </p:ext>
     </p:extLst>
   </p:cSld>
@@ -39646,7 +40941,29 @@
       </p:grpSpPr>
       <p:sp>
         <p:nvSpPr>
-          <p:cNvPr id="2" name="標題 1"/>
+          <p:cNvPr id="9" name="內容版面配置區 8"/>
+          <p:cNvSpPr>
+            <a:spLocks noGrp="1"/>
+          </p:cNvSpPr>
+          <p:nvPr>
+            <p:ph idx="1"/>
+          </p:nvPr>
+        </p:nvSpPr>
+        <p:spPr/>
+        <p:txBody>
+          <a:bodyPr/>
+          <a:lstStyle/>
+          <a:p>
+            <a:r>
+              <a:rPr lang="zh-TW" altLang="en-US" dirty="0"/>
+              <a:t>當然最長共同子序列不一定是唯一，現在來探討如何找出其中一個最長的子序列，讀者們應能將此方法擴充為找出所有最長共同子序列的方法：</a:t>
+            </a:r>
+          </a:p>
+        </p:txBody>
+      </p:sp>
+      <p:sp>
+        <p:nvSpPr>
+          <p:cNvPr id="8" name="標題 7"/>
           <p:cNvSpPr>
             <a:spLocks noGrp="1"/>
           </p:cNvSpPr>
@@ -39660,7 +40977,7 @@
           <a:lstStyle/>
           <a:p>
             <a:r>
-              <a:rPr lang="en-US" altLang="zh-TW" dirty="0" smtClean="0"/>
+              <a:rPr lang="en-US" altLang="zh-TW" dirty="0"/>
               <a:t>11-5 </a:t>
             </a:r>
             <a:r>
@@ -39670,62 +40987,73 @@
           </a:p>
         </p:txBody>
       </p:sp>
-      <p:sp>
-        <p:nvSpPr>
-          <p:cNvPr id="3" name="內容版面配置區 2"/>
-          <p:cNvSpPr>
-            <a:spLocks noGrp="1"/>
-          </p:cNvSpPr>
-          <p:nvPr>
-            <p:ph idx="1"/>
-          </p:nvPr>
-        </p:nvSpPr>
-        <p:spPr/>
-        <p:txBody>
-          <a:bodyPr/>
-          <a:lstStyle/>
-          <a:p>
-            <a:r>
-              <a:rPr lang="zh-TW" altLang="en-US" dirty="0"/>
-              <a:t>給定兩序列，最長共同子序列</a:t>
-            </a:r>
-            <a:r>
-              <a:rPr lang="en-US" altLang="zh-TW" dirty="0"/>
-              <a:t>(LCS)</a:t>
-            </a:r>
-            <a:r>
-              <a:rPr lang="zh-TW" altLang="en-US" dirty="0"/>
-              <a:t>問題是決定一個子序列，使得：</a:t>
-            </a:r>
-            <a:endParaRPr lang="en-US" altLang="zh-TW" dirty="0"/>
-          </a:p>
-          <a:p>
-            <a:pPr lvl="1"/>
-            <a:r>
-              <a:rPr lang="zh-TW" altLang="en-US" dirty="0"/>
-              <a:t>該子序列是這兩序列的子序列。</a:t>
-            </a:r>
-            <a:endParaRPr lang="en-US" altLang="zh-TW" dirty="0"/>
-          </a:p>
-          <a:p>
-            <a:pPr lvl="1"/>
-            <a:r>
-              <a:rPr lang="zh-TW" altLang="en-US" dirty="0"/>
-              <a:t>它的長度是最長的。</a:t>
-            </a:r>
-            <a:endParaRPr lang="en-US" altLang="zh-TW" dirty="0"/>
-          </a:p>
-          <a:p>
-            <a:endParaRPr lang="zh-TW" altLang="en-US" dirty="0"/>
-          </a:p>
-        </p:txBody>
-      </p:sp>
+      <p:pic>
+        <p:nvPicPr>
+          <p:cNvPr id="6" name="Picture 2"/>
+          <p:cNvPicPr>
+            <a:picLocks noChangeAspect="1" noChangeArrowheads="1"/>
+          </p:cNvPicPr>
+          <p:nvPr/>
+        </p:nvPicPr>
+        <p:blipFill rotWithShape="1">
+          <a:blip r:embed="rId2" cstate="print"/>
+          <a:srcRect l="2827" t="8670" r="1691" b="8968"/>
+          <a:stretch/>
+        </p:blipFill>
+        <p:spPr bwMode="auto">
+          <a:xfrm>
+            <a:off x="2094647" y="3262127"/>
+            <a:ext cx="5044714" cy="704778"/>
+          </a:xfrm>
+          <a:prstGeom prst="rect">
+            <a:avLst/>
+          </a:prstGeom>
+          <a:ln>
+            <a:noFill/>
+          </a:ln>
+          <a:effectLst>
+            <a:outerShdw blurRad="190500" algn="tl" rotWithShape="0">
+              <a:srgbClr val="000000">
+                <a:alpha val="70000"/>
+              </a:srgbClr>
+            </a:outerShdw>
+          </a:effectLst>
+        </p:spPr>
+      </p:pic>
+      <p:pic>
+        <p:nvPicPr>
+          <p:cNvPr id="7" name="Picture 4"/>
+          <p:cNvPicPr>
+            <a:picLocks noChangeAspect="1" noChangeArrowheads="1"/>
+          </p:cNvPicPr>
+          <p:nvPr/>
+        </p:nvPicPr>
+        <p:blipFill rotWithShape="1">
+          <a:blip r:embed="rId3" cstate="print"/>
+          <a:srcRect l="2583" t="6555" r="1519" b="5946"/>
+          <a:stretch/>
+        </p:blipFill>
+        <p:spPr bwMode="auto">
+          <a:xfrm>
+            <a:off x="2100482" y="4101920"/>
+            <a:ext cx="5081808" cy="741870"/>
+          </a:xfrm>
+          <a:prstGeom prst="rect">
+            <a:avLst/>
+          </a:prstGeom>
+          <a:ln>
+            <a:noFill/>
+          </a:ln>
+          <a:effectLst>
+            <a:outerShdw blurRad="190500" algn="tl" rotWithShape="0">
+              <a:srgbClr val="000000">
+                <a:alpha val="70000"/>
+              </a:srgbClr>
+            </a:outerShdw>
+          </a:effectLst>
+        </p:spPr>
+      </p:pic>
     </p:spTree>
-    <p:extLst>
-      <p:ext uri="{BB962C8B-B14F-4D97-AF65-F5344CB8AC3E}">
-        <p14:creationId xmlns:p14="http://schemas.microsoft.com/office/powerpoint/2010/main" val="3811970469"/>
-      </p:ext>
-    </p:extLst>
   </p:cSld>
   <p:clrMapOvr>
     <a:masterClrMapping/>
@@ -39766,16 +41094,12 @@
           <a:lstStyle/>
           <a:p>
             <a:r>
-              <a:rPr lang="en-US" altLang="zh-TW" dirty="0" smtClean="0"/>
+              <a:rPr lang="en-US" altLang="zh-TW" dirty="0"/>
               <a:t>11-2 </a:t>
             </a:r>
             <a:r>
-              <a:rPr lang="zh-TW" altLang="en-US" b="1" dirty="0" smtClean="0"/>
-              <a:t>最大</a:t>
-            </a:r>
-            <a:r>
               <a:rPr lang="zh-TW" altLang="en-US" b="1" dirty="0"/>
-              <a:t>數及最小數找法</a:t>
+              <a:t>最大數及最小數找法</a:t>
             </a:r>
             <a:endParaRPr lang="zh-TW" altLang="en-US" dirty="0"/>
           </a:p>
@@ -39949,13 +41273,6 @@
   <p:clrMapOvr>
     <a:masterClrMapping/>
   </p:clrMapOvr>
-  <p:timing>
-    <p:tnLst>
-      <p:par>
-        <p:cTn id="1" dur="indefinite" restart="never" nodeType="tmRoot"/>
-      </p:par>
-    </p:tnLst>
-  </p:timing>
 </p:sld>
 </file>
 
@@ -39978,29 +41295,7 @@
       </p:grpSpPr>
       <p:sp>
         <p:nvSpPr>
-          <p:cNvPr id="9" name="內容版面配置區 8"/>
-          <p:cNvSpPr>
-            <a:spLocks noGrp="1"/>
-          </p:cNvSpPr>
-          <p:nvPr>
-            <p:ph idx="1"/>
-          </p:nvPr>
-        </p:nvSpPr>
-        <p:spPr/>
-        <p:txBody>
-          <a:bodyPr/>
-          <a:lstStyle/>
-          <a:p>
-            <a:r>
-              <a:rPr lang="zh-TW" altLang="en-US" dirty="0"/>
-              <a:t>當然最長共同子序列不一定是唯一，現在來探討如何找出其中一個最長的子序列，讀者們應能將此方法擴充為找出所有最長共同子序列的方法：</a:t>
-            </a:r>
-          </a:p>
-        </p:txBody>
-      </p:sp>
-      <p:sp>
-        <p:nvSpPr>
-          <p:cNvPr id="8" name="標題 7"/>
+          <p:cNvPr id="3" name="標題 2"/>
           <p:cNvSpPr>
             <a:spLocks noGrp="1"/>
           </p:cNvSpPr>
@@ -40014,19 +41309,215 @@
           <a:lstStyle/>
           <a:p>
             <a:r>
-              <a:rPr lang="en-US" altLang="zh-TW" dirty="0" smtClean="0"/>
+              <a:rPr lang="en-US" altLang="zh-TW" dirty="0"/>
               <a:t>11-5 </a:t>
             </a:r>
             <a:r>
               <a:rPr lang="zh-TW" altLang="en-US" dirty="0"/>
               <a:t>動態規劃技巧</a:t>
+            </a:r>
+          </a:p>
+        </p:txBody>
+      </p:sp>
+      <p:sp>
+        <p:nvSpPr>
+          <p:cNvPr id="2" name="內容版面配置區 1"/>
+          <p:cNvSpPr>
+            <a:spLocks noGrp="1"/>
+          </p:cNvSpPr>
+          <p:nvPr>
+            <p:ph idx="1"/>
+          </p:nvPr>
+        </p:nvSpPr>
+        <p:spPr/>
+        <p:txBody>
+          <a:bodyPr>
+            <a:normAutofit/>
+          </a:bodyPr>
+          <a:lstStyle/>
+          <a:p>
+            <a:r>
+              <a:rPr lang="zh-TW" altLang="en-US" sz="2800" dirty="0"/>
+              <a:t>給定兩序列</a:t>
+            </a:r>
+            <a:r>
+              <a:rPr lang="en-US" altLang="zh-TW" sz="2800" dirty="0"/>
+              <a:t>A=a</a:t>
+            </a:r>
+            <a:r>
+              <a:rPr lang="en-US" altLang="zh-TW" sz="2800" baseline="-25000" dirty="0"/>
+              <a:t>1</a:t>
+            </a:r>
+            <a:r>
+              <a:rPr lang="en-US" altLang="zh-TW" sz="2800" dirty="0"/>
+              <a:t>a</a:t>
+            </a:r>
+            <a:r>
+              <a:rPr lang="en-US" altLang="zh-TW" sz="2800" baseline="-25000" dirty="0"/>
+              <a:t>2</a:t>
+            </a:r>
+            <a:r>
+              <a:rPr lang="en-US" altLang="zh-TW" sz="2800" dirty="0"/>
+              <a:t>...a</a:t>
+            </a:r>
+            <a:r>
+              <a:rPr lang="en-US" altLang="zh-TW" sz="2800" baseline="-25000" dirty="0"/>
+              <a:t>m</a:t>
+            </a:r>
+            <a:r>
+              <a:rPr lang="zh-TW" altLang="en-US" sz="2800" dirty="0"/>
+              <a:t>及</a:t>
+            </a:r>
+            <a:r>
+              <a:rPr lang="en-US" altLang="zh-TW" sz="2800" dirty="0"/>
+              <a:t>B=b</a:t>
+            </a:r>
+            <a:r>
+              <a:rPr lang="en-US" altLang="zh-TW" sz="2800" baseline="-25000" dirty="0"/>
+              <a:t>1</a:t>
+            </a:r>
+            <a:r>
+              <a:rPr lang="en-US" altLang="zh-TW" sz="2800" dirty="0"/>
+              <a:t>b</a:t>
+            </a:r>
+            <a:r>
+              <a:rPr lang="en-US" altLang="zh-TW" sz="2800" baseline="-25000" dirty="0"/>
+              <a:t>2</a:t>
+            </a:r>
+            <a:r>
+              <a:rPr lang="en-US" altLang="zh-TW" sz="2800" dirty="0"/>
+              <a:t>...</a:t>
+            </a:r>
+            <a:r>
+              <a:rPr lang="en-US" altLang="zh-TW" sz="2800" dirty="0" err="1"/>
+              <a:t>b</a:t>
+            </a:r>
+            <a:r>
+              <a:rPr lang="en-US" altLang="zh-TW" sz="2800" baseline="-25000" dirty="0" err="1"/>
+              <a:t>n</a:t>
+            </a:r>
+            <a:r>
+              <a:rPr lang="zh-TW" altLang="en-US" sz="2800" dirty="0"/>
+              <a:t>，令</a:t>
+            </a:r>
+            <a:r>
+              <a:rPr lang="en-US" altLang="zh-TW" sz="2800" dirty="0" err="1"/>
+              <a:t>len</a:t>
+            </a:r>
+            <a:r>
+              <a:rPr lang="en-US" altLang="zh-TW" sz="2800" dirty="0"/>
+              <a:t>(</a:t>
+            </a:r>
+            <a:r>
+              <a:rPr lang="en-US" altLang="zh-TW" sz="2800" dirty="0" err="1"/>
+              <a:t>i,j</a:t>
+            </a:r>
+            <a:r>
+              <a:rPr lang="en-US" altLang="zh-TW" sz="2800" dirty="0"/>
+              <a:t>)</a:t>
+            </a:r>
+            <a:r>
+              <a:rPr lang="zh-TW" altLang="en-US" sz="2800" dirty="0"/>
+              <a:t>表示</a:t>
+            </a:r>
+            <a:r>
+              <a:rPr lang="en-US" altLang="zh-TW" sz="2800" dirty="0"/>
+              <a:t>a</a:t>
+            </a:r>
+            <a:r>
+              <a:rPr lang="en-US" altLang="zh-TW" sz="2800" baseline="-25000" dirty="0"/>
+              <a:t>1</a:t>
+            </a:r>
+            <a:r>
+              <a:rPr lang="en-US" altLang="zh-TW" sz="2800" dirty="0"/>
+              <a:t>a</a:t>
+            </a:r>
+            <a:r>
+              <a:rPr lang="en-US" altLang="zh-TW" sz="2800" baseline="-25000" dirty="0"/>
+              <a:t>2</a:t>
+            </a:r>
+            <a:r>
+              <a:rPr lang="en-US" altLang="zh-TW" sz="2800" dirty="0"/>
+              <a:t>...</a:t>
+            </a:r>
+            <a:r>
+              <a:rPr lang="en-US" altLang="zh-TW" sz="2800" dirty="0" err="1"/>
+              <a:t>a</a:t>
+            </a:r>
+            <a:r>
+              <a:rPr lang="en-US" altLang="zh-TW" sz="2800" baseline="-25000" dirty="0" err="1"/>
+              <a:t>i</a:t>
+            </a:r>
+            <a:r>
+              <a:rPr lang="zh-TW" altLang="en-US" sz="2800" dirty="0"/>
+              <a:t>與</a:t>
+            </a:r>
+            <a:r>
+              <a:rPr lang="en-US" altLang="zh-TW" sz="2800" dirty="0"/>
+              <a:t>b</a:t>
+            </a:r>
+            <a:r>
+              <a:rPr lang="en-US" altLang="zh-TW" sz="2800" baseline="-25000" dirty="0"/>
+              <a:t>1</a:t>
+            </a:r>
+            <a:r>
+              <a:rPr lang="en-US" altLang="zh-TW" sz="2800" dirty="0"/>
+              <a:t>b</a:t>
+            </a:r>
+            <a:r>
+              <a:rPr lang="en-US" altLang="zh-TW" sz="2800" baseline="-25000" dirty="0"/>
+              <a:t>2</a:t>
+            </a:r>
+            <a:r>
+              <a:rPr lang="en-US" altLang="zh-TW" sz="2800" dirty="0"/>
+              <a:t>...</a:t>
+            </a:r>
+            <a:r>
+              <a:rPr lang="en-US" altLang="zh-TW" sz="2800" dirty="0" err="1"/>
+              <a:t>b</a:t>
+            </a:r>
+            <a:r>
+              <a:rPr lang="en-US" altLang="zh-TW" sz="2800" baseline="-25000" dirty="0" err="1"/>
+              <a:t>j</a:t>
+            </a:r>
+            <a:r>
+              <a:rPr lang="zh-TW" altLang="en-US" sz="2800" dirty="0"/>
+              <a:t>的</a:t>
+            </a:r>
+            <a:r>
+              <a:rPr lang="en-US" altLang="zh-TW" sz="2800" dirty="0"/>
+              <a:t>LCS</a:t>
+            </a:r>
+            <a:r>
+              <a:rPr lang="zh-TW" altLang="en-US" sz="2800" dirty="0"/>
+              <a:t>之長度，則下列遞迴關係可用來計算</a:t>
+            </a:r>
+            <a:r>
+              <a:rPr lang="en-US" altLang="zh-TW" sz="2800" dirty="0" err="1"/>
+              <a:t>len</a:t>
+            </a:r>
+            <a:r>
+              <a:rPr lang="en-US" altLang="zh-TW" sz="2800" dirty="0"/>
+              <a:t>(</a:t>
+            </a:r>
+            <a:r>
+              <a:rPr lang="en-US" altLang="zh-TW" sz="2800" dirty="0" err="1"/>
+              <a:t>i</a:t>
+            </a:r>
+            <a:r>
+              <a:rPr lang="en-US" altLang="zh-TW" sz="2800" dirty="0"/>
+              <a:t>, j)</a:t>
+            </a:r>
+            <a:r>
+              <a:rPr lang="zh-TW" altLang="en-US" sz="2800" dirty="0"/>
+              <a:t>：</a:t>
             </a:r>
           </a:p>
         </p:txBody>
       </p:sp>
       <p:pic>
         <p:nvPicPr>
-          <p:cNvPr id="6" name="Picture 2"/>
+          <p:cNvPr id="5" name="Picture 2"/>
           <p:cNvPicPr>
             <a:picLocks noChangeAspect="1" noChangeArrowheads="1"/>
           </p:cNvPicPr>
@@ -40034,46 +41525,13 @@
         </p:nvPicPr>
         <p:blipFill rotWithShape="1">
           <a:blip r:embed="rId2" cstate="print"/>
-          <a:srcRect l="2827" t="8670" r="1691" b="8968"/>
+          <a:srcRect l="2106" t="3474" r="1008" b="6196"/>
           <a:stretch/>
         </p:blipFill>
         <p:spPr bwMode="auto">
           <a:xfrm>
-            <a:off x="2094647" y="3262127"/>
-            <a:ext cx="5044714" cy="704778"/>
-          </a:xfrm>
-          <a:prstGeom prst="rect">
-            <a:avLst/>
-          </a:prstGeom>
-          <a:ln>
-            <a:noFill/>
-          </a:ln>
-          <a:effectLst>
-            <a:outerShdw blurRad="190500" algn="tl" rotWithShape="0">
-              <a:srgbClr val="000000">
-                <a:alpha val="70000"/>
-              </a:srgbClr>
-            </a:outerShdw>
-          </a:effectLst>
-        </p:spPr>
-      </p:pic>
-      <p:pic>
-        <p:nvPicPr>
-          <p:cNvPr id="7" name="Picture 4"/>
-          <p:cNvPicPr>
-            <a:picLocks noChangeAspect="1" noChangeArrowheads="1"/>
-          </p:cNvPicPr>
-          <p:nvPr/>
-        </p:nvPicPr>
-        <p:blipFill rotWithShape="1">
-          <a:blip r:embed="rId3" cstate="print"/>
-          <a:srcRect l="2583" t="6555" r="1519" b="5946"/>
-          <a:stretch/>
-        </p:blipFill>
-        <p:spPr bwMode="auto">
-          <a:xfrm>
-            <a:off x="2100482" y="4101920"/>
-            <a:ext cx="5081808" cy="741870"/>
+            <a:off x="1241630" y="3424493"/>
+            <a:ext cx="6210690" cy="1170130"/>
           </a:xfrm>
           <a:prstGeom prst="rect">
             <a:avLst/>
@@ -40117,7 +41575,7 @@
       </p:grpSpPr>
       <p:sp>
         <p:nvSpPr>
-          <p:cNvPr id="3" name="標題 2"/>
+          <p:cNvPr id="5" name="標題 4"/>
           <p:cNvSpPr>
             <a:spLocks noGrp="1"/>
           </p:cNvSpPr>
@@ -40131,7 +41589,7 @@
           <a:lstStyle/>
           <a:p>
             <a:r>
-              <a:rPr lang="en-US" altLang="zh-TW" dirty="0" smtClean="0"/>
+              <a:rPr lang="en-US" altLang="zh-TW" dirty="0"/>
               <a:t>11-5 </a:t>
             </a:r>
             <a:r>
@@ -40151,7 +41609,12 @@
             <p:ph idx="1"/>
           </p:nvPr>
         </p:nvSpPr>
-        <p:spPr/>
+        <p:spPr>
+          <a:xfrm>
+            <a:off x="457200" y="1494049"/>
+            <a:ext cx="8229600" cy="3341621"/>
+          </a:xfrm>
+        </p:spPr>
         <p:txBody>
           <a:bodyPr>
             <a:normAutofit/>
@@ -40159,217 +41622,152 @@
           <a:lstStyle/>
           <a:p>
             <a:r>
-              <a:rPr lang="zh-TW" altLang="en-US" sz="2800" dirty="0"/>
-              <a:t>給定兩序列</a:t>
-            </a:r>
-            <a:r>
-              <a:rPr lang="en-US" altLang="zh-TW" sz="2800" dirty="0"/>
-              <a:t>A=a</a:t>
-            </a:r>
-            <a:r>
-              <a:rPr lang="en-US" altLang="zh-TW" sz="2800" baseline="-25000" dirty="0"/>
+              <a:rPr lang="zh-TW" altLang="en-US" dirty="0"/>
+              <a:t>遞迴關係：當某個序列是空序列時，</a:t>
+            </a:r>
+            <a:r>
+              <a:rPr lang="en-US" altLang="zh-TW" dirty="0"/>
+              <a:t>LCS</a:t>
+            </a:r>
+            <a:r>
+              <a:rPr lang="zh-TW" altLang="en-US" dirty="0"/>
+              <a:t>的長度為</a:t>
+            </a:r>
+            <a:r>
+              <a:rPr lang="en-US" altLang="zh-TW" dirty="0"/>
+              <a:t>0</a:t>
+            </a:r>
+            <a:r>
+              <a:rPr lang="zh-TW" altLang="en-US" dirty="0"/>
+              <a:t>；當</a:t>
+            </a:r>
+            <a:r>
+              <a:rPr lang="en-US" altLang="zh-TW" dirty="0" err="1"/>
+              <a:t>a</a:t>
+            </a:r>
+            <a:r>
+              <a:rPr lang="en-US" altLang="zh-TW" baseline="-25000" dirty="0" err="1"/>
+              <a:t>i</a:t>
+            </a:r>
+            <a:r>
+              <a:rPr lang="en-US" altLang="zh-TW" dirty="0"/>
+              <a:t>=</a:t>
+            </a:r>
+            <a:r>
+              <a:rPr lang="en-US" altLang="zh-TW" dirty="0" err="1"/>
+              <a:t>b</a:t>
+            </a:r>
+            <a:r>
+              <a:rPr lang="en-US" altLang="zh-TW" baseline="-25000" dirty="0" err="1"/>
+              <a:t>j</a:t>
+            </a:r>
+            <a:r>
+              <a:rPr lang="zh-TW" altLang="en-US" dirty="0"/>
+              <a:t>時，將</a:t>
+            </a:r>
+            <a:r>
+              <a:rPr lang="en-US" altLang="zh-TW" dirty="0"/>
+              <a:t>a</a:t>
+            </a:r>
+            <a:r>
+              <a:rPr lang="en-US" altLang="zh-TW" baseline="-25000" dirty="0"/>
               <a:t>1</a:t>
             </a:r>
             <a:r>
-              <a:rPr lang="en-US" altLang="zh-TW" sz="2800" dirty="0"/>
+              <a:rPr lang="en-US" altLang="zh-TW" dirty="0"/>
               <a:t>a</a:t>
             </a:r>
             <a:r>
-              <a:rPr lang="en-US" altLang="zh-TW" sz="2800" baseline="-25000" dirty="0"/>
+              <a:rPr lang="en-US" altLang="zh-TW" baseline="-25000" dirty="0"/>
               <a:t>2</a:t>
             </a:r>
             <a:r>
-              <a:rPr lang="en-US" altLang="zh-TW" sz="2800" dirty="0"/>
+              <a:rPr lang="en-US" altLang="zh-TW" dirty="0"/>
               <a:t>...a</a:t>
             </a:r>
             <a:r>
-              <a:rPr lang="en-US" altLang="zh-TW" sz="2800" baseline="-25000" dirty="0"/>
-              <a:t>m</a:t>
-            </a:r>
-            <a:r>
-              <a:rPr lang="zh-TW" altLang="en-US" sz="2800" dirty="0"/>
+              <a:rPr lang="en-US" altLang="zh-TW" baseline="-25000" dirty="0"/>
+              <a:t>i-1</a:t>
+            </a:r>
+            <a:r>
+              <a:rPr lang="zh-TW" altLang="en-US" dirty="0"/>
               <a:t>及</a:t>
             </a:r>
             <a:r>
-              <a:rPr lang="en-US" altLang="zh-TW" sz="2800" dirty="0"/>
-              <a:t>B=b</a:t>
-            </a:r>
-            <a:r>
-              <a:rPr lang="en-US" altLang="zh-TW" sz="2800" baseline="-25000" dirty="0"/>
+              <a:rPr lang="en-US" altLang="zh-TW" dirty="0"/>
+              <a:t>b</a:t>
+            </a:r>
+            <a:r>
+              <a:rPr lang="en-US" altLang="zh-TW" baseline="-25000" dirty="0"/>
               <a:t>1</a:t>
             </a:r>
             <a:r>
-              <a:rPr lang="en-US" altLang="zh-TW" sz="2800" dirty="0"/>
+              <a:rPr lang="en-US" altLang="zh-TW" dirty="0"/>
               <a:t>b</a:t>
             </a:r>
             <a:r>
-              <a:rPr lang="en-US" altLang="zh-TW" sz="2800" baseline="-25000" dirty="0"/>
+              <a:rPr lang="en-US" altLang="zh-TW" baseline="-25000" dirty="0"/>
               <a:t>2</a:t>
             </a:r>
             <a:r>
-              <a:rPr lang="en-US" altLang="zh-TW" sz="2800" dirty="0"/>
-              <a:t>...</a:t>
-            </a:r>
-            <a:r>
-              <a:rPr lang="en-US" altLang="zh-TW" sz="2800" dirty="0" err="1"/>
-              <a:t>b</a:t>
-            </a:r>
-            <a:r>
-              <a:rPr lang="en-US" altLang="zh-TW" sz="2800" baseline="-25000" dirty="0" err="1"/>
-              <a:t>n</a:t>
-            </a:r>
-            <a:r>
-              <a:rPr lang="zh-TW" altLang="en-US" sz="2800" dirty="0"/>
-              <a:t>，令</a:t>
-            </a:r>
-            <a:r>
-              <a:rPr lang="en-US" altLang="zh-TW" sz="2800" dirty="0" err="1"/>
-              <a:t>len</a:t>
-            </a:r>
-            <a:r>
-              <a:rPr lang="en-US" altLang="zh-TW" sz="2800" dirty="0"/>
+              <a:rPr lang="en-US" altLang="zh-TW" dirty="0"/>
+              <a:t>...b</a:t>
+            </a:r>
+            <a:r>
+              <a:rPr lang="en-US" altLang="zh-TW" baseline="-25000" dirty="0"/>
+              <a:t>j-1</a:t>
+            </a:r>
+            <a:r>
+              <a:rPr lang="zh-TW" altLang="en-US" dirty="0"/>
+              <a:t>的</a:t>
+            </a:r>
+            <a:r>
+              <a:rPr lang="en-US" altLang="zh-TW" dirty="0"/>
+              <a:t>LCS</a:t>
+            </a:r>
+            <a:r>
+              <a:rPr lang="zh-TW" altLang="en-US" dirty="0"/>
+              <a:t>長度再加上</a:t>
+            </a:r>
+            <a:r>
+              <a:rPr lang="en-US" altLang="zh-TW" dirty="0"/>
+              <a:t>1</a:t>
+            </a:r>
+            <a:r>
+              <a:rPr lang="zh-TW" altLang="en-US" dirty="0"/>
+              <a:t>即可</a:t>
+            </a:r>
+            <a:r>
+              <a:rPr lang="en-US" altLang="zh-TW" dirty="0"/>
               <a:t>(</a:t>
             </a:r>
             <a:r>
-              <a:rPr lang="en-US" altLang="zh-TW" sz="2800" dirty="0" err="1"/>
-              <a:t>i,j</a:t>
-            </a:r>
-            <a:r>
-              <a:rPr lang="en-US" altLang="zh-TW" sz="2800" dirty="0"/>
+              <a:rPr lang="zh-TW" altLang="en-US" dirty="0"/>
+              <a:t>因為最後的字元相同，可使</a:t>
+            </a:r>
+            <a:r>
+              <a:rPr lang="en-US" altLang="zh-TW" dirty="0"/>
+              <a:t>LCS</a:t>
+            </a:r>
+            <a:r>
+              <a:rPr lang="zh-TW" altLang="en-US" dirty="0"/>
+              <a:t>的長度增加</a:t>
+            </a:r>
+            <a:r>
+              <a:rPr lang="en-US" altLang="zh-TW" dirty="0"/>
+              <a:t>1</a:t>
+            </a:r>
+            <a:r>
+              <a:rPr lang="zh-TW" altLang="en-US" dirty="0"/>
+              <a:t>。</a:t>
+            </a:r>
+            <a:r>
+              <a:rPr lang="en-US" altLang="zh-TW" dirty="0"/>
               <a:t>)</a:t>
-            </a:r>
-            <a:r>
-              <a:rPr lang="zh-TW" altLang="en-US" sz="2800" dirty="0"/>
-              <a:t>表示</a:t>
-            </a:r>
-            <a:r>
-              <a:rPr lang="en-US" altLang="zh-TW" sz="2800" dirty="0"/>
-              <a:t>a</a:t>
-            </a:r>
-            <a:r>
-              <a:rPr lang="en-US" altLang="zh-TW" sz="2800" baseline="-25000" dirty="0"/>
-              <a:t>1</a:t>
-            </a:r>
-            <a:r>
-              <a:rPr lang="en-US" altLang="zh-TW" sz="2800" dirty="0"/>
-              <a:t>a</a:t>
-            </a:r>
-            <a:r>
-              <a:rPr lang="en-US" altLang="zh-TW" sz="2800" baseline="-25000" dirty="0"/>
-              <a:t>2</a:t>
-            </a:r>
-            <a:r>
-              <a:rPr lang="en-US" altLang="zh-TW" sz="2800" dirty="0"/>
-              <a:t>...</a:t>
-            </a:r>
-            <a:r>
-              <a:rPr lang="en-US" altLang="zh-TW" sz="2800" dirty="0" err="1"/>
-              <a:t>a</a:t>
-            </a:r>
-            <a:r>
-              <a:rPr lang="en-US" altLang="zh-TW" sz="2800" baseline="-25000" dirty="0" err="1"/>
-              <a:t>i</a:t>
-            </a:r>
-            <a:r>
-              <a:rPr lang="zh-TW" altLang="en-US" sz="2800" dirty="0"/>
-              <a:t>與</a:t>
-            </a:r>
-            <a:r>
-              <a:rPr lang="en-US" altLang="zh-TW" sz="2800" dirty="0"/>
-              <a:t>b</a:t>
-            </a:r>
-            <a:r>
-              <a:rPr lang="en-US" altLang="zh-TW" sz="2800" baseline="-25000" dirty="0"/>
-              <a:t>1</a:t>
-            </a:r>
-            <a:r>
-              <a:rPr lang="en-US" altLang="zh-TW" sz="2800" dirty="0"/>
-              <a:t>b</a:t>
-            </a:r>
-            <a:r>
-              <a:rPr lang="en-US" altLang="zh-TW" sz="2800" baseline="-25000" dirty="0"/>
-              <a:t>2</a:t>
-            </a:r>
-            <a:r>
-              <a:rPr lang="en-US" altLang="zh-TW" sz="2800" dirty="0"/>
-              <a:t>...</a:t>
-            </a:r>
-            <a:r>
-              <a:rPr lang="en-US" altLang="zh-TW" sz="2800" dirty="0" err="1"/>
-              <a:t>b</a:t>
-            </a:r>
-            <a:r>
-              <a:rPr lang="en-US" altLang="zh-TW" sz="2800" baseline="-25000" dirty="0" err="1"/>
-              <a:t>j</a:t>
-            </a:r>
-            <a:r>
-              <a:rPr lang="zh-TW" altLang="en-US" sz="2800" dirty="0"/>
-              <a:t>的</a:t>
-            </a:r>
-            <a:r>
-              <a:rPr lang="en-US" altLang="zh-TW" sz="2800" dirty="0"/>
-              <a:t>LCS</a:t>
-            </a:r>
-            <a:r>
-              <a:rPr lang="zh-TW" altLang="en-US" sz="2800" dirty="0"/>
-              <a:t>之長度，則下列遞迴關係可用來計算</a:t>
-            </a:r>
-            <a:r>
-              <a:rPr lang="en-US" altLang="zh-TW" sz="2800" dirty="0" err="1"/>
-              <a:t>len</a:t>
-            </a:r>
-            <a:r>
-              <a:rPr lang="en-US" altLang="zh-TW" sz="2800" dirty="0"/>
-              <a:t>(</a:t>
-            </a:r>
-            <a:r>
-              <a:rPr lang="en-US" altLang="zh-TW" sz="2800" dirty="0" err="1"/>
-              <a:t>i</a:t>
-            </a:r>
-            <a:r>
-              <a:rPr lang="en-US" altLang="zh-TW" sz="2800" dirty="0"/>
-              <a:t>, j)</a:t>
-            </a:r>
-            <a:r>
-              <a:rPr lang="zh-TW" altLang="en-US" sz="2800" dirty="0"/>
-              <a:t>：</a:t>
             </a:r>
           </a:p>
         </p:txBody>
       </p:sp>
-      <p:pic>
-        <p:nvPicPr>
-          <p:cNvPr id="5" name="Picture 2"/>
-          <p:cNvPicPr>
-            <a:picLocks noChangeAspect="1" noChangeArrowheads="1"/>
-          </p:cNvPicPr>
-          <p:nvPr/>
-        </p:nvPicPr>
-        <p:blipFill rotWithShape="1">
-          <a:blip r:embed="rId2" cstate="print"/>
-          <a:srcRect l="2106" t="3474" r="1008" b="6196"/>
-          <a:stretch/>
-        </p:blipFill>
-        <p:spPr bwMode="auto">
-          <a:xfrm>
-            <a:off x="1241630" y="3424493"/>
-            <a:ext cx="6210690" cy="1170130"/>
-          </a:xfrm>
-          <a:prstGeom prst="rect">
-            <a:avLst/>
-          </a:prstGeom>
-          <a:ln>
-            <a:noFill/>
-          </a:ln>
-          <a:effectLst>
-            <a:outerShdw blurRad="190500" algn="tl" rotWithShape="0">
-              <a:srgbClr val="000000">
-                <a:alpha val="70000"/>
-              </a:srgbClr>
-            </a:outerShdw>
-          </a:effectLst>
-        </p:spPr>
-      </p:pic>
     </p:spTree>
   </p:cSld>
   <p:clrMapOvr>
@@ -40397,7 +41795,7 @@
       </p:grpSpPr>
       <p:sp>
         <p:nvSpPr>
-          <p:cNvPr id="5" name="標題 4"/>
+          <p:cNvPr id="2" name="標題 1"/>
           <p:cNvSpPr>
             <a:spLocks noGrp="1"/>
           </p:cNvSpPr>
@@ -40411,7 +41809,7 @@
           <a:lstStyle/>
           <a:p>
             <a:r>
-              <a:rPr lang="en-US" altLang="zh-TW" dirty="0" smtClean="0"/>
+              <a:rPr lang="en-US" altLang="zh-TW" dirty="0"/>
               <a:t>11-5 </a:t>
             </a:r>
             <a:r>
@@ -40423,7 +41821,7 @@
       </p:sp>
       <p:sp>
         <p:nvSpPr>
-          <p:cNvPr id="2" name="內容版面配置區 1"/>
+          <p:cNvPr id="3" name="內容版面配置區 2"/>
           <p:cNvSpPr>
             <a:spLocks noGrp="1"/>
           </p:cNvSpPr>
@@ -40431,21 +41829,38 @@
             <p:ph idx="1"/>
           </p:nvPr>
         </p:nvSpPr>
-        <p:spPr>
-          <a:xfrm>
-            <a:off x="457200" y="1494049"/>
-            <a:ext cx="8229600" cy="3341621"/>
-          </a:xfrm>
-        </p:spPr>
+        <p:spPr/>
         <p:txBody>
-          <a:bodyPr>
-            <a:normAutofit/>
-          </a:bodyPr>
+          <a:bodyPr/>
           <a:lstStyle/>
           <a:p>
             <a:r>
               <a:rPr lang="zh-TW" altLang="en-US" dirty="0"/>
-              <a:t>遞迴關係：當某個序列是空序列時，</a:t>
+              <a:t>當</a:t>
+            </a:r>
+            <a:r>
+              <a:rPr lang="en-US" altLang="zh-TW" dirty="0" err="1"/>
+              <a:t>a</a:t>
+            </a:r>
+            <a:r>
+              <a:rPr lang="en-US" altLang="zh-TW" baseline="-25000" dirty="0" err="1"/>
+              <a:t>i</a:t>
+            </a:r>
+            <a:r>
+              <a:rPr lang="zh-TW" altLang="en-US" dirty="0"/>
+              <a:t>≠</a:t>
+            </a:r>
+            <a:r>
+              <a:rPr lang="en-US" altLang="zh-TW" dirty="0" err="1"/>
+              <a:t>b</a:t>
+            </a:r>
+            <a:r>
+              <a:rPr lang="en-US" altLang="zh-TW" baseline="-25000" dirty="0" err="1"/>
+              <a:t>j</a:t>
+            </a:r>
+            <a:r>
+              <a:rPr lang="zh-TW" altLang="en-US" dirty="0"/>
+              <a:t>時，這兩個字元不可能配對來貢獻給</a:t>
             </a:r>
             <a:r>
               <a:rPr lang="en-US" altLang="zh-TW" dirty="0"/>
@@ -40453,15 +41868,27 @@
             </a:r>
             <a:r>
               <a:rPr lang="zh-TW" altLang="en-US" dirty="0"/>
-              <a:t>的長度為</a:t>
+              <a:t>，所以取</a:t>
             </a:r>
             <a:r>
               <a:rPr lang="en-US" altLang="zh-TW" dirty="0"/>
-              <a:t>0</a:t>
-            </a:r>
-            <a:r>
-              <a:rPr lang="zh-TW" altLang="en-US" dirty="0"/>
-              <a:t>；當</a:t>
+              <a:t>a</a:t>
+            </a:r>
+            <a:r>
+              <a:rPr lang="en-US" altLang="zh-TW" baseline="-25000" dirty="0"/>
+              <a:t>1</a:t>
+            </a:r>
+            <a:r>
+              <a:rPr lang="en-US" altLang="zh-TW" dirty="0"/>
+              <a:t>a</a:t>
+            </a:r>
+            <a:r>
+              <a:rPr lang="en-US" altLang="zh-TW" baseline="-25000" dirty="0"/>
+              <a:t>2</a:t>
+            </a:r>
+            <a:r>
+              <a:rPr lang="en-US" altLang="zh-TW" dirty="0"/>
+              <a:t>...</a:t>
             </a:r>
             <a:r>
               <a:rPr lang="en-US" altLang="zh-TW" dirty="0" err="1"/>
@@ -40472,8 +41899,92 @@
               <a:t>i</a:t>
             </a:r>
             <a:r>
+              <a:rPr lang="zh-TW" altLang="en-US" dirty="0"/>
+              <a:t>與</a:t>
+            </a:r>
+            <a:r>
               <a:rPr lang="en-US" altLang="zh-TW" dirty="0"/>
-              <a:t>=</a:t>
+              <a:t>b</a:t>
+            </a:r>
+            <a:r>
+              <a:rPr lang="en-US" altLang="zh-TW" baseline="-25000" dirty="0"/>
+              <a:t>1</a:t>
+            </a:r>
+            <a:r>
+              <a:rPr lang="en-US" altLang="zh-TW" dirty="0"/>
+              <a:t>b</a:t>
+            </a:r>
+            <a:r>
+              <a:rPr lang="en-US" altLang="zh-TW" baseline="-25000" dirty="0"/>
+              <a:t>2</a:t>
+            </a:r>
+            <a:r>
+              <a:rPr lang="en-US" altLang="zh-TW" dirty="0"/>
+              <a:t>...b</a:t>
+            </a:r>
+            <a:r>
+              <a:rPr lang="en-US" altLang="zh-TW" baseline="-25000" dirty="0"/>
+              <a:t>j-1</a:t>
+            </a:r>
+            <a:r>
+              <a:rPr lang="zh-TW" altLang="en-US" dirty="0"/>
+              <a:t>的</a:t>
+            </a:r>
+            <a:r>
+              <a:rPr lang="en-US" altLang="zh-TW" dirty="0"/>
+              <a:t>LCS</a:t>
+            </a:r>
+            <a:r>
+              <a:rPr lang="zh-TW" altLang="en-US" dirty="0"/>
+              <a:t>或</a:t>
+            </a:r>
+            <a:r>
+              <a:rPr lang="en-US" altLang="zh-TW" dirty="0"/>
+              <a:t>a</a:t>
+            </a:r>
+            <a:r>
+              <a:rPr lang="en-US" altLang="zh-TW" baseline="-25000" dirty="0"/>
+              <a:t>1</a:t>
+            </a:r>
+            <a:r>
+              <a:rPr lang="en-US" altLang="zh-TW" dirty="0"/>
+              <a:t>a</a:t>
+            </a:r>
+            <a:r>
+              <a:rPr lang="en-US" altLang="zh-TW" baseline="-25000" dirty="0"/>
+              <a:t>2</a:t>
+            </a:r>
+            <a:r>
+              <a:rPr lang="en-US" altLang="zh-TW" dirty="0"/>
+              <a:t>...a</a:t>
+            </a:r>
+            <a:r>
+              <a:rPr lang="en-US" altLang="zh-TW" baseline="-25000" dirty="0"/>
+              <a:t>i-1</a:t>
+            </a:r>
+            <a:r>
+              <a:rPr lang="zh-TW" altLang="en-US" dirty="0"/>
+              <a:t>與</a:t>
+            </a:r>
+            <a:r>
+              <a:rPr lang="en-US" altLang="zh-TW" dirty="0"/>
+              <a:t>b</a:t>
+            </a:r>
+            <a:r>
+              <a:rPr lang="en-US" altLang="zh-TW" baseline="-25000" dirty="0"/>
+              <a:t>1</a:t>
+            </a:r>
+            <a:r>
+              <a:rPr lang="en-US" altLang="zh-TW" dirty="0"/>
+              <a:t>b</a:t>
+            </a:r>
+            <a:r>
+              <a:rPr lang="en-US" altLang="zh-TW" baseline="-25000" dirty="0"/>
+              <a:t>2</a:t>
+            </a:r>
+            <a:r>
+              <a:rPr lang="en-US" altLang="zh-TW" dirty="0"/>
+              <a:t>...</a:t>
             </a:r>
             <a:r>
               <a:rPr lang="en-US" altLang="zh-TW" dirty="0" err="1"/>
@@ -40485,62 +41996,6 @@
             </a:r>
             <a:r>
               <a:rPr lang="zh-TW" altLang="en-US" dirty="0"/>
-              <a:t>時，將</a:t>
-            </a:r>
-            <a:r>
-              <a:rPr lang="en-US" altLang="zh-TW" dirty="0"/>
-              <a:t>a</a:t>
-            </a:r>
-            <a:r>
-              <a:rPr lang="en-US" altLang="zh-TW" baseline="-25000" dirty="0"/>
-              <a:t>1</a:t>
-            </a:r>
-            <a:r>
-              <a:rPr lang="en-US" altLang="zh-TW" dirty="0"/>
-              <a:t>a</a:t>
-            </a:r>
-            <a:r>
-              <a:rPr lang="en-US" altLang="zh-TW" baseline="-25000" dirty="0"/>
-              <a:t>2</a:t>
-            </a:r>
-            <a:r>
-              <a:rPr lang="en-US" altLang="zh-TW" dirty="0"/>
-              <a:t>...a</a:t>
-            </a:r>
-            <a:r>
-              <a:rPr lang="en-US" altLang="zh-TW" baseline="-25000" dirty="0"/>
-              <a:t>i-1</a:t>
-            </a:r>
-            <a:r>
-              <a:rPr lang="zh-TW" altLang="en-US" dirty="0"/>
-              <a:t>及</a:t>
-            </a:r>
-            <a:r>
-              <a:rPr lang="en-US" altLang="zh-TW" dirty="0"/>
-              <a:t>b</a:t>
-            </a:r>
-            <a:r>
-              <a:rPr lang="en-US" altLang="zh-TW" baseline="-25000" dirty="0"/>
-              <a:t>1</a:t>
-            </a:r>
-            <a:r>
-              <a:rPr lang="en-US" altLang="zh-TW" dirty="0"/>
-              <a:t>b</a:t>
-            </a:r>
-            <a:r>
-              <a:rPr lang="en-US" altLang="zh-TW" baseline="-25000" dirty="0"/>
-              <a:t>2</a:t>
-            </a:r>
-            <a:r>
-              <a:rPr lang="en-US" altLang="zh-TW" dirty="0"/>
-              <a:t>...b</a:t>
-            </a:r>
-            <a:r>
-              <a:rPr lang="en-US" altLang="zh-TW" baseline="-25000" dirty="0"/>
-              <a:t>j-1</a:t>
-            </a:r>
-            <a:r>
-              <a:rPr lang="zh-TW" altLang="en-US" dirty="0"/>
               <a:t>的</a:t>
             </a:r>
             <a:r>
@@ -40549,23 +42004,7 @@
             </a:r>
             <a:r>
               <a:rPr lang="zh-TW" altLang="en-US" dirty="0"/>
-              <a:t>長度再加上</a:t>
-            </a:r>
-            <a:r>
-              <a:rPr lang="en-US" altLang="zh-TW" dirty="0"/>
-              <a:t>1</a:t>
-            </a:r>
-            <a:r>
-              <a:rPr lang="zh-TW" altLang="en-US" dirty="0"/>
-              <a:t>即可</a:t>
-            </a:r>
-            <a:r>
-              <a:rPr lang="en-US" altLang="zh-TW" dirty="0"/>
-              <a:t>(</a:t>
-            </a:r>
-            <a:r>
-              <a:rPr lang="zh-TW" altLang="en-US" dirty="0"/>
-              <a:t>因為最後的字元相同，可使</a:t>
+              <a:t>等這兩者中較長的一個作為目前</a:t>
             </a:r>
             <a:r>
               <a:rPr lang="en-US" altLang="zh-TW" dirty="0"/>
@@ -40573,24 +42012,20 @@
             </a:r>
             <a:r>
               <a:rPr lang="zh-TW" altLang="en-US" dirty="0"/>
-              <a:t>的長度增加</a:t>
-            </a:r>
-            <a:r>
-              <a:rPr lang="en-US" altLang="zh-TW" dirty="0"/>
-              <a:t>1</a:t>
-            </a:r>
-            <a:r>
-              <a:rPr lang="zh-TW" altLang="en-US" dirty="0"/>
-              <a:t>。</a:t>
-            </a:r>
-            <a:r>
-              <a:rPr lang="en-US" altLang="zh-TW" dirty="0"/>
-              <a:t>)</a:t>
-            </a:r>
+              <a:t>的長度。</a:t>
+            </a:r>
+          </a:p>
+          <a:p>
+            <a:endParaRPr lang="zh-TW" altLang="en-US" dirty="0"/>
           </a:p>
         </p:txBody>
       </p:sp>
     </p:spTree>
+    <p:extLst>
+      <p:ext uri="{BB962C8B-B14F-4D97-AF65-F5344CB8AC3E}">
+        <p14:creationId xmlns:p14="http://schemas.microsoft.com/office/powerpoint/2010/main" val="1629804865"/>
+      </p:ext>
+    </p:extLst>
   </p:cSld>
   <p:clrMapOvr>
     <a:masterClrMapping/>
@@ -40631,7 +42066,7 @@
           <a:lstStyle/>
           <a:p>
             <a:r>
-              <a:rPr lang="en-US" altLang="zh-TW" dirty="0" smtClean="0"/>
+              <a:rPr lang="en-US" altLang="zh-TW" dirty="0"/>
               <a:t>11-5 </a:t>
             </a:r>
             <a:r>
@@ -40653,24 +42088,82 @@
         </p:nvSpPr>
         <p:spPr/>
         <p:txBody>
-          <a:bodyPr/>
+          <a:bodyPr>
+            <a:normAutofit/>
+          </a:bodyPr>
           <a:lstStyle/>
           <a:p>
             <a:r>
               <a:rPr lang="zh-TW" altLang="en-US" dirty="0"/>
-              <a:t>當</a:t>
+              <a:t>值得注意的是：</a:t>
             </a:r>
             <a:r>
               <a:rPr lang="en-US" altLang="zh-TW" dirty="0" err="1"/>
+              <a:t>len</a:t>
+            </a:r>
+            <a:r>
+              <a:rPr lang="en-US" altLang="zh-TW" dirty="0"/>
+              <a:t>(</a:t>
+            </a:r>
+            <a:r>
+              <a:rPr lang="en-US" altLang="zh-TW" dirty="0" err="1"/>
+              <a:t>m,n</a:t>
+            </a:r>
+            <a:r>
+              <a:rPr lang="en-US" altLang="zh-TW" dirty="0"/>
+              <a:t>)</a:t>
+            </a:r>
+            <a:r>
+              <a:rPr lang="zh-TW" altLang="en-US" dirty="0"/>
+              <a:t>為</a:t>
+            </a:r>
+            <a:r>
+              <a:rPr lang="en-US" altLang="zh-TW" dirty="0"/>
+              <a:t>A=a</a:t>
+            </a:r>
+            <a:r>
+              <a:rPr lang="en-US" altLang="zh-TW" baseline="-25000" dirty="0"/>
+              <a:t>1</a:t>
+            </a:r>
+            <a:r>
+              <a:rPr lang="en-US" altLang="zh-TW" dirty="0"/>
               <a:t>a</a:t>
             </a:r>
             <a:r>
-              <a:rPr lang="en-US" altLang="zh-TW" baseline="-25000" dirty="0" err="1"/>
-              <a:t>i</a:t>
-            </a:r>
-            <a:r>
-              <a:rPr lang="zh-TW" altLang="en-US" dirty="0"/>
-              <a:t>≠</a:t>
+              <a:rPr lang="en-US" altLang="zh-TW" baseline="-25000" dirty="0"/>
+              <a:t>2</a:t>
+            </a:r>
+            <a:r>
+              <a:rPr lang="en-US" altLang="zh-TW" dirty="0"/>
+              <a:t>...a</a:t>
+            </a:r>
+            <a:r>
+              <a:rPr lang="en-US" altLang="zh-TW" baseline="-25000" dirty="0"/>
+              <a:t>m</a:t>
+            </a:r>
+            <a:r>
+              <a:rPr lang="zh-TW" altLang="en-US" dirty="0"/>
+              <a:t>及</a:t>
+            </a:r>
+            <a:r>
+              <a:rPr lang="en-US" altLang="zh-TW" dirty="0"/>
+              <a:t>B =b</a:t>
+            </a:r>
+            <a:r>
+              <a:rPr lang="en-US" altLang="zh-TW" baseline="-25000" dirty="0"/>
+              <a:t>1</a:t>
+            </a:r>
+            <a:r>
+              <a:rPr lang="en-US" altLang="zh-TW" dirty="0"/>
+              <a:t>b</a:t>
+            </a:r>
+            <a:r>
+              <a:rPr lang="en-US" altLang="zh-TW" baseline="-25000" dirty="0"/>
+              <a:t>2</a:t>
+            </a:r>
+            <a:r>
+              <a:rPr lang="en-US" altLang="zh-TW" dirty="0"/>
+              <a:t>...</a:t>
             </a:r>
             <a:r>
               <a:rPr lang="en-US" altLang="zh-TW" dirty="0" err="1"/>
@@ -40678,11 +42171,11 @@
             </a:r>
             <a:r>
               <a:rPr lang="en-US" altLang="zh-TW" baseline="-25000" dirty="0" err="1"/>
-              <a:t>j</a:t>
-            </a:r>
-            <a:r>
-              <a:rPr lang="zh-TW" altLang="en-US" dirty="0"/>
-              <a:t>時，這兩個字元不可能配對來貢獻給</a:t>
+              <a:t>n</a:t>
+            </a:r>
+            <a:r>
+              <a:rPr lang="zh-TW" altLang="en-US" dirty="0"/>
+              <a:t>這兩個序列的</a:t>
             </a:r>
             <a:r>
               <a:rPr lang="en-US" altLang="zh-TW" dirty="0"/>
@@ -40690,152 +42183,9 @@
             </a:r>
             <a:r>
               <a:rPr lang="zh-TW" altLang="en-US" dirty="0"/>
-              <a:t>，所以取</a:t>
-            </a:r>
-            <a:r>
-              <a:rPr lang="en-US" altLang="zh-TW" dirty="0"/>
-              <a:t>a</a:t>
-            </a:r>
-            <a:r>
-              <a:rPr lang="en-US" altLang="zh-TW" baseline="-25000" dirty="0"/>
-              <a:t>1</a:t>
-            </a:r>
-            <a:r>
-              <a:rPr lang="en-US" altLang="zh-TW" dirty="0"/>
-              <a:t>a</a:t>
-            </a:r>
-            <a:r>
-              <a:rPr lang="en-US" altLang="zh-TW" baseline="-25000" dirty="0"/>
-              <a:t>2</a:t>
-            </a:r>
-            <a:r>
-              <a:rPr lang="en-US" altLang="zh-TW" dirty="0"/>
-              <a:t>...</a:t>
-            </a:r>
-            <a:r>
-              <a:rPr lang="en-US" altLang="zh-TW" dirty="0" err="1"/>
-              <a:t>a</a:t>
-            </a:r>
-            <a:r>
-              <a:rPr lang="en-US" altLang="zh-TW" baseline="-25000" dirty="0" err="1"/>
-              <a:t>i</a:t>
-            </a:r>
-            <a:r>
-              <a:rPr lang="zh-TW" altLang="en-US" dirty="0"/>
-              <a:t>與</a:t>
-            </a:r>
-            <a:r>
-              <a:rPr lang="en-US" altLang="zh-TW" dirty="0"/>
-              <a:t>b</a:t>
-            </a:r>
-            <a:r>
-              <a:rPr lang="en-US" altLang="zh-TW" baseline="-25000" dirty="0"/>
-              <a:t>1</a:t>
-            </a:r>
-            <a:r>
-              <a:rPr lang="en-US" altLang="zh-TW" dirty="0"/>
-              <a:t>b</a:t>
-            </a:r>
-            <a:r>
-              <a:rPr lang="en-US" altLang="zh-TW" baseline="-25000" dirty="0"/>
-              <a:t>2</a:t>
-            </a:r>
-            <a:r>
-              <a:rPr lang="en-US" altLang="zh-TW" dirty="0"/>
-              <a:t>...b</a:t>
-            </a:r>
-            <a:r>
-              <a:rPr lang="en-US" altLang="zh-TW" baseline="-25000" dirty="0"/>
-              <a:t>j-1</a:t>
-            </a:r>
-            <a:r>
-              <a:rPr lang="zh-TW" altLang="en-US" dirty="0"/>
-              <a:t>的</a:t>
-            </a:r>
-            <a:r>
-              <a:rPr lang="en-US" altLang="zh-TW" dirty="0"/>
-              <a:t>LCS</a:t>
-            </a:r>
-            <a:r>
-              <a:rPr lang="zh-TW" altLang="en-US" dirty="0"/>
-              <a:t>或</a:t>
-            </a:r>
-            <a:r>
-              <a:rPr lang="en-US" altLang="zh-TW" dirty="0"/>
-              <a:t>a</a:t>
-            </a:r>
-            <a:r>
-              <a:rPr lang="en-US" altLang="zh-TW" baseline="-25000" dirty="0"/>
-              <a:t>1</a:t>
-            </a:r>
-            <a:r>
-              <a:rPr lang="en-US" altLang="zh-TW" dirty="0"/>
-              <a:t>a</a:t>
-            </a:r>
-            <a:r>
-              <a:rPr lang="en-US" altLang="zh-TW" baseline="-25000" dirty="0"/>
-              <a:t>2</a:t>
-            </a:r>
-            <a:r>
-              <a:rPr lang="en-US" altLang="zh-TW" dirty="0"/>
-              <a:t>...a</a:t>
-            </a:r>
-            <a:r>
-              <a:rPr lang="en-US" altLang="zh-TW" baseline="-25000" dirty="0"/>
-              <a:t>i-1</a:t>
-            </a:r>
-            <a:r>
-              <a:rPr lang="zh-TW" altLang="en-US" dirty="0"/>
-              <a:t>與</a:t>
-            </a:r>
-            <a:r>
-              <a:rPr lang="en-US" altLang="zh-TW" dirty="0"/>
-              <a:t>b</a:t>
-            </a:r>
-            <a:r>
-              <a:rPr lang="en-US" altLang="zh-TW" baseline="-25000" dirty="0"/>
-              <a:t>1</a:t>
-            </a:r>
-            <a:r>
-              <a:rPr lang="en-US" altLang="zh-TW" dirty="0"/>
-              <a:t>b</a:t>
-            </a:r>
-            <a:r>
-              <a:rPr lang="en-US" altLang="zh-TW" baseline="-25000" dirty="0"/>
-              <a:t>2</a:t>
-            </a:r>
-            <a:r>
-              <a:rPr lang="en-US" altLang="zh-TW" dirty="0"/>
-              <a:t>...</a:t>
-            </a:r>
-            <a:r>
-              <a:rPr lang="en-US" altLang="zh-TW" dirty="0" err="1"/>
-              <a:t>b</a:t>
-            </a:r>
-            <a:r>
-              <a:rPr lang="en-US" altLang="zh-TW" baseline="-25000" dirty="0" err="1"/>
-              <a:t>j</a:t>
-            </a:r>
-            <a:r>
-              <a:rPr lang="zh-TW" altLang="en-US" dirty="0"/>
-              <a:t>的</a:t>
-            </a:r>
-            <a:r>
-              <a:rPr lang="en-US" altLang="zh-TW" dirty="0"/>
-              <a:t>LCS</a:t>
-            </a:r>
-            <a:r>
-              <a:rPr lang="zh-TW" altLang="en-US" dirty="0"/>
-              <a:t>等這兩者中較長的一個作為目前</a:t>
-            </a:r>
-            <a:r>
-              <a:rPr lang="en-US" altLang="zh-TW" dirty="0"/>
-              <a:t>LCS</a:t>
-            </a:r>
-            <a:r>
-              <a:rPr lang="zh-TW" altLang="en-US" dirty="0"/>
-              <a:t>的長度。</a:t>
-            </a:r>
+              <a:t>之長度。</a:t>
+            </a:r>
+            <a:endParaRPr lang="en-US" altLang="zh-TW" dirty="0"/>
           </a:p>
           <a:p>
             <a:endParaRPr lang="zh-TW" altLang="en-US" dirty="0"/>
@@ -40845,7 +42195,7 @@
     </p:spTree>
     <p:extLst>
       <p:ext uri="{BB962C8B-B14F-4D97-AF65-F5344CB8AC3E}">
-        <p14:creationId xmlns:p14="http://schemas.microsoft.com/office/powerpoint/2010/main" val="1629804865"/>
+        <p14:creationId xmlns:p14="http://schemas.microsoft.com/office/powerpoint/2010/main" val="1969189306"/>
       </p:ext>
     </p:extLst>
   </p:cSld>
@@ -40888,7 +42238,7 @@
           <a:lstStyle/>
           <a:p>
             <a:r>
-              <a:rPr lang="en-US" altLang="zh-TW" dirty="0" smtClean="0"/>
+              <a:rPr lang="en-US" altLang="zh-TW" dirty="0"/>
               <a:t>11-5 </a:t>
             </a:r>
             <a:r>
@@ -40910,14 +42260,20 @@
         </p:nvSpPr>
         <p:spPr/>
         <p:txBody>
-          <a:bodyPr>
-            <a:normAutofit/>
-          </a:bodyPr>
+          <a:bodyPr/>
           <a:lstStyle/>
           <a:p>
             <a:r>
               <a:rPr lang="zh-TW" altLang="en-US" dirty="0"/>
-              <a:t>值得注意的是：</a:t>
+              <a:t>可直接用程式語言中的遞迴呼叫</a:t>
+            </a:r>
+            <a:r>
+              <a:rPr lang="en-US" altLang="zh-TW" dirty="0"/>
+              <a:t>(recursive call)</a:t>
+            </a:r>
+            <a:r>
+              <a:rPr lang="zh-TW" altLang="en-US" dirty="0"/>
+              <a:t>來計算</a:t>
             </a:r>
             <a:r>
               <a:rPr lang="en-US" altLang="zh-TW" dirty="0" err="1"/>
@@ -40929,7 +42285,7 @@
             </a:r>
             <a:r>
               <a:rPr lang="en-US" altLang="zh-TW" dirty="0" err="1"/>
-              <a:t>m,n</a:t>
+              <a:t>i,j</a:t>
             </a:r>
             <a:r>
               <a:rPr lang="en-US" altLang="zh-TW" dirty="0"/>
@@ -40937,77 +42293,87 @@
             </a:r>
             <a:r>
               <a:rPr lang="zh-TW" altLang="en-US" dirty="0"/>
-              <a:t>為</a:t>
+              <a:t>，但這需要</a:t>
             </a:r>
             <a:r>
               <a:rPr lang="en-US" altLang="zh-TW" dirty="0"/>
-              <a:t>A=a</a:t>
-            </a:r>
-            <a:r>
-              <a:rPr lang="en-US" altLang="zh-TW" baseline="-25000" dirty="0"/>
-              <a:t>1</a:t>
+              <a:t>exponential time</a:t>
+            </a:r>
+            <a:r>
+              <a:rPr lang="zh-TW" altLang="en-US" dirty="0"/>
+              <a:t>　</a:t>
             </a:r>
             <a:r>
               <a:rPr lang="en-US" altLang="zh-TW" dirty="0"/>
-              <a:t>a</a:t>
-            </a:r>
-            <a:r>
-              <a:rPr lang="en-US" altLang="zh-TW" baseline="-25000" dirty="0"/>
-              <a:t>2</a:t>
+              <a:t>(</a:t>
+            </a:r>
+            <a:r>
+              <a:rPr lang="zh-TW" altLang="en-US" dirty="0"/>
+              <a:t>那是很長很長的時間</a:t>
             </a:r>
             <a:r>
               <a:rPr lang="en-US" altLang="zh-TW" dirty="0"/>
-              <a:t>...a</a:t>
-            </a:r>
-            <a:r>
-              <a:rPr lang="en-US" altLang="zh-TW" baseline="-25000" dirty="0"/>
-              <a:t>m</a:t>
-            </a:r>
-            <a:r>
-              <a:rPr lang="zh-TW" altLang="en-US" dirty="0"/>
-              <a:t>及</a:t>
+              <a:t>)</a:t>
+            </a:r>
+            <a:r>
+              <a:rPr lang="zh-TW" altLang="en-US" dirty="0"/>
+              <a:t>。</a:t>
+            </a:r>
+            <a:endParaRPr lang="en-US" altLang="zh-TW" dirty="0"/>
+          </a:p>
+          <a:p>
+            <a:r>
+              <a:rPr lang="zh-TW" altLang="en-US" dirty="0"/>
+              <a:t>若以動態規劃技巧來計算</a:t>
+            </a:r>
+            <a:r>
+              <a:rPr lang="en-US" altLang="zh-TW" dirty="0" err="1"/>
+              <a:t>len</a:t>
             </a:r>
             <a:r>
               <a:rPr lang="en-US" altLang="zh-TW" dirty="0"/>
-              <a:t>B =b</a:t>
-            </a:r>
-            <a:r>
-              <a:rPr lang="en-US" altLang="zh-TW" baseline="-25000" dirty="0"/>
-              <a:t>1</a:t>
+              <a:t>(</a:t>
+            </a:r>
+            <a:r>
+              <a:rPr lang="en-US" altLang="zh-TW" dirty="0" err="1"/>
+              <a:t>i,j</a:t>
             </a:r>
             <a:r>
               <a:rPr lang="en-US" altLang="zh-TW" dirty="0"/>
-              <a:t>b</a:t>
-            </a:r>
-            <a:r>
-              <a:rPr lang="en-US" altLang="zh-TW" baseline="-25000" dirty="0"/>
-              <a:t>2</a:t>
+              <a:t>)</a:t>
+            </a:r>
+            <a:r>
+              <a:rPr lang="zh-TW" altLang="en-US" dirty="0"/>
+              <a:t>，則在與</a:t>
+            </a:r>
+            <a:r>
+              <a:rPr lang="en-US" altLang="zh-TW" dirty="0" err="1"/>
+              <a:t>m×n</a:t>
+            </a:r>
+            <a:r>
+              <a:rPr lang="zh-TW" altLang="en-US" dirty="0"/>
+              <a:t>成常數正比的時間內，就能算出</a:t>
+            </a:r>
+            <a:r>
+              <a:rPr lang="en-US" altLang="zh-TW" dirty="0" err="1"/>
+              <a:t>len</a:t>
             </a:r>
             <a:r>
               <a:rPr lang="en-US" altLang="zh-TW" dirty="0"/>
-              <a:t>...</a:t>
+              <a:t>(</a:t>
             </a:r>
             <a:r>
               <a:rPr lang="en-US" altLang="zh-TW" dirty="0" err="1"/>
-              <a:t>b</a:t>
-            </a:r>
-            <a:r>
-              <a:rPr lang="en-US" altLang="zh-TW" baseline="-25000" dirty="0" err="1"/>
-              <a:t>n</a:t>
-            </a:r>
-            <a:r>
-              <a:rPr lang="zh-TW" altLang="en-US" dirty="0"/>
-              <a:t>這兩個序列的</a:t>
+              <a:t>m,n</a:t>
             </a:r>
             <a:r>
               <a:rPr lang="en-US" altLang="zh-TW" dirty="0"/>
-              <a:t>LCS</a:t>
-            </a:r>
-            <a:r>
-              <a:rPr lang="zh-TW" altLang="en-US" dirty="0"/>
-              <a:t>之長度。</a:t>
-            </a:r>
-            <a:endParaRPr lang="en-US" altLang="zh-TW" dirty="0"/>
+              <a:t>)</a:t>
+            </a:r>
+            <a:r>
+              <a:rPr lang="zh-TW" altLang="en-US" dirty="0"/>
+              <a:t>。</a:t>
+            </a:r>
           </a:p>
           <a:p>
             <a:endParaRPr lang="zh-TW" altLang="en-US" dirty="0"/>
@@ -41017,7 +42383,7 @@
     </p:spTree>
     <p:extLst>
       <p:ext uri="{BB962C8B-B14F-4D97-AF65-F5344CB8AC3E}">
-        <p14:creationId xmlns:p14="http://schemas.microsoft.com/office/powerpoint/2010/main" val="1969189306"/>
+        <p14:creationId xmlns:p14="http://schemas.microsoft.com/office/powerpoint/2010/main" val="1941392898"/>
       </p:ext>
     </p:extLst>
   </p:cSld>
@@ -41046,7 +42412,7 @@
       </p:grpSpPr>
       <p:sp>
         <p:nvSpPr>
-          <p:cNvPr id="2" name="標題 1"/>
+          <p:cNvPr id="5" name="標題 4"/>
           <p:cNvSpPr>
             <a:spLocks noGrp="1"/>
           </p:cNvSpPr>
@@ -41060,7 +42426,7 @@
           <a:lstStyle/>
           <a:p>
             <a:r>
-              <a:rPr lang="en-US" altLang="zh-TW" dirty="0" smtClean="0"/>
+              <a:rPr lang="en-US" altLang="zh-TW" dirty="0"/>
               <a:t>11-5 </a:t>
             </a:r>
             <a:r>
@@ -41072,7 +42438,7 @@
       </p:sp>
       <p:sp>
         <p:nvSpPr>
-          <p:cNvPr id="3" name="內容版面配置區 2"/>
+          <p:cNvPr id="2" name="內容版面配置區 1"/>
           <p:cNvSpPr>
             <a:spLocks noGrp="1"/>
           </p:cNvSpPr>
@@ -41082,24 +42448,93 @@
         </p:nvSpPr>
         <p:spPr/>
         <p:txBody>
-          <a:bodyPr/>
+          <a:bodyPr>
+            <a:normAutofit fontScale="92500"/>
+          </a:bodyPr>
           <a:lstStyle/>
           <a:p>
             <a:r>
               <a:rPr lang="zh-TW" altLang="en-US" dirty="0"/>
-              <a:t>可直接用程式語言中的遞迴呼叫</a:t>
+              <a:t>在下頁中，以</a:t>
+            </a:r>
+            <a:r>
+              <a:rPr lang="zh-TW" altLang="en-US" dirty="0">
+                <a:solidFill>
+                  <a:srgbClr val="C00000"/>
+                </a:solidFill>
+              </a:rPr>
+              <a:t>虛擬碼</a:t>
             </a:r>
             <a:r>
               <a:rPr lang="en-US" altLang="zh-TW" dirty="0"/>
-              <a:t>(recursive call)</a:t>
-            </a:r>
-            <a:r>
-              <a:rPr lang="zh-TW" altLang="en-US" dirty="0"/>
-              <a:t>來計算</a:t>
-            </a:r>
-            <a:r>
-              <a:rPr lang="en-US" altLang="zh-TW" dirty="0" err="1"/>
-              <a:t>len</a:t>
+              <a:t>(pseudo code)</a:t>
+            </a:r>
+            <a:r>
+              <a:rPr lang="zh-TW" altLang="en-US" dirty="0"/>
+              <a:t>寫成的程序</a:t>
+            </a:r>
+            <a:r>
+              <a:rPr lang="en-US" altLang="zh-TW" dirty="0"/>
+              <a:t>LCS-Length</a:t>
+            </a:r>
+            <a:r>
+              <a:rPr lang="zh-TW" altLang="en-US" dirty="0"/>
+              <a:t>來說明如何用</a:t>
+            </a:r>
+            <a:r>
+              <a:rPr lang="zh-TW" altLang="en-US" dirty="0">
+                <a:solidFill>
+                  <a:srgbClr val="C00000"/>
+                </a:solidFill>
+              </a:rPr>
+              <a:t>列表式運算</a:t>
+            </a:r>
+            <a:r>
+              <a:rPr lang="en-US" altLang="zh-TW" dirty="0"/>
+              <a:t>(tabular computation)</a:t>
+            </a:r>
+            <a:r>
+              <a:rPr lang="zh-TW" altLang="en-US" dirty="0"/>
+              <a:t>來算出序列</a:t>
+            </a:r>
+            <a:r>
+              <a:rPr lang="en-US" altLang="zh-TW" dirty="0"/>
+              <a:t>A</a:t>
+            </a:r>
+            <a:r>
+              <a:rPr lang="zh-TW" altLang="en-US" dirty="0"/>
+              <a:t>與序列</a:t>
+            </a:r>
+            <a:r>
+              <a:rPr lang="en-US" altLang="zh-TW" dirty="0"/>
+              <a:t>B</a:t>
+            </a:r>
+            <a:r>
+              <a:rPr lang="zh-TW" altLang="en-US" dirty="0"/>
+              <a:t>的</a:t>
+            </a:r>
+            <a:r>
+              <a:rPr lang="en-US" altLang="zh-TW" dirty="0"/>
+              <a:t>LCS</a:t>
+            </a:r>
+            <a:r>
+              <a:rPr lang="zh-TW" altLang="en-US" dirty="0"/>
+              <a:t>長度。</a:t>
+            </a:r>
+            <a:endParaRPr lang="en-US" altLang="zh-TW" dirty="0"/>
+          </a:p>
+          <a:p>
+            <a:r>
+              <a:rPr lang="zh-TW" altLang="en-US" dirty="0"/>
+              <a:t>在計算過程中，記錄最佳長度的貢獻者，以便稍後能藉由</a:t>
+            </a:r>
+            <a:r>
+              <a:rPr lang="zh-TW" altLang="en-US" dirty="0">
+                <a:solidFill>
+                  <a:srgbClr val="C00000"/>
+                </a:solidFill>
+              </a:rPr>
+              <a:t>路徑回溯</a:t>
             </a:r>
             <a:r>
               <a:rPr lang="en-US" altLang="zh-TW" dirty="0"/>
@@ -41107,7 +42542,7 @@
             </a:r>
             <a:r>
               <a:rPr lang="en-US" altLang="zh-TW" dirty="0" err="1"/>
-              <a:t>i,j</a:t>
+              <a:t>traceback</a:t>
             </a:r>
             <a:r>
               <a:rPr lang="en-US" altLang="zh-TW" dirty="0"/>
@@ -41115,99 +42550,20 @@
             </a:r>
             <a:r>
               <a:rPr lang="zh-TW" altLang="en-US" dirty="0"/>
-              <a:t>，但這需要</a:t>
+              <a:t>找出</a:t>
             </a:r>
             <a:r>
               <a:rPr lang="en-US" altLang="zh-TW" dirty="0"/>
-              <a:t>exponential time</a:t>
-            </a:r>
-            <a:r>
-              <a:rPr lang="zh-TW" altLang="en-US" dirty="0"/>
-              <a:t>　</a:t>
-            </a:r>
-            <a:r>
-              <a:rPr lang="en-US" altLang="zh-TW" dirty="0"/>
-              <a:t>(</a:t>
-            </a:r>
-            <a:r>
-              <a:rPr lang="zh-TW" altLang="en-US" dirty="0"/>
-              <a:t>那是很長很長的時間</a:t>
-            </a:r>
-            <a:r>
-              <a:rPr lang="en-US" altLang="zh-TW" dirty="0"/>
-              <a:t>)</a:t>
+              <a:t>LCS</a:t>
             </a:r>
             <a:r>
               <a:rPr lang="zh-TW" altLang="en-US" dirty="0"/>
               <a:t>。</a:t>
             </a:r>
-            <a:endParaRPr lang="en-US" altLang="zh-TW" dirty="0"/>
-          </a:p>
-          <a:p>
-            <a:r>
-              <a:rPr lang="zh-TW" altLang="en-US" dirty="0"/>
-              <a:t>若以動態規劃技巧來計算</a:t>
-            </a:r>
-            <a:r>
-              <a:rPr lang="en-US" altLang="zh-TW" dirty="0" err="1"/>
-              <a:t>len</a:t>
-            </a:r>
-            <a:r>
-              <a:rPr lang="en-US" altLang="zh-TW" dirty="0"/>
-              <a:t>(</a:t>
-            </a:r>
-            <a:r>
-              <a:rPr lang="en-US" altLang="zh-TW" dirty="0" err="1"/>
-              <a:t>i,j</a:t>
-            </a:r>
-            <a:r>
-              <a:rPr lang="en-US" altLang="zh-TW" dirty="0"/>
-              <a:t>)</a:t>
-            </a:r>
-            <a:r>
-              <a:rPr lang="zh-TW" altLang="en-US" dirty="0"/>
-              <a:t>，則在與</a:t>
-            </a:r>
-            <a:r>
-              <a:rPr lang="en-US" altLang="zh-TW" dirty="0" err="1"/>
-              <a:t>m×n</a:t>
-            </a:r>
-            <a:r>
-              <a:rPr lang="zh-TW" altLang="en-US" dirty="0"/>
-              <a:t>成常數正比的時間內，就能算出</a:t>
-            </a:r>
-            <a:r>
-              <a:rPr lang="en-US" altLang="zh-TW" dirty="0" err="1"/>
-              <a:t>len</a:t>
-            </a:r>
-            <a:r>
-              <a:rPr lang="en-US" altLang="zh-TW" dirty="0"/>
-              <a:t>(</a:t>
-            </a:r>
-            <a:r>
-              <a:rPr lang="en-US" altLang="zh-TW" dirty="0" err="1"/>
-              <a:t>m,n</a:t>
-            </a:r>
-            <a:r>
-              <a:rPr lang="en-US" altLang="zh-TW" dirty="0"/>
-              <a:t>)</a:t>
-            </a:r>
-            <a:r>
-              <a:rPr lang="zh-TW" altLang="en-US" dirty="0"/>
-              <a:t>。</a:t>
-            </a:r>
-          </a:p>
-          <a:p>
-            <a:endParaRPr lang="zh-TW" altLang="en-US" dirty="0"/>
           </a:p>
         </p:txBody>
       </p:sp>
     </p:spTree>
-    <p:extLst>
-      <p:ext uri="{BB962C8B-B14F-4D97-AF65-F5344CB8AC3E}">
-        <p14:creationId xmlns:p14="http://schemas.microsoft.com/office/powerpoint/2010/main" val="1941392898"/>
-      </p:ext>
-    </p:extLst>
   </p:cSld>
   <p:clrMapOvr>
     <a:masterClrMapping/>
@@ -41248,197 +42604,7 @@
           <a:lstStyle/>
           <a:p>
             <a:r>
-              <a:rPr lang="en-US" altLang="zh-TW" dirty="0" smtClean="0"/>
-              <a:t>11-5 </a:t>
-            </a:r>
-            <a:r>
-              <a:rPr lang="zh-TW" altLang="en-US" dirty="0"/>
-              <a:t>動態規劃技巧</a:t>
-            </a:r>
-          </a:p>
-        </p:txBody>
-      </p:sp>
-      <p:sp>
-        <p:nvSpPr>
-          <p:cNvPr id="2" name="內容版面配置區 1"/>
-          <p:cNvSpPr>
-            <a:spLocks noGrp="1"/>
-          </p:cNvSpPr>
-          <p:nvPr>
-            <p:ph idx="1"/>
-          </p:nvPr>
-        </p:nvSpPr>
-        <p:spPr/>
-        <p:txBody>
-          <a:bodyPr>
-            <a:normAutofit fontScale="92500"/>
-          </a:bodyPr>
-          <a:lstStyle/>
-          <a:p>
-            <a:r>
-              <a:rPr lang="zh-TW" altLang="en-US" dirty="0"/>
-              <a:t>在下頁中，以</a:t>
-            </a:r>
-            <a:r>
-              <a:rPr lang="zh-TW" altLang="en-US" dirty="0">
-                <a:solidFill>
-                  <a:srgbClr val="C00000"/>
-                </a:solidFill>
-              </a:rPr>
-              <a:t>虛擬碼</a:t>
-            </a:r>
-            <a:r>
               <a:rPr lang="en-US" altLang="zh-TW" dirty="0"/>
-              <a:t>(pseudo code)</a:t>
-            </a:r>
-            <a:r>
-              <a:rPr lang="zh-TW" altLang="en-US" dirty="0"/>
-              <a:t>寫成的程序</a:t>
-            </a:r>
-            <a:r>
-              <a:rPr lang="en-US" altLang="zh-TW" dirty="0"/>
-              <a:t>LCS-Length</a:t>
-            </a:r>
-            <a:r>
-              <a:rPr lang="zh-TW" altLang="en-US" dirty="0"/>
-              <a:t>來說明如何用</a:t>
-            </a:r>
-            <a:r>
-              <a:rPr lang="zh-TW" altLang="en-US" dirty="0">
-                <a:solidFill>
-                  <a:srgbClr val="C00000"/>
-                </a:solidFill>
-              </a:rPr>
-              <a:t>列表式運算</a:t>
-            </a:r>
-            <a:r>
-              <a:rPr lang="en-US" altLang="zh-TW" dirty="0"/>
-              <a:t>(tabular computation)</a:t>
-            </a:r>
-            <a:r>
-              <a:rPr lang="zh-TW" altLang="en-US" dirty="0"/>
-              <a:t>來算出序列</a:t>
-            </a:r>
-            <a:r>
-              <a:rPr lang="en-US" altLang="zh-TW" dirty="0"/>
-              <a:t>A</a:t>
-            </a:r>
-            <a:r>
-              <a:rPr lang="zh-TW" altLang="en-US" dirty="0"/>
-              <a:t>與序列</a:t>
-            </a:r>
-            <a:r>
-              <a:rPr lang="en-US" altLang="zh-TW" dirty="0"/>
-              <a:t>B</a:t>
-            </a:r>
-            <a:r>
-              <a:rPr lang="zh-TW" altLang="en-US" dirty="0"/>
-              <a:t>的</a:t>
-            </a:r>
-            <a:r>
-              <a:rPr lang="en-US" altLang="zh-TW" dirty="0"/>
-              <a:t>LCS</a:t>
-            </a:r>
-            <a:r>
-              <a:rPr lang="zh-TW" altLang="en-US" dirty="0" smtClean="0"/>
-              <a:t>長度。</a:t>
-            </a:r>
-            <a:endParaRPr lang="en-US" altLang="zh-TW" dirty="0"/>
-          </a:p>
-          <a:p>
-            <a:r>
-              <a:rPr lang="zh-TW" altLang="en-US" dirty="0" smtClean="0"/>
-              <a:t>在</a:t>
-            </a:r>
-            <a:r>
-              <a:rPr lang="zh-TW" altLang="en-US" dirty="0"/>
-              <a:t>計算過程中</a:t>
-            </a:r>
-            <a:r>
-              <a:rPr lang="zh-TW" altLang="en-US" dirty="0" smtClean="0"/>
-              <a:t>，記錄最佳</a:t>
-            </a:r>
-            <a:r>
-              <a:rPr lang="zh-TW" altLang="en-US" dirty="0"/>
-              <a:t>長度的貢獻者，以便稍後能藉由</a:t>
-            </a:r>
-            <a:r>
-              <a:rPr lang="zh-TW" altLang="en-US" dirty="0">
-                <a:solidFill>
-                  <a:srgbClr val="C00000"/>
-                </a:solidFill>
-              </a:rPr>
-              <a:t>路徑回溯</a:t>
-            </a:r>
-            <a:r>
-              <a:rPr lang="en-US" altLang="zh-TW" dirty="0"/>
-              <a:t>(</a:t>
-            </a:r>
-            <a:r>
-              <a:rPr lang="en-US" altLang="zh-TW" dirty="0" err="1"/>
-              <a:t>traceback</a:t>
-            </a:r>
-            <a:r>
-              <a:rPr lang="en-US" altLang="zh-TW" dirty="0"/>
-              <a:t>)</a:t>
-            </a:r>
-            <a:r>
-              <a:rPr lang="zh-TW" altLang="en-US" dirty="0"/>
-              <a:t>找出</a:t>
-            </a:r>
-            <a:r>
-              <a:rPr lang="en-US" altLang="zh-TW" dirty="0"/>
-              <a:t>LCS</a:t>
-            </a:r>
-            <a:r>
-              <a:rPr lang="zh-TW" altLang="en-US" dirty="0"/>
-              <a:t>。</a:t>
-            </a:r>
-          </a:p>
-        </p:txBody>
-      </p:sp>
-    </p:spTree>
-  </p:cSld>
-  <p:clrMapOvr>
-    <a:masterClrMapping/>
-  </p:clrMapOvr>
-</p:sld>
-</file>
-
-<file path=ppt/slides/slide87.xml><?xml version="1.0" encoding="utf-8"?>
-<p:sld xmlns:a="http://schemas.openxmlformats.org/drawingml/2006/main" xmlns:r="http://schemas.openxmlformats.org/officeDocument/2006/relationships" xmlns:p="http://schemas.openxmlformats.org/presentationml/2006/main">
-  <p:cSld>
-    <p:spTree>
-      <p:nvGrpSpPr>
-        <p:cNvPr id="1" name=""/>
-        <p:cNvGrpSpPr/>
-        <p:nvPr/>
-      </p:nvGrpSpPr>
-      <p:grpSpPr>
-        <a:xfrm>
-          <a:off x="0" y="0"/>
-          <a:ext cx="0" cy="0"/>
-          <a:chOff x="0" y="0"/>
-          <a:chExt cx="0" cy="0"/>
-        </a:xfrm>
-      </p:grpSpPr>
-      <p:sp>
-        <p:nvSpPr>
-          <p:cNvPr id="5" name="標題 4"/>
-          <p:cNvSpPr>
-            <a:spLocks noGrp="1"/>
-          </p:cNvSpPr>
-          <p:nvPr>
-            <p:ph type="title"/>
-          </p:nvPr>
-        </p:nvSpPr>
-        <p:spPr/>
-        <p:txBody>
-          <a:bodyPr/>
-          <a:lstStyle/>
-          <a:p>
-            <a:r>
-              <a:rPr lang="en-US" altLang="zh-TW" dirty="0" smtClean="0"/>
               <a:t>11-5 </a:t>
             </a:r>
             <a:r>
@@ -41608,7 +42774,7 @@
 </p:sld>
 </file>
 
-<file path=ppt/slides/slide88.xml><?xml version="1.0" encoding="utf-8"?>
+<file path=ppt/slides/slide87.xml><?xml version="1.0" encoding="utf-8"?>
 <p:sld xmlns:a="http://schemas.openxmlformats.org/drawingml/2006/main" xmlns:r="http://schemas.openxmlformats.org/officeDocument/2006/relationships" xmlns:p="http://schemas.openxmlformats.org/presentationml/2006/main">
   <p:cSld>
     <p:spTree>
@@ -41641,7 +42807,7 @@
           <a:lstStyle/>
           <a:p>
             <a:r>
-              <a:rPr lang="en-US" altLang="zh-TW" dirty="0" smtClean="0"/>
+              <a:rPr lang="en-US" altLang="zh-TW" dirty="0"/>
               <a:t>11-5 </a:t>
             </a:r>
             <a:r>
@@ -41792,7 +42958,7 @@
 </p:sld>
 </file>
 
-<file path=ppt/slides/slide89.xml><?xml version="1.0" encoding="utf-8"?>
+<file path=ppt/slides/slide88.xml><?xml version="1.0" encoding="utf-8"?>
 <p:sld xmlns:a="http://schemas.openxmlformats.org/drawingml/2006/main" xmlns:r="http://schemas.openxmlformats.org/officeDocument/2006/relationships" xmlns:p="http://schemas.openxmlformats.org/presentationml/2006/main">
   <p:cSld>
     <p:spTree>
@@ -41825,7 +42991,7 @@
           <a:lstStyle/>
           <a:p>
             <a:r>
-              <a:rPr lang="en-US" altLang="zh-TW" dirty="0" smtClean="0"/>
+              <a:rPr lang="en-US" altLang="zh-TW" dirty="0"/>
               <a:t>11-5 </a:t>
             </a:r>
             <a:r>
@@ -42009,6 +43175,184 @@
 </p:sld>
 </file>
 
+<file path=ppt/slides/slide89.xml><?xml version="1.0" encoding="utf-8"?>
+<p:sld xmlns:a="http://schemas.openxmlformats.org/drawingml/2006/main" xmlns:r="http://schemas.openxmlformats.org/officeDocument/2006/relationships" xmlns:p="http://schemas.openxmlformats.org/presentationml/2006/main">
+  <p:cSld>
+    <p:spTree>
+      <p:nvGrpSpPr>
+        <p:cNvPr id="1" name=""/>
+        <p:cNvGrpSpPr/>
+        <p:nvPr/>
+      </p:nvGrpSpPr>
+      <p:grpSpPr>
+        <a:xfrm>
+          <a:off x="0" y="0"/>
+          <a:ext cx="0" cy="0"/>
+          <a:chOff x="0" y="0"/>
+          <a:chExt cx="0" cy="0"/>
+        </a:xfrm>
+      </p:grpSpPr>
+      <p:sp>
+        <p:nvSpPr>
+          <p:cNvPr id="5" name="標題 4"/>
+          <p:cNvSpPr>
+            <a:spLocks noGrp="1"/>
+          </p:cNvSpPr>
+          <p:nvPr>
+            <p:ph type="title"/>
+          </p:nvPr>
+        </p:nvSpPr>
+        <p:spPr/>
+        <p:txBody>
+          <a:bodyPr/>
+          <a:lstStyle/>
+          <a:p>
+            <a:r>
+              <a:rPr lang="en-US" altLang="zh-TW" dirty="0"/>
+              <a:t>11-5 </a:t>
+            </a:r>
+            <a:r>
+              <a:rPr lang="zh-TW" altLang="en-US" dirty="0"/>
+              <a:t>動態規劃技巧</a:t>
+            </a:r>
+          </a:p>
+        </p:txBody>
+      </p:sp>
+      <p:sp>
+        <p:nvSpPr>
+          <p:cNvPr id="2" name="內容版面配置區 1"/>
+          <p:cNvSpPr>
+            <a:spLocks noGrp="1"/>
+          </p:cNvSpPr>
+          <p:nvPr>
+            <p:ph idx="1"/>
+          </p:nvPr>
+        </p:nvSpPr>
+        <p:spPr/>
+        <p:txBody>
+          <a:bodyPr>
+            <a:normAutofit fontScale="92500" lnSpcReduction="10000"/>
+          </a:bodyPr>
+          <a:lstStyle/>
+          <a:p>
+            <a:r>
+              <a:rPr lang="zh-TW" altLang="en-US" dirty="0"/>
+              <a:t>如何藉由路徑回溯</a:t>
+            </a:r>
+            <a:r>
+              <a:rPr lang="en-US" altLang="zh-TW" dirty="0"/>
+              <a:t>(</a:t>
+            </a:r>
+            <a:r>
+              <a:rPr lang="en-US" altLang="zh-TW" dirty="0" err="1"/>
+              <a:t>traceback</a:t>
+            </a:r>
+            <a:r>
+              <a:rPr lang="en-US" altLang="zh-TW" dirty="0"/>
+              <a:t>)</a:t>
+            </a:r>
+            <a:r>
+              <a:rPr lang="zh-TW" altLang="en-US" dirty="0"/>
+              <a:t>將最長共同子序列</a:t>
+            </a:r>
+            <a:r>
+              <a:rPr lang="en-US" altLang="zh-TW" dirty="0"/>
+              <a:t>(LCS)</a:t>
+            </a:r>
+            <a:r>
+              <a:rPr lang="zh-TW" altLang="en-US" dirty="0"/>
+              <a:t>建構出來。</a:t>
+            </a:r>
+            <a:endParaRPr lang="en-US" altLang="zh-TW" dirty="0"/>
+          </a:p>
+          <a:p>
+            <a:r>
+              <a:rPr lang="zh-TW" altLang="en-US" dirty="0"/>
+              <a:t>基本上，從</a:t>
+            </a:r>
+            <a:r>
+              <a:rPr lang="en-US" altLang="zh-TW" dirty="0"/>
+              <a:t>(</a:t>
+            </a:r>
+            <a:r>
+              <a:rPr lang="en-US" altLang="zh-TW" dirty="0" err="1"/>
+              <a:t>m,n</a:t>
+            </a:r>
+            <a:r>
+              <a:rPr lang="en-US" altLang="zh-TW" dirty="0"/>
+              <a:t>)</a:t>
+            </a:r>
+            <a:r>
+              <a:rPr lang="zh-TW" altLang="en-US" dirty="0"/>
+              <a:t>沿著</a:t>
+            </a:r>
+            <a:r>
+              <a:rPr lang="en-US" altLang="zh-TW" dirty="0" err="1"/>
+              <a:t>prev</a:t>
+            </a:r>
+            <a:r>
+              <a:rPr lang="zh-TW" altLang="en-US" dirty="0"/>
+              <a:t>所記錄的箭頭方向回溯，每當碰到斜角箭頭時，表示那個位置</a:t>
+            </a:r>
+            <a:r>
+              <a:rPr lang="en-US" altLang="zh-TW" dirty="0" err="1"/>
+              <a:t>a</a:t>
+            </a:r>
+            <a:r>
+              <a:rPr lang="en-US" altLang="zh-TW" baseline="-25000" dirty="0" err="1"/>
+              <a:t>i</a:t>
+            </a:r>
+            <a:r>
+              <a:rPr lang="en-US" altLang="zh-TW" dirty="0"/>
+              <a:t>=</a:t>
+            </a:r>
+            <a:r>
+              <a:rPr lang="en-US" altLang="zh-TW" dirty="0" err="1"/>
+              <a:t>b</a:t>
+            </a:r>
+            <a:r>
+              <a:rPr lang="en-US" altLang="zh-TW" baseline="-25000" dirty="0" err="1"/>
+              <a:t>j</a:t>
+            </a:r>
+            <a:r>
+              <a:rPr lang="zh-TW" altLang="en-US" dirty="0"/>
+              <a:t>，且它也是</a:t>
+            </a:r>
+            <a:r>
+              <a:rPr lang="en-US" altLang="zh-TW" dirty="0"/>
+              <a:t>LCS</a:t>
+            </a:r>
+            <a:r>
+              <a:rPr lang="zh-TW" altLang="en-US" dirty="0"/>
+              <a:t>的一部分，所以在往前回溯結束後</a:t>
+            </a:r>
+            <a:r>
+              <a:rPr lang="en-US" altLang="zh-TW" dirty="0"/>
+              <a:t>(</a:t>
+            </a:r>
+            <a:r>
+              <a:rPr lang="zh-TW" altLang="en-US" dirty="0"/>
+              <a:t>回溯過程直到邊界為止</a:t>
+            </a:r>
+            <a:r>
+              <a:rPr lang="en-US" altLang="zh-TW" dirty="0"/>
+              <a:t>)</a:t>
+            </a:r>
+            <a:r>
+              <a:rPr lang="zh-TW" altLang="en-US" dirty="0"/>
+              <a:t>，還得將這個字符印出。</a:t>
+            </a:r>
+          </a:p>
+        </p:txBody>
+      </p:sp>
+    </p:spTree>
+  </p:cSld>
+  <p:clrMapOvr>
+    <a:masterClrMapping/>
+  </p:clrMapOvr>
+</p:sld>
+</file>
+
 <file path=ppt/slides/slide9.xml><?xml version="1.0" encoding="utf-8"?>
 <p:sld xmlns:a="http://schemas.openxmlformats.org/drawingml/2006/main" xmlns:r="http://schemas.openxmlformats.org/officeDocument/2006/relationships" xmlns:p="http://schemas.openxmlformats.org/presentationml/2006/main">
   <p:cSld>
@@ -42093,13 +43437,6 @@
   <p:clrMapOvr>
     <a:masterClrMapping/>
   </p:clrMapOvr>
-  <p:timing>
-    <p:tnLst>
-      <p:par>
-        <p:cTn id="1" dur="indefinite" restart="never" nodeType="tmRoot"/>
-      </p:par>
-    </p:tnLst>
-  </p:timing>
 </p:sld>
 </file>
 
@@ -42136,185 +43473,7 @@
           <a:lstStyle/>
           <a:p>
             <a:r>
-              <a:rPr lang="en-US" altLang="zh-TW" dirty="0" smtClean="0"/>
-              <a:t>11-5 </a:t>
-            </a:r>
-            <a:r>
-              <a:rPr lang="zh-TW" altLang="en-US" dirty="0"/>
-              <a:t>動態規劃技巧</a:t>
-            </a:r>
-          </a:p>
-        </p:txBody>
-      </p:sp>
-      <p:sp>
-        <p:nvSpPr>
-          <p:cNvPr id="2" name="內容版面配置區 1"/>
-          <p:cNvSpPr>
-            <a:spLocks noGrp="1"/>
-          </p:cNvSpPr>
-          <p:nvPr>
-            <p:ph idx="1"/>
-          </p:nvPr>
-        </p:nvSpPr>
-        <p:spPr/>
-        <p:txBody>
-          <a:bodyPr>
-            <a:normAutofit fontScale="92500" lnSpcReduction="10000"/>
-          </a:bodyPr>
-          <a:lstStyle/>
-          <a:p>
-            <a:r>
-              <a:rPr lang="zh-TW" altLang="en-US" dirty="0"/>
-              <a:t>如何藉由路徑回溯</a:t>
-            </a:r>
-            <a:r>
               <a:rPr lang="en-US" altLang="zh-TW" dirty="0"/>
-              <a:t>(</a:t>
-            </a:r>
-            <a:r>
-              <a:rPr lang="en-US" altLang="zh-TW" dirty="0" err="1"/>
-              <a:t>traceback</a:t>
-            </a:r>
-            <a:r>
-              <a:rPr lang="en-US" altLang="zh-TW" dirty="0"/>
-              <a:t>)</a:t>
-            </a:r>
-            <a:r>
-              <a:rPr lang="zh-TW" altLang="en-US" dirty="0"/>
-              <a:t>將最長共同子序列</a:t>
-            </a:r>
-            <a:r>
-              <a:rPr lang="en-US" altLang="zh-TW" dirty="0"/>
-              <a:t>(LCS)</a:t>
-            </a:r>
-            <a:r>
-              <a:rPr lang="zh-TW" altLang="en-US" dirty="0"/>
-              <a:t>建構出來。</a:t>
-            </a:r>
-            <a:endParaRPr lang="en-US" altLang="zh-TW" dirty="0"/>
-          </a:p>
-          <a:p>
-            <a:r>
-              <a:rPr lang="zh-TW" altLang="en-US" dirty="0"/>
-              <a:t>基本上，從</a:t>
-            </a:r>
-            <a:r>
-              <a:rPr lang="en-US" altLang="zh-TW" dirty="0"/>
-              <a:t>(</a:t>
-            </a:r>
-            <a:r>
-              <a:rPr lang="en-US" altLang="zh-TW" dirty="0" err="1"/>
-              <a:t>m,n</a:t>
-            </a:r>
-            <a:r>
-              <a:rPr lang="en-US" altLang="zh-TW" dirty="0"/>
-              <a:t>)</a:t>
-            </a:r>
-            <a:r>
-              <a:rPr lang="zh-TW" altLang="en-US" dirty="0"/>
-              <a:t>沿著</a:t>
-            </a:r>
-            <a:r>
-              <a:rPr lang="en-US" altLang="zh-TW" dirty="0" err="1"/>
-              <a:t>prev</a:t>
-            </a:r>
-            <a:r>
-              <a:rPr lang="zh-TW" altLang="en-US" dirty="0"/>
-              <a:t>所記錄的箭頭方向回溯，每當碰到斜角箭頭時，表示那個位置</a:t>
-            </a:r>
-            <a:r>
-              <a:rPr lang="en-US" altLang="zh-TW" dirty="0" err="1"/>
-              <a:t>a</a:t>
-            </a:r>
-            <a:r>
-              <a:rPr lang="en-US" altLang="zh-TW" baseline="-25000" dirty="0" err="1"/>
-              <a:t>i</a:t>
-            </a:r>
-            <a:r>
-              <a:rPr lang="en-US" altLang="zh-TW" dirty="0"/>
-              <a:t>=</a:t>
-            </a:r>
-            <a:r>
-              <a:rPr lang="en-US" altLang="zh-TW" dirty="0" err="1"/>
-              <a:t>b</a:t>
-            </a:r>
-            <a:r>
-              <a:rPr lang="en-US" altLang="zh-TW" baseline="-25000" dirty="0" err="1"/>
-              <a:t>j</a:t>
-            </a:r>
-            <a:r>
-              <a:rPr lang="zh-TW" altLang="en-US" dirty="0"/>
-              <a:t>，且它也是</a:t>
-            </a:r>
-            <a:r>
-              <a:rPr lang="en-US" altLang="zh-TW" dirty="0"/>
-              <a:t>LCS</a:t>
-            </a:r>
-            <a:r>
-              <a:rPr lang="zh-TW" altLang="en-US" dirty="0"/>
-              <a:t>的一部分，所以在往前回溯結束後</a:t>
-            </a:r>
-            <a:r>
-              <a:rPr lang="en-US" altLang="zh-TW" dirty="0"/>
-              <a:t>(</a:t>
-            </a:r>
-            <a:r>
-              <a:rPr lang="zh-TW" altLang="en-US" dirty="0"/>
-              <a:t>回溯過程直到邊界為止</a:t>
-            </a:r>
-            <a:r>
-              <a:rPr lang="en-US" altLang="zh-TW" dirty="0"/>
-              <a:t>)</a:t>
-            </a:r>
-            <a:r>
-              <a:rPr lang="zh-TW" altLang="en-US" dirty="0"/>
-              <a:t>，還得將這個字符印出。</a:t>
-            </a:r>
-          </a:p>
-        </p:txBody>
-      </p:sp>
-    </p:spTree>
-  </p:cSld>
-  <p:clrMapOvr>
-    <a:masterClrMapping/>
-  </p:clrMapOvr>
-</p:sld>
-</file>
-
-<file path=ppt/slides/slide91.xml><?xml version="1.0" encoding="utf-8"?>
-<p:sld xmlns:a="http://schemas.openxmlformats.org/drawingml/2006/main" xmlns:r="http://schemas.openxmlformats.org/officeDocument/2006/relationships" xmlns:p="http://schemas.openxmlformats.org/presentationml/2006/main">
-  <p:cSld>
-    <p:spTree>
-      <p:nvGrpSpPr>
-        <p:cNvPr id="1" name=""/>
-        <p:cNvGrpSpPr/>
-        <p:nvPr/>
-      </p:nvGrpSpPr>
-      <p:grpSpPr>
-        <a:xfrm>
-          <a:off x="0" y="0"/>
-          <a:ext cx="0" cy="0"/>
-          <a:chOff x="0" y="0"/>
-          <a:chExt cx="0" cy="0"/>
-        </a:xfrm>
-      </p:grpSpPr>
-      <p:sp>
-        <p:nvSpPr>
-          <p:cNvPr id="5" name="標題 4"/>
-          <p:cNvSpPr>
-            <a:spLocks noGrp="1"/>
-          </p:cNvSpPr>
-          <p:nvPr>
-            <p:ph type="title"/>
-          </p:nvPr>
-        </p:nvSpPr>
-        <p:spPr/>
-        <p:txBody>
-          <a:bodyPr/>
-          <a:lstStyle/>
-          <a:p>
-            <a:r>
-              <a:rPr lang="en-US" altLang="zh-TW" dirty="0" smtClean="0"/>
               <a:t>11-5 </a:t>
             </a:r>
             <a:r>
@@ -42497,7 +43656,7 @@
 </p:sld>
 </file>
 
-<file path=ppt/slides/slide92.xml><?xml version="1.0" encoding="utf-8"?>
+<file path=ppt/slides/slide91.xml><?xml version="1.0" encoding="utf-8"?>
 <p:sld xmlns:a="http://schemas.openxmlformats.org/drawingml/2006/main" xmlns:r="http://schemas.openxmlformats.org/officeDocument/2006/relationships" xmlns:p="http://schemas.openxmlformats.org/presentationml/2006/main">
   <p:cSld>
     <p:spTree>
@@ -42530,7 +43689,7 @@
           <a:lstStyle/>
           <a:p>
             <a:r>
-              <a:rPr lang="en-US" altLang="zh-TW" dirty="0" smtClean="0"/>
+              <a:rPr lang="en-US" altLang="zh-TW" dirty="0"/>
               <a:t>11-5 </a:t>
             </a:r>
             <a:r>
@@ -42714,17 +43873,10 @@
   <p:clrMapOvr>
     <a:masterClrMapping/>
   </p:clrMapOvr>
-  <p:timing>
-    <p:tnLst>
-      <p:par>
-        <p:cTn id="1" dur="indefinite" restart="never" nodeType="tmRoot"/>
-      </p:par>
-    </p:tnLst>
-  </p:timing>
 </p:sld>
 </file>
 
-<file path=ppt/slides/slide93.xml><?xml version="1.0" encoding="utf-8"?>
+<file path=ppt/slides/slide92.xml><?xml version="1.0" encoding="utf-8"?>
 <p:sld xmlns:a="http://schemas.openxmlformats.org/drawingml/2006/main" xmlns:r="http://schemas.openxmlformats.org/officeDocument/2006/relationships" xmlns:p="http://schemas.openxmlformats.org/presentationml/2006/main">
   <p:cSld>
     <p:spTree>
@@ -42757,7 +43909,7 @@
           <a:lstStyle/>
           <a:p>
             <a:r>
-              <a:rPr lang="en-US" altLang="zh-TW" dirty="0" smtClean="0"/>
+              <a:rPr lang="en-US" altLang="zh-TW" dirty="0"/>
               <a:t>11-6 </a:t>
             </a:r>
             <a:r>
@@ -42818,13 +43970,95 @@
   <p:clrMapOvr>
     <a:masterClrMapping/>
   </p:clrMapOvr>
-  <p:timing>
-    <p:tnLst>
-      <p:par>
-        <p:cTn id="1" dur="indefinite" restart="never" nodeType="tmRoot"/>
-      </p:par>
-    </p:tnLst>
-  </p:timing>
+</p:sld>
+</file>
+
+<file path=ppt/slides/slide93.xml><?xml version="1.0" encoding="utf-8"?>
+<p:sld xmlns:a="http://schemas.openxmlformats.org/drawingml/2006/main" xmlns:r="http://schemas.openxmlformats.org/officeDocument/2006/relationships" xmlns:p="http://schemas.openxmlformats.org/presentationml/2006/main">
+  <p:cSld>
+    <p:spTree>
+      <p:nvGrpSpPr>
+        <p:cNvPr id="1" name=""/>
+        <p:cNvGrpSpPr/>
+        <p:nvPr/>
+      </p:nvGrpSpPr>
+      <p:grpSpPr>
+        <a:xfrm>
+          <a:off x="0" y="0"/>
+          <a:ext cx="0" cy="0"/>
+          <a:chOff x="0" y="0"/>
+          <a:chExt cx="0" cy="0"/>
+        </a:xfrm>
+      </p:grpSpPr>
+      <p:sp>
+        <p:nvSpPr>
+          <p:cNvPr id="2" name="標題 1"/>
+          <p:cNvSpPr>
+            <a:spLocks noGrp="1"/>
+          </p:cNvSpPr>
+          <p:nvPr>
+            <p:ph type="title"/>
+          </p:nvPr>
+        </p:nvSpPr>
+        <p:spPr/>
+        <p:txBody>
+          <a:bodyPr/>
+          <a:lstStyle/>
+          <a:p>
+            <a:r>
+              <a:rPr lang="en-US" altLang="zh-TW" dirty="0"/>
+              <a:t>11-6 </a:t>
+            </a:r>
+            <a:r>
+              <a:rPr lang="zh-TW" altLang="en-US" dirty="0"/>
+              <a:t>計算難題</a:t>
+            </a:r>
+          </a:p>
+        </p:txBody>
+      </p:sp>
+      <p:sp>
+        <p:nvSpPr>
+          <p:cNvPr id="3" name="內容版面配置區 2"/>
+          <p:cNvSpPr>
+            <a:spLocks noGrp="1"/>
+          </p:cNvSpPr>
+          <p:nvPr>
+            <p:ph idx="1"/>
+          </p:nvPr>
+        </p:nvSpPr>
+        <p:spPr/>
+        <p:txBody>
+          <a:bodyPr>
+            <a:normAutofit/>
+          </a:bodyPr>
+          <a:lstStyle/>
+          <a:p>
+            <a:r>
+              <a:rPr lang="zh-TW" altLang="en-US" dirty="0"/>
+              <a:t>在可解的數位計算問題裡，很多都已依它的計算時間及記憶空間複雜度的難易做歸類了，最有名的歸類要算是</a:t>
+            </a:r>
+            <a:r>
+              <a:rPr lang="en-US" altLang="zh-TW" dirty="0"/>
+              <a:t>NP-Complete</a:t>
+            </a:r>
+            <a:r>
+              <a:rPr lang="zh-TW" altLang="en-US" dirty="0"/>
+              <a:t>問題了。</a:t>
+            </a:r>
+            <a:endParaRPr lang="en-US" altLang="zh-TW" dirty="0"/>
+          </a:p>
+        </p:txBody>
+      </p:sp>
+    </p:spTree>
+    <p:extLst>
+      <p:ext uri="{BB962C8B-B14F-4D97-AF65-F5344CB8AC3E}">
+        <p14:creationId xmlns:p14="http://schemas.microsoft.com/office/powerpoint/2010/main" val="1664159071"/>
+      </p:ext>
+    </p:extLst>
+  </p:cSld>
+  <p:clrMapOvr>
+    <a:masterClrMapping/>
+  </p:clrMapOvr>
 </p:sld>
 </file>
 
@@ -42861,103 +44095,7 @@
           <a:lstStyle/>
           <a:p>
             <a:r>
-              <a:rPr lang="en-US" altLang="zh-TW" dirty="0" smtClean="0"/>
-              <a:t>11-6 </a:t>
-            </a:r>
-            <a:r>
-              <a:rPr lang="zh-TW" altLang="en-US" dirty="0"/>
-              <a:t>計算難題</a:t>
-            </a:r>
-          </a:p>
-        </p:txBody>
-      </p:sp>
-      <p:sp>
-        <p:nvSpPr>
-          <p:cNvPr id="3" name="內容版面配置區 2"/>
-          <p:cNvSpPr>
-            <a:spLocks noGrp="1"/>
-          </p:cNvSpPr>
-          <p:nvPr>
-            <p:ph idx="1"/>
-          </p:nvPr>
-        </p:nvSpPr>
-        <p:spPr/>
-        <p:txBody>
-          <a:bodyPr>
-            <a:normAutofit/>
-          </a:bodyPr>
-          <a:lstStyle/>
-          <a:p>
-            <a:r>
-              <a:rPr lang="zh-TW" altLang="en-US" dirty="0"/>
-              <a:t>在可解的數位計算問題裡，很多都已依它的計算時間及記憶空間複雜度的難易做歸類了，最有名的歸類要算是</a:t>
-            </a:r>
-            <a:r>
               <a:rPr lang="en-US" altLang="zh-TW" dirty="0"/>
-              <a:t>NP-Complete</a:t>
-            </a:r>
-            <a:r>
-              <a:rPr lang="zh-TW" altLang="en-US" dirty="0"/>
-              <a:t>問題了。</a:t>
-            </a:r>
-            <a:endParaRPr lang="en-US" altLang="zh-TW" dirty="0"/>
-          </a:p>
-        </p:txBody>
-      </p:sp>
-    </p:spTree>
-    <p:extLst>
-      <p:ext uri="{BB962C8B-B14F-4D97-AF65-F5344CB8AC3E}">
-        <p14:creationId xmlns:p14="http://schemas.microsoft.com/office/powerpoint/2010/main" val="1664159071"/>
-      </p:ext>
-    </p:extLst>
-  </p:cSld>
-  <p:clrMapOvr>
-    <a:masterClrMapping/>
-  </p:clrMapOvr>
-  <p:timing>
-    <p:tnLst>
-      <p:par>
-        <p:cTn id="1" dur="indefinite" restart="never" nodeType="tmRoot"/>
-      </p:par>
-    </p:tnLst>
-  </p:timing>
-</p:sld>
-</file>
-
-<file path=ppt/slides/slide95.xml><?xml version="1.0" encoding="utf-8"?>
-<p:sld xmlns:a="http://schemas.openxmlformats.org/drawingml/2006/main" xmlns:r="http://schemas.openxmlformats.org/officeDocument/2006/relationships" xmlns:p="http://schemas.openxmlformats.org/presentationml/2006/main">
-  <p:cSld>
-    <p:spTree>
-      <p:nvGrpSpPr>
-        <p:cNvPr id="1" name=""/>
-        <p:cNvGrpSpPr/>
-        <p:nvPr/>
-      </p:nvGrpSpPr>
-      <p:grpSpPr>
-        <a:xfrm>
-          <a:off x="0" y="0"/>
-          <a:ext cx="0" cy="0"/>
-          <a:chOff x="0" y="0"/>
-          <a:chExt cx="0" cy="0"/>
-        </a:xfrm>
-      </p:grpSpPr>
-      <p:sp>
-        <p:nvSpPr>
-          <p:cNvPr id="2" name="標題 1"/>
-          <p:cNvSpPr>
-            <a:spLocks noGrp="1"/>
-          </p:cNvSpPr>
-          <p:nvPr>
-            <p:ph type="title"/>
-          </p:nvPr>
-        </p:nvSpPr>
-        <p:spPr/>
-        <p:txBody>
-          <a:bodyPr/>
-          <a:lstStyle/>
-          <a:p>
-            <a:r>
-              <a:rPr lang="en-US" altLang="zh-TW" dirty="0" smtClean="0"/>
               <a:t>11-6 </a:t>
             </a:r>
             <a:r>
@@ -43027,17 +44165,10 @@
   <p:clrMapOvr>
     <a:masterClrMapping/>
   </p:clrMapOvr>
-  <p:timing>
-    <p:tnLst>
-      <p:par>
-        <p:cTn id="1" dur="indefinite" restart="never" nodeType="tmRoot"/>
-      </p:par>
-    </p:tnLst>
-  </p:timing>
 </p:sld>
 </file>
 
-<file path=ppt/slides/slide96.xml><?xml version="1.0" encoding="utf-8"?>
+<file path=ppt/slides/slide95.xml><?xml version="1.0" encoding="utf-8"?>
 <p:sld xmlns:a="http://schemas.openxmlformats.org/drawingml/2006/main" xmlns:r="http://schemas.openxmlformats.org/officeDocument/2006/relationships" xmlns:p="http://schemas.openxmlformats.org/presentationml/2006/main">
   <p:cSld>
     <p:spTree>
@@ -43075,7 +44206,7 @@
           <a:lstStyle/>
           <a:p>
             <a:r>
-              <a:rPr lang="en-US" altLang="zh-TW" dirty="0" smtClean="0"/>
+              <a:rPr lang="en-US" altLang="zh-TW" dirty="0"/>
               <a:t>11-6 </a:t>
             </a:r>
             <a:r>
@@ -43230,7 +44361,7 @@
 </p:sld>
 </file>
 
-<file path=ppt/slides/slide97.xml><?xml version="1.0" encoding="utf-8"?>
+<file path=ppt/slides/slide96.xml><?xml version="1.0" encoding="utf-8"?>
 <p:sld xmlns:a="http://schemas.openxmlformats.org/drawingml/2006/main" xmlns:r="http://schemas.openxmlformats.org/officeDocument/2006/relationships" xmlns:p="http://schemas.openxmlformats.org/presentationml/2006/main">
   <p:cSld>
     <p:spTree>
@@ -43268,7 +44399,7 @@
           <a:lstStyle/>
           <a:p>
             <a:r>
-              <a:rPr lang="en-US" altLang="zh-TW" dirty="0" smtClean="0"/>
+              <a:rPr lang="en-US" altLang="zh-TW" dirty="0"/>
               <a:t>11-6 </a:t>
             </a:r>
             <a:r>
@@ -43399,7 +44530,7 @@
           <p:cNvPr id="3" name="內容版面配置區 2">
             <a:extLst>
               <a:ext uri="{FF2B5EF4-FFF2-40B4-BE49-F238E27FC236}">
-                <a16:creationId xmlns="" xmlns:a16="http://schemas.microsoft.com/office/drawing/2014/main" id="{CB15DE03-D858-C635-070D-36168198F332}"/>
+                <a16:creationId xmlns:a16="http://schemas.microsoft.com/office/drawing/2014/main" id="{CB15DE03-D858-C635-070D-36168198F332}"/>
               </a:ext>
             </a:extLst>
           </p:cNvPr>
@@ -43458,7 +44589,7 @@
 </p:sld>
 </file>
 
-<file path=ppt/slides/slide98.xml><?xml version="1.0" encoding="utf-8"?>
+<file path=ppt/slides/slide97.xml><?xml version="1.0" encoding="utf-8"?>
 <p:sld xmlns:a="http://schemas.openxmlformats.org/drawingml/2006/main" xmlns:r="http://schemas.openxmlformats.org/officeDocument/2006/relationships" xmlns:p="http://schemas.openxmlformats.org/presentationml/2006/main">
   <p:cSld>
     <p:spTree>
@@ -43491,7 +44622,7 @@
           <a:lstStyle/>
           <a:p>
             <a:r>
-              <a:rPr lang="en-US" altLang="zh-TW" dirty="0" smtClean="0"/>
+              <a:rPr lang="en-US" altLang="zh-TW" dirty="0"/>
               <a:t>11-6 </a:t>
             </a:r>
             <a:r>
@@ -43520,11 +44651,7 @@
           <a:p>
             <a:r>
               <a:rPr lang="zh-TW" altLang="en-US" dirty="0"/>
-              <a:t>不僅如此，還可證明小偷背包問題和旅行推銷員問題的精確解法，它們的難度是一樣的，也就是說，只要其中有一個存在有效率的精確解法，另一個也會存在有效率的精確解法</a:t>
-            </a:r>
-            <a:r>
-              <a:rPr lang="zh-TW" altLang="en-US" dirty="0" smtClean="0"/>
-              <a:t>。</a:t>
+              <a:t>不僅如此，還可證明小偷背包問題和旅行推銷員問題的精確解法，它們的難度是一樣的，也就是說，只要其中有一個存在有效率的精確解法，另一個也會存在有效率的精確解法。</a:t>
             </a:r>
             <a:endParaRPr lang="en-US" altLang="zh-TW" dirty="0"/>
           </a:p>
@@ -43538,7 +44665,7 @@
 </p:sld>
 </file>
 
-<file path=ppt/slides/slide99.xml><?xml version="1.0" encoding="utf-8"?>
+<file path=ppt/slides/slide98.xml><?xml version="1.0" encoding="utf-8"?>
 <p:sld xmlns:a="http://schemas.openxmlformats.org/drawingml/2006/main" xmlns:r="http://schemas.openxmlformats.org/officeDocument/2006/relationships" xmlns:p="http://schemas.openxmlformats.org/presentationml/2006/main">
   <p:cSld>
     <p:spTree>
@@ -43571,7 +44698,7 @@
           <a:lstStyle/>
           <a:p>
             <a:r>
-              <a:rPr lang="en-US" altLang="zh-TW" dirty="0" smtClean="0"/>
+              <a:rPr lang="en-US" altLang="zh-TW" dirty="0"/>
               <a:t>11-6 </a:t>
             </a:r>
             <a:r>
@@ -43636,10 +44763,90 @@
 </p:sld>
 </file>
 
+<file path=ppt/slides/slide99.xml><?xml version="1.0" encoding="utf-8"?>
+<p:sld xmlns:a="http://schemas.openxmlformats.org/drawingml/2006/main" xmlns:r="http://schemas.openxmlformats.org/officeDocument/2006/relationships" xmlns:p="http://schemas.openxmlformats.org/presentationml/2006/main">
+  <p:cSld>
+    <p:spTree>
+      <p:nvGrpSpPr>
+        <p:cNvPr id="1" name=""/>
+        <p:cNvGrpSpPr/>
+        <p:nvPr/>
+      </p:nvGrpSpPr>
+      <p:grpSpPr>
+        <a:xfrm>
+          <a:off x="0" y="0"/>
+          <a:ext cx="0" cy="0"/>
+          <a:chOff x="0" y="0"/>
+          <a:chExt cx="0" cy="0"/>
+        </a:xfrm>
+      </p:grpSpPr>
+      <p:sp>
+        <p:nvSpPr>
+          <p:cNvPr id="2" name="標題 1"/>
+          <p:cNvSpPr>
+            <a:spLocks noGrp="1"/>
+          </p:cNvSpPr>
+          <p:nvPr>
+            <p:ph type="title"/>
+          </p:nvPr>
+        </p:nvSpPr>
+        <p:spPr/>
+        <p:txBody>
+          <a:bodyPr/>
+          <a:lstStyle/>
+          <a:p>
+            <a:r>
+              <a:rPr lang="en-US" altLang="zh-TW" dirty="0"/>
+              <a:t>11-6 </a:t>
+            </a:r>
+            <a:r>
+              <a:rPr lang="zh-TW" altLang="en-US" dirty="0"/>
+              <a:t>計算難題</a:t>
+            </a:r>
+          </a:p>
+        </p:txBody>
+      </p:sp>
+      <p:sp>
+        <p:nvSpPr>
+          <p:cNvPr id="3" name="內容版面配置區 2"/>
+          <p:cNvSpPr>
+            <a:spLocks noGrp="1"/>
+          </p:cNvSpPr>
+          <p:nvPr>
+            <p:ph idx="1"/>
+          </p:nvPr>
+        </p:nvSpPr>
+        <p:spPr/>
+        <p:txBody>
+          <a:bodyPr>
+            <a:normAutofit/>
+          </a:bodyPr>
+          <a:lstStyle/>
+          <a:p>
+            <a:r>
+              <a:rPr lang="zh-TW" altLang="en-US" dirty="0"/>
+              <a:t>可以證明旅行推銷員問題不太可能存在好的近似解法，而小偷背包問題卻已有很好的近似解法。</a:t>
+            </a:r>
+          </a:p>
+        </p:txBody>
+      </p:sp>
+    </p:spTree>
+    <p:extLst>
+      <p:ext uri="{BB962C8B-B14F-4D97-AF65-F5344CB8AC3E}">
+        <p14:creationId xmlns:p14="http://schemas.microsoft.com/office/powerpoint/2010/main" val="3605386876"/>
+      </p:ext>
+    </p:extLst>
+  </p:cSld>
+  <p:clrMapOvr>
+    <a:masterClrMapping/>
+  </p:clrMapOvr>
+</p:sld>
+</file>
+
 <file path=ppt/theme/theme1.xml><?xml version="1.0" encoding="utf-8"?>
 <a:theme xmlns:a="http://schemas.openxmlformats.org/drawingml/2006/main" name="Office 佈景主題">
   <a:themeElements>
-    <a:clrScheme name="Office">
+    <a:clrScheme name="藍綠色">
       <a:dk1>
         <a:sysClr val="windowText" lastClr="000000"/>
       </a:dk1>
@@ -43647,34 +44854,34 @@
         <a:sysClr val="window" lastClr="FFFFFF"/>
       </a:lt1>
       <a:dk2>
-        <a:srgbClr val="1F497D"/>
+        <a:srgbClr val="373545"/>
       </a:dk2>
       <a:lt2>
-        <a:srgbClr val="EEECE1"/>
+        <a:srgbClr val="CEDBE6"/>
       </a:lt2>
       <a:accent1>
-        <a:srgbClr val="4F81BD"/>
+        <a:srgbClr val="3494BA"/>
       </a:accent1>
       <a:accent2>
-        <a:srgbClr val="C0504D"/>
+        <a:srgbClr val="58B6C0"/>
       </a:accent2>
       <a:accent3>
-        <a:srgbClr val="9BBB59"/>
+        <a:srgbClr val="75BDA7"/>
       </a:accent3>
       <a:accent4>
-        <a:srgbClr val="8064A2"/>
+        <a:srgbClr val="7A8C8E"/>
       </a:accent4>
       <a:accent5>
-        <a:srgbClr val="4BACC6"/>
+        <a:srgbClr val="84ACB6"/>
       </a:accent5>
       <a:accent6>
-        <a:srgbClr val="F79646"/>
+        <a:srgbClr val="2683C6"/>
       </a:accent6>
       <a:hlink>
-        <a:srgbClr val="0000FF"/>
+        <a:srgbClr val="6B9F25"/>
       </a:hlink>
       <a:folHlink>
-        <a:srgbClr val="800080"/>
+        <a:srgbClr val="9F6715"/>
       </a:folHlink>
     </a:clrScheme>
     <a:fontScheme name="Office">
